--- a/public/documents/countries/afrique-du-sud.pptx
+++ b/public/documents/countries/afrique-du-sud.pptx
@@ -2650,6 +2650,13 @@
 <file path=ppt/slides/slide1.xml><?xml version="1.0" encoding="utf-8"?>
 <p:sld xmlns:a="http://schemas.openxmlformats.org/drawingml/2006/main" xmlns:r="http://schemas.openxmlformats.org/officeDocument/2006/relationships" xmlns:p="http://schemas.openxmlformats.org/presentationml/2006/main">
   <p:cSld name="Slide 1">
+    <p:bg>
+      <p:bgPr>
+        <a:solidFill>
+          <a:srgbClr val="0D0D0D"/>
+        </a:solidFill>
+      </p:bgPr>
+    </p:bg>
     <p:spTree>
       <p:nvGrpSpPr>
         <p:cNvPr id="1" name=""/>
@@ -2680,79 +2687,172 @@
         </p:blipFill>
         <p:spPr>
           <a:xfrm>
+            <a:off x="6272784" y="0"/>
+            <a:ext cx="5918911" cy="6858000"/>
+          </a:xfrm>
+          <a:prstGeom prst="rect">
+            <a:avLst/>
+          </a:prstGeom>
+        </p:spPr>
+      </p:pic>
+      <p:sp>
+        <p:nvSpPr>
+          <p:cNvPr id="3" name="Shape 0"/>
+          <p:cNvSpPr/>
+          <p:nvPr/>
+        </p:nvSpPr>
+        <p:spPr>
+          <a:xfrm>
             <a:off x="0" y="0"/>
-            <a:ext cx="12191695" cy="6858000"/>
+            <a:ext cx="6272784" cy="6858000"/>
+          </a:xfrm>
+          <a:prstGeom prst="rect">
+            <a:avLst/>
+          </a:prstGeom>
+          <a:solidFill>
+            <a:srgbClr val="0D0D0D"/>
+          </a:solidFill>
+          <a:ln/>
+        </p:spPr>
+      </p:sp>
+      <p:sp>
+        <p:nvSpPr>
+          <p:cNvPr id="4" name="Text 1"/>
+          <p:cNvSpPr txBox="1"/>
+          <p:nvPr/>
+        </p:nvSpPr>
+        <p:spPr>
+          <a:xfrm>
+            <a:off x="658368" y="566928"/>
+            <a:ext cx="4041648" cy="292608"/>
+          </a:xfrm>
+          <a:prstGeom prst="rect">
+            <a:avLst/>
+          </a:prstGeom>
+          <a:noFill/>
+          <a:ln/>
+        </p:spPr>
+        <p:txBody>
+          <a:bodyPr wrap="square" lIns="0" tIns="0" rIns="0" bIns="0" rtlCol="0" anchor="ctr"/>
+          <a:lstStyle/>
+          <a:p>
+            <a:pPr algn="l" indent="0" marL="0">
+              <a:buNone/>
+            </a:pPr>
+            <a:r>
+              <a:rPr lang="en-US" sz="1100" b="1" spc="80" kern="0" dirty="0">
+                <a:solidFill>
+                  <a:srgbClr val="8BC34A"/>
+                </a:solidFill>
+                <a:latin typeface="Calibri" pitchFamily="34" charset="0"/>
+                <a:ea typeface="Calibri" pitchFamily="34" charset="-122"/>
+                <a:cs typeface="Calibri" pitchFamily="34" charset="-120"/>
+              </a:rPr>
+              <a:t>GREEN SOLUTIONS GROUP</a:t>
+            </a:r>
+            <a:endParaRPr lang="en-US" sz="1100" dirty="0"/>
+          </a:p>
+        </p:txBody>
+      </p:sp>
+      <p:pic>
+        <p:nvPicPr>
+          <p:cNvPr id="5" name="Image 1" descr="C:\Users\Utilisateur\dev\green-solutions-web\public\images\logo-icon.png">    </p:cNvPr>
+          <p:cNvPicPr>
+            <a:picLocks noChangeAspect="1"/>
+          </p:cNvPicPr>
+          <p:nvPr/>
+        </p:nvPicPr>
+        <p:blipFill>
+          <a:blip r:embed="rId2"/>
+          <a:stretch>
+            <a:fillRect/>
+          </a:stretch>
+        </p:blipFill>
+        <p:spPr>
+          <a:xfrm>
+            <a:off x="5010912" y="457200"/>
+            <a:ext cx="603504" cy="603504"/>
           </a:xfrm>
           <a:prstGeom prst="rect">
             <a:avLst/>
           </a:prstGeom>
         </p:spPr>
       </p:pic>
-      <p:sp>
-        <p:nvSpPr>
-          <p:cNvPr id="3" name="Text 0"/>
-          <p:cNvSpPr txBox="1"/>
-          <p:nvPr/>
-        </p:nvSpPr>
-        <p:spPr>
-          <a:xfrm>
-            <a:off x="777240" y="1965960"/>
-            <a:ext cx="10058400" cy="320040"/>
-          </a:xfrm>
-          <a:prstGeom prst="rect">
-            <a:avLst/>
-          </a:prstGeom>
-          <a:noFill/>
-          <a:ln/>
-        </p:spPr>
-        <p:txBody>
-          <a:bodyPr wrap="square" lIns="0" tIns="0" rIns="0" bIns="0" rtlCol="0" anchor="ctr"/>
+      <p:pic>
+        <p:nvPicPr>
+          <p:cNvPr id="6" name="Image 2" descr="C:\Users\Utilisateur\dev\green-solutions-web\scripts\dossiers\drapeaux\afrique-du-sud.png">    </p:cNvPr>
+          <p:cNvPicPr>
+            <a:picLocks noChangeAspect="1"/>
+          </p:cNvPicPr>
+          <p:nvPr/>
+        </p:nvPicPr>
+        <p:blipFill>
+          <a:blip r:embed="rId3"/>
+          <a:stretch>
+            <a:fillRect/>
+          </a:stretch>
+        </p:blipFill>
+        <p:spPr>
+          <a:xfrm>
+            <a:off x="3648456" y="1389888"/>
+            <a:ext cx="1965960" cy="1310640"/>
+          </a:xfrm>
+          <a:prstGeom prst="rect">
+            <a:avLst/>
+          </a:prstGeom>
+        </p:spPr>
+      </p:pic>
+      <p:sp>
+        <p:nvSpPr>
+          <p:cNvPr id="7" name="Shape 2"/>
+          <p:cNvSpPr/>
+          <p:nvPr/>
+        </p:nvSpPr>
+        <p:spPr>
+          <a:xfrm>
+            <a:off x="3648456" y="1389888"/>
+            <a:ext cx="1965960" cy="1310640"/>
+          </a:xfrm>
+          <a:prstGeom prst="rect">
+            <a:avLst/>
+          </a:prstGeom>
+          <a:ln w="9525">
+            <a:solidFill>
+              <a:srgbClr val="3A3A3A"/>
+            </a:solidFill>
+            <a:prstDash val="solid"/>
+          </a:ln>
+        </p:spPr>
+      </p:sp>
+      <p:sp>
+        <p:nvSpPr>
+          <p:cNvPr id="8" name="Text 3"/>
+          <p:cNvSpPr txBox="1"/>
+          <p:nvPr/>
+        </p:nvSpPr>
+        <p:spPr>
+          <a:xfrm>
+            <a:off x="658368" y="1298448"/>
+            <a:ext cx="2761488" cy="1234440"/>
+          </a:xfrm>
+          <a:prstGeom prst="rect">
+            <a:avLst/>
+          </a:prstGeom>
+          <a:noFill/>
+          <a:ln/>
+        </p:spPr>
+        <p:txBody>
+          <a:bodyPr wrap="square" lIns="0" tIns="0" rIns="0" bIns="0" rtlCol="0" anchor="t"/>
           <a:lstStyle/>
           <a:p>
             <a:pPr algn="l" indent="0" marL="0">
-              <a:buNone/>
-            </a:pPr>
-            <a:r>
-              <a:rPr lang="en-US" sz="1300" b="1" spc="250" kern="0" dirty="0">
-                <a:solidFill>
-                  <a:srgbClr val="C9A227"/>
-                </a:solidFill>
-                <a:latin typeface="Calibri" pitchFamily="34" charset="0"/>
-                <a:ea typeface="Calibri" pitchFamily="34" charset="-122"/>
-                <a:cs typeface="Calibri" pitchFamily="34" charset="-120"/>
-              </a:rPr>
-              <a:t>MARKET DOSSIER</a:t>
-            </a:r>
-            <a:endParaRPr lang="en-US" sz="1300" dirty="0"/>
-          </a:p>
-        </p:txBody>
-      </p:sp>
-      <p:sp>
-        <p:nvSpPr>
-          <p:cNvPr id="4" name="Text 1"/>
-          <p:cNvSpPr txBox="1"/>
-          <p:nvPr/>
-        </p:nvSpPr>
-        <p:spPr>
-          <a:xfrm>
-            <a:off x="777240" y="2377440"/>
-            <a:ext cx="10241280" cy="1371600"/>
-          </a:xfrm>
-          <a:prstGeom prst="rect">
-            <a:avLst/>
-          </a:prstGeom>
-          <a:noFill/>
-          <a:ln/>
-        </p:spPr>
-        <p:txBody>
-          <a:bodyPr wrap="square" lIns="0" tIns="0" rIns="0" bIns="0" rtlCol="0" anchor="ctr"/>
-          <a:lstStyle/>
-          <a:p>
-            <a:pPr algn="l" indent="0" marL="0">
-              <a:buNone/>
-            </a:pPr>
-            <a:r>
-              <a:rPr lang="en-US" sz="4200" b="1" dirty="0">
+              <a:lnSpc>
+                <a:spcPct val="110000"/>
+              </a:lnSpc>
+              <a:buNone/>
+            </a:pPr>
+            <a:r>
+              <a:rPr lang="en-US" sz="2400" b="1" dirty="0">
                 <a:solidFill>
                   <a:srgbClr val="FFFFFF"/>
                 </a:solidFill>
@@ -2760,22 +2860,42 @@
                 <a:ea typeface="Cambria" pitchFamily="34" charset="-122"/>
                 <a:cs typeface="Cambria" pitchFamily="34" charset="-120"/>
               </a:rPr>
-              <a:t>South Africa</a:t>
-            </a:r>
-            <a:endParaRPr lang="en-US" sz="4200" dirty="0"/>
-          </a:p>
-        </p:txBody>
-      </p:sp>
-      <p:sp>
-        <p:nvSpPr>
-          <p:cNvPr id="5" name="Text 2"/>
-          <p:cNvSpPr txBox="1"/>
-          <p:nvPr/>
-        </p:nvSpPr>
-        <p:spPr>
-          <a:xfrm>
-            <a:off x="777240" y="3840480"/>
-            <a:ext cx="8686800" cy="822960"/>
+              <a:t>REPUBLIC OF SOUTH AFRICA</a:t>
+            </a:r>
+            <a:endParaRPr lang="en-US" sz="2400" dirty="0"/>
+          </a:p>
+        </p:txBody>
+      </p:sp>
+      <p:sp>
+        <p:nvSpPr>
+          <p:cNvPr id="9" name="Shape 4"/>
+          <p:cNvSpPr/>
+          <p:nvPr/>
+        </p:nvSpPr>
+        <p:spPr>
+          <a:xfrm>
+            <a:off x="658368" y="2889504"/>
+            <a:ext cx="2788920" cy="45720"/>
+          </a:xfrm>
+          <a:prstGeom prst="rect">
+            <a:avLst/>
+          </a:prstGeom>
+          <a:solidFill>
+            <a:srgbClr val="C9A227"/>
+          </a:solidFill>
+          <a:ln/>
+        </p:spPr>
+      </p:sp>
+      <p:sp>
+        <p:nvSpPr>
+          <p:cNvPr id="10" name="Text 5"/>
+          <p:cNvSpPr txBox="1"/>
+          <p:nvPr/>
+        </p:nvSpPr>
+        <p:spPr>
+          <a:xfrm>
+            <a:off x="658368" y="3163824"/>
+            <a:ext cx="4956048" cy="384048"/>
           </a:xfrm>
           <a:prstGeom prst="rect">
             <a:avLst/>
@@ -2785,20 +2905,57 @@
         </p:spPr>
         <p:txBody>
           <a:bodyPr wrap="square" lIns="0" tIns="0" rIns="0" bIns="0" rtlCol="0" anchor="ctr"/>
+          <a:lstStyle/>
+          <a:p>
+            <a:pPr algn="l" indent="0" marL="0">
+              <a:buNone/>
+            </a:pPr>
+            <a:r>
+              <a:rPr lang="en-US" sz="1600" b="1" dirty="0">
+                <a:solidFill>
+                  <a:srgbClr val="C9A227"/>
+                </a:solidFill>
+                <a:latin typeface="Cambria" pitchFamily="34" charset="0"/>
+                <a:ea typeface="Cambria" pitchFamily="34" charset="-122"/>
+                <a:cs typeface="Cambria" pitchFamily="34" charset="-120"/>
+              </a:rPr>
+              <a:t>Pretoria · 2026</a:t>
+            </a:r>
+            <a:endParaRPr lang="en-US" sz="1600" dirty="0"/>
+          </a:p>
+        </p:txBody>
+      </p:sp>
+      <p:sp>
+        <p:nvSpPr>
+          <p:cNvPr id="11" name="Text 6"/>
+          <p:cNvSpPr txBox="1"/>
+          <p:nvPr/>
+        </p:nvSpPr>
+        <p:spPr>
+          <a:xfrm>
+            <a:off x="658368" y="3767328"/>
+            <a:ext cx="4956048" cy="914400"/>
+          </a:xfrm>
+          <a:prstGeom prst="rect">
+            <a:avLst/>
+          </a:prstGeom>
+          <a:noFill/>
+          <a:ln/>
+        </p:spPr>
+        <p:txBody>
+          <a:bodyPr wrap="square" lIns="0" tIns="0" rIns="0" bIns="0" rtlCol="0" anchor="t"/>
           <a:lstStyle/>
           <a:p>
             <a:pPr algn="l" indent="0" marL="0">
               <a:lnSpc>
-                <a:spcPct val="125000"/>
+                <a:spcPct val="128000"/>
               </a:lnSpc>
               <a:buNone/>
             </a:pPr>
             <a:r>
-              <a:rPr lang="en-US" sz="1600" dirty="0">
-                <a:solidFill>
-                  <a:srgbClr val="FFFFFF">
-                    <a:alpha val="88000"/>
-                  </a:srgbClr>
+              <a:rPr lang="en-US" sz="1450" dirty="0">
+                <a:solidFill>
+                  <a:srgbClr val="FFFFFF"/>
                 </a:solidFill>
                 <a:latin typeface="Calibri" pitchFamily="34" charset="0"/>
                 <a:ea typeface="Calibri" pitchFamily="34" charset="-122"/>
@@ -2806,21 +2963,19 @@
               </a:rPr>
               <a:t>Citrus, deciduous fruit and wine grapes grown on half the world's average rainfall.</a:t>
             </a:r>
-            <a:endParaRPr lang="en-US" sz="1600" dirty="0"/>
+            <a:endParaRPr lang="en-US" sz="1450" dirty="0"/>
           </a:p>
           <a:p>
             <a:pPr algn="l" indent="0" marL="0">
               <a:lnSpc>
-                <a:spcPct val="125000"/>
+                <a:spcPct val="128000"/>
               </a:lnSpc>
               <a:buNone/>
             </a:pPr>
             <a:r>
-              <a:rPr lang="en-US" sz="1600" dirty="0">
-                <a:solidFill>
-                  <a:srgbClr val="FFFFFF">
-                    <a:alpha val="88000"/>
-                  </a:srgbClr>
+              <a:rPr lang="en-US" sz="1450" dirty="0">
+                <a:solidFill>
+                  <a:srgbClr val="FFFFFF"/>
                 </a:solidFill>
                 <a:latin typeface="Calibri" pitchFamily="34" charset="0"/>
                 <a:ea typeface="Calibri" pitchFamily="34" charset="-122"/>
@@ -2828,20 +2983,20 @@
               </a:rPr>
               <a:t>What hydro-retention changes for an export-led sector.</a:t>
             </a:r>
-            <a:endParaRPr lang="en-US" sz="1600" dirty="0"/>
-          </a:p>
-        </p:txBody>
-      </p:sp>
-      <p:sp>
-        <p:nvSpPr>
-          <p:cNvPr id="6" name="Text 3"/>
-          <p:cNvSpPr txBox="1"/>
-          <p:nvPr/>
-        </p:nvSpPr>
-        <p:spPr>
-          <a:xfrm>
-            <a:off x="777240" y="5989320"/>
-            <a:ext cx="10058400" cy="320040"/>
+            <a:endParaRPr lang="en-US" sz="1450" dirty="0"/>
+          </a:p>
+        </p:txBody>
+      </p:sp>
+      <p:sp>
+        <p:nvSpPr>
+          <p:cNvPr id="12" name="Text 7"/>
+          <p:cNvSpPr txBox="1"/>
+          <p:nvPr/>
+        </p:nvSpPr>
+        <p:spPr>
+          <a:xfrm>
+            <a:off x="658368" y="4892040"/>
+            <a:ext cx="4956048" cy="347472"/>
           </a:xfrm>
           <a:prstGeom prst="rect">
             <a:avLst/>
@@ -2857,19 +3012,56 @@
               <a:buNone/>
             </a:pPr>
             <a:r>
-              <a:rPr lang="en-US" sz="1100" dirty="0">
-                <a:solidFill>
-                  <a:srgbClr val="FFFFFF">
-                    <a:alpha val="65000"/>
-                  </a:srgbClr>
-                </a:solidFill>
-                <a:latin typeface="Calibri" pitchFamily="34" charset="0"/>
-                <a:ea typeface="Calibri" pitchFamily="34" charset="-122"/>
-                <a:cs typeface="Calibri" pitchFamily="34" charset="-120"/>
-              </a:rPr>
-              <a:t>Green Solutions · contact@evergreen-ecosorb.com</a:t>
+              <a:rPr lang="en-US" sz="1100" b="1" dirty="0">
+                <a:solidFill>
+                  <a:srgbClr val="8BC34A"/>
+                </a:solidFill>
+                <a:latin typeface="Calibri" pitchFamily="34" charset="0"/>
+                <a:ea typeface="Calibri" pitchFamily="34" charset="-122"/>
+                <a:cs typeface="Calibri" pitchFamily="34" charset="-120"/>
+              </a:rPr>
+              <a:t>ECOSORB® · ECOFERT® · NAPEMA® · PAULOWNIA</a:t>
             </a:r>
             <a:endParaRPr lang="en-US" sz="1100" dirty="0"/>
+          </a:p>
+        </p:txBody>
+      </p:sp>
+      <p:sp>
+        <p:nvSpPr>
+          <p:cNvPr id="13" name="Text 8"/>
+          <p:cNvSpPr txBox="1"/>
+          <p:nvPr/>
+        </p:nvSpPr>
+        <p:spPr>
+          <a:xfrm>
+            <a:off x="658368" y="6053328"/>
+            <a:ext cx="4956048" cy="310896"/>
+          </a:xfrm>
+          <a:prstGeom prst="rect">
+            <a:avLst/>
+          </a:prstGeom>
+          <a:noFill/>
+          <a:ln/>
+        </p:spPr>
+        <p:txBody>
+          <a:bodyPr wrap="square" lIns="0" tIns="0" rIns="0" bIns="0" rtlCol="0" anchor="ctr"/>
+          <a:lstStyle/>
+          <a:p>
+            <a:pPr algn="l" indent="0" marL="0">
+              <a:buNone/>
+            </a:pPr>
+            <a:r>
+              <a:rPr lang="en-US" sz="850" dirty="0">
+                <a:solidFill>
+                  <a:srgbClr val="9A9A9A"/>
+                </a:solidFill>
+                <a:latin typeface="Calibri" pitchFamily="34" charset="0"/>
+                <a:ea typeface="Calibri" pitchFamily="34" charset="-122"/>
+                <a:cs typeface="Calibri" pitchFamily="34" charset="-120"/>
+              </a:rPr>
+              <a:t>September 2026 · Confidential · For the sole use of the recipient</a:t>
+            </a:r>
+            <a:endParaRPr lang="en-US" sz="850" dirty="0"/>
           </a:p>
         </p:txBody>
       </p:sp>

--- a/public/documents/countries/afrique-du-sud.pptx
+++ b/public/documents/countries/afrique-du-sud.pptx
@@ -3842,9 +3842,35 @@
           </a:p>
         </p:txBody>
       </p:sp>
-      <p:sp>
-        <p:nvSpPr>
-          <p:cNvPr id="6" name="Text 3"/>
+      <p:pic>
+        <p:nvPicPr>
+          <p:cNvPr id="6" name="Image 1" descr="C:\Users\Utilisateur\dev\green-solutions-web\scripts\dossiers\sceau-aim-clair.png">    </p:cNvPr>
+          <p:cNvPicPr>
+            <a:picLocks noChangeAspect="1"/>
+          </p:cNvPicPr>
+          <p:nvPr/>
+        </p:nvPicPr>
+        <p:blipFill>
+          <a:blip r:embed="rId2">
+            <a:alphaModFix amt="85000"/>
+          </a:blip>
+          <a:stretch>
+            <a:fillRect/>
+          </a:stretch>
+        </p:blipFill>
+        <p:spPr>
+          <a:xfrm>
+            <a:off x="10637215" y="5193792"/>
+            <a:ext cx="1051560" cy="1051560"/>
+          </a:xfrm>
+          <a:prstGeom prst="rect">
+            <a:avLst/>
+          </a:prstGeom>
+        </p:spPr>
+      </p:pic>
+      <p:sp>
+        <p:nvSpPr>
+          <p:cNvPr id="7" name="Text 3"/>
           <p:cNvSpPr txBox="1"/>
           <p:nvPr/>
         </p:nvSpPr>
@@ -3885,7 +3911,7 @@
       </p:sp>
       <p:sp>
         <p:nvSpPr>
-          <p:cNvPr id="7" name="Text 4"/>
+          <p:cNvPr id="8" name="Text 4"/>
           <p:cNvSpPr txBox="1"/>
           <p:nvPr/>
         </p:nvSpPr>

--- a/public/documents/countries/afrique-du-sud.pptx
+++ b/public/documents/countries/afrique-du-sud.pptx
@@ -16,9 +16,16 @@
     <p:sldId id="264" r:id="rId10"/>
     <p:sldId id="265" r:id="rId11"/>
     <p:sldId id="266" r:id="rId12"/>
+    <p:sldId id="267" r:id="rId13"/>
+    <p:sldId id="268" r:id="rId14"/>
+    <p:sldId id="269" r:id="rId15"/>
+    <p:sldId id="270" r:id="rId16"/>
+    <p:sldId id="271" r:id="rId17"/>
+    <p:sldId id="272" r:id="rId18"/>
+    <p:sldId id="273" r:id="rId19"/>
   </p:sldIdLst>
   <p:notesMasterIdLst>
-    <p:notesMasterId r:id="rId13"/>
+    <p:notesMasterId r:id="rId20"/>
   </p:notesMasterIdLst>
   <p:sldSz cx="12192000" cy="6858000"/>
   <p:notesSz cx="6858000" cy="12192000"/>
@@ -691,6 +698,371 @@
               <c:strCache>
                 <c:ptCount val="1"/>
                 <c:pt idx="0">
+                  <c:v>Low end (%)</c:v>
+                </c:pt>
+              </c:strCache>
+            </c:strRef>
+          </c:tx>
+          <c:spPr>
+            <a:solidFill>
+              <a:srgbClr val="6B2A44"/>
+            </a:solidFill>
+            <a:effectLst/>
+          </c:spPr>
+          <c:invertIfNegative val="0"/>
+          <c:dLbls>
+            <c:numFmt formatCode="[$-409]0&quot;%&quot;" sourceLinked="0"/>
+            <c:txPr>
+              <a:bodyPr/>
+              <a:lstStyle/>
+              <a:p>
+                <a:pPr>
+                  <a:defRPr b="0" i="0" strike="noStrike" sz="1100" u="none">
+                    <a:solidFill>
+                      <a:srgbClr val="3F162A"/>
+                    </a:solidFill>
+                    <a:latin typeface="Calibri"/>
+                  </a:defRPr>
+                </a:pPr>
+              </a:p>
+            </c:txPr>
+            <c:showLegendKey val="0"/>
+            <c:showVal val="1"/>
+            <c:showCatName val="0"/>
+            <c:showSerName val="0"/>
+            <c:showPercent val="0"/>
+            <c:showBubbleSize val="0"/>
+            <c:showLeaderLines val="0"/>
+          </c:dLbls>
+          <c:cat>
+            <c:multiLvlStrRef>
+              <c:f>Sheet1!$A$2:$A$6</c:f>
+              <c:multiLvlStrCache>
+                <c:ptCount val="5"/>
+                <c:lvl>
+                  <c:pt idx="0">
+                    <c:v>Grapes</c:v>
+                  </c:pt>
+                  <c:pt idx="1">
+                    <c:v>Citrus</c:v>
+                  </c:pt>
+                  <c:pt idx="2">
+                    <c:v>Sugar cane</c:v>
+                  </c:pt>
+                  <c:pt idx="3">
+                    <c:v>Potatoes</c:v>
+                  </c:pt>
+                  <c:pt idx="4">
+                    <c:v>Avocados</c:v>
+                  </c:pt>
+                </c:lvl>
+              </c:multiLvlStrCache>
+            </c:multiLvlStrRef>
+          </c:cat>
+          <c:val>
+            <c:numRef>
+              <c:f>Sheet1!$B$2:$B$6</c:f>
+              <c:numCache>
+                <c:formatCode>General</c:formatCode>
+                <c:ptCount val="5"/>
+                <c:pt idx="0">
+                  <c:v>20</c:v>
+                </c:pt>
+                <c:pt idx="1">
+                  <c:v>20</c:v>
+                </c:pt>
+                <c:pt idx="2">
+                  <c:v>10</c:v>
+                </c:pt>
+                <c:pt idx="3">
+                  <c:v>20</c:v>
+                </c:pt>
+                <c:pt idx="4">
+                  <c:v>15</c:v>
+                </c:pt>
+              </c:numCache>
+            </c:numRef>
+          </c:val>
+        </c:ser>
+        <c:ser>
+          <c:idx val="1"/>
+          <c:order val="1"/>
+          <c:tx>
+            <c:strRef>
+              <c:f>Sheet1!$C$1</c:f>
+              <c:strCache>
+                <c:ptCount val="1"/>
+                <c:pt idx="0">
+                  <c:v>High end (%)</c:v>
+                </c:pt>
+              </c:strCache>
+            </c:strRef>
+          </c:tx>
+          <c:spPr>
+            <a:solidFill>
+              <a:srgbClr val="C9A227"/>
+            </a:solidFill>
+            <a:effectLst/>
+          </c:spPr>
+          <c:invertIfNegative val="0"/>
+          <c:dLbls>
+            <c:numFmt formatCode="[$-409]0&quot;%&quot;" sourceLinked="0"/>
+            <c:txPr>
+              <a:bodyPr/>
+              <a:lstStyle/>
+              <a:p>
+                <a:pPr>
+                  <a:defRPr b="0" i="0" strike="noStrike" sz="1100" u="none">
+                    <a:solidFill>
+                      <a:srgbClr val="3F162A"/>
+                    </a:solidFill>
+                    <a:latin typeface="Calibri"/>
+                  </a:defRPr>
+                </a:pPr>
+              </a:p>
+            </c:txPr>
+            <c:showLegendKey val="0"/>
+            <c:showVal val="1"/>
+            <c:showCatName val="0"/>
+            <c:showSerName val="0"/>
+            <c:showPercent val="0"/>
+            <c:showBubbleSize val="0"/>
+            <c:showLeaderLines val="0"/>
+          </c:dLbls>
+          <c:cat>
+            <c:multiLvlStrRef>
+              <c:f>Sheet1!$A$2:$A$6</c:f>
+              <c:multiLvlStrCache>
+                <c:ptCount val="5"/>
+                <c:lvl>
+                  <c:pt idx="0">
+                    <c:v>Grapes</c:v>
+                  </c:pt>
+                  <c:pt idx="1">
+                    <c:v>Citrus</c:v>
+                  </c:pt>
+                  <c:pt idx="2">
+                    <c:v>Sugar cane</c:v>
+                  </c:pt>
+                  <c:pt idx="3">
+                    <c:v>Potatoes</c:v>
+                  </c:pt>
+                  <c:pt idx="4">
+                    <c:v>Avocados</c:v>
+                  </c:pt>
+                </c:lvl>
+              </c:multiLvlStrCache>
+            </c:multiLvlStrRef>
+          </c:cat>
+          <c:val>
+            <c:numRef>
+              <c:f>Sheet1!$C$2:$C$6</c:f>
+              <c:numCache>
+                <c:formatCode>General</c:formatCode>
+                <c:ptCount val="5"/>
+                <c:pt idx="0">
+                  <c:v>40</c:v>
+                </c:pt>
+                <c:pt idx="1">
+                  <c:v>40</c:v>
+                </c:pt>
+                <c:pt idx="2">
+                  <c:v>20</c:v>
+                </c:pt>
+                <c:pt idx="3">
+                  <c:v>40</c:v>
+                </c:pt>
+                <c:pt idx="4">
+                  <c:v>25</c:v>
+                </c:pt>
+              </c:numCache>
+            </c:numRef>
+          </c:val>
+        </c:ser>
+        <c:dLbls>
+          <c:numFmt formatCode="[$-409]0&quot;%&quot;" sourceLinked="0"/>
+          <c:txPr>
+            <a:bodyPr/>
+            <a:lstStyle/>
+            <a:p>
+              <a:pPr>
+                <a:defRPr b="0" i="0" strike="noStrike" sz="1100" u="none">
+                  <a:solidFill>
+                    <a:srgbClr val="3F162A"/>
+                  </a:solidFill>
+                  <a:latin typeface="Calibri"/>
+                </a:defRPr>
+              </a:pPr>
+            </a:p>
+          </c:txPr>
+          <c:showLegendKey val="0"/>
+          <c:showVal val="1"/>
+          <c:showCatName val="0"/>
+          <c:showSerName val="0"/>
+          <c:showPercent val="0"/>
+          <c:showBubbleSize val="0"/>
+          <c:showLeaderLines val="0"/>
+        </c:dLbls>
+        <c:gapWidth val="150"/>
+        <c:overlap val="0"/>
+        <c:axId val="2094734554"/>
+        <c:axId val="2094734552"/>
+        <c:axId val="2094734556"/>
+      </c:barChart>
+      <c:catAx>
+        <c:axId val="2094734554"/>
+        <c:scaling>
+          <c:orientation val="minMax"/>
+        </c:scaling>
+        <c:delete val="0"/>
+        <c:axPos val="b"/>
+        <c:numFmt formatCode="General" sourceLinked="1"/>
+        <c:majorTickMark val="out"/>
+        <c:minorTickMark val="none"/>
+        <c:tickLblPos val="low"/>
+        <c:spPr>
+          <a:ln w="12700" cap="flat">
+            <a:solidFill>
+              <a:srgbClr val="888888"/>
+            </a:solidFill>
+            <a:prstDash val="solid"/>
+            <a:round/>
+          </a:ln>
+        </c:spPr>
+        <c:txPr>
+          <a:bodyPr/>
+          <a:lstStyle/>
+          <a:p>
+            <a:pPr>
+              <a:defRPr sz="1100" b="0" i="0" u="none" strike="noStrike">
+                <a:solidFill>
+                  <a:srgbClr val="7C6B73"/>
+                </a:solidFill>
+                <a:latin typeface="Calibri"/>
+              </a:defRPr>
+            </a:pPr>
+            <a:endParaRPr lang="en-US"/>
+          </a:p>
+        </c:txPr>
+        <c:crossAx val="2094734552"/>
+        <c:crosses val="autoZero"/>
+        <c:auto val="1"/>
+        <c:lblAlgn val="ctr"/>
+        <c:noMultiLvlLbl val="1"/>
+      </c:catAx>
+      <c:valAx>
+        <c:axId val="2094734552"/>
+        <c:scaling>
+          <c:orientation val="minMax"/>
+          <c:min val="0"/>
+        </c:scaling>
+        <c:delete val="0"/>
+        <c:axPos val="l"/>
+        <c:majorGridlines>
+          <c:spPr>
+            <a:ln w="9525" cap="flat">
+              <a:solidFill>
+                <a:srgbClr val="E5D9DE"/>
+              </a:solidFill>
+              <a:prstDash val="solid"/>
+              <a:round/>
+            </a:ln>
+          </c:spPr>
+        </c:majorGridlines>
+        <c:numFmt formatCode="General" sourceLinked="0"/>
+        <c:majorTickMark val="out"/>
+        <c:minorTickMark val="none"/>
+        <c:tickLblPos val="nextTo"/>
+        <c:spPr>
+          <a:ln w="12700" cap="flat">
+            <a:solidFill>
+              <a:srgbClr val="888888"/>
+            </a:solidFill>
+            <a:prstDash val="solid"/>
+            <a:round/>
+          </a:ln>
+        </c:spPr>
+        <c:txPr>
+          <a:bodyPr/>
+          <a:lstStyle/>
+          <a:p>
+            <a:pPr>
+              <a:defRPr sz="1100" b="0" i="0" u="none" strike="noStrike">
+                <a:solidFill>
+                  <a:srgbClr val="7C6B73"/>
+                </a:solidFill>
+                <a:latin typeface="Calibri"/>
+              </a:defRPr>
+            </a:pPr>
+            <a:endParaRPr lang="en-US"/>
+          </a:p>
+        </c:txPr>
+        <c:crossAx val="2094734554"/>
+        <c:crosses val="autoZero"/>
+        <c:crossBetween val="between"/>
+      </c:valAx>
+      <c:spPr>
+        <a:noFill/>
+        <a:ln>
+          <a:noFill/>
+        </a:ln>
+        <a:effectLst/>
+      </c:spPr>
+    </c:plotArea>
+    <c:legend>
+      <c:legendPos val="b"/>
+      <c:overlay val="0"/>
+      <c:txPr>
+        <a:bodyPr/>
+        <a:lstStyle/>
+        <a:p>
+          <a:pPr>
+            <a:defRPr sz="1100">
+              <a:latin typeface="Calibri"/>
+              <a:cs typeface="Calibri"/>
+            </a:defRPr>
+          </a:pPr>
+          <a:endParaRPr lang="en-US"/>
+        </a:p>
+      </c:txPr>
+    </c:legend>
+    <c:plotVisOnly val="1"/>
+    <c:dispBlanksAs val="span"/>
+  </c:chart>
+  <c:spPr>
+    <a:noFill/>
+    <a:ln>
+      <a:noFill/>
+    </a:ln>
+    <a:effectLst/>
+  </c:spPr>
+  <c:externalData r:id="rId1">
+    <c:autoUpdate val="0"/>
+  </c:externalData>
+</c:chartSpace>
+</file>
+
+<file path=ppt/charts/chart4.xml><?xml version="1.0" encoding="utf-8"?>
+<c:chartSpace xmlns:c="http://schemas.openxmlformats.org/drawingml/2006/chart" xmlns:a="http://schemas.openxmlformats.org/drawingml/2006/main" xmlns:r="http://schemas.openxmlformats.org/officeDocument/2006/relationships">
+  <c:date1904 val="0"/>
+  <c:roundedCorners val="1"/>
+  <c:chart>
+    <c:autoTitleDeleted val="1"/>
+    <c:plotArea>
+      <c:layout/>
+      <c:barChart>
+        <c:barDir val="col"/>
+        <c:grouping val="clustered"/>
+        <c:varyColors val="0"/>
+        <c:ser>
+          <c:idx val="0"/>
+          <c:order val="0"/>
+          <c:tx>
+            <c:strRef>
+              <c:f>Sheet1!$B$1</c:f>
+              <c:strCache>
+                <c:ptCount val="1"/>
+                <c:pt idx="0">
                   <c:v>Low end of range (%)</c:v>
                 </c:pt>
               </c:strCache>
@@ -1618,6 +1990,622 @@
             <a:fld id="{F7021451-1387-4CA6-816F-3879F97B5CBC}" type="slidenum">
               <a:rPr lang="en-US"/>
               <a:t>11</a:t>
+            </a:fld>
+            <a:endParaRPr lang="en-US"/>
+          </a:p>
+        </p:txBody>
+      </p:sp>
+    </p:spTree>
+    <p:extLst>
+      <p:ext uri="{BB962C8B-B14F-4D97-AF65-F5344CB8AC3E}">
+        <p14:creationId xmlns:p14="http://schemas.microsoft.com/office/powerpoint/2010/main" val="1024086991"/>
+      </p:ext>
+    </p:extLst>
+  </p:cSld>
+  <p:clrMapOvr>
+    <a:masterClrMapping/>
+  </p:clrMapOvr>
+</p:notes>
+</file>
+
+<file path=ppt/notesSlides/notesSlide12.xml><?xml version="1.0" encoding="utf-8"?>
+<p:notes xmlns:a="http://schemas.openxmlformats.org/drawingml/2006/main" xmlns:r="http://schemas.openxmlformats.org/officeDocument/2006/relationships" xmlns:p="http://schemas.openxmlformats.org/presentationml/2006/main">
+  <p:cSld>
+    <p:spTree>
+      <p:nvGrpSpPr>
+        <p:cNvPr id="1" name=""/>
+        <p:cNvGrpSpPr/>
+        <p:nvPr/>
+      </p:nvGrpSpPr>
+      <p:grpSpPr>
+        <a:xfrm>
+          <a:off x="0" y="0"/>
+          <a:ext cx="0" cy="0"/>
+          <a:chOff x="0" y="0"/>
+          <a:chExt cx="0" cy="0"/>
+        </a:xfrm>
+      </p:grpSpPr>
+      <p:sp>
+        <p:nvSpPr>
+          <p:cNvPr id="2" name="Slide Image Placeholder 1"/>
+          <p:cNvSpPr>
+            <a:spLocks noGrp="1" noRot="1" noChangeAspect="1"/>
+          </p:cNvSpPr>
+          <p:nvPr>
+            <p:ph type="sldImg"/>
+          </p:nvPr>
+        </p:nvSpPr>
+        <p:spPr/>
+      </p:sp>
+      <p:sp>
+        <p:nvSpPr>
+          <p:cNvPr id="3" name="Notes Placeholder 2"/>
+          <p:cNvSpPr>
+            <a:spLocks noGrp="1"/>
+          </p:cNvSpPr>
+          <p:nvPr>
+            <p:ph type="body" idx="1"/>
+          </p:nvPr>
+        </p:nvSpPr>
+        <p:spPr/>
+        <p:txBody>
+          <a:bodyPr/>
+          <a:lstStyle/>
+          <a:p>
+            <a:r>
+              <a:rPr lang="en-US" dirty="0"/>
+              <a:t/>
+            </a:r>
+            <a:endParaRPr lang="en-US" dirty="0"/>
+          </a:p>
+        </p:txBody>
+      </p:sp>
+      <p:sp>
+        <p:nvSpPr>
+          <p:cNvPr id="4" name="Slide Number Placeholder 3"/>
+          <p:cNvSpPr>
+            <a:spLocks noGrp="1"/>
+          </p:cNvSpPr>
+          <p:nvPr>
+            <p:ph type="sldNum" sz="quarter" idx="10"/>
+          </p:nvPr>
+        </p:nvSpPr>
+        <p:spPr/>
+        <p:txBody>
+          <a:bodyPr/>
+          <a:lstStyle/>
+          <a:p>
+            <a:fld id="{F7021451-1387-4CA6-816F-3879F97B5CBC}" type="slidenum">
+              <a:rPr lang="en-US"/>
+              <a:t>12</a:t>
+            </a:fld>
+            <a:endParaRPr lang="en-US"/>
+          </a:p>
+        </p:txBody>
+      </p:sp>
+    </p:spTree>
+    <p:extLst>
+      <p:ext uri="{BB962C8B-B14F-4D97-AF65-F5344CB8AC3E}">
+        <p14:creationId xmlns:p14="http://schemas.microsoft.com/office/powerpoint/2010/main" val="1024086991"/>
+      </p:ext>
+    </p:extLst>
+  </p:cSld>
+  <p:clrMapOvr>
+    <a:masterClrMapping/>
+  </p:clrMapOvr>
+</p:notes>
+</file>
+
+<file path=ppt/notesSlides/notesSlide13.xml><?xml version="1.0" encoding="utf-8"?>
+<p:notes xmlns:a="http://schemas.openxmlformats.org/drawingml/2006/main" xmlns:r="http://schemas.openxmlformats.org/officeDocument/2006/relationships" xmlns:p="http://schemas.openxmlformats.org/presentationml/2006/main">
+  <p:cSld>
+    <p:spTree>
+      <p:nvGrpSpPr>
+        <p:cNvPr id="1" name=""/>
+        <p:cNvGrpSpPr/>
+        <p:nvPr/>
+      </p:nvGrpSpPr>
+      <p:grpSpPr>
+        <a:xfrm>
+          <a:off x="0" y="0"/>
+          <a:ext cx="0" cy="0"/>
+          <a:chOff x="0" y="0"/>
+          <a:chExt cx="0" cy="0"/>
+        </a:xfrm>
+      </p:grpSpPr>
+      <p:sp>
+        <p:nvSpPr>
+          <p:cNvPr id="2" name="Slide Image Placeholder 1"/>
+          <p:cNvSpPr>
+            <a:spLocks noGrp="1" noRot="1" noChangeAspect="1"/>
+          </p:cNvSpPr>
+          <p:nvPr>
+            <p:ph type="sldImg"/>
+          </p:nvPr>
+        </p:nvSpPr>
+        <p:spPr/>
+      </p:sp>
+      <p:sp>
+        <p:nvSpPr>
+          <p:cNvPr id="3" name="Notes Placeholder 2"/>
+          <p:cNvSpPr>
+            <a:spLocks noGrp="1"/>
+          </p:cNvSpPr>
+          <p:nvPr>
+            <p:ph type="body" idx="1"/>
+          </p:nvPr>
+        </p:nvSpPr>
+        <p:spPr/>
+        <p:txBody>
+          <a:bodyPr/>
+          <a:lstStyle/>
+          <a:p>
+            <a:r>
+              <a:rPr lang="en-US" dirty="0"/>
+              <a:t/>
+            </a:r>
+            <a:endParaRPr lang="en-US" dirty="0"/>
+          </a:p>
+        </p:txBody>
+      </p:sp>
+      <p:sp>
+        <p:nvSpPr>
+          <p:cNvPr id="4" name="Slide Number Placeholder 3"/>
+          <p:cNvSpPr>
+            <a:spLocks noGrp="1"/>
+          </p:cNvSpPr>
+          <p:nvPr>
+            <p:ph type="sldNum" sz="quarter" idx="10"/>
+          </p:nvPr>
+        </p:nvSpPr>
+        <p:spPr/>
+        <p:txBody>
+          <a:bodyPr/>
+          <a:lstStyle/>
+          <a:p>
+            <a:fld id="{F7021451-1387-4CA6-816F-3879F97B5CBC}" type="slidenum">
+              <a:rPr lang="en-US"/>
+              <a:t>13</a:t>
+            </a:fld>
+            <a:endParaRPr lang="en-US"/>
+          </a:p>
+        </p:txBody>
+      </p:sp>
+    </p:spTree>
+    <p:extLst>
+      <p:ext uri="{BB962C8B-B14F-4D97-AF65-F5344CB8AC3E}">
+        <p14:creationId xmlns:p14="http://schemas.microsoft.com/office/powerpoint/2010/main" val="1024086991"/>
+      </p:ext>
+    </p:extLst>
+  </p:cSld>
+  <p:clrMapOvr>
+    <a:masterClrMapping/>
+  </p:clrMapOvr>
+</p:notes>
+</file>
+
+<file path=ppt/notesSlides/notesSlide14.xml><?xml version="1.0" encoding="utf-8"?>
+<p:notes xmlns:a="http://schemas.openxmlformats.org/drawingml/2006/main" xmlns:r="http://schemas.openxmlformats.org/officeDocument/2006/relationships" xmlns:p="http://schemas.openxmlformats.org/presentationml/2006/main">
+  <p:cSld>
+    <p:spTree>
+      <p:nvGrpSpPr>
+        <p:cNvPr id="1" name=""/>
+        <p:cNvGrpSpPr/>
+        <p:nvPr/>
+      </p:nvGrpSpPr>
+      <p:grpSpPr>
+        <a:xfrm>
+          <a:off x="0" y="0"/>
+          <a:ext cx="0" cy="0"/>
+          <a:chOff x="0" y="0"/>
+          <a:chExt cx="0" cy="0"/>
+        </a:xfrm>
+      </p:grpSpPr>
+      <p:sp>
+        <p:nvSpPr>
+          <p:cNvPr id="2" name="Slide Image Placeholder 1"/>
+          <p:cNvSpPr>
+            <a:spLocks noGrp="1" noRot="1" noChangeAspect="1"/>
+          </p:cNvSpPr>
+          <p:nvPr>
+            <p:ph type="sldImg"/>
+          </p:nvPr>
+        </p:nvSpPr>
+        <p:spPr/>
+      </p:sp>
+      <p:sp>
+        <p:nvSpPr>
+          <p:cNvPr id="3" name="Notes Placeholder 2"/>
+          <p:cNvSpPr>
+            <a:spLocks noGrp="1"/>
+          </p:cNvSpPr>
+          <p:nvPr>
+            <p:ph type="body" idx="1"/>
+          </p:nvPr>
+        </p:nvSpPr>
+        <p:spPr/>
+        <p:txBody>
+          <a:bodyPr/>
+          <a:lstStyle/>
+          <a:p>
+            <a:r>
+              <a:rPr lang="en-US" dirty="0"/>
+              <a:t/>
+            </a:r>
+            <a:endParaRPr lang="en-US" dirty="0"/>
+          </a:p>
+        </p:txBody>
+      </p:sp>
+      <p:sp>
+        <p:nvSpPr>
+          <p:cNvPr id="4" name="Slide Number Placeholder 3"/>
+          <p:cNvSpPr>
+            <a:spLocks noGrp="1"/>
+          </p:cNvSpPr>
+          <p:nvPr>
+            <p:ph type="sldNum" sz="quarter" idx="10"/>
+          </p:nvPr>
+        </p:nvSpPr>
+        <p:spPr/>
+        <p:txBody>
+          <a:bodyPr/>
+          <a:lstStyle/>
+          <a:p>
+            <a:fld id="{F7021451-1387-4CA6-816F-3879F97B5CBC}" type="slidenum">
+              <a:rPr lang="en-US"/>
+              <a:t>14</a:t>
+            </a:fld>
+            <a:endParaRPr lang="en-US"/>
+          </a:p>
+        </p:txBody>
+      </p:sp>
+    </p:spTree>
+    <p:extLst>
+      <p:ext uri="{BB962C8B-B14F-4D97-AF65-F5344CB8AC3E}">
+        <p14:creationId xmlns:p14="http://schemas.microsoft.com/office/powerpoint/2010/main" val="1024086991"/>
+      </p:ext>
+    </p:extLst>
+  </p:cSld>
+  <p:clrMapOvr>
+    <a:masterClrMapping/>
+  </p:clrMapOvr>
+</p:notes>
+</file>
+
+<file path=ppt/notesSlides/notesSlide15.xml><?xml version="1.0" encoding="utf-8"?>
+<p:notes xmlns:a="http://schemas.openxmlformats.org/drawingml/2006/main" xmlns:r="http://schemas.openxmlformats.org/officeDocument/2006/relationships" xmlns:p="http://schemas.openxmlformats.org/presentationml/2006/main">
+  <p:cSld>
+    <p:spTree>
+      <p:nvGrpSpPr>
+        <p:cNvPr id="1" name=""/>
+        <p:cNvGrpSpPr/>
+        <p:nvPr/>
+      </p:nvGrpSpPr>
+      <p:grpSpPr>
+        <a:xfrm>
+          <a:off x="0" y="0"/>
+          <a:ext cx="0" cy="0"/>
+          <a:chOff x="0" y="0"/>
+          <a:chExt cx="0" cy="0"/>
+        </a:xfrm>
+      </p:grpSpPr>
+      <p:sp>
+        <p:nvSpPr>
+          <p:cNvPr id="2" name="Slide Image Placeholder 1"/>
+          <p:cNvSpPr>
+            <a:spLocks noGrp="1" noRot="1" noChangeAspect="1"/>
+          </p:cNvSpPr>
+          <p:nvPr>
+            <p:ph type="sldImg"/>
+          </p:nvPr>
+        </p:nvSpPr>
+        <p:spPr/>
+      </p:sp>
+      <p:sp>
+        <p:nvSpPr>
+          <p:cNvPr id="3" name="Notes Placeholder 2"/>
+          <p:cNvSpPr>
+            <a:spLocks noGrp="1"/>
+          </p:cNvSpPr>
+          <p:nvPr>
+            <p:ph type="body" idx="1"/>
+          </p:nvPr>
+        </p:nvSpPr>
+        <p:spPr/>
+        <p:txBody>
+          <a:bodyPr/>
+          <a:lstStyle/>
+          <a:p>
+            <a:r>
+              <a:rPr lang="en-US" dirty="0"/>
+              <a:t/>
+            </a:r>
+            <a:endParaRPr lang="en-US" dirty="0"/>
+          </a:p>
+        </p:txBody>
+      </p:sp>
+      <p:sp>
+        <p:nvSpPr>
+          <p:cNvPr id="4" name="Slide Number Placeholder 3"/>
+          <p:cNvSpPr>
+            <a:spLocks noGrp="1"/>
+          </p:cNvSpPr>
+          <p:nvPr>
+            <p:ph type="sldNum" sz="quarter" idx="10"/>
+          </p:nvPr>
+        </p:nvSpPr>
+        <p:spPr/>
+        <p:txBody>
+          <a:bodyPr/>
+          <a:lstStyle/>
+          <a:p>
+            <a:fld id="{F7021451-1387-4CA6-816F-3879F97B5CBC}" type="slidenum">
+              <a:rPr lang="en-US"/>
+              <a:t>15</a:t>
+            </a:fld>
+            <a:endParaRPr lang="en-US"/>
+          </a:p>
+        </p:txBody>
+      </p:sp>
+    </p:spTree>
+    <p:extLst>
+      <p:ext uri="{BB962C8B-B14F-4D97-AF65-F5344CB8AC3E}">
+        <p14:creationId xmlns:p14="http://schemas.microsoft.com/office/powerpoint/2010/main" val="1024086991"/>
+      </p:ext>
+    </p:extLst>
+  </p:cSld>
+  <p:clrMapOvr>
+    <a:masterClrMapping/>
+  </p:clrMapOvr>
+</p:notes>
+</file>
+
+<file path=ppt/notesSlides/notesSlide16.xml><?xml version="1.0" encoding="utf-8"?>
+<p:notes xmlns:a="http://schemas.openxmlformats.org/drawingml/2006/main" xmlns:r="http://schemas.openxmlformats.org/officeDocument/2006/relationships" xmlns:p="http://schemas.openxmlformats.org/presentationml/2006/main">
+  <p:cSld>
+    <p:spTree>
+      <p:nvGrpSpPr>
+        <p:cNvPr id="1" name=""/>
+        <p:cNvGrpSpPr/>
+        <p:nvPr/>
+      </p:nvGrpSpPr>
+      <p:grpSpPr>
+        <a:xfrm>
+          <a:off x="0" y="0"/>
+          <a:ext cx="0" cy="0"/>
+          <a:chOff x="0" y="0"/>
+          <a:chExt cx="0" cy="0"/>
+        </a:xfrm>
+      </p:grpSpPr>
+      <p:sp>
+        <p:nvSpPr>
+          <p:cNvPr id="2" name="Slide Image Placeholder 1"/>
+          <p:cNvSpPr>
+            <a:spLocks noGrp="1" noRot="1" noChangeAspect="1"/>
+          </p:cNvSpPr>
+          <p:nvPr>
+            <p:ph type="sldImg"/>
+          </p:nvPr>
+        </p:nvSpPr>
+        <p:spPr/>
+      </p:sp>
+      <p:sp>
+        <p:nvSpPr>
+          <p:cNvPr id="3" name="Notes Placeholder 2"/>
+          <p:cNvSpPr>
+            <a:spLocks noGrp="1"/>
+          </p:cNvSpPr>
+          <p:nvPr>
+            <p:ph type="body" idx="1"/>
+          </p:nvPr>
+        </p:nvSpPr>
+        <p:spPr/>
+        <p:txBody>
+          <a:bodyPr/>
+          <a:lstStyle/>
+          <a:p>
+            <a:r>
+              <a:rPr lang="en-US" dirty="0"/>
+              <a:t/>
+            </a:r>
+            <a:endParaRPr lang="en-US" dirty="0"/>
+          </a:p>
+        </p:txBody>
+      </p:sp>
+      <p:sp>
+        <p:nvSpPr>
+          <p:cNvPr id="4" name="Slide Number Placeholder 3"/>
+          <p:cNvSpPr>
+            <a:spLocks noGrp="1"/>
+          </p:cNvSpPr>
+          <p:nvPr>
+            <p:ph type="sldNum" sz="quarter" idx="10"/>
+          </p:nvPr>
+        </p:nvSpPr>
+        <p:spPr/>
+        <p:txBody>
+          <a:bodyPr/>
+          <a:lstStyle/>
+          <a:p>
+            <a:fld id="{F7021451-1387-4CA6-816F-3879F97B5CBC}" type="slidenum">
+              <a:rPr lang="en-US"/>
+              <a:t>16</a:t>
+            </a:fld>
+            <a:endParaRPr lang="en-US"/>
+          </a:p>
+        </p:txBody>
+      </p:sp>
+    </p:spTree>
+    <p:extLst>
+      <p:ext uri="{BB962C8B-B14F-4D97-AF65-F5344CB8AC3E}">
+        <p14:creationId xmlns:p14="http://schemas.microsoft.com/office/powerpoint/2010/main" val="1024086991"/>
+      </p:ext>
+    </p:extLst>
+  </p:cSld>
+  <p:clrMapOvr>
+    <a:masterClrMapping/>
+  </p:clrMapOvr>
+</p:notes>
+</file>
+
+<file path=ppt/notesSlides/notesSlide17.xml><?xml version="1.0" encoding="utf-8"?>
+<p:notes xmlns:a="http://schemas.openxmlformats.org/drawingml/2006/main" xmlns:r="http://schemas.openxmlformats.org/officeDocument/2006/relationships" xmlns:p="http://schemas.openxmlformats.org/presentationml/2006/main">
+  <p:cSld>
+    <p:spTree>
+      <p:nvGrpSpPr>
+        <p:cNvPr id="1" name=""/>
+        <p:cNvGrpSpPr/>
+        <p:nvPr/>
+      </p:nvGrpSpPr>
+      <p:grpSpPr>
+        <a:xfrm>
+          <a:off x="0" y="0"/>
+          <a:ext cx="0" cy="0"/>
+          <a:chOff x="0" y="0"/>
+          <a:chExt cx="0" cy="0"/>
+        </a:xfrm>
+      </p:grpSpPr>
+      <p:sp>
+        <p:nvSpPr>
+          <p:cNvPr id="2" name="Slide Image Placeholder 1"/>
+          <p:cNvSpPr>
+            <a:spLocks noGrp="1" noRot="1" noChangeAspect="1"/>
+          </p:cNvSpPr>
+          <p:nvPr>
+            <p:ph type="sldImg"/>
+          </p:nvPr>
+        </p:nvSpPr>
+        <p:spPr/>
+      </p:sp>
+      <p:sp>
+        <p:nvSpPr>
+          <p:cNvPr id="3" name="Notes Placeholder 2"/>
+          <p:cNvSpPr>
+            <a:spLocks noGrp="1"/>
+          </p:cNvSpPr>
+          <p:nvPr>
+            <p:ph type="body" idx="1"/>
+          </p:nvPr>
+        </p:nvSpPr>
+        <p:spPr/>
+        <p:txBody>
+          <a:bodyPr/>
+          <a:lstStyle/>
+          <a:p>
+            <a:r>
+              <a:rPr lang="en-US" dirty="0"/>
+              <a:t/>
+            </a:r>
+            <a:endParaRPr lang="en-US" dirty="0"/>
+          </a:p>
+        </p:txBody>
+      </p:sp>
+      <p:sp>
+        <p:nvSpPr>
+          <p:cNvPr id="4" name="Slide Number Placeholder 3"/>
+          <p:cNvSpPr>
+            <a:spLocks noGrp="1"/>
+          </p:cNvSpPr>
+          <p:nvPr>
+            <p:ph type="sldNum" sz="quarter" idx="10"/>
+          </p:nvPr>
+        </p:nvSpPr>
+        <p:spPr/>
+        <p:txBody>
+          <a:bodyPr/>
+          <a:lstStyle/>
+          <a:p>
+            <a:fld id="{F7021451-1387-4CA6-816F-3879F97B5CBC}" type="slidenum">
+              <a:rPr lang="en-US"/>
+              <a:t>17</a:t>
+            </a:fld>
+            <a:endParaRPr lang="en-US"/>
+          </a:p>
+        </p:txBody>
+      </p:sp>
+    </p:spTree>
+    <p:extLst>
+      <p:ext uri="{BB962C8B-B14F-4D97-AF65-F5344CB8AC3E}">
+        <p14:creationId xmlns:p14="http://schemas.microsoft.com/office/powerpoint/2010/main" val="1024086991"/>
+      </p:ext>
+    </p:extLst>
+  </p:cSld>
+  <p:clrMapOvr>
+    <a:masterClrMapping/>
+  </p:clrMapOvr>
+</p:notes>
+</file>
+
+<file path=ppt/notesSlides/notesSlide18.xml><?xml version="1.0" encoding="utf-8"?>
+<p:notes xmlns:a="http://schemas.openxmlformats.org/drawingml/2006/main" xmlns:r="http://schemas.openxmlformats.org/officeDocument/2006/relationships" xmlns:p="http://schemas.openxmlformats.org/presentationml/2006/main">
+  <p:cSld>
+    <p:spTree>
+      <p:nvGrpSpPr>
+        <p:cNvPr id="1" name=""/>
+        <p:cNvGrpSpPr/>
+        <p:nvPr/>
+      </p:nvGrpSpPr>
+      <p:grpSpPr>
+        <a:xfrm>
+          <a:off x="0" y="0"/>
+          <a:ext cx="0" cy="0"/>
+          <a:chOff x="0" y="0"/>
+          <a:chExt cx="0" cy="0"/>
+        </a:xfrm>
+      </p:grpSpPr>
+      <p:sp>
+        <p:nvSpPr>
+          <p:cNvPr id="2" name="Slide Image Placeholder 1"/>
+          <p:cNvSpPr>
+            <a:spLocks noGrp="1" noRot="1" noChangeAspect="1"/>
+          </p:cNvSpPr>
+          <p:nvPr>
+            <p:ph type="sldImg"/>
+          </p:nvPr>
+        </p:nvSpPr>
+        <p:spPr/>
+      </p:sp>
+      <p:sp>
+        <p:nvSpPr>
+          <p:cNvPr id="3" name="Notes Placeholder 2"/>
+          <p:cNvSpPr>
+            <a:spLocks noGrp="1"/>
+          </p:cNvSpPr>
+          <p:nvPr>
+            <p:ph type="body" idx="1"/>
+          </p:nvPr>
+        </p:nvSpPr>
+        <p:spPr/>
+        <p:txBody>
+          <a:bodyPr/>
+          <a:lstStyle/>
+          <a:p>
+            <a:r>
+              <a:rPr lang="en-US" dirty="0"/>
+              <a:t/>
+            </a:r>
+            <a:endParaRPr lang="en-US" dirty="0"/>
+          </a:p>
+        </p:txBody>
+      </p:sp>
+      <p:sp>
+        <p:nvSpPr>
+          <p:cNvPr id="4" name="Slide Number Placeholder 3"/>
+          <p:cNvSpPr>
+            <a:spLocks noGrp="1"/>
+          </p:cNvSpPr>
+          <p:nvPr>
+            <p:ph type="sldNum" sz="quarter" idx="10"/>
+          </p:nvPr>
+        </p:nvSpPr>
+        <p:spPr/>
+        <p:txBody>
+          <a:bodyPr/>
+          <a:lstStyle/>
+          <a:p>
+            <a:fld id="{F7021451-1387-4CA6-816F-3879F97B5CBC}" type="slidenum">
+              <a:rPr lang="en-US"/>
+              <a:t>18</a:t>
             </a:fld>
             <a:endParaRPr lang="en-US"/>
           </a:p>
@@ -3130,7 +4118,7 @@
                 <a:ea typeface="Calibri" pitchFamily="34" charset="-122"/>
                 <a:cs typeface="Calibri" pitchFamily="34" charset="-120"/>
               </a:rPr>
-              <a:t>WHAT TO ANTICIPATE</a:t>
+              <a:t>OUR RESPONSE</a:t>
             </a:r>
             <a:endParaRPr lang="en-US" sz="1150" dirty="0"/>
           </a:p>
@@ -3169,7 +4157,7 @@
                 <a:ea typeface="Cambria" pitchFamily="34" charset="-122"/>
                 <a:cs typeface="Cambria" pitchFamily="34" charset="-120"/>
               </a:rPr>
-              <a:t>Identified risks and our answers</a:t>
+              <a:t>Two technologies, two different constraints</a:t>
             </a:r>
             <a:endParaRPr lang="en-US" sz="3000" dirty="0"/>
           </a:p>
@@ -3208,7 +4196,7 @@
                 <a:ea typeface="Cambria" pitchFamily="34" charset="-122"/>
                 <a:cs typeface="Cambria" pitchFamily="34" charset="-120"/>
               </a:rPr>
-              <a:t>Risks</a:t>
+              <a:t>EVERGREEN® — holding the water</a:t>
             </a:r>
             <a:endParaRPr lang="en-US" sz="1600" dirty="0"/>
           </a:p>
@@ -3254,7 +4242,7 @@
                 <a:ea typeface="Calibri" pitchFamily="34" charset="-122"/>
                 <a:cs typeface="Calibri" pitchFamily="34" charset="-120"/>
               </a:rPr>
-              <a:t>Rainfall variability: one good La Niña season is enough to mask the value of the product.</a:t>
+              <a:t>A potassium-based hydro-retainer placed in the root zone at planting or at replant.</a:t>
             </a:r>
             <a:endParaRPr lang="en-US" sz="1350" dirty="0"/>
           </a:p>
@@ -3278,7 +4266,7 @@
                 <a:ea typeface="Calibri" pitchFamily="34" charset="-122"/>
                 <a:cs typeface="Calibri" pitchFamily="34" charset="-120"/>
               </a:rPr>
-              <a:t>Registration: fertilisers and soil amendments fall under Act 36 of 1947 and must be registered before commercial sale.</a:t>
+              <a:t>It captures rain and irrigation water and releases it back to the plant gradually, removing water stress through the critical stages.</a:t>
             </a:r>
             <a:endParaRPr lang="en-US" sz="1350" dirty="0"/>
           </a:p>
@@ -3302,7 +4290,7 @@
                 <a:ea typeface="Calibri" pitchFamily="34" charset="-122"/>
                 <a:cs typeface="Calibri" pitchFamily="34" charset="-120"/>
               </a:rPr>
-              <a:t>The memory of cheap sodium-based polymers, which left a poor reputation in several regions.</a:t>
+              <a:t>Absorbs on the order of 300 times its own weight; useful effect of 3 to 4 years in the soil.</a:t>
             </a:r>
             <a:endParaRPr lang="en-US" sz="1350" dirty="0"/>
           </a:p>
@@ -3326,7 +4314,7 @@
                 <a:ea typeface="Calibri" pitchFamily="34" charset="-122"/>
                 <a:cs typeface="Calibri" pitchFamily="34" charset="-120"/>
               </a:rPr>
-              <a:t>Farm cash flow after successive droughts, high input costs and a rand that raises the price of every imported input.</a:t>
+              <a:t>Breaks down by 20 to 25 % a year, with no build-up and no risk of overdosing.</a:t>
             </a:r>
             <a:endParaRPr lang="en-US" sz="1350" dirty="0"/>
           </a:p>
@@ -3365,7 +4353,7 @@
                 <a:ea typeface="Cambria" pitchFamily="34" charset="-122"/>
                 <a:cs typeface="Cambria" pitchFamily="34" charset="-120"/>
               </a:rPr>
-              <a:t>Our answers</a:t>
+              <a:t>ECOFERT® — feeding without depleting</a:t>
             </a:r>
             <a:endParaRPr lang="en-US" sz="1600" dirty="0"/>
           </a:p>
@@ -3411,7 +4399,7 @@
                 <a:ea typeface="Calibri" pitchFamily="34" charset="-122"/>
                 <a:cs typeface="Calibri" pitchFamily="34" charset="-120"/>
               </a:rPr>
-              <a:t>Run the trial over a full season against a control block, so the gain is measurable even in a favourable year.</a:t>
+              <a:t>A micro-dose fertiliser of amino acids, nitrogen, phosphorus and potassium, made from renewable resources.</a:t>
             </a:r>
             <a:endParaRPr lang="en-US" sz="1350" dirty="0"/>
           </a:p>
@@ -3435,7 +4423,7 @@
                 <a:ea typeface="Calibri" pitchFamily="34" charset="-122"/>
                 <a:cs typeface="Calibri" pitchFamily="34" charset="-120"/>
               </a:rPr>
-              <a:t>Open the registration file in parallel with the first trials rather than after them.</a:t>
+              <a:t>Non-chelating: it does not strip the clay-humus complex and adds neither salinity nor nitrate load.</a:t>
             </a:r>
             <a:endParaRPr lang="en-US" sz="1350" dirty="0"/>
           </a:p>
@@ -3459,7 +4447,7 @@
                 <a:ea typeface="Calibri" pitchFamily="34" charset="-122"/>
                 <a:cs typeface="Calibri" pitchFamily="34" charset="-120"/>
               </a:rPr>
-              <a:t>Document the formulation: potassium, never sodium, and compatible with food crops.</a:t>
+              <a:t>Certified SOHISCERT and EU Bio, in use in 60 countries — the entry condition for European buyers' specifications.</a:t>
             </a:r>
             <a:endParaRPr lang="en-US" sz="1350" dirty="0"/>
           </a:p>
@@ -3483,7 +4471,7 @@
                 <a:ea typeface="Calibri" pitchFamily="34" charset="-122"/>
                 <a:cs typeface="Calibri" pitchFamily="34" charset="-120"/>
               </a:rPr>
-              <a:t>Spread the commitment: a useful life of 3 to 4 years amortises the cost over several seasons.</a:t>
+              <a:t>1 to 4 bottles of 140 ml per hectare, compatible with existing fertigation equipment.</a:t>
             </a:r>
             <a:endParaRPr lang="en-US" sz="1350" dirty="0"/>
           </a:p>
@@ -3552,7 +4540,7 @@
                 <a:ea typeface="Calibri" pitchFamily="34" charset="-122"/>
                 <a:cs typeface="Calibri" pitchFamily="34" charset="-120"/>
               </a:rPr>
-              <a:t>Acrylamide analysis (Polymex laboratory, ISO 9001, content below 3.0 µg/g) and REACH / SVHC screening (SGS) are available on request, together with the SOHISCERT certificate valid until 4 September 2027.</a:t>
+              <a:t>The two products are sold separately but were designed to reinforce each other: the hydro-retainer extends how long water stays available, the fertiliser puts that water to work without degrading the soil.</a:t>
             </a:r>
             <a:endParaRPr lang="en-US" sz="1100" dirty="0"/>
           </a:p>
@@ -3651,6 +4639,4717 @@
 <file path=ppt/slides/slide11.xml><?xml version="1.0" encoding="utf-8"?>
 <p:sld xmlns:a="http://schemas.openxmlformats.org/drawingml/2006/main" xmlns:r="http://schemas.openxmlformats.org/officeDocument/2006/relationships" xmlns:p="http://schemas.openxmlformats.org/presentationml/2006/main">
   <p:cSld name="Slide 11">
+    <p:bg>
+      <p:bgPr>
+        <a:solidFill>
+          <a:srgbClr val="FCFAFA"/>
+        </a:solidFill>
+      </p:bgPr>
+    </p:bg>
+    <p:spTree>
+      <p:nvGrpSpPr>
+        <p:cNvPr id="1" name=""/>
+        <p:cNvGrpSpPr/>
+        <p:nvPr/>
+      </p:nvGrpSpPr>
+      <p:grpSpPr>
+        <a:xfrm>
+          <a:off x="0" y="0"/>
+          <a:ext cx="0" cy="0"/>
+          <a:chOff x="0" y="0"/>
+          <a:chExt cx="0" cy="0"/>
+        </a:xfrm>
+      </p:grpSpPr>
+      <p:sp>
+        <p:nvSpPr>
+          <p:cNvPr id="2" name="Text 0"/>
+          <p:cNvSpPr txBox="1"/>
+          <p:nvPr/>
+        </p:nvSpPr>
+        <p:spPr>
+          <a:xfrm>
+            <a:off x="594360" y="411480"/>
+            <a:ext cx="10515600" cy="274320"/>
+          </a:xfrm>
+          <a:prstGeom prst="rect">
+            <a:avLst/>
+          </a:prstGeom>
+          <a:noFill/>
+          <a:ln/>
+        </p:spPr>
+        <p:txBody>
+          <a:bodyPr wrap="square" lIns="0" tIns="0" rIns="0" bIns="0" rtlCol="0" anchor="ctr"/>
+          <a:lstStyle/>
+          <a:p>
+            <a:pPr algn="l" indent="0" marL="0">
+              <a:buNone/>
+            </a:pPr>
+            <a:r>
+              <a:rPr lang="en-US" sz="1150" b="1" spc="200" kern="0" dirty="0">
+                <a:solidFill>
+                  <a:srgbClr val="C9A227"/>
+                </a:solidFill>
+                <a:latin typeface="Calibri" pitchFamily="34" charset="0"/>
+                <a:ea typeface="Calibri" pitchFamily="34" charset="-122"/>
+                <a:cs typeface="Calibri" pitchFamily="34" charset="-120"/>
+              </a:rPr>
+              <a:t>The rest of the range</a:t>
+            </a:r>
+            <a:endParaRPr lang="en-US" sz="1150" dirty="0"/>
+          </a:p>
+        </p:txBody>
+      </p:sp>
+      <p:sp>
+        <p:nvSpPr>
+          <p:cNvPr id="3" name="Text 1"/>
+          <p:cNvSpPr txBox="1"/>
+          <p:nvPr/>
+        </p:nvSpPr>
+        <p:spPr>
+          <a:xfrm>
+            <a:off x="594360" y="731520"/>
+            <a:ext cx="10881360" cy="731520"/>
+          </a:xfrm>
+          <a:prstGeom prst="rect">
+            <a:avLst/>
+          </a:prstGeom>
+          <a:noFill/>
+          <a:ln/>
+        </p:spPr>
+        <p:txBody>
+          <a:bodyPr wrap="square" lIns="0" tIns="0" rIns="0" bIns="0" rtlCol="0" anchor="ctr"/>
+          <a:lstStyle/>
+          <a:p>
+            <a:pPr algn="l" indent="0" marL="0">
+              <a:buNone/>
+            </a:pPr>
+            <a:r>
+              <a:rPr lang="en-US" sz="3000" b="1" dirty="0">
+                <a:solidFill>
+                  <a:srgbClr val="3F162A"/>
+                </a:solidFill>
+                <a:latin typeface="Cambria" pitchFamily="34" charset="0"/>
+                <a:ea typeface="Cambria" pitchFamily="34" charset="-122"/>
+                <a:cs typeface="Cambria" pitchFamily="34" charset="-120"/>
+              </a:rPr>
+              <a:t>Protecting crops, holding soils</a:t>
+            </a:r>
+            <a:endParaRPr lang="en-US" sz="3000" dirty="0"/>
+          </a:p>
+        </p:txBody>
+      </p:sp>
+      <p:sp>
+        <p:nvSpPr>
+          <p:cNvPr id="4" name="Text 2"/>
+          <p:cNvSpPr txBox="1"/>
+          <p:nvPr/>
+        </p:nvSpPr>
+        <p:spPr>
+          <a:xfrm>
+            <a:off x="594360" y="1783080"/>
+            <a:ext cx="5227168" cy="411480"/>
+          </a:xfrm>
+          <a:prstGeom prst="rect">
+            <a:avLst/>
+          </a:prstGeom>
+          <a:noFill/>
+          <a:ln/>
+        </p:spPr>
+        <p:txBody>
+          <a:bodyPr wrap="square" lIns="0" tIns="0" rIns="0" bIns="0" rtlCol="0" anchor="ctr"/>
+          <a:lstStyle/>
+          <a:p>
+            <a:pPr algn="l" indent="0" marL="0">
+              <a:buNone/>
+            </a:pPr>
+            <a:r>
+              <a:rPr lang="en-US" sz="1600" b="1" dirty="0">
+                <a:solidFill>
+                  <a:srgbClr val="6B2A44"/>
+                </a:solidFill>
+                <a:latin typeface="Cambria" pitchFamily="34" charset="0"/>
+                <a:ea typeface="Cambria" pitchFamily="34" charset="-122"/>
+                <a:cs typeface="Cambria" pitchFamily="34" charset="-120"/>
+              </a:rPr>
+              <a:t>NAPEMA® — protection without residue</a:t>
+            </a:r>
+            <a:endParaRPr lang="en-US" sz="1600" dirty="0"/>
+          </a:p>
+        </p:txBody>
+      </p:sp>
+      <p:sp>
+        <p:nvSpPr>
+          <p:cNvPr id="5" name="Text 3"/>
+          <p:cNvSpPr txBox="1"/>
+          <p:nvPr/>
+        </p:nvSpPr>
+        <p:spPr>
+          <a:xfrm>
+            <a:off x="594360" y="2286000"/>
+            <a:ext cx="5227168" cy="2468880"/>
+          </a:xfrm>
+          <a:prstGeom prst="rect">
+            <a:avLst/>
+          </a:prstGeom>
+          <a:noFill/>
+          <a:ln/>
+        </p:spPr>
+        <p:txBody>
+          <a:bodyPr wrap="square" lIns="0" tIns="0" rIns="0" bIns="0" rtlCol="0" anchor="t"/>
+          <a:lstStyle/>
+          <a:p>
+            <a:pPr algn="l" marL="342900" indent="-342900">
+              <a:lnSpc>
+                <a:spcPct val="122000"/>
+              </a:lnSpc>
+              <a:spcAft>
+                <a:spcPts val="1000"/>
+              </a:spcAft>
+              <a:buSzPct val="100000"/>
+              <a:buChar char="•"/>
+            </a:pPr>
+            <a:r>
+              <a:rPr lang="en-US" sz="1350" dirty="0">
+                <a:solidFill>
+                  <a:srgbClr val="3F3138"/>
+                </a:solidFill>
+                <a:latin typeface="Calibri" pitchFamily="34" charset="0"/>
+                <a:ea typeface="Calibri" pitchFamily="34" charset="-122"/>
+                <a:cs typeface="Calibri" pitchFamily="34" charset="-120"/>
+              </a:rPr>
+              <a:t>Controls diseases, parasites, fungi and pests, with no synthetic molecule.</a:t>
+            </a:r>
+            <a:endParaRPr lang="en-US" sz="1350" dirty="0"/>
+          </a:p>
+          <a:p>
+            <a:pPr algn="l" marL="342900" indent="-342900">
+              <a:lnSpc>
+                <a:spcPct val="122000"/>
+              </a:lnSpc>
+              <a:spcAft>
+                <a:spcPts val="1000"/>
+              </a:spcAft>
+              <a:buSzPct val="100000"/>
+              <a:buChar char="•"/>
+            </a:pPr>
+            <a:r>
+              <a:rPr lang="en-US" sz="1350" dirty="0">
+                <a:solidFill>
+                  <a:srgbClr val="3F3138"/>
+                </a:solidFill>
+                <a:latin typeface="Calibri" pitchFamily="34" charset="0"/>
+                <a:ea typeface="Calibri" pitchFamily="34" charset="-122"/>
+                <a:cs typeface="Calibri" pitchFamily="34" charset="-120"/>
+              </a:rPr>
+              <a:t>Foliar and root spraying, working both preventively and curatively.</a:t>
+            </a:r>
+            <a:endParaRPr lang="en-US" sz="1350" dirty="0"/>
+          </a:p>
+          <a:p>
+            <a:pPr algn="l" marL="342900" indent="-342900">
+              <a:lnSpc>
+                <a:spcPct val="122000"/>
+              </a:lnSpc>
+              <a:spcAft>
+                <a:spcPts val="1000"/>
+              </a:spcAft>
+              <a:buSzPct val="100000"/>
+              <a:buChar char="•"/>
+            </a:pPr>
+            <a:r>
+              <a:rPr lang="en-US" sz="1350" dirty="0">
+                <a:solidFill>
+                  <a:srgbClr val="3F3138"/>
+                </a:solidFill>
+                <a:latin typeface="Calibri" pitchFamily="34" charset="0"/>
+                <a:ea typeface="Calibri" pitchFamily="34" charset="-122"/>
+                <a:cs typeface="Calibri" pitchFamily="34" charset="-120"/>
+              </a:rPr>
+              <a:t>No residue in soil, plant or air: pollinators and beneficial insects are spared.</a:t>
+            </a:r>
+            <a:endParaRPr lang="en-US" sz="1350" dirty="0"/>
+          </a:p>
+          <a:p>
+            <a:pPr algn="l" marL="342900" indent="-342900">
+              <a:lnSpc>
+                <a:spcPct val="122000"/>
+              </a:lnSpc>
+              <a:spcAft>
+                <a:spcPts val="1000"/>
+              </a:spcAft>
+              <a:buSzPct val="100000"/>
+              <a:buChar char="•"/>
+            </a:pPr>
+            <a:r>
+              <a:rPr lang="en-US" sz="1350" dirty="0">
+                <a:solidFill>
+                  <a:srgbClr val="3F3138"/>
+                </a:solidFill>
+                <a:latin typeface="Calibri" pitchFamily="34" charset="0"/>
+                <a:ea typeface="Calibri" pitchFamily="34" charset="-122"/>
+                <a:cs typeface="Calibri" pitchFamily="34" charset="-120"/>
+              </a:rPr>
+              <a:t>Formulated for one precise problem: mealybug, citrus greening (HLB), nematodes.</a:t>
+            </a:r>
+            <a:endParaRPr lang="en-US" sz="1350" dirty="0"/>
+          </a:p>
+        </p:txBody>
+      </p:sp>
+      <p:sp>
+        <p:nvSpPr>
+          <p:cNvPr id="6" name="Text 4"/>
+          <p:cNvSpPr txBox="1"/>
+          <p:nvPr/>
+        </p:nvSpPr>
+        <p:spPr>
+          <a:xfrm>
+            <a:off x="6370168" y="1783080"/>
+            <a:ext cx="5227168" cy="411480"/>
+          </a:xfrm>
+          <a:prstGeom prst="rect">
+            <a:avLst/>
+          </a:prstGeom>
+          <a:noFill/>
+          <a:ln/>
+        </p:spPr>
+        <p:txBody>
+          <a:bodyPr wrap="square" lIns="0" tIns="0" rIns="0" bIns="0" rtlCol="0" anchor="ctr"/>
+          <a:lstStyle/>
+          <a:p>
+            <a:pPr algn="l" indent="0" marL="0">
+              <a:buNone/>
+            </a:pPr>
+            <a:r>
+              <a:rPr lang="en-US" sz="1600" b="1" dirty="0">
+                <a:solidFill>
+                  <a:srgbClr val="6B2A44"/>
+                </a:solidFill>
+                <a:latin typeface="Cambria" pitchFamily="34" charset="0"/>
+                <a:ea typeface="Cambria" pitchFamily="34" charset="-122"/>
+                <a:cs typeface="Cambria" pitchFamily="34" charset="-120"/>
+              </a:rPr>
+              <a:t>Paulownia ALTIFOLIA® — the tree for hot regions</a:t>
+            </a:r>
+            <a:endParaRPr lang="en-US" sz="1600" dirty="0"/>
+          </a:p>
+        </p:txBody>
+      </p:sp>
+      <p:sp>
+        <p:nvSpPr>
+          <p:cNvPr id="7" name="Text 5"/>
+          <p:cNvSpPr txBox="1"/>
+          <p:nvPr/>
+        </p:nvSpPr>
+        <p:spPr>
+          <a:xfrm>
+            <a:off x="6370168" y="2286000"/>
+            <a:ext cx="5227168" cy="2468880"/>
+          </a:xfrm>
+          <a:prstGeom prst="rect">
+            <a:avLst/>
+          </a:prstGeom>
+          <a:noFill/>
+          <a:ln/>
+        </p:spPr>
+        <p:txBody>
+          <a:bodyPr wrap="square" lIns="0" tIns="0" rIns="0" bIns="0" rtlCol="0" anchor="t"/>
+          <a:lstStyle/>
+          <a:p>
+            <a:pPr algn="l" marL="342900" indent="-342900">
+              <a:lnSpc>
+                <a:spcPct val="122000"/>
+              </a:lnSpc>
+              <a:spcAft>
+                <a:spcPts val="1000"/>
+              </a:spcAft>
+              <a:buSzPct val="100000"/>
+              <a:buChar char="•"/>
+            </a:pPr>
+            <a:r>
+              <a:rPr lang="en-US" sz="1350" dirty="0">
+                <a:solidFill>
+                  <a:srgbClr val="3F3138"/>
+                </a:solidFill>
+                <a:latin typeface="Calibri" pitchFamily="34" charset="0"/>
+                <a:ea typeface="Calibri" pitchFamily="34" charset="-122"/>
+                <a:cs typeface="Calibri" pitchFamily="34" charset="-120"/>
+              </a:rPr>
+              <a:t>13 to 15 m in six to eight years, with a wide trunk.</a:t>
+            </a:r>
+            <a:endParaRPr lang="en-US" sz="1350" dirty="0"/>
+          </a:p>
+          <a:p>
+            <a:pPr algn="l" marL="342900" indent="-342900">
+              <a:lnSpc>
+                <a:spcPct val="122000"/>
+              </a:lnSpc>
+              <a:spcAft>
+                <a:spcPts val="1000"/>
+              </a:spcAft>
+              <a:buSzPct val="100000"/>
+              <a:buChar char="•"/>
+            </a:pPr>
+            <a:r>
+              <a:rPr lang="en-US" sz="1350" dirty="0">
+                <a:solidFill>
+                  <a:srgbClr val="3F3138"/>
+                </a:solidFill>
+                <a:latin typeface="Calibri" pitchFamily="34" charset="0"/>
+                <a:ea typeface="Calibri" pitchFamily="34" charset="-122"/>
+                <a:cs typeface="Calibri" pitchFamily="34" charset="-120"/>
+              </a:rPr>
+              <a:t>Combined with 100 g of EVERGREEN® per plant, irrigation needs drop by 50%.</a:t>
+            </a:r>
+            <a:endParaRPr lang="en-US" sz="1350" dirty="0"/>
+          </a:p>
+          <a:p>
+            <a:pPr algn="l" marL="342900" indent="-342900">
+              <a:lnSpc>
+                <a:spcPct val="122000"/>
+              </a:lnSpc>
+              <a:spcAft>
+                <a:spcPts val="1000"/>
+              </a:spcAft>
+              <a:buSzPct val="100000"/>
+              <a:buChar char="•"/>
+            </a:pPr>
+            <a:r>
+              <a:rPr lang="en-US" sz="1350" dirty="0">
+                <a:solidFill>
+                  <a:srgbClr val="3F3138"/>
+                </a:solidFill>
+                <a:latin typeface="Calibri" pitchFamily="34" charset="0"/>
+                <a:ea typeface="Calibri" pitchFamily="34" charset="-122"/>
+                <a:cs typeface="Calibri" pitchFamily="34" charset="-120"/>
+              </a:rPr>
+              <a:t>Withstands −25 °C to +45 °C; the wood only ignites above 426 °C.</a:t>
+            </a:r>
+            <a:endParaRPr lang="en-US" sz="1350" dirty="0"/>
+          </a:p>
+          <a:p>
+            <a:pPr algn="l" marL="342900" indent="-342900">
+              <a:lnSpc>
+                <a:spcPct val="122000"/>
+              </a:lnSpc>
+              <a:spcAft>
+                <a:spcPts val="1000"/>
+              </a:spcAft>
+              <a:buSzPct val="100000"/>
+              <a:buChar char="•"/>
+            </a:pPr>
+            <a:r>
+              <a:rPr lang="en-US" sz="1350" dirty="0">
+                <a:solidFill>
+                  <a:srgbClr val="3F3138"/>
+                </a:solidFill>
+                <a:latin typeface="Calibri" pitchFamily="34" charset="0"/>
+                <a:ea typeface="Calibri" pitchFamily="34" charset="-122"/>
+                <a:cs typeface="Calibri" pitchFamily="34" charset="-120"/>
+              </a:rPr>
+              <a:t>Windbreak, protection against soil erosion, 400 to 700 kg of honey per hectare.</a:t>
+            </a:r>
+            <a:endParaRPr lang="en-US" sz="1350" dirty="0"/>
+          </a:p>
+        </p:txBody>
+      </p:sp>
+      <p:sp>
+        <p:nvSpPr>
+          <p:cNvPr id="8" name="Shape 6"/>
+          <p:cNvSpPr/>
+          <p:nvPr/>
+        </p:nvSpPr>
+        <p:spPr>
+          <a:xfrm>
+            <a:off x="594360" y="4846320"/>
+            <a:ext cx="11002975" cy="960120"/>
+          </a:xfrm>
+          <a:prstGeom prst="roundRect">
+            <a:avLst>
+              <a:gd name="adj" fmla="val 7619"/>
+            </a:avLst>
+          </a:prstGeom>
+          <a:solidFill>
+            <a:srgbClr val="F5EFF1"/>
+          </a:solidFill>
+          <a:ln w="9525">
+            <a:solidFill>
+              <a:srgbClr val="E5D9DE"/>
+            </a:solidFill>
+            <a:prstDash val="solid"/>
+          </a:ln>
+        </p:spPr>
+      </p:sp>
+      <p:sp>
+        <p:nvSpPr>
+          <p:cNvPr id="9" name="Text 7"/>
+          <p:cNvSpPr txBox="1"/>
+          <p:nvPr/>
+        </p:nvSpPr>
+        <p:spPr>
+          <a:xfrm>
+            <a:off x="822960" y="4983480"/>
+            <a:ext cx="10545775" cy="713232"/>
+          </a:xfrm>
+          <a:prstGeom prst="rect">
+            <a:avLst/>
+          </a:prstGeom>
+          <a:noFill/>
+          <a:ln/>
+        </p:spPr>
+        <p:txBody>
+          <a:bodyPr wrap="square" lIns="0" tIns="0" rIns="0" bIns="0" rtlCol="0" anchor="t"/>
+          <a:lstStyle/>
+          <a:p>
+            <a:pPr algn="l" indent="0" marL="0">
+              <a:lnSpc>
+                <a:spcPct val="118000"/>
+              </a:lnSpc>
+              <a:buNone/>
+            </a:pPr>
+            <a:r>
+              <a:rPr lang="en-US" sz="1100" dirty="0">
+                <a:solidFill>
+                  <a:srgbClr val="7C6B73"/>
+                </a:solidFill>
+                <a:latin typeface="Calibri" pitchFamily="34" charset="0"/>
+                <a:ea typeface="Calibri" pitchFamily="34" charset="-122"/>
+                <a:cs typeface="Calibri" pitchFamily="34" charset="-120"/>
+              </a:rPr>
+              <a:t>Plants delivered potted (25 to 30 cm), certified disease-free and replaced under warranty in case of loss. First harvest at the end of year six, with wood valued at around €400 to €450 per m³.</a:t>
+            </a:r>
+            <a:endParaRPr lang="en-US" sz="1100" dirty="0"/>
+          </a:p>
+        </p:txBody>
+      </p:sp>
+      <p:sp>
+        <p:nvSpPr>
+          <p:cNvPr id="10" name="Text 8"/>
+          <p:cNvSpPr txBox="1"/>
+          <p:nvPr/>
+        </p:nvSpPr>
+        <p:spPr>
+          <a:xfrm>
+            <a:off x="502920" y="6382512"/>
+            <a:ext cx="8229600" cy="274320"/>
+          </a:xfrm>
+          <a:prstGeom prst="rect">
+            <a:avLst/>
+          </a:prstGeom>
+          <a:noFill/>
+          <a:ln/>
+        </p:spPr>
+        <p:txBody>
+          <a:bodyPr wrap="square" lIns="0" tIns="0" rIns="0" bIns="0" rtlCol="0" anchor="ctr"/>
+          <a:lstStyle/>
+          <a:p>
+            <a:pPr algn="l" indent="0" marL="0">
+              <a:buNone/>
+            </a:pPr>
+            <a:r>
+              <a:rPr lang="en-US" sz="950" dirty="0">
+                <a:solidFill>
+                  <a:srgbClr val="7C6B73">
+                    <a:alpha val="80000"/>
+                  </a:srgbClr>
+                </a:solidFill>
+                <a:latin typeface="Calibri" pitchFamily="34" charset="0"/>
+                <a:ea typeface="Calibri" pitchFamily="34" charset="-122"/>
+                <a:cs typeface="Calibri" pitchFamily="34" charset="-120"/>
+              </a:rPr>
+              <a:t>Green Solutions · South Africa market dossier</a:t>
+            </a:r>
+            <a:endParaRPr lang="en-US" sz="950" dirty="0"/>
+          </a:p>
+        </p:txBody>
+      </p:sp>
+      <p:sp>
+        <p:nvSpPr>
+          <p:cNvPr id="11" name="Text 9"/>
+          <p:cNvSpPr txBox="1"/>
+          <p:nvPr/>
+        </p:nvSpPr>
+        <p:spPr>
+          <a:xfrm>
+            <a:off x="11140135" y="6382512"/>
+            <a:ext cx="548640" cy="274320"/>
+          </a:xfrm>
+          <a:prstGeom prst="rect">
+            <a:avLst/>
+          </a:prstGeom>
+          <a:noFill/>
+          <a:ln/>
+        </p:spPr>
+        <p:txBody>
+          <a:bodyPr wrap="square" lIns="0" tIns="0" rIns="0" bIns="0" rtlCol="0" anchor="ctr"/>
+          <a:lstStyle/>
+          <a:p>
+            <a:pPr algn="r" indent="0" marL="0">
+              <a:buNone/>
+            </a:pPr>
+            <a:r>
+              <a:rPr lang="en-US" sz="950" dirty="0">
+                <a:solidFill>
+                  <a:srgbClr val="7C6B73">
+                    <a:alpha val="80000"/>
+                  </a:srgbClr>
+                </a:solidFill>
+                <a:latin typeface="Calibri" pitchFamily="34" charset="0"/>
+                <a:ea typeface="Calibri" pitchFamily="34" charset="-122"/>
+                <a:cs typeface="Calibri" pitchFamily="34" charset="-120"/>
+              </a:rPr>
+              <a:t>10</a:t>
+            </a:r>
+            <a:endParaRPr lang="en-US" sz="950" dirty="0"/>
+          </a:p>
+        </p:txBody>
+      </p:sp>
+    </p:spTree>
+  </p:cSld>
+  <p:clrMapOvr>
+    <a:masterClrMapping/>
+  </p:clrMapOvr>
+</p:sld>
+</file>
+
+<file path=ppt/slides/slide12.xml><?xml version="1.0" encoding="utf-8"?>
+<p:sld xmlns:a="http://schemas.openxmlformats.org/drawingml/2006/main" xmlns:r="http://schemas.openxmlformats.org/officeDocument/2006/relationships" xmlns:p="http://schemas.openxmlformats.org/presentationml/2006/main">
+  <p:cSld name="Slide 12">
+    <p:bg>
+      <p:bgPr>
+        <a:solidFill>
+          <a:srgbClr val="FCFAFA"/>
+        </a:solidFill>
+      </p:bgPr>
+    </p:bg>
+    <p:spTree>
+      <p:nvGrpSpPr>
+        <p:cNvPr id="1" name=""/>
+        <p:cNvGrpSpPr/>
+        <p:nvPr/>
+      </p:nvGrpSpPr>
+      <p:grpSpPr>
+        <a:xfrm>
+          <a:off x="0" y="0"/>
+          <a:ext cx="0" cy="0"/>
+          <a:chOff x="0" y="0"/>
+          <a:chExt cx="0" cy="0"/>
+        </a:xfrm>
+      </p:grpSpPr>
+      <p:sp>
+        <p:nvSpPr>
+          <p:cNvPr id="2" name="Text 0"/>
+          <p:cNvSpPr txBox="1"/>
+          <p:nvPr/>
+        </p:nvSpPr>
+        <p:spPr>
+          <a:xfrm>
+            <a:off x="594360" y="411480"/>
+            <a:ext cx="10515600" cy="274320"/>
+          </a:xfrm>
+          <a:prstGeom prst="rect">
+            <a:avLst/>
+          </a:prstGeom>
+          <a:noFill/>
+          <a:ln/>
+        </p:spPr>
+        <p:txBody>
+          <a:bodyPr wrap="square" lIns="0" tIns="0" rIns="0" bIns="0" rtlCol="0" anchor="ctr"/>
+          <a:lstStyle/>
+          <a:p>
+            <a:pPr algn="l" indent="0" marL="0">
+              <a:buNone/>
+            </a:pPr>
+            <a:r>
+              <a:rPr lang="en-US" sz="1150" b="1" spc="200" kern="0" dirty="0">
+                <a:solidFill>
+                  <a:srgbClr val="C9A227"/>
+                </a:solidFill>
+                <a:latin typeface="Calibri" pitchFamily="34" charset="0"/>
+                <a:ea typeface="Calibri" pitchFamily="34" charset="-122"/>
+                <a:cs typeface="Calibri" pitchFamily="34" charset="-120"/>
+              </a:rPr>
+              <a:t>ORDERS OF MAGNITUDE</a:t>
+            </a:r>
+            <a:endParaRPr lang="en-US" sz="1150" dirty="0"/>
+          </a:p>
+        </p:txBody>
+      </p:sp>
+      <p:sp>
+        <p:nvSpPr>
+          <p:cNvPr id="3" name="Text 1"/>
+          <p:cNvSpPr txBox="1"/>
+          <p:nvPr/>
+        </p:nvSpPr>
+        <p:spPr>
+          <a:xfrm>
+            <a:off x="594360" y="731520"/>
+            <a:ext cx="10881360" cy="731520"/>
+          </a:xfrm>
+          <a:prstGeom prst="rect">
+            <a:avLst/>
+          </a:prstGeom>
+          <a:noFill/>
+          <a:ln/>
+        </p:spPr>
+        <p:txBody>
+          <a:bodyPr wrap="square" lIns="0" tIns="0" rIns="0" bIns="0" rtlCol="0" anchor="ctr"/>
+          <a:lstStyle/>
+          <a:p>
+            <a:pPr algn="l" indent="0" marL="0">
+              <a:buNone/>
+            </a:pPr>
+            <a:r>
+              <a:rPr lang="en-US" sz="3000" b="1" dirty="0">
+                <a:solidFill>
+                  <a:srgbClr val="3F162A"/>
+                </a:solidFill>
+                <a:latin typeface="Cambria" pitchFamily="34" charset="0"/>
+                <a:ea typeface="Cambria" pitchFamily="34" charset="-122"/>
+                <a:cs typeface="Cambria" pitchFamily="34" charset="-120"/>
+              </a:rPr>
+              <a:t>Expected water saving by irrigation method</a:t>
+            </a:r>
+            <a:endParaRPr lang="en-US" sz="3000" dirty="0"/>
+          </a:p>
+        </p:txBody>
+      </p:sp>
+      <p:graphicFrame>
+        <p:nvGraphicFramePr>
+          <p:cNvPr id="4" name="Chart 0" descr=""/>
+          <p:cNvGraphicFramePr/>
+          <p:nvPr/>
+        </p:nvGraphicFramePr>
+        <p:xfrm>
+          <a:off x="594360" y="1783080"/>
+          <a:ext cx="7360920" cy="3977640"/>
+        </p:xfrm>
+        <a:graphic xmlns:a="http://schemas.openxmlformats.org/drawingml/2006/main">
+          <a:graphicData uri="http://schemas.openxmlformats.org/drawingml/2006/chart">
+            <c:chart xmlns:c="http://schemas.openxmlformats.org/drawingml/2006/chart" r:id="rId1"/>
+          </a:graphicData>
+        </a:graphic>
+      </p:graphicFrame>
+      <p:sp>
+        <p:nvSpPr>
+          <p:cNvPr id="5" name="Shape 2"/>
+          <p:cNvSpPr/>
+          <p:nvPr/>
+        </p:nvSpPr>
+        <p:spPr>
+          <a:xfrm>
+            <a:off x="8275320" y="1783080"/>
+            <a:ext cx="3291840" cy="3977640"/>
+          </a:xfrm>
+          <a:prstGeom prst="roundRect">
+            <a:avLst>
+              <a:gd name="adj" fmla="val 2778"/>
+            </a:avLst>
+          </a:prstGeom>
+          <a:solidFill>
+            <a:srgbClr val="F5EFF1"/>
+          </a:solidFill>
+          <a:ln w="9525">
+            <a:solidFill>
+              <a:srgbClr val="E5D9DE"/>
+            </a:solidFill>
+            <a:prstDash val="solid"/>
+          </a:ln>
+        </p:spPr>
+      </p:sp>
+      <p:sp>
+        <p:nvSpPr>
+          <p:cNvPr id="6" name="Text 3"/>
+          <p:cNvSpPr txBox="1"/>
+          <p:nvPr/>
+        </p:nvSpPr>
+        <p:spPr>
+          <a:xfrm>
+            <a:off x="8503920" y="2011680"/>
+            <a:ext cx="2834640" cy="457200"/>
+          </a:xfrm>
+          <a:prstGeom prst="rect">
+            <a:avLst/>
+          </a:prstGeom>
+          <a:noFill/>
+          <a:ln/>
+        </p:spPr>
+        <p:txBody>
+          <a:bodyPr wrap="square" lIns="0" tIns="0" rIns="0" bIns="0" rtlCol="0" anchor="ctr"/>
+          <a:lstStyle/>
+          <a:p>
+            <a:pPr algn="l" indent="0" marL="0">
+              <a:buNone/>
+            </a:pPr>
+            <a:r>
+              <a:rPr lang="en-US" sz="1300" b="1" dirty="0">
+                <a:solidFill>
+                  <a:srgbClr val="6B2A44"/>
+                </a:solidFill>
+                <a:latin typeface="Cambria" pitchFamily="34" charset="0"/>
+                <a:ea typeface="Cambria" pitchFamily="34" charset="-122"/>
+                <a:cs typeface="Cambria" pitchFamily="34" charset="-120"/>
+              </a:rPr>
+              <a:t>Read with caution</a:t>
+            </a:r>
+            <a:endParaRPr lang="en-US" sz="1300" dirty="0"/>
+          </a:p>
+        </p:txBody>
+      </p:sp>
+      <p:sp>
+        <p:nvSpPr>
+          <p:cNvPr id="7" name="Text 4"/>
+          <p:cNvSpPr txBox="1"/>
+          <p:nvPr/>
+        </p:nvSpPr>
+        <p:spPr>
+          <a:xfrm>
+            <a:off x="8503920" y="2560320"/>
+            <a:ext cx="2834640" cy="3017520"/>
+          </a:xfrm>
+          <a:prstGeom prst="rect">
+            <a:avLst/>
+          </a:prstGeom>
+          <a:noFill/>
+          <a:ln/>
+        </p:spPr>
+        <p:txBody>
+          <a:bodyPr wrap="square" lIns="0" tIns="0" rIns="0" bIns="0" rtlCol="0" anchor="t"/>
+          <a:lstStyle/>
+          <a:p>
+            <a:pPr algn="l" indent="0" marL="0">
+              <a:lnSpc>
+                <a:spcPct val="125000"/>
+              </a:lnSpc>
+              <a:buNone/>
+            </a:pPr>
+            <a:r>
+              <a:rPr lang="en-US" sz="1200" dirty="0">
+                <a:solidFill>
+                  <a:srgbClr val="3F3138"/>
+                </a:solidFill>
+                <a:latin typeface="Calibri" pitchFamily="34" charset="0"/>
+                <a:ea typeface="Calibri" pitchFamily="34" charset="-122"/>
+                <a:cs typeface="Calibri" pitchFamily="34" charset="-120"/>
+              </a:rPr>
+              <a:t>These ranges are indicative and based on the savings documented for our hydro-retainers.</a:t>
+            </a:r>
+            <a:endParaRPr lang="en-US" sz="1200" dirty="0"/>
+          </a:p>
+          <a:p>
+            <a:pPr algn="l" indent="0" marL="0">
+              <a:lnSpc>
+                <a:spcPct val="125000"/>
+              </a:lnSpc>
+              <a:buNone/>
+            </a:pPr>
+            <a:endParaRPr lang="en-US" sz="1200" dirty="0"/>
+          </a:p>
+          <a:p>
+            <a:pPr algn="l" indent="0" marL="0">
+              <a:lnSpc>
+                <a:spcPct val="125000"/>
+              </a:lnSpc>
+              <a:buNone/>
+            </a:pPr>
+            <a:r>
+              <a:rPr lang="en-US" sz="1200" dirty="0">
+                <a:solidFill>
+                  <a:srgbClr val="3F3138"/>
+                </a:solidFill>
+                <a:latin typeface="Calibri" pitchFamily="34" charset="0"/>
+                <a:ea typeface="Calibri" pitchFamily="34" charset="-122"/>
+                <a:cs typeface="Calibri" pitchFamily="34" charset="-120"/>
+              </a:rPr>
+              <a:t>The actual result depends on the soil, the climate and the crop. They give an order of magnitude and are in no case a guaranteed, contractual or absolute value.</a:t>
+            </a:r>
+            <a:endParaRPr lang="en-US" sz="1200" dirty="0"/>
+          </a:p>
+        </p:txBody>
+      </p:sp>
+      <p:sp>
+        <p:nvSpPr>
+          <p:cNvPr id="8" name="Text 5"/>
+          <p:cNvSpPr txBox="1"/>
+          <p:nvPr/>
+        </p:nvSpPr>
+        <p:spPr>
+          <a:xfrm>
+            <a:off x="502920" y="6382512"/>
+            <a:ext cx="8229600" cy="274320"/>
+          </a:xfrm>
+          <a:prstGeom prst="rect">
+            <a:avLst/>
+          </a:prstGeom>
+          <a:noFill/>
+          <a:ln/>
+        </p:spPr>
+        <p:txBody>
+          <a:bodyPr wrap="square" lIns="0" tIns="0" rIns="0" bIns="0" rtlCol="0" anchor="ctr"/>
+          <a:lstStyle/>
+          <a:p>
+            <a:pPr algn="l" indent="0" marL="0">
+              <a:buNone/>
+            </a:pPr>
+            <a:r>
+              <a:rPr lang="en-US" sz="950" dirty="0">
+                <a:solidFill>
+                  <a:srgbClr val="7C6B73">
+                    <a:alpha val="80000"/>
+                  </a:srgbClr>
+                </a:solidFill>
+                <a:latin typeface="Calibri" pitchFamily="34" charset="0"/>
+                <a:ea typeface="Calibri" pitchFamily="34" charset="-122"/>
+                <a:cs typeface="Calibri" pitchFamily="34" charset="-120"/>
+              </a:rPr>
+              <a:t>Green Solutions · South Africa market dossier</a:t>
+            </a:r>
+            <a:endParaRPr lang="en-US" sz="950" dirty="0"/>
+          </a:p>
+        </p:txBody>
+      </p:sp>
+      <p:sp>
+        <p:nvSpPr>
+          <p:cNvPr id="9" name="Text 6"/>
+          <p:cNvSpPr txBox="1"/>
+          <p:nvPr/>
+        </p:nvSpPr>
+        <p:spPr>
+          <a:xfrm>
+            <a:off x="11140135" y="6382512"/>
+            <a:ext cx="548640" cy="274320"/>
+          </a:xfrm>
+          <a:prstGeom prst="rect">
+            <a:avLst/>
+          </a:prstGeom>
+          <a:noFill/>
+          <a:ln/>
+        </p:spPr>
+        <p:txBody>
+          <a:bodyPr wrap="square" lIns="0" tIns="0" rIns="0" bIns="0" rtlCol="0" anchor="ctr"/>
+          <a:lstStyle/>
+          <a:p>
+            <a:pPr algn="r" indent="0" marL="0">
+              <a:buNone/>
+            </a:pPr>
+            <a:r>
+              <a:rPr lang="en-US" sz="950" dirty="0">
+                <a:solidFill>
+                  <a:srgbClr val="7C6B73">
+                    <a:alpha val="80000"/>
+                  </a:srgbClr>
+                </a:solidFill>
+                <a:latin typeface="Calibri" pitchFamily="34" charset="0"/>
+                <a:ea typeface="Calibri" pitchFamily="34" charset="-122"/>
+                <a:cs typeface="Calibri" pitchFamily="34" charset="-120"/>
+              </a:rPr>
+              <a:t>11</a:t>
+            </a:r>
+            <a:endParaRPr lang="en-US" sz="950" dirty="0"/>
+          </a:p>
+        </p:txBody>
+      </p:sp>
+    </p:spTree>
+  </p:cSld>
+  <p:clrMapOvr>
+    <a:masterClrMapping/>
+  </p:clrMapOvr>
+</p:sld>
+</file>
+
+<file path=ppt/slides/slide13.xml><?xml version="1.0" encoding="utf-8"?>
+<p:sld xmlns:a="http://schemas.openxmlformats.org/drawingml/2006/main" xmlns:r="http://schemas.openxmlformats.org/officeDocument/2006/relationships" xmlns:p="http://schemas.openxmlformats.org/presentationml/2006/main">
+  <p:cSld name="Slide 13">
+    <p:bg>
+      <p:bgPr>
+        <a:solidFill>
+          <a:srgbClr val="FCFAFA"/>
+        </a:solidFill>
+      </p:bgPr>
+    </p:bg>
+    <p:spTree>
+      <p:nvGrpSpPr>
+        <p:cNvPr id="1" name=""/>
+        <p:cNvGrpSpPr/>
+        <p:nvPr/>
+      </p:nvGrpSpPr>
+      <p:grpSpPr>
+        <a:xfrm>
+          <a:off x="0" y="0"/>
+          <a:ext cx="0" cy="0"/>
+          <a:chOff x="0" y="0"/>
+          <a:chExt cx="0" cy="0"/>
+        </a:xfrm>
+      </p:grpSpPr>
+      <p:sp>
+        <p:nvSpPr>
+          <p:cNvPr id="2" name="Text 0"/>
+          <p:cNvSpPr txBox="1"/>
+          <p:nvPr/>
+        </p:nvSpPr>
+        <p:spPr>
+          <a:xfrm>
+            <a:off x="594360" y="411480"/>
+            <a:ext cx="10515600" cy="274320"/>
+          </a:xfrm>
+          <a:prstGeom prst="rect">
+            <a:avLst/>
+          </a:prstGeom>
+          <a:noFill/>
+          <a:ln/>
+        </p:spPr>
+        <p:txBody>
+          <a:bodyPr wrap="square" lIns="0" tIns="0" rIns="0" bIns="0" rtlCol="0" anchor="ctr"/>
+          <a:lstStyle/>
+          <a:p>
+            <a:pPr algn="l" indent="0" marL="0">
+              <a:buNone/>
+            </a:pPr>
+            <a:r>
+              <a:rPr lang="en-US" sz="1150" b="1" spc="200" kern="0" dirty="0">
+                <a:solidFill>
+                  <a:srgbClr val="C9A227"/>
+                </a:solidFill>
+                <a:latin typeface="Calibri" pitchFamily="34" charset="0"/>
+                <a:ea typeface="Calibri" pitchFamily="34" charset="-122"/>
+                <a:cs typeface="Calibri" pitchFamily="34" charset="-120"/>
+              </a:rPr>
+              <a:t>THREE PRIORITY AREAS</a:t>
+            </a:r>
+            <a:endParaRPr lang="en-US" sz="1150" dirty="0"/>
+          </a:p>
+        </p:txBody>
+      </p:sp>
+      <p:sp>
+        <p:nvSpPr>
+          <p:cNvPr id="3" name="Text 1"/>
+          <p:cNvSpPr txBox="1"/>
+          <p:nvPr/>
+        </p:nvSpPr>
+        <p:spPr>
+          <a:xfrm>
+            <a:off x="594360" y="731520"/>
+            <a:ext cx="10881360" cy="731520"/>
+          </a:xfrm>
+          <a:prstGeom prst="rect">
+            <a:avLst/>
+          </a:prstGeom>
+          <a:noFill/>
+          <a:ln/>
+        </p:spPr>
+        <p:txBody>
+          <a:bodyPr wrap="square" lIns="0" tIns="0" rIns="0" bIns="0" rtlCol="0" anchor="ctr"/>
+          <a:lstStyle/>
+          <a:p>
+            <a:pPr algn="l" indent="0" marL="0">
+              <a:buNone/>
+            </a:pPr>
+            <a:r>
+              <a:rPr lang="en-US" sz="3000" b="1" dirty="0">
+                <a:solidFill>
+                  <a:srgbClr val="3F162A"/>
+                </a:solidFill>
+                <a:latin typeface="Cambria" pitchFamily="34" charset="0"/>
+                <a:ea typeface="Cambria" pitchFamily="34" charset="-122"/>
+                <a:cs typeface="Cambria" pitchFamily="34" charset="-120"/>
+              </a:rPr>
+              <a:t>Where to run the first trials</a:t>
+            </a:r>
+            <a:endParaRPr lang="en-US" sz="3000" dirty="0"/>
+          </a:p>
+        </p:txBody>
+      </p:sp>
+      <p:sp>
+        <p:nvSpPr>
+          <p:cNvPr id="4" name="Shape 2"/>
+          <p:cNvSpPr/>
+          <p:nvPr/>
+        </p:nvSpPr>
+        <p:spPr>
+          <a:xfrm>
+            <a:off x="594360" y="1783080"/>
+            <a:ext cx="3472586" cy="4069080"/>
+          </a:xfrm>
+          <a:prstGeom prst="roundRect">
+            <a:avLst>
+              <a:gd name="adj" fmla="val 2633"/>
+            </a:avLst>
+          </a:prstGeom>
+          <a:solidFill>
+            <a:srgbClr val="F5EFF1"/>
+          </a:solidFill>
+          <a:ln w="9525">
+            <a:solidFill>
+              <a:srgbClr val="E5D9DE"/>
+            </a:solidFill>
+            <a:prstDash val="solid"/>
+          </a:ln>
+        </p:spPr>
+      </p:sp>
+      <p:pic>
+        <p:nvPicPr>
+          <p:cNvPr id="5" name="Image 0" descr="preencoded.png">    </p:cNvPr>
+          <p:cNvPicPr>
+            <a:picLocks noChangeAspect="1"/>
+          </p:cNvPicPr>
+          <p:nvPr/>
+        </p:nvPicPr>
+        <p:blipFill>
+          <a:blip r:embed="rId1"/>
+          <a:stretch>
+            <a:fillRect/>
+          </a:stretch>
+        </p:blipFill>
+        <p:spPr>
+          <a:xfrm>
+            <a:off x="594360" y="1783080"/>
+            <a:ext cx="3472586" cy="1691640"/>
+          </a:xfrm>
+          <a:prstGeom prst="rect">
+            <a:avLst/>
+          </a:prstGeom>
+        </p:spPr>
+      </p:pic>
+      <p:sp>
+        <p:nvSpPr>
+          <p:cNvPr id="6" name="Text 3"/>
+          <p:cNvSpPr txBox="1"/>
+          <p:nvPr/>
+        </p:nvSpPr>
+        <p:spPr>
+          <a:xfrm>
+            <a:off x="795528" y="3639312"/>
+            <a:ext cx="3070250" cy="384048"/>
+          </a:xfrm>
+          <a:prstGeom prst="rect">
+            <a:avLst/>
+          </a:prstGeom>
+          <a:noFill/>
+          <a:ln/>
+        </p:spPr>
+        <p:txBody>
+          <a:bodyPr wrap="square" lIns="0" tIns="0" rIns="0" bIns="0" rtlCol="0" anchor="ctr"/>
+          <a:lstStyle/>
+          <a:p>
+            <a:pPr algn="l" indent="0" marL="0">
+              <a:buNone/>
+            </a:pPr>
+            <a:r>
+              <a:rPr lang="en-US" sz="1500" b="1" dirty="0">
+                <a:solidFill>
+                  <a:srgbClr val="6B2A44"/>
+                </a:solidFill>
+                <a:latin typeface="Cambria" pitchFamily="34" charset="0"/>
+                <a:ea typeface="Cambria" pitchFamily="34" charset="-122"/>
+                <a:cs typeface="Cambria" pitchFamily="34" charset="-120"/>
+              </a:rPr>
+              <a:t>Western Cape</a:t>
+            </a:r>
+            <a:endParaRPr lang="en-US" sz="1500" dirty="0"/>
+          </a:p>
+        </p:txBody>
+      </p:sp>
+      <p:sp>
+        <p:nvSpPr>
+          <p:cNvPr id="7" name="Text 4"/>
+          <p:cNvSpPr txBox="1"/>
+          <p:nvPr/>
+        </p:nvSpPr>
+        <p:spPr>
+          <a:xfrm>
+            <a:off x="795528" y="4041648"/>
+            <a:ext cx="3070250" cy="329184"/>
+          </a:xfrm>
+          <a:prstGeom prst="rect">
+            <a:avLst/>
+          </a:prstGeom>
+          <a:noFill/>
+          <a:ln/>
+        </p:spPr>
+        <p:txBody>
+          <a:bodyPr wrap="square" lIns="0" tIns="0" rIns="0" bIns="0" rtlCol="0" anchor="ctr"/>
+          <a:lstStyle/>
+          <a:p>
+            <a:pPr algn="l" indent="0" marL="0">
+              <a:buNone/>
+            </a:pPr>
+            <a:r>
+              <a:rPr lang="en-US" sz="1250" b="1" dirty="0">
+                <a:solidFill>
+                  <a:srgbClr val="8F6D0F"/>
+                </a:solidFill>
+                <a:latin typeface="Calibri" pitchFamily="34" charset="0"/>
+                <a:ea typeface="Calibri" pitchFamily="34" charset="-122"/>
+                <a:cs typeface="Calibri" pitchFamily="34" charset="-120"/>
+              </a:rPr>
+              <a:t>≈ 90,000 ha of vineyard</a:t>
+            </a:r>
+            <a:endParaRPr lang="en-US" sz="1250" dirty="0"/>
+          </a:p>
+        </p:txBody>
+      </p:sp>
+      <p:sp>
+        <p:nvSpPr>
+          <p:cNvPr id="8" name="Text 5"/>
+          <p:cNvSpPr txBox="1"/>
+          <p:nvPr/>
+        </p:nvSpPr>
+        <p:spPr>
+          <a:xfrm>
+            <a:off x="795528" y="4407408"/>
+            <a:ext cx="3070250" cy="1280160"/>
+          </a:xfrm>
+          <a:prstGeom prst="rect">
+            <a:avLst/>
+          </a:prstGeom>
+          <a:noFill/>
+          <a:ln/>
+        </p:spPr>
+        <p:txBody>
+          <a:bodyPr wrap="square" lIns="0" tIns="0" rIns="0" bIns="0" rtlCol="0" anchor="t"/>
+          <a:lstStyle/>
+          <a:p>
+            <a:pPr algn="l" marL="342900" indent="-342900">
+              <a:lnSpc>
+                <a:spcPct val="116000"/>
+              </a:lnSpc>
+              <a:spcAft>
+                <a:spcPts val="700"/>
+              </a:spcAft>
+              <a:buSzPct val="100000"/>
+              <a:buChar char="•"/>
+            </a:pPr>
+            <a:r>
+              <a:rPr lang="en-US" sz="1150" dirty="0">
+                <a:solidFill>
+                  <a:srgbClr val="3F3138"/>
+                </a:solidFill>
+                <a:latin typeface="Calibri" pitchFamily="34" charset="0"/>
+                <a:ea typeface="Calibri" pitchFamily="34" charset="-122"/>
+                <a:cs typeface="Calibri" pitchFamily="34" charset="-120"/>
+              </a:rPr>
+              <a:t>Nearly all of the national vineyard, plus the deciduous fruit of the Breede and Olifants valleys.</a:t>
+            </a:r>
+            <a:endParaRPr lang="en-US" sz="1150" dirty="0"/>
+          </a:p>
+          <a:p>
+            <a:pPr algn="l" marL="342900" indent="-342900">
+              <a:lnSpc>
+                <a:spcPct val="116000"/>
+              </a:lnSpc>
+              <a:spcAft>
+                <a:spcPts val="700"/>
+              </a:spcAft>
+              <a:buSzPct val="100000"/>
+              <a:buChar char="•"/>
+            </a:pPr>
+            <a:r>
+              <a:rPr lang="en-US" sz="1150" dirty="0">
+                <a:solidFill>
+                  <a:srgbClr val="3F3138"/>
+                </a:solidFill>
+                <a:latin typeface="Calibri" pitchFamily="34" charset="0"/>
+                <a:ea typeface="Calibri" pitchFamily="34" charset="-122"/>
+                <a:cs typeface="Calibri" pitchFamily="34" charset="-120"/>
+              </a:rPr>
+              <a:t>Winter rainfall of 250 to 400 mm inland, and the 2015-2018 quota cuts are a live memory.</a:t>
+            </a:r>
+            <a:endParaRPr lang="en-US" sz="1150" dirty="0"/>
+          </a:p>
+          <a:p>
+            <a:pPr algn="l" marL="342900" indent="-342900">
+              <a:lnSpc>
+                <a:spcPct val="116000"/>
+              </a:lnSpc>
+              <a:spcAft>
+                <a:spcPts val="700"/>
+              </a:spcAft>
+              <a:buSzPct val="100000"/>
+              <a:buChar char="•"/>
+            </a:pPr>
+            <a:r>
+              <a:rPr lang="en-US" sz="1150" dirty="0">
+                <a:solidFill>
+                  <a:srgbClr val="3F3138"/>
+                </a:solidFill>
+                <a:latin typeface="Calibri" pitchFamily="34" charset="0"/>
+                <a:ea typeface="Calibri" pitchFamily="34" charset="-122"/>
+                <a:cs typeface="Calibri" pitchFamily="34" charset="-120"/>
+              </a:rPr>
+              <a:t>Export blocks already on drip or micro-sprinkler, with buyers asking for organic certification.</a:t>
+            </a:r>
+            <a:endParaRPr lang="en-US" sz="1150" dirty="0"/>
+          </a:p>
+        </p:txBody>
+      </p:sp>
+      <p:sp>
+        <p:nvSpPr>
+          <p:cNvPr id="9" name="Shape 6"/>
+          <p:cNvSpPr/>
+          <p:nvPr/>
+        </p:nvSpPr>
+        <p:spPr>
+          <a:xfrm>
+            <a:off x="4359554" y="1783080"/>
+            <a:ext cx="3472586" cy="4069080"/>
+          </a:xfrm>
+          <a:prstGeom prst="roundRect">
+            <a:avLst>
+              <a:gd name="adj" fmla="val 2633"/>
+            </a:avLst>
+          </a:prstGeom>
+          <a:solidFill>
+            <a:srgbClr val="F5EFF1"/>
+          </a:solidFill>
+          <a:ln w="9525">
+            <a:solidFill>
+              <a:srgbClr val="E5D9DE"/>
+            </a:solidFill>
+            <a:prstDash val="solid"/>
+          </a:ln>
+        </p:spPr>
+      </p:sp>
+      <p:pic>
+        <p:nvPicPr>
+          <p:cNvPr id="10" name="Image 1" descr="preencoded.png">    </p:cNvPr>
+          <p:cNvPicPr>
+            <a:picLocks noChangeAspect="1"/>
+          </p:cNvPicPr>
+          <p:nvPr/>
+        </p:nvPicPr>
+        <p:blipFill>
+          <a:blip r:embed="rId2"/>
+          <a:stretch>
+            <a:fillRect/>
+          </a:stretch>
+        </p:blipFill>
+        <p:spPr>
+          <a:xfrm>
+            <a:off x="4359554" y="1783080"/>
+            <a:ext cx="3472586" cy="1691640"/>
+          </a:xfrm>
+          <a:prstGeom prst="rect">
+            <a:avLst/>
+          </a:prstGeom>
+        </p:spPr>
+      </p:pic>
+      <p:sp>
+        <p:nvSpPr>
+          <p:cNvPr id="11" name="Text 7"/>
+          <p:cNvSpPr txBox="1"/>
+          <p:nvPr/>
+        </p:nvSpPr>
+        <p:spPr>
+          <a:xfrm>
+            <a:off x="4560722" y="3639312"/>
+            <a:ext cx="3070250" cy="384048"/>
+          </a:xfrm>
+          <a:prstGeom prst="rect">
+            <a:avLst/>
+          </a:prstGeom>
+          <a:noFill/>
+          <a:ln/>
+        </p:spPr>
+        <p:txBody>
+          <a:bodyPr wrap="square" lIns="0" tIns="0" rIns="0" bIns="0" rtlCol="0" anchor="ctr"/>
+          <a:lstStyle/>
+          <a:p>
+            <a:pPr algn="l" indent="0" marL="0">
+              <a:buNone/>
+            </a:pPr>
+            <a:r>
+              <a:rPr lang="en-US" sz="1500" b="1" dirty="0">
+                <a:solidFill>
+                  <a:srgbClr val="6B2A44"/>
+                </a:solidFill>
+                <a:latin typeface="Cambria" pitchFamily="34" charset="0"/>
+                <a:ea typeface="Cambria" pitchFamily="34" charset="-122"/>
+                <a:cs typeface="Cambria" pitchFamily="34" charset="-120"/>
+              </a:rPr>
+              <a:t>Limpopo</a:t>
+            </a:r>
+            <a:endParaRPr lang="en-US" sz="1500" dirty="0"/>
+          </a:p>
+        </p:txBody>
+      </p:sp>
+      <p:sp>
+        <p:nvSpPr>
+          <p:cNvPr id="12" name="Text 8"/>
+          <p:cNvSpPr txBox="1"/>
+          <p:nvPr/>
+        </p:nvSpPr>
+        <p:spPr>
+          <a:xfrm>
+            <a:off x="4560722" y="4041648"/>
+            <a:ext cx="3070250" cy="329184"/>
+          </a:xfrm>
+          <a:prstGeom prst="rect">
+            <a:avLst/>
+          </a:prstGeom>
+          <a:noFill/>
+          <a:ln/>
+        </p:spPr>
+        <p:txBody>
+          <a:bodyPr wrap="square" lIns="0" tIns="0" rIns="0" bIns="0" rtlCol="0" anchor="ctr"/>
+          <a:lstStyle/>
+          <a:p>
+            <a:pPr algn="l" indent="0" marL="0">
+              <a:buNone/>
+            </a:pPr>
+            <a:r>
+              <a:rPr lang="en-US" sz="1250" b="1" dirty="0">
+                <a:solidFill>
+                  <a:srgbClr val="8F6D0F"/>
+                </a:solidFill>
+                <a:latin typeface="Calibri" pitchFamily="34" charset="0"/>
+                <a:ea typeface="Calibri" pitchFamily="34" charset="-122"/>
+                <a:cs typeface="Calibri" pitchFamily="34" charset="-120"/>
+              </a:rPr>
+              <a:t>≈ 450 mm of rain a year</a:t>
+            </a:r>
+            <a:endParaRPr lang="en-US" sz="1250" dirty="0"/>
+          </a:p>
+        </p:txBody>
+      </p:sp>
+      <p:sp>
+        <p:nvSpPr>
+          <p:cNvPr id="13" name="Text 9"/>
+          <p:cNvSpPr txBox="1"/>
+          <p:nvPr/>
+        </p:nvSpPr>
+        <p:spPr>
+          <a:xfrm>
+            <a:off x="4560722" y="4407408"/>
+            <a:ext cx="3070250" cy="1280160"/>
+          </a:xfrm>
+          <a:prstGeom prst="rect">
+            <a:avLst/>
+          </a:prstGeom>
+          <a:noFill/>
+          <a:ln/>
+        </p:spPr>
+        <p:txBody>
+          <a:bodyPr wrap="square" lIns="0" tIns="0" rIns="0" bIns="0" rtlCol="0" anchor="t"/>
+          <a:lstStyle/>
+          <a:p>
+            <a:pPr algn="l" marL="342900" indent="-342900">
+              <a:lnSpc>
+                <a:spcPct val="116000"/>
+              </a:lnSpc>
+              <a:spcAft>
+                <a:spcPts val="700"/>
+              </a:spcAft>
+              <a:buSzPct val="100000"/>
+              <a:buChar char="•"/>
+            </a:pPr>
+            <a:r>
+              <a:rPr lang="en-US" sz="1150" dirty="0">
+                <a:solidFill>
+                  <a:srgbClr val="3F3138"/>
+                </a:solidFill>
+                <a:latin typeface="Calibri" pitchFamily="34" charset="0"/>
+                <a:ea typeface="Calibri" pitchFamily="34" charset="-122"/>
+                <a:cs typeface="Calibri" pitchFamily="34" charset="-120"/>
+              </a:rPr>
+              <a:t>The leading citrus province, with macadamia and avocado on sandy, low-retention soils.</a:t>
+            </a:r>
+            <a:endParaRPr lang="en-US" sz="1150" dirty="0"/>
+          </a:p>
+          <a:p>
+            <a:pPr algn="l" marL="342900" indent="-342900">
+              <a:lnSpc>
+                <a:spcPct val="116000"/>
+              </a:lnSpc>
+              <a:spcAft>
+                <a:spcPts val="700"/>
+              </a:spcAft>
+              <a:buSzPct val="100000"/>
+              <a:buChar char="•"/>
+            </a:pPr>
+            <a:r>
+              <a:rPr lang="en-US" sz="1150" dirty="0">
+                <a:solidFill>
+                  <a:srgbClr val="3F3138"/>
+                </a:solidFill>
+                <a:latin typeface="Calibri" pitchFamily="34" charset="0"/>
+                <a:ea typeface="Calibri" pitchFamily="34" charset="-122"/>
+                <a:cs typeface="Calibri" pitchFamily="34" charset="-120"/>
+              </a:rPr>
+              <a:t>High summer evaporation and a long dry winter: irrigation carries the whole season.</a:t>
+            </a:r>
+            <a:endParaRPr lang="en-US" sz="1150" dirty="0"/>
+          </a:p>
+          <a:p>
+            <a:pPr algn="l" marL="342900" indent="-342900">
+              <a:lnSpc>
+                <a:spcPct val="116000"/>
+              </a:lnSpc>
+              <a:spcAft>
+                <a:spcPts val="700"/>
+              </a:spcAft>
+              <a:buSzPct val="100000"/>
+              <a:buChar char="•"/>
+            </a:pPr>
+            <a:r>
+              <a:rPr lang="en-US" sz="1150" dirty="0">
+                <a:solidFill>
+                  <a:srgbClr val="3F3138"/>
+                </a:solidFill>
+                <a:latin typeface="Calibri" pitchFamily="34" charset="0"/>
+                <a:ea typeface="Calibri" pitchFamily="34" charset="-122"/>
+                <a:cs typeface="Calibri" pitchFamily="34" charset="-120"/>
+              </a:rPr>
+              <a:t>Orchards planted for twenty years or more — planting is exactly when the retainer goes in.</a:t>
+            </a:r>
+            <a:endParaRPr lang="en-US" sz="1150" dirty="0"/>
+          </a:p>
+        </p:txBody>
+      </p:sp>
+      <p:sp>
+        <p:nvSpPr>
+          <p:cNvPr id="14" name="Shape 10"/>
+          <p:cNvSpPr/>
+          <p:nvPr/>
+        </p:nvSpPr>
+        <p:spPr>
+          <a:xfrm>
+            <a:off x="8124749" y="1783080"/>
+            <a:ext cx="3472586" cy="4069080"/>
+          </a:xfrm>
+          <a:prstGeom prst="roundRect">
+            <a:avLst>
+              <a:gd name="adj" fmla="val 2633"/>
+            </a:avLst>
+          </a:prstGeom>
+          <a:solidFill>
+            <a:srgbClr val="F5EFF1"/>
+          </a:solidFill>
+          <a:ln w="9525">
+            <a:solidFill>
+              <a:srgbClr val="E5D9DE"/>
+            </a:solidFill>
+            <a:prstDash val="solid"/>
+          </a:ln>
+        </p:spPr>
+      </p:sp>
+      <p:pic>
+        <p:nvPicPr>
+          <p:cNvPr id="15" name="Image 2" descr="preencoded.png">    </p:cNvPr>
+          <p:cNvPicPr>
+            <a:picLocks noChangeAspect="1"/>
+          </p:cNvPicPr>
+          <p:nvPr/>
+        </p:nvPicPr>
+        <p:blipFill>
+          <a:blip r:embed="rId3"/>
+          <a:stretch>
+            <a:fillRect/>
+          </a:stretch>
+        </p:blipFill>
+        <p:spPr>
+          <a:xfrm>
+            <a:off x="8124749" y="1783080"/>
+            <a:ext cx="3472586" cy="1691640"/>
+          </a:xfrm>
+          <a:prstGeom prst="rect">
+            <a:avLst/>
+          </a:prstGeom>
+        </p:spPr>
+      </p:pic>
+      <p:sp>
+        <p:nvSpPr>
+          <p:cNvPr id="16" name="Text 11"/>
+          <p:cNvSpPr txBox="1"/>
+          <p:nvPr/>
+        </p:nvSpPr>
+        <p:spPr>
+          <a:xfrm>
+            <a:off x="8325917" y="3639312"/>
+            <a:ext cx="3070250" cy="384048"/>
+          </a:xfrm>
+          <a:prstGeom prst="rect">
+            <a:avLst/>
+          </a:prstGeom>
+          <a:noFill/>
+          <a:ln/>
+        </p:spPr>
+        <p:txBody>
+          <a:bodyPr wrap="square" lIns="0" tIns="0" rIns="0" bIns="0" rtlCol="0" anchor="ctr"/>
+          <a:lstStyle/>
+          <a:p>
+            <a:pPr algn="l" indent="0" marL="0">
+              <a:buNone/>
+            </a:pPr>
+            <a:r>
+              <a:rPr lang="en-US" sz="1500" b="1" dirty="0">
+                <a:solidFill>
+                  <a:srgbClr val="6B2A44"/>
+                </a:solidFill>
+                <a:latin typeface="Cambria" pitchFamily="34" charset="0"/>
+                <a:ea typeface="Cambria" pitchFamily="34" charset="-122"/>
+                <a:cs typeface="Cambria" pitchFamily="34" charset="-120"/>
+              </a:rPr>
+              <a:t>KwaZulu-Natal</a:t>
+            </a:r>
+            <a:endParaRPr lang="en-US" sz="1500" dirty="0"/>
+          </a:p>
+        </p:txBody>
+      </p:sp>
+      <p:sp>
+        <p:nvSpPr>
+          <p:cNvPr id="17" name="Text 12"/>
+          <p:cNvSpPr txBox="1"/>
+          <p:nvPr/>
+        </p:nvSpPr>
+        <p:spPr>
+          <a:xfrm>
+            <a:off x="8325917" y="4041648"/>
+            <a:ext cx="3070250" cy="329184"/>
+          </a:xfrm>
+          <a:prstGeom prst="rect">
+            <a:avLst/>
+          </a:prstGeom>
+          <a:noFill/>
+          <a:ln/>
+        </p:spPr>
+        <p:txBody>
+          <a:bodyPr wrap="square" lIns="0" tIns="0" rIns="0" bIns="0" rtlCol="0" anchor="ctr"/>
+          <a:lstStyle/>
+          <a:p>
+            <a:pPr algn="l" indent="0" marL="0">
+              <a:buNone/>
+            </a:pPr>
+            <a:r>
+              <a:rPr lang="en-US" sz="1250" b="1" dirty="0">
+                <a:solidFill>
+                  <a:srgbClr val="8F6D0F"/>
+                </a:solidFill>
+                <a:latin typeface="Calibri" pitchFamily="34" charset="0"/>
+                <a:ea typeface="Calibri" pitchFamily="34" charset="-122"/>
+                <a:cs typeface="Calibri" pitchFamily="34" charset="-120"/>
+              </a:rPr>
+              <a:t>≈ 300,000 ha of cane</a:t>
+            </a:r>
+            <a:endParaRPr lang="en-US" sz="1250" dirty="0"/>
+          </a:p>
+        </p:txBody>
+      </p:sp>
+      <p:sp>
+        <p:nvSpPr>
+          <p:cNvPr id="18" name="Text 13"/>
+          <p:cNvSpPr txBox="1"/>
+          <p:nvPr/>
+        </p:nvSpPr>
+        <p:spPr>
+          <a:xfrm>
+            <a:off x="8325917" y="4407408"/>
+            <a:ext cx="3070250" cy="1280160"/>
+          </a:xfrm>
+          <a:prstGeom prst="rect">
+            <a:avLst/>
+          </a:prstGeom>
+          <a:noFill/>
+          <a:ln/>
+        </p:spPr>
+        <p:txBody>
+          <a:bodyPr wrap="square" lIns="0" tIns="0" rIns="0" bIns="0" rtlCol="0" anchor="t"/>
+          <a:lstStyle/>
+          <a:p>
+            <a:pPr algn="l" marL="342900" indent="-342900">
+              <a:lnSpc>
+                <a:spcPct val="116000"/>
+              </a:lnSpc>
+              <a:spcAft>
+                <a:spcPts val="700"/>
+              </a:spcAft>
+              <a:buSzPct val="100000"/>
+              <a:buChar char="•"/>
+            </a:pPr>
+            <a:r>
+              <a:rPr lang="en-US" sz="1150" dirty="0">
+                <a:solidFill>
+                  <a:srgbClr val="3F3138"/>
+                </a:solidFill>
+                <a:latin typeface="Calibri" pitchFamily="34" charset="0"/>
+                <a:ea typeface="Calibri" pitchFamily="34" charset="-122"/>
+                <a:cs typeface="Calibri" pitchFamily="34" charset="-120"/>
+              </a:rPr>
+              <a:t>A sugar belt from the North Coast to Zululand, carrying most of a national crop of roughly 18 million tonnes.</a:t>
+            </a:r>
+            <a:endParaRPr lang="en-US" sz="1150" dirty="0"/>
+          </a:p>
+          <a:p>
+            <a:pPr algn="l" marL="342900" indent="-342900">
+              <a:lnSpc>
+                <a:spcPct val="116000"/>
+              </a:lnSpc>
+              <a:spcAft>
+                <a:spcPts val="700"/>
+              </a:spcAft>
+              <a:buSzPct val="100000"/>
+              <a:buChar char="•"/>
+            </a:pPr>
+            <a:r>
+              <a:rPr lang="en-US" sz="1150" dirty="0">
+                <a:solidFill>
+                  <a:srgbClr val="3F3138"/>
+                </a:solidFill>
+                <a:latin typeface="Calibri" pitchFamily="34" charset="0"/>
+                <a:ea typeface="Calibri" pitchFamily="34" charset="-122"/>
+                <a:cs typeface="Calibri" pitchFamily="34" charset="-120"/>
+              </a:rPr>
+              <a:t>Largely rain-fed: the gain is in holding the rain that falls, not in trimming a dose.</a:t>
+            </a:r>
+            <a:endParaRPr lang="en-US" sz="1150" dirty="0"/>
+          </a:p>
+          <a:p>
+            <a:pPr algn="l" marL="342900" indent="-342900">
+              <a:lnSpc>
+                <a:spcPct val="116000"/>
+              </a:lnSpc>
+              <a:spcAft>
+                <a:spcPts val="700"/>
+              </a:spcAft>
+              <a:buSzPct val="100000"/>
+              <a:buChar char="•"/>
+            </a:pPr>
+            <a:r>
+              <a:rPr lang="en-US" sz="1150" dirty="0">
+                <a:solidFill>
+                  <a:srgbClr val="3F3138"/>
+                </a:solidFill>
+                <a:latin typeface="Calibri" pitchFamily="34" charset="0"/>
+                <a:ea typeface="Calibri" pitchFamily="34" charset="-122"/>
+                <a:cs typeface="Calibri" pitchFamily="34" charset="-120"/>
+              </a:rPr>
+              <a:t>Around twenty thousand growers organised around mills — one route to a coordinated trial.</a:t>
+            </a:r>
+            <a:endParaRPr lang="en-US" sz="1150" dirty="0"/>
+          </a:p>
+        </p:txBody>
+      </p:sp>
+      <p:sp>
+        <p:nvSpPr>
+          <p:cNvPr id="19" name="Text 14"/>
+          <p:cNvSpPr txBox="1"/>
+          <p:nvPr/>
+        </p:nvSpPr>
+        <p:spPr>
+          <a:xfrm>
+            <a:off x="502920" y="6382512"/>
+            <a:ext cx="8229600" cy="274320"/>
+          </a:xfrm>
+          <a:prstGeom prst="rect">
+            <a:avLst/>
+          </a:prstGeom>
+          <a:noFill/>
+          <a:ln/>
+        </p:spPr>
+        <p:txBody>
+          <a:bodyPr wrap="square" lIns="0" tIns="0" rIns="0" bIns="0" rtlCol="0" anchor="ctr"/>
+          <a:lstStyle/>
+          <a:p>
+            <a:pPr algn="l" indent="0" marL="0">
+              <a:buNone/>
+            </a:pPr>
+            <a:r>
+              <a:rPr lang="en-US" sz="950" dirty="0">
+                <a:solidFill>
+                  <a:srgbClr val="7C6B73">
+                    <a:alpha val="80000"/>
+                  </a:srgbClr>
+                </a:solidFill>
+                <a:latin typeface="Calibri" pitchFamily="34" charset="0"/>
+                <a:ea typeface="Calibri" pitchFamily="34" charset="-122"/>
+                <a:cs typeface="Calibri" pitchFamily="34" charset="-120"/>
+              </a:rPr>
+              <a:t>Green Solutions · South Africa market dossier</a:t>
+            </a:r>
+            <a:endParaRPr lang="en-US" sz="950" dirty="0"/>
+          </a:p>
+        </p:txBody>
+      </p:sp>
+      <p:sp>
+        <p:nvSpPr>
+          <p:cNvPr id="20" name="Text 15"/>
+          <p:cNvSpPr txBox="1"/>
+          <p:nvPr/>
+        </p:nvSpPr>
+        <p:spPr>
+          <a:xfrm>
+            <a:off x="11140135" y="6382512"/>
+            <a:ext cx="548640" cy="274320"/>
+          </a:xfrm>
+          <a:prstGeom prst="rect">
+            <a:avLst/>
+          </a:prstGeom>
+          <a:noFill/>
+          <a:ln/>
+        </p:spPr>
+        <p:txBody>
+          <a:bodyPr wrap="square" lIns="0" tIns="0" rIns="0" bIns="0" rtlCol="0" anchor="ctr"/>
+          <a:lstStyle/>
+          <a:p>
+            <a:pPr algn="r" indent="0" marL="0">
+              <a:buNone/>
+            </a:pPr>
+            <a:r>
+              <a:rPr lang="en-US" sz="950" dirty="0">
+                <a:solidFill>
+                  <a:srgbClr val="7C6B73">
+                    <a:alpha val="80000"/>
+                  </a:srgbClr>
+                </a:solidFill>
+                <a:latin typeface="Calibri" pitchFamily="34" charset="0"/>
+                <a:ea typeface="Calibri" pitchFamily="34" charset="-122"/>
+                <a:cs typeface="Calibri" pitchFamily="34" charset="-120"/>
+              </a:rPr>
+              <a:t>12</a:t>
+            </a:r>
+            <a:endParaRPr lang="en-US" sz="950" dirty="0"/>
+          </a:p>
+        </p:txBody>
+      </p:sp>
+    </p:spTree>
+  </p:cSld>
+  <p:clrMapOvr>
+    <a:masterClrMapping/>
+  </p:clrMapOvr>
+</p:sld>
+</file>
+
+<file path=ppt/slides/slide14.xml><?xml version="1.0" encoding="utf-8"?>
+<p:sld xmlns:a="http://schemas.openxmlformats.org/drawingml/2006/main" xmlns:r="http://schemas.openxmlformats.org/officeDocument/2006/relationships" xmlns:p="http://schemas.openxmlformats.org/presentationml/2006/main">
+  <p:cSld name="Slide 14">
+    <p:bg>
+      <p:bgPr>
+        <a:solidFill>
+          <a:srgbClr val="FCFAFA"/>
+        </a:solidFill>
+      </p:bgPr>
+    </p:bg>
+    <p:spTree>
+      <p:nvGrpSpPr>
+        <p:cNvPr id="1" name=""/>
+        <p:cNvGrpSpPr/>
+        <p:nvPr/>
+      </p:nvGrpSpPr>
+      <p:grpSpPr>
+        <a:xfrm>
+          <a:off x="0" y="0"/>
+          <a:ext cx="0" cy="0"/>
+          <a:chOff x="0" y="0"/>
+          <a:chExt cx="0" cy="0"/>
+        </a:xfrm>
+      </p:grpSpPr>
+      <p:sp>
+        <p:nvSpPr>
+          <p:cNvPr id="2" name="Text 0"/>
+          <p:cNvSpPr txBox="1"/>
+          <p:nvPr/>
+        </p:nvSpPr>
+        <p:spPr>
+          <a:xfrm>
+            <a:off x="594360" y="411480"/>
+            <a:ext cx="10515600" cy="274320"/>
+          </a:xfrm>
+          <a:prstGeom prst="rect">
+            <a:avLst/>
+          </a:prstGeom>
+          <a:noFill/>
+          <a:ln/>
+        </p:spPr>
+        <p:txBody>
+          <a:bodyPr wrap="square" lIns="0" tIns="0" rIns="0" bIns="0" rtlCol="0" anchor="ctr"/>
+          <a:lstStyle/>
+          <a:p>
+            <a:pPr algn="l" indent="0" marL="0">
+              <a:buNone/>
+            </a:pPr>
+            <a:r>
+              <a:rPr lang="en-US" sz="1150" b="1" spc="200" kern="0" dirty="0">
+                <a:solidFill>
+                  <a:srgbClr val="C9A227"/>
+                </a:solidFill>
+                <a:latin typeface="Calibri" pitchFamily="34" charset="0"/>
+                <a:ea typeface="Calibri" pitchFamily="34" charset="-122"/>
+                <a:cs typeface="Calibri" pitchFamily="34" charset="-120"/>
+              </a:rPr>
+              <a:t>HOW WE WORK</a:t>
+            </a:r>
+            <a:endParaRPr lang="en-US" sz="1150" dirty="0"/>
+          </a:p>
+        </p:txBody>
+      </p:sp>
+      <p:sp>
+        <p:nvSpPr>
+          <p:cNvPr id="3" name="Text 1"/>
+          <p:cNvSpPr txBox="1"/>
+          <p:nvPr/>
+        </p:nvSpPr>
+        <p:spPr>
+          <a:xfrm>
+            <a:off x="594360" y="731520"/>
+            <a:ext cx="10881360" cy="731520"/>
+          </a:xfrm>
+          <a:prstGeom prst="rect">
+            <a:avLst/>
+          </a:prstGeom>
+          <a:noFill/>
+          <a:ln/>
+        </p:spPr>
+        <p:txBody>
+          <a:bodyPr wrap="square" lIns="0" tIns="0" rIns="0" bIns="0" rtlCol="0" anchor="ctr"/>
+          <a:lstStyle/>
+          <a:p>
+            <a:pPr algn="l" indent="0" marL="0">
+              <a:buNone/>
+            </a:pPr>
+            <a:r>
+              <a:rPr lang="en-US" sz="3000" b="1" dirty="0">
+                <a:solidFill>
+                  <a:srgbClr val="3F162A"/>
+                </a:solidFill>
+                <a:latin typeface="Cambria" pitchFamily="34" charset="0"/>
+                <a:ea typeface="Cambria" pitchFamily="34" charset="-122"/>
+                <a:cs typeface="Cambria" pitchFamily="34" charset="-120"/>
+              </a:rPr>
+              <a:t>A staged rollout, measured at every step</a:t>
+            </a:r>
+            <a:endParaRPr lang="en-US" sz="3000" dirty="0"/>
+          </a:p>
+        </p:txBody>
+      </p:sp>
+      <p:sp>
+        <p:nvSpPr>
+          <p:cNvPr id="4" name="Shape 2"/>
+          <p:cNvSpPr/>
+          <p:nvPr/>
+        </p:nvSpPr>
+        <p:spPr>
+          <a:xfrm>
+            <a:off x="594360" y="1874520"/>
+            <a:ext cx="2545004" cy="2834640"/>
+          </a:xfrm>
+          <a:prstGeom prst="roundRect">
+            <a:avLst>
+              <a:gd name="adj" fmla="val 3593"/>
+            </a:avLst>
+          </a:prstGeom>
+          <a:solidFill>
+            <a:srgbClr val="F5EFF1"/>
+          </a:solidFill>
+          <a:ln w="9525">
+            <a:solidFill>
+              <a:srgbClr val="E5D9DE"/>
+            </a:solidFill>
+            <a:prstDash val="solid"/>
+          </a:ln>
+        </p:spPr>
+      </p:sp>
+      <p:sp>
+        <p:nvSpPr>
+          <p:cNvPr id="5" name="Shape 3"/>
+          <p:cNvSpPr/>
+          <p:nvPr/>
+        </p:nvSpPr>
+        <p:spPr>
+          <a:xfrm>
+            <a:off x="822960" y="2103120"/>
+            <a:ext cx="566928" cy="566928"/>
+          </a:xfrm>
+          <a:prstGeom prst="ellipse">
+            <a:avLst/>
+          </a:prstGeom>
+          <a:solidFill>
+            <a:srgbClr val="6B2A44"/>
+          </a:solidFill>
+          <a:ln/>
+        </p:spPr>
+      </p:sp>
+      <p:sp>
+        <p:nvSpPr>
+          <p:cNvPr id="6" name="Text 4"/>
+          <p:cNvSpPr txBox="1"/>
+          <p:nvPr/>
+        </p:nvSpPr>
+        <p:spPr>
+          <a:xfrm>
+            <a:off x="822960" y="2103120"/>
+            <a:ext cx="566928" cy="566928"/>
+          </a:xfrm>
+          <a:prstGeom prst="rect">
+            <a:avLst/>
+          </a:prstGeom>
+          <a:noFill/>
+          <a:ln/>
+        </p:spPr>
+        <p:txBody>
+          <a:bodyPr wrap="square" lIns="0" tIns="0" rIns="0" bIns="0" rtlCol="0" anchor="ctr"/>
+          <a:lstStyle/>
+          <a:p>
+            <a:pPr algn="ctr" indent="0" marL="0">
+              <a:buNone/>
+            </a:pPr>
+            <a:r>
+              <a:rPr lang="en-US" sz="1600" b="1" dirty="0">
+                <a:solidFill>
+                  <a:srgbClr val="FFFFFF"/>
+                </a:solidFill>
+                <a:latin typeface="Cambria" pitchFamily="34" charset="0"/>
+                <a:ea typeface="Cambria" pitchFamily="34" charset="-122"/>
+                <a:cs typeface="Cambria" pitchFamily="34" charset="-120"/>
+              </a:rPr>
+              <a:t>1</a:t>
+            </a:r>
+            <a:endParaRPr lang="en-US" sz="1600" dirty="0"/>
+          </a:p>
+        </p:txBody>
+      </p:sp>
+      <p:sp>
+        <p:nvSpPr>
+          <p:cNvPr id="7" name="Text 5"/>
+          <p:cNvSpPr txBox="1"/>
+          <p:nvPr/>
+        </p:nvSpPr>
+        <p:spPr>
+          <a:xfrm>
+            <a:off x="822960" y="2788920"/>
+            <a:ext cx="2087804" cy="457200"/>
+          </a:xfrm>
+          <a:prstGeom prst="rect">
+            <a:avLst/>
+          </a:prstGeom>
+          <a:noFill/>
+          <a:ln/>
+        </p:spPr>
+        <p:txBody>
+          <a:bodyPr wrap="square" lIns="0" tIns="0" rIns="0" bIns="0" rtlCol="0" anchor="ctr"/>
+          <a:lstStyle/>
+          <a:p>
+            <a:pPr algn="l" indent="0" marL="0">
+              <a:buNone/>
+            </a:pPr>
+            <a:r>
+              <a:rPr lang="en-US" sz="1400" b="1" dirty="0">
+                <a:solidFill>
+                  <a:srgbClr val="6B2A44"/>
+                </a:solidFill>
+                <a:latin typeface="Cambria" pitchFamily="34" charset="0"/>
+                <a:ea typeface="Cambria" pitchFamily="34" charset="-122"/>
+                <a:cs typeface="Cambria" pitchFamily="34" charset="-120"/>
+              </a:rPr>
+              <a:t>Assessment</a:t>
+            </a:r>
+            <a:endParaRPr lang="en-US" sz="1400" dirty="0"/>
+          </a:p>
+        </p:txBody>
+      </p:sp>
+      <p:sp>
+        <p:nvSpPr>
+          <p:cNvPr id="8" name="Text 6"/>
+          <p:cNvSpPr txBox="1"/>
+          <p:nvPr/>
+        </p:nvSpPr>
+        <p:spPr>
+          <a:xfrm>
+            <a:off x="822960" y="3291840"/>
+            <a:ext cx="2087804" cy="1234440"/>
+          </a:xfrm>
+          <a:prstGeom prst="rect">
+            <a:avLst/>
+          </a:prstGeom>
+          <a:noFill/>
+          <a:ln/>
+        </p:spPr>
+        <p:txBody>
+          <a:bodyPr wrap="square" lIns="0" tIns="0" rIns="0" bIns="0" rtlCol="0" anchor="t"/>
+          <a:lstStyle/>
+          <a:p>
+            <a:pPr algn="l" indent="0" marL="0">
+              <a:lnSpc>
+                <a:spcPct val="120000"/>
+              </a:lnSpc>
+              <a:buNone/>
+            </a:pPr>
+            <a:r>
+              <a:rPr lang="en-US" sz="1200" dirty="0">
+                <a:solidFill>
+                  <a:srgbClr val="3F3138"/>
+                </a:solidFill>
+                <a:latin typeface="Calibri" pitchFamily="34" charset="0"/>
+                <a:ea typeface="Calibri" pitchFamily="34" charset="-122"/>
+                <a:cs typeface="Calibri" pitchFamily="34" charset="-120"/>
+              </a:rPr>
+              <a:t>Soil, irrigation method and crop are reviewed. No commitment at this stage.</a:t>
+            </a:r>
+            <a:endParaRPr lang="en-US" sz="1200" dirty="0"/>
+          </a:p>
+        </p:txBody>
+      </p:sp>
+      <p:sp>
+        <p:nvSpPr>
+          <p:cNvPr id="9" name="Shape 7"/>
+          <p:cNvSpPr/>
+          <p:nvPr/>
+        </p:nvSpPr>
+        <p:spPr>
+          <a:xfrm>
+            <a:off x="3413684" y="1874520"/>
+            <a:ext cx="2545004" cy="2834640"/>
+          </a:xfrm>
+          <a:prstGeom prst="roundRect">
+            <a:avLst>
+              <a:gd name="adj" fmla="val 3593"/>
+            </a:avLst>
+          </a:prstGeom>
+          <a:solidFill>
+            <a:srgbClr val="F5EFF1"/>
+          </a:solidFill>
+          <a:ln w="9525">
+            <a:solidFill>
+              <a:srgbClr val="E5D9DE"/>
+            </a:solidFill>
+            <a:prstDash val="solid"/>
+          </a:ln>
+        </p:spPr>
+      </p:sp>
+      <p:sp>
+        <p:nvSpPr>
+          <p:cNvPr id="10" name="Shape 8"/>
+          <p:cNvSpPr/>
+          <p:nvPr/>
+        </p:nvSpPr>
+        <p:spPr>
+          <a:xfrm>
+            <a:off x="3642284" y="2103120"/>
+            <a:ext cx="566928" cy="566928"/>
+          </a:xfrm>
+          <a:prstGeom prst="ellipse">
+            <a:avLst/>
+          </a:prstGeom>
+          <a:solidFill>
+            <a:srgbClr val="6B2A44"/>
+          </a:solidFill>
+          <a:ln/>
+        </p:spPr>
+      </p:sp>
+      <p:sp>
+        <p:nvSpPr>
+          <p:cNvPr id="11" name="Text 9"/>
+          <p:cNvSpPr txBox="1"/>
+          <p:nvPr/>
+        </p:nvSpPr>
+        <p:spPr>
+          <a:xfrm>
+            <a:off x="3642284" y="2103120"/>
+            <a:ext cx="566928" cy="566928"/>
+          </a:xfrm>
+          <a:prstGeom prst="rect">
+            <a:avLst/>
+          </a:prstGeom>
+          <a:noFill/>
+          <a:ln/>
+        </p:spPr>
+        <p:txBody>
+          <a:bodyPr wrap="square" lIns="0" tIns="0" rIns="0" bIns="0" rtlCol="0" anchor="ctr"/>
+          <a:lstStyle/>
+          <a:p>
+            <a:pPr algn="ctr" indent="0" marL="0">
+              <a:buNone/>
+            </a:pPr>
+            <a:r>
+              <a:rPr lang="en-US" sz="1600" b="1" dirty="0">
+                <a:solidFill>
+                  <a:srgbClr val="FFFFFF"/>
+                </a:solidFill>
+                <a:latin typeface="Cambria" pitchFamily="34" charset="0"/>
+                <a:ea typeface="Cambria" pitchFamily="34" charset="-122"/>
+                <a:cs typeface="Cambria" pitchFamily="34" charset="-120"/>
+              </a:rPr>
+              <a:t>2</a:t>
+            </a:r>
+            <a:endParaRPr lang="en-US" sz="1600" dirty="0"/>
+          </a:p>
+        </p:txBody>
+      </p:sp>
+      <p:sp>
+        <p:nvSpPr>
+          <p:cNvPr id="12" name="Text 10"/>
+          <p:cNvSpPr txBox="1"/>
+          <p:nvPr/>
+        </p:nvSpPr>
+        <p:spPr>
+          <a:xfrm>
+            <a:off x="3642284" y="2788920"/>
+            <a:ext cx="2087804" cy="457200"/>
+          </a:xfrm>
+          <a:prstGeom prst="rect">
+            <a:avLst/>
+          </a:prstGeom>
+          <a:noFill/>
+          <a:ln/>
+        </p:spPr>
+        <p:txBody>
+          <a:bodyPr wrap="square" lIns="0" tIns="0" rIns="0" bIns="0" rtlCol="0" anchor="ctr"/>
+          <a:lstStyle/>
+          <a:p>
+            <a:pPr algn="l" indent="0" marL="0">
+              <a:buNone/>
+            </a:pPr>
+            <a:r>
+              <a:rPr lang="en-US" sz="1400" b="1" dirty="0">
+                <a:solidFill>
+                  <a:srgbClr val="6B2A44"/>
+                </a:solidFill>
+                <a:latin typeface="Cambria" pitchFamily="34" charset="0"/>
+                <a:ea typeface="Cambria" pitchFamily="34" charset="-122"/>
+                <a:cs typeface="Cambria" pitchFamily="34" charset="-120"/>
+              </a:rPr>
+              <a:t>Trial block</a:t>
+            </a:r>
+            <a:endParaRPr lang="en-US" sz="1400" dirty="0"/>
+          </a:p>
+        </p:txBody>
+      </p:sp>
+      <p:sp>
+        <p:nvSpPr>
+          <p:cNvPr id="13" name="Text 11"/>
+          <p:cNvSpPr txBox="1"/>
+          <p:nvPr/>
+        </p:nvSpPr>
+        <p:spPr>
+          <a:xfrm>
+            <a:off x="3642284" y="3291840"/>
+            <a:ext cx="2087804" cy="1234440"/>
+          </a:xfrm>
+          <a:prstGeom prst="rect">
+            <a:avLst/>
+          </a:prstGeom>
+          <a:noFill/>
+          <a:ln/>
+        </p:spPr>
+        <p:txBody>
+          <a:bodyPr wrap="square" lIns="0" tIns="0" rIns="0" bIns="0" rtlCol="0" anchor="t"/>
+          <a:lstStyle/>
+          <a:p>
+            <a:pPr algn="l" indent="0" marL="0">
+              <a:lnSpc>
+                <a:spcPct val="120000"/>
+              </a:lnSpc>
+              <a:buNone/>
+            </a:pPr>
+            <a:r>
+              <a:rPr lang="en-US" sz="1200" dirty="0">
+                <a:solidFill>
+                  <a:srgbClr val="3F3138"/>
+                </a:solidFill>
+                <a:latin typeface="Calibri" pitchFamily="34" charset="0"/>
+                <a:ea typeface="Calibri" pitchFamily="34" charset="-122"/>
+                <a:cs typeface="Calibri" pitchFamily="34" charset="-120"/>
+              </a:rPr>
+              <a:t>One comparative trial block, against a control block managed identically.</a:t>
+            </a:r>
+            <a:endParaRPr lang="en-US" sz="1200" dirty="0"/>
+          </a:p>
+        </p:txBody>
+      </p:sp>
+      <p:sp>
+        <p:nvSpPr>
+          <p:cNvPr id="14" name="Shape 12"/>
+          <p:cNvSpPr/>
+          <p:nvPr/>
+        </p:nvSpPr>
+        <p:spPr>
+          <a:xfrm>
+            <a:off x="6233008" y="1874520"/>
+            <a:ext cx="2545004" cy="2834640"/>
+          </a:xfrm>
+          <a:prstGeom prst="roundRect">
+            <a:avLst>
+              <a:gd name="adj" fmla="val 3593"/>
+            </a:avLst>
+          </a:prstGeom>
+          <a:solidFill>
+            <a:srgbClr val="F5EFF1"/>
+          </a:solidFill>
+          <a:ln w="9525">
+            <a:solidFill>
+              <a:srgbClr val="E5D9DE"/>
+            </a:solidFill>
+            <a:prstDash val="solid"/>
+          </a:ln>
+        </p:spPr>
+      </p:sp>
+      <p:sp>
+        <p:nvSpPr>
+          <p:cNvPr id="15" name="Shape 13"/>
+          <p:cNvSpPr/>
+          <p:nvPr/>
+        </p:nvSpPr>
+        <p:spPr>
+          <a:xfrm>
+            <a:off x="6461608" y="2103120"/>
+            <a:ext cx="566928" cy="566928"/>
+          </a:xfrm>
+          <a:prstGeom prst="ellipse">
+            <a:avLst/>
+          </a:prstGeom>
+          <a:solidFill>
+            <a:srgbClr val="6B2A44"/>
+          </a:solidFill>
+          <a:ln/>
+        </p:spPr>
+      </p:sp>
+      <p:sp>
+        <p:nvSpPr>
+          <p:cNvPr id="16" name="Text 14"/>
+          <p:cNvSpPr txBox="1"/>
+          <p:nvPr/>
+        </p:nvSpPr>
+        <p:spPr>
+          <a:xfrm>
+            <a:off x="6461608" y="2103120"/>
+            <a:ext cx="566928" cy="566928"/>
+          </a:xfrm>
+          <a:prstGeom prst="rect">
+            <a:avLst/>
+          </a:prstGeom>
+          <a:noFill/>
+          <a:ln/>
+        </p:spPr>
+        <p:txBody>
+          <a:bodyPr wrap="square" lIns="0" tIns="0" rIns="0" bIns="0" rtlCol="0" anchor="ctr"/>
+          <a:lstStyle/>
+          <a:p>
+            <a:pPr algn="ctr" indent="0" marL="0">
+              <a:buNone/>
+            </a:pPr>
+            <a:r>
+              <a:rPr lang="en-US" sz="1600" b="1" dirty="0">
+                <a:solidFill>
+                  <a:srgbClr val="FFFFFF"/>
+                </a:solidFill>
+                <a:latin typeface="Cambria" pitchFamily="34" charset="0"/>
+                <a:ea typeface="Cambria" pitchFamily="34" charset="-122"/>
+                <a:cs typeface="Cambria" pitchFamily="34" charset="-120"/>
+              </a:rPr>
+              <a:t>3</a:t>
+            </a:r>
+            <a:endParaRPr lang="en-US" sz="1600" dirty="0"/>
+          </a:p>
+        </p:txBody>
+      </p:sp>
+      <p:sp>
+        <p:nvSpPr>
+          <p:cNvPr id="17" name="Text 15"/>
+          <p:cNvSpPr txBox="1"/>
+          <p:nvPr/>
+        </p:nvSpPr>
+        <p:spPr>
+          <a:xfrm>
+            <a:off x="6461608" y="2788920"/>
+            <a:ext cx="2087804" cy="457200"/>
+          </a:xfrm>
+          <a:prstGeom prst="rect">
+            <a:avLst/>
+          </a:prstGeom>
+          <a:noFill/>
+          <a:ln/>
+        </p:spPr>
+        <p:txBody>
+          <a:bodyPr wrap="square" lIns="0" tIns="0" rIns="0" bIns="0" rtlCol="0" anchor="ctr"/>
+          <a:lstStyle/>
+          <a:p>
+            <a:pPr algn="l" indent="0" marL="0">
+              <a:buNone/>
+            </a:pPr>
+            <a:r>
+              <a:rPr lang="en-US" sz="1400" b="1" dirty="0">
+                <a:solidFill>
+                  <a:srgbClr val="6B2A44"/>
+                </a:solidFill>
+                <a:latin typeface="Cambria" pitchFamily="34" charset="0"/>
+                <a:ea typeface="Cambria" pitchFamily="34" charset="-122"/>
+                <a:cs typeface="Cambria" pitchFamily="34" charset="-120"/>
+              </a:rPr>
+              <a:t>Measurement</a:t>
+            </a:r>
+            <a:endParaRPr lang="en-US" sz="1400" dirty="0"/>
+          </a:p>
+        </p:txBody>
+      </p:sp>
+      <p:sp>
+        <p:nvSpPr>
+          <p:cNvPr id="18" name="Text 16"/>
+          <p:cNvSpPr txBox="1"/>
+          <p:nvPr/>
+        </p:nvSpPr>
+        <p:spPr>
+          <a:xfrm>
+            <a:off x="6461608" y="3291840"/>
+            <a:ext cx="2087804" cy="1234440"/>
+          </a:xfrm>
+          <a:prstGeom prst="rect">
+            <a:avLst/>
+          </a:prstGeom>
+          <a:noFill/>
+          <a:ln/>
+        </p:spPr>
+        <p:txBody>
+          <a:bodyPr wrap="square" lIns="0" tIns="0" rIns="0" bIns="0" rtlCol="0" anchor="t"/>
+          <a:lstStyle/>
+          <a:p>
+            <a:pPr algn="l" indent="0" marL="0">
+              <a:lnSpc>
+                <a:spcPct val="120000"/>
+              </a:lnSpc>
+              <a:buNone/>
+            </a:pPr>
+            <a:r>
+              <a:rPr lang="en-US" sz="1200" dirty="0">
+                <a:solidFill>
+                  <a:srgbClr val="3F3138"/>
+                </a:solidFill>
+                <a:latin typeface="Calibri" pitchFamily="34" charset="0"/>
+                <a:ea typeface="Calibri" pitchFamily="34" charset="-122"/>
+                <a:cs typeface="Calibri" pitchFamily="34" charset="-120"/>
+              </a:rPr>
+              <a:t>Water use and yield recorded over a full growing season.</a:t>
+            </a:r>
+            <a:endParaRPr lang="en-US" sz="1200" dirty="0"/>
+          </a:p>
+        </p:txBody>
+      </p:sp>
+      <p:sp>
+        <p:nvSpPr>
+          <p:cNvPr id="19" name="Shape 17"/>
+          <p:cNvSpPr/>
+          <p:nvPr/>
+        </p:nvSpPr>
+        <p:spPr>
+          <a:xfrm>
+            <a:off x="9052331" y="1874520"/>
+            <a:ext cx="2545004" cy="2834640"/>
+          </a:xfrm>
+          <a:prstGeom prst="roundRect">
+            <a:avLst>
+              <a:gd name="adj" fmla="val 3593"/>
+            </a:avLst>
+          </a:prstGeom>
+          <a:solidFill>
+            <a:srgbClr val="F5EFF1"/>
+          </a:solidFill>
+          <a:ln w="9525">
+            <a:solidFill>
+              <a:srgbClr val="E5D9DE"/>
+            </a:solidFill>
+            <a:prstDash val="solid"/>
+          </a:ln>
+        </p:spPr>
+      </p:sp>
+      <p:sp>
+        <p:nvSpPr>
+          <p:cNvPr id="20" name="Shape 18"/>
+          <p:cNvSpPr/>
+          <p:nvPr/>
+        </p:nvSpPr>
+        <p:spPr>
+          <a:xfrm>
+            <a:off x="9280931" y="2103120"/>
+            <a:ext cx="566928" cy="566928"/>
+          </a:xfrm>
+          <a:prstGeom prst="ellipse">
+            <a:avLst/>
+          </a:prstGeom>
+          <a:solidFill>
+            <a:srgbClr val="6B2A44"/>
+          </a:solidFill>
+          <a:ln/>
+        </p:spPr>
+      </p:sp>
+      <p:sp>
+        <p:nvSpPr>
+          <p:cNvPr id="21" name="Text 19"/>
+          <p:cNvSpPr txBox="1"/>
+          <p:nvPr/>
+        </p:nvSpPr>
+        <p:spPr>
+          <a:xfrm>
+            <a:off x="9280931" y="2103120"/>
+            <a:ext cx="566928" cy="566928"/>
+          </a:xfrm>
+          <a:prstGeom prst="rect">
+            <a:avLst/>
+          </a:prstGeom>
+          <a:noFill/>
+          <a:ln/>
+        </p:spPr>
+        <p:txBody>
+          <a:bodyPr wrap="square" lIns="0" tIns="0" rIns="0" bIns="0" rtlCol="0" anchor="ctr"/>
+          <a:lstStyle/>
+          <a:p>
+            <a:pPr algn="ctr" indent="0" marL="0">
+              <a:buNone/>
+            </a:pPr>
+            <a:r>
+              <a:rPr lang="en-US" sz="1600" b="1" dirty="0">
+                <a:solidFill>
+                  <a:srgbClr val="FFFFFF"/>
+                </a:solidFill>
+                <a:latin typeface="Cambria" pitchFamily="34" charset="0"/>
+                <a:ea typeface="Cambria" pitchFamily="34" charset="-122"/>
+                <a:cs typeface="Cambria" pitchFamily="34" charset="-120"/>
+              </a:rPr>
+              <a:t>4</a:t>
+            </a:r>
+            <a:endParaRPr lang="en-US" sz="1600" dirty="0"/>
+          </a:p>
+        </p:txBody>
+      </p:sp>
+      <p:sp>
+        <p:nvSpPr>
+          <p:cNvPr id="22" name="Text 20"/>
+          <p:cNvSpPr txBox="1"/>
+          <p:nvPr/>
+        </p:nvSpPr>
+        <p:spPr>
+          <a:xfrm>
+            <a:off x="9280931" y="2788920"/>
+            <a:ext cx="2087804" cy="457200"/>
+          </a:xfrm>
+          <a:prstGeom prst="rect">
+            <a:avLst/>
+          </a:prstGeom>
+          <a:noFill/>
+          <a:ln/>
+        </p:spPr>
+        <p:txBody>
+          <a:bodyPr wrap="square" lIns="0" tIns="0" rIns="0" bIns="0" rtlCol="0" anchor="ctr"/>
+          <a:lstStyle/>
+          <a:p>
+            <a:pPr algn="l" indent="0" marL="0">
+              <a:buNone/>
+            </a:pPr>
+            <a:r>
+              <a:rPr lang="en-US" sz="1400" b="1" dirty="0">
+                <a:solidFill>
+                  <a:srgbClr val="6B2A44"/>
+                </a:solidFill>
+                <a:latin typeface="Cambria" pitchFamily="34" charset="0"/>
+                <a:ea typeface="Cambria" pitchFamily="34" charset="-122"/>
+                <a:cs typeface="Cambria" pitchFamily="34" charset="-120"/>
+              </a:rPr>
+              <a:t>Extension</a:t>
+            </a:r>
+            <a:endParaRPr lang="en-US" sz="1400" dirty="0"/>
+          </a:p>
+        </p:txBody>
+      </p:sp>
+      <p:sp>
+        <p:nvSpPr>
+          <p:cNvPr id="23" name="Text 21"/>
+          <p:cNvSpPr txBox="1"/>
+          <p:nvPr/>
+        </p:nvSpPr>
+        <p:spPr>
+          <a:xfrm>
+            <a:off x="9280931" y="3291840"/>
+            <a:ext cx="2087804" cy="1234440"/>
+          </a:xfrm>
+          <a:prstGeom prst="rect">
+            <a:avLst/>
+          </a:prstGeom>
+          <a:noFill/>
+          <a:ln/>
+        </p:spPr>
+        <p:txBody>
+          <a:bodyPr wrap="square" lIns="0" tIns="0" rIns="0" bIns="0" rtlCol="0" anchor="t"/>
+          <a:lstStyle/>
+          <a:p>
+            <a:pPr algn="l" indent="0" marL="0">
+              <a:lnSpc>
+                <a:spcPct val="120000"/>
+              </a:lnSpc>
+              <a:buNone/>
+            </a:pPr>
+            <a:r>
+              <a:rPr lang="en-US" sz="1200" dirty="0">
+                <a:solidFill>
+                  <a:srgbClr val="3F3138"/>
+                </a:solidFill>
+                <a:latin typeface="Calibri" pitchFamily="34" charset="0"/>
+                <a:ea typeface="Calibri" pitchFamily="34" charset="-122"/>
+                <a:cs typeface="Calibri" pitchFamily="34" charset="-120"/>
+              </a:rPr>
+              <a:t>Gradual rollout to the remaining blocks, on the basis of what was measured.</a:t>
+            </a:r>
+            <a:endParaRPr lang="en-US" sz="1200" dirty="0"/>
+          </a:p>
+        </p:txBody>
+      </p:sp>
+      <p:sp>
+        <p:nvSpPr>
+          <p:cNvPr id="24" name="Text 22"/>
+          <p:cNvSpPr txBox="1"/>
+          <p:nvPr/>
+        </p:nvSpPr>
+        <p:spPr>
+          <a:xfrm>
+            <a:off x="594360" y="4983480"/>
+            <a:ext cx="11002975" cy="822960"/>
+          </a:xfrm>
+          <a:prstGeom prst="rect">
+            <a:avLst/>
+          </a:prstGeom>
+          <a:noFill/>
+          <a:ln/>
+        </p:spPr>
+        <p:txBody>
+          <a:bodyPr wrap="square" lIns="0" tIns="0" rIns="0" bIns="0" rtlCol="0" anchor="t"/>
+          <a:lstStyle/>
+          <a:p>
+            <a:pPr algn="l" indent="0" marL="0">
+              <a:lnSpc>
+                <a:spcPct val="125000"/>
+              </a:lnSpc>
+              <a:buNone/>
+            </a:pPr>
+            <a:r>
+              <a:rPr lang="en-US" sz="1250" i="1" dirty="0">
+                <a:solidFill>
+                  <a:srgbClr val="7C6B73"/>
+                </a:solidFill>
+                <a:latin typeface="Calibri" pitchFamily="34" charset="0"/>
+                <a:ea typeface="Calibri" pitchFamily="34" charset="-122"/>
+                <a:cs typeface="Calibri" pitchFamily="34" charset="-120"/>
+              </a:rPr>
+              <a:t>The dosing rule is the same everywhere: 3 grams per litre of useful soil. What changes from one site to the next is the volume of soil the roots actually explore.</a:t>
+            </a:r>
+            <a:endParaRPr lang="en-US" sz="1250" dirty="0"/>
+          </a:p>
+        </p:txBody>
+      </p:sp>
+      <p:sp>
+        <p:nvSpPr>
+          <p:cNvPr id="25" name="Text 23"/>
+          <p:cNvSpPr txBox="1"/>
+          <p:nvPr/>
+        </p:nvSpPr>
+        <p:spPr>
+          <a:xfrm>
+            <a:off x="502920" y="6382512"/>
+            <a:ext cx="8229600" cy="274320"/>
+          </a:xfrm>
+          <a:prstGeom prst="rect">
+            <a:avLst/>
+          </a:prstGeom>
+          <a:noFill/>
+          <a:ln/>
+        </p:spPr>
+        <p:txBody>
+          <a:bodyPr wrap="square" lIns="0" tIns="0" rIns="0" bIns="0" rtlCol="0" anchor="ctr"/>
+          <a:lstStyle/>
+          <a:p>
+            <a:pPr algn="l" indent="0" marL="0">
+              <a:buNone/>
+            </a:pPr>
+            <a:r>
+              <a:rPr lang="en-US" sz="950" dirty="0">
+                <a:solidFill>
+                  <a:srgbClr val="7C6B73">
+                    <a:alpha val="80000"/>
+                  </a:srgbClr>
+                </a:solidFill>
+                <a:latin typeface="Calibri" pitchFamily="34" charset="0"/>
+                <a:ea typeface="Calibri" pitchFamily="34" charset="-122"/>
+                <a:cs typeface="Calibri" pitchFamily="34" charset="-120"/>
+              </a:rPr>
+              <a:t>Green Solutions · South Africa market dossier</a:t>
+            </a:r>
+            <a:endParaRPr lang="en-US" sz="950" dirty="0"/>
+          </a:p>
+        </p:txBody>
+      </p:sp>
+      <p:sp>
+        <p:nvSpPr>
+          <p:cNvPr id="26" name="Text 24"/>
+          <p:cNvSpPr txBox="1"/>
+          <p:nvPr/>
+        </p:nvSpPr>
+        <p:spPr>
+          <a:xfrm>
+            <a:off x="11140135" y="6382512"/>
+            <a:ext cx="548640" cy="274320"/>
+          </a:xfrm>
+          <a:prstGeom prst="rect">
+            <a:avLst/>
+          </a:prstGeom>
+          <a:noFill/>
+          <a:ln/>
+        </p:spPr>
+        <p:txBody>
+          <a:bodyPr wrap="square" lIns="0" tIns="0" rIns="0" bIns="0" rtlCol="0" anchor="ctr"/>
+          <a:lstStyle/>
+          <a:p>
+            <a:pPr algn="r" indent="0" marL="0">
+              <a:buNone/>
+            </a:pPr>
+            <a:r>
+              <a:rPr lang="en-US" sz="950" dirty="0">
+                <a:solidFill>
+                  <a:srgbClr val="7C6B73">
+                    <a:alpha val="80000"/>
+                  </a:srgbClr>
+                </a:solidFill>
+                <a:latin typeface="Calibri" pitchFamily="34" charset="0"/>
+                <a:ea typeface="Calibri" pitchFamily="34" charset="-122"/>
+                <a:cs typeface="Calibri" pitchFamily="34" charset="-120"/>
+              </a:rPr>
+              <a:t>13</a:t>
+            </a:r>
+            <a:endParaRPr lang="en-US" sz="950" dirty="0"/>
+          </a:p>
+        </p:txBody>
+      </p:sp>
+    </p:spTree>
+  </p:cSld>
+  <p:clrMapOvr>
+    <a:masterClrMapping/>
+  </p:clrMapOvr>
+</p:sld>
+</file>
+
+<file path=ppt/slides/slide15.xml><?xml version="1.0" encoding="utf-8"?>
+<p:sld xmlns:a="http://schemas.openxmlformats.org/drawingml/2006/main" xmlns:r="http://schemas.openxmlformats.org/officeDocument/2006/relationships" xmlns:p="http://schemas.openxmlformats.org/presentationml/2006/main">
+  <p:cSld name="Slide 15">
+    <p:bg>
+      <p:bgPr>
+        <a:solidFill>
+          <a:srgbClr val="FCFAFA"/>
+        </a:solidFill>
+      </p:bgPr>
+    </p:bg>
+    <p:spTree>
+      <p:nvGrpSpPr>
+        <p:cNvPr id="1" name=""/>
+        <p:cNvGrpSpPr/>
+        <p:nvPr/>
+      </p:nvGrpSpPr>
+      <p:grpSpPr>
+        <a:xfrm>
+          <a:off x="0" y="0"/>
+          <a:ext cx="0" cy="0"/>
+          <a:chOff x="0" y="0"/>
+          <a:chExt cx="0" cy="0"/>
+        </a:xfrm>
+      </p:grpSpPr>
+      <p:sp>
+        <p:nvSpPr>
+          <p:cNvPr id="2" name="Text 0"/>
+          <p:cNvSpPr txBox="1"/>
+          <p:nvPr/>
+        </p:nvSpPr>
+        <p:spPr>
+          <a:xfrm>
+            <a:off x="594360" y="411480"/>
+            <a:ext cx="10515600" cy="274320"/>
+          </a:xfrm>
+          <a:prstGeom prst="rect">
+            <a:avLst/>
+          </a:prstGeom>
+          <a:noFill/>
+          <a:ln/>
+        </p:spPr>
+        <p:txBody>
+          <a:bodyPr wrap="square" lIns="0" tIns="0" rIns="0" bIns="0" rtlCol="0" anchor="ctr"/>
+          <a:lstStyle/>
+          <a:p>
+            <a:pPr algn="l" indent="0" marL="0">
+              <a:buNone/>
+            </a:pPr>
+            <a:r>
+              <a:rPr lang="en-US" sz="1150" b="1" spc="200" kern="0" dirty="0">
+                <a:solidFill>
+                  <a:srgbClr val="C9A227"/>
+                </a:solidFill>
+                <a:latin typeface="Calibri" pitchFamily="34" charset="0"/>
+                <a:ea typeface="Calibri" pitchFamily="34" charset="-122"/>
+                <a:cs typeface="Calibri" pitchFamily="34" charset="-120"/>
+              </a:rPr>
+              <a:t>Working together</a:t>
+            </a:r>
+            <a:endParaRPr lang="en-US" sz="1150" dirty="0"/>
+          </a:p>
+        </p:txBody>
+      </p:sp>
+      <p:sp>
+        <p:nvSpPr>
+          <p:cNvPr id="3" name="Text 1"/>
+          <p:cNvSpPr txBox="1"/>
+          <p:nvPr/>
+        </p:nvSpPr>
+        <p:spPr>
+          <a:xfrm>
+            <a:off x="594360" y="731520"/>
+            <a:ext cx="10881360" cy="731520"/>
+          </a:xfrm>
+          <a:prstGeom prst="rect">
+            <a:avLst/>
+          </a:prstGeom>
+          <a:noFill/>
+          <a:ln/>
+        </p:spPr>
+        <p:txBody>
+          <a:bodyPr wrap="square" lIns="0" tIns="0" rIns="0" bIns="0" rtlCol="0" anchor="ctr"/>
+          <a:lstStyle/>
+          <a:p>
+            <a:pPr algn="l" indent="0" marL="0">
+              <a:buNone/>
+            </a:pPr>
+            <a:r>
+              <a:rPr lang="en-US" sz="3000" b="1" dirty="0">
+                <a:solidFill>
+                  <a:srgbClr val="3F162A"/>
+                </a:solidFill>
+                <a:latin typeface="Cambria" pitchFamily="34" charset="0"/>
+                <a:ea typeface="Cambria" pitchFamily="34" charset="-122"/>
+                <a:cs typeface="Cambria" pitchFamily="34" charset="-120"/>
+              </a:rPr>
+              <a:t>A local partner for South Africa</a:t>
+            </a:r>
+            <a:endParaRPr lang="en-US" sz="3000" dirty="0"/>
+          </a:p>
+        </p:txBody>
+      </p:sp>
+      <p:sp>
+        <p:nvSpPr>
+          <p:cNvPr id="4" name="Shape 2"/>
+          <p:cNvSpPr/>
+          <p:nvPr/>
+        </p:nvSpPr>
+        <p:spPr>
+          <a:xfrm>
+            <a:off x="594360" y="1874520"/>
+            <a:ext cx="2545004" cy="2834640"/>
+          </a:xfrm>
+          <a:prstGeom prst="roundRect">
+            <a:avLst>
+              <a:gd name="adj" fmla="val 3593"/>
+            </a:avLst>
+          </a:prstGeom>
+          <a:solidFill>
+            <a:srgbClr val="F5EFF1"/>
+          </a:solidFill>
+          <a:ln w="9525">
+            <a:solidFill>
+              <a:srgbClr val="E5D9DE"/>
+            </a:solidFill>
+            <a:prstDash val="solid"/>
+          </a:ln>
+        </p:spPr>
+      </p:sp>
+      <p:sp>
+        <p:nvSpPr>
+          <p:cNvPr id="5" name="Shape 3"/>
+          <p:cNvSpPr/>
+          <p:nvPr/>
+        </p:nvSpPr>
+        <p:spPr>
+          <a:xfrm>
+            <a:off x="822960" y="2103120"/>
+            <a:ext cx="566928" cy="566928"/>
+          </a:xfrm>
+          <a:prstGeom prst="ellipse">
+            <a:avLst/>
+          </a:prstGeom>
+          <a:solidFill>
+            <a:srgbClr val="6B2A44"/>
+          </a:solidFill>
+          <a:ln/>
+        </p:spPr>
+      </p:sp>
+      <p:sp>
+        <p:nvSpPr>
+          <p:cNvPr id="6" name="Text 4"/>
+          <p:cNvSpPr txBox="1"/>
+          <p:nvPr/>
+        </p:nvSpPr>
+        <p:spPr>
+          <a:xfrm>
+            <a:off x="822960" y="2103120"/>
+            <a:ext cx="566928" cy="566928"/>
+          </a:xfrm>
+          <a:prstGeom prst="rect">
+            <a:avLst/>
+          </a:prstGeom>
+          <a:noFill/>
+          <a:ln/>
+        </p:spPr>
+        <p:txBody>
+          <a:bodyPr wrap="square" lIns="0" tIns="0" rIns="0" bIns="0" rtlCol="0" anchor="ctr"/>
+          <a:lstStyle/>
+          <a:p>
+            <a:pPr algn="ctr" indent="0" marL="0">
+              <a:buNone/>
+            </a:pPr>
+            <a:r>
+              <a:rPr lang="en-US" sz="1600" b="1" dirty="0">
+                <a:solidFill>
+                  <a:srgbClr val="FFFFFF"/>
+                </a:solidFill>
+                <a:latin typeface="Cambria" pitchFamily="34" charset="0"/>
+                <a:ea typeface="Cambria" pitchFamily="34" charset="-122"/>
+                <a:cs typeface="Cambria" pitchFamily="34" charset="-120"/>
+              </a:rPr>
+              <a:t>1</a:t>
+            </a:r>
+            <a:endParaRPr lang="en-US" sz="1600" dirty="0"/>
+          </a:p>
+        </p:txBody>
+      </p:sp>
+      <p:sp>
+        <p:nvSpPr>
+          <p:cNvPr id="7" name="Text 5"/>
+          <p:cNvSpPr txBox="1"/>
+          <p:nvPr/>
+        </p:nvSpPr>
+        <p:spPr>
+          <a:xfrm>
+            <a:off x="822960" y="2788920"/>
+            <a:ext cx="2087804" cy="457200"/>
+          </a:xfrm>
+          <a:prstGeom prst="rect">
+            <a:avLst/>
+          </a:prstGeom>
+          <a:noFill/>
+          <a:ln/>
+        </p:spPr>
+        <p:txBody>
+          <a:bodyPr wrap="square" lIns="0" tIns="0" rIns="0" bIns="0" rtlCol="0" anchor="ctr"/>
+          <a:lstStyle/>
+          <a:p>
+            <a:pPr algn="l" indent="0" marL="0">
+              <a:buNone/>
+            </a:pPr>
+            <a:r>
+              <a:rPr lang="en-US" sz="1400" b="1" dirty="0">
+                <a:solidFill>
+                  <a:srgbClr val="6B2A44"/>
+                </a:solidFill>
+                <a:latin typeface="Cambria" pitchFamily="34" charset="0"/>
+                <a:ea typeface="Cambria" pitchFamily="34" charset="-122"/>
+                <a:cs typeface="Cambria" pitchFamily="34" charset="-120"/>
+              </a:rPr>
+              <a:t>Distribution</a:t>
+            </a:r>
+            <a:endParaRPr lang="en-US" sz="1400" dirty="0"/>
+          </a:p>
+        </p:txBody>
+      </p:sp>
+      <p:sp>
+        <p:nvSpPr>
+          <p:cNvPr id="8" name="Text 6"/>
+          <p:cNvSpPr txBox="1"/>
+          <p:nvPr/>
+        </p:nvSpPr>
+        <p:spPr>
+          <a:xfrm>
+            <a:off x="822960" y="3291840"/>
+            <a:ext cx="2087804" cy="1234440"/>
+          </a:xfrm>
+          <a:prstGeom prst="rect">
+            <a:avLst/>
+          </a:prstGeom>
+          <a:noFill/>
+          <a:ln/>
+        </p:spPr>
+        <p:txBody>
+          <a:bodyPr wrap="square" lIns="0" tIns="0" rIns="0" bIns="0" rtlCol="0" anchor="t"/>
+          <a:lstStyle/>
+          <a:p>
+            <a:pPr algn="l" indent="0" marL="0">
+              <a:lnSpc>
+                <a:spcPct val="120000"/>
+              </a:lnSpc>
+              <a:buNone/>
+            </a:pPr>
+            <a:r>
+              <a:rPr lang="en-US" sz="1200" dirty="0">
+                <a:solidFill>
+                  <a:srgbClr val="3F3138"/>
+                </a:solidFill>
+                <a:latin typeface="Calibri" pitchFamily="34" charset="0"/>
+                <a:ea typeface="Calibri" pitchFamily="34" charset="-122"/>
+                <a:cs typeface="Calibri" pitchFamily="34" charset="-120"/>
+              </a:rPr>
+              <a:t>Territorial exclusivity and launch stock for the first commercial season.</a:t>
+            </a:r>
+            <a:endParaRPr lang="en-US" sz="1200" dirty="0"/>
+          </a:p>
+        </p:txBody>
+      </p:sp>
+      <p:sp>
+        <p:nvSpPr>
+          <p:cNvPr id="9" name="Shape 7"/>
+          <p:cNvSpPr/>
+          <p:nvPr/>
+        </p:nvSpPr>
+        <p:spPr>
+          <a:xfrm>
+            <a:off x="3413684" y="1874520"/>
+            <a:ext cx="2545004" cy="2834640"/>
+          </a:xfrm>
+          <a:prstGeom prst="roundRect">
+            <a:avLst>
+              <a:gd name="adj" fmla="val 3593"/>
+            </a:avLst>
+          </a:prstGeom>
+          <a:solidFill>
+            <a:srgbClr val="F5EFF1"/>
+          </a:solidFill>
+          <a:ln w="9525">
+            <a:solidFill>
+              <a:srgbClr val="E5D9DE"/>
+            </a:solidFill>
+            <a:prstDash val="solid"/>
+          </a:ln>
+        </p:spPr>
+      </p:sp>
+      <p:sp>
+        <p:nvSpPr>
+          <p:cNvPr id="10" name="Shape 8"/>
+          <p:cNvSpPr/>
+          <p:nvPr/>
+        </p:nvSpPr>
+        <p:spPr>
+          <a:xfrm>
+            <a:off x="3642284" y="2103120"/>
+            <a:ext cx="566928" cy="566928"/>
+          </a:xfrm>
+          <a:prstGeom prst="ellipse">
+            <a:avLst/>
+          </a:prstGeom>
+          <a:solidFill>
+            <a:srgbClr val="6B2A44"/>
+          </a:solidFill>
+          <a:ln/>
+        </p:spPr>
+      </p:sp>
+      <p:sp>
+        <p:nvSpPr>
+          <p:cNvPr id="11" name="Text 9"/>
+          <p:cNvSpPr txBox="1"/>
+          <p:nvPr/>
+        </p:nvSpPr>
+        <p:spPr>
+          <a:xfrm>
+            <a:off x="3642284" y="2103120"/>
+            <a:ext cx="566928" cy="566928"/>
+          </a:xfrm>
+          <a:prstGeom prst="rect">
+            <a:avLst/>
+          </a:prstGeom>
+          <a:noFill/>
+          <a:ln/>
+        </p:spPr>
+        <p:txBody>
+          <a:bodyPr wrap="square" lIns="0" tIns="0" rIns="0" bIns="0" rtlCol="0" anchor="ctr"/>
+          <a:lstStyle/>
+          <a:p>
+            <a:pPr algn="ctr" indent="0" marL="0">
+              <a:buNone/>
+            </a:pPr>
+            <a:r>
+              <a:rPr lang="en-US" sz="1600" b="1" dirty="0">
+                <a:solidFill>
+                  <a:srgbClr val="FFFFFF"/>
+                </a:solidFill>
+                <a:latin typeface="Cambria" pitchFamily="34" charset="0"/>
+                <a:ea typeface="Cambria" pitchFamily="34" charset="-122"/>
+                <a:cs typeface="Cambria" pitchFamily="34" charset="-120"/>
+              </a:rPr>
+              <a:t>2</a:t>
+            </a:r>
+            <a:endParaRPr lang="en-US" sz="1600" dirty="0"/>
+          </a:p>
+        </p:txBody>
+      </p:sp>
+      <p:sp>
+        <p:nvSpPr>
+          <p:cNvPr id="12" name="Text 10"/>
+          <p:cNvSpPr txBox="1"/>
+          <p:nvPr/>
+        </p:nvSpPr>
+        <p:spPr>
+          <a:xfrm>
+            <a:off x="3642284" y="2788920"/>
+            <a:ext cx="2087804" cy="457200"/>
+          </a:xfrm>
+          <a:prstGeom prst="rect">
+            <a:avLst/>
+          </a:prstGeom>
+          <a:noFill/>
+          <a:ln/>
+        </p:spPr>
+        <p:txBody>
+          <a:bodyPr wrap="square" lIns="0" tIns="0" rIns="0" bIns="0" rtlCol="0" anchor="ctr"/>
+          <a:lstStyle/>
+          <a:p>
+            <a:pPr algn="l" indent="0" marL="0">
+              <a:buNone/>
+            </a:pPr>
+            <a:r>
+              <a:rPr lang="en-US" sz="1400" b="1" dirty="0">
+                <a:solidFill>
+                  <a:srgbClr val="6B2A44"/>
+                </a:solidFill>
+                <a:latin typeface="Cambria" pitchFamily="34" charset="0"/>
+                <a:ea typeface="Cambria" pitchFamily="34" charset="-122"/>
+                <a:cs typeface="Cambria" pitchFamily="34" charset="-120"/>
+              </a:rPr>
+              <a:t>Training</a:t>
+            </a:r>
+            <a:endParaRPr lang="en-US" sz="1400" dirty="0"/>
+          </a:p>
+        </p:txBody>
+      </p:sp>
+      <p:sp>
+        <p:nvSpPr>
+          <p:cNvPr id="13" name="Text 11"/>
+          <p:cNvSpPr txBox="1"/>
+          <p:nvPr/>
+        </p:nvSpPr>
+        <p:spPr>
+          <a:xfrm>
+            <a:off x="3642284" y="3291840"/>
+            <a:ext cx="2087804" cy="1234440"/>
+          </a:xfrm>
+          <a:prstGeom prst="rect">
+            <a:avLst/>
+          </a:prstGeom>
+          <a:noFill/>
+          <a:ln/>
+        </p:spPr>
+        <p:txBody>
+          <a:bodyPr wrap="square" lIns="0" tIns="0" rIns="0" bIns="0" rtlCol="0" anchor="t"/>
+          <a:lstStyle/>
+          <a:p>
+            <a:pPr algn="l" indent="0" marL="0">
+              <a:lnSpc>
+                <a:spcPct val="120000"/>
+              </a:lnSpc>
+              <a:buNone/>
+            </a:pPr>
+            <a:r>
+              <a:rPr lang="en-US" sz="1200" dirty="0">
+                <a:solidFill>
+                  <a:srgbClr val="3F3138"/>
+                </a:solidFill>
+                <a:latin typeface="Calibri" pitchFamily="34" charset="0"/>
+                <a:ea typeface="Calibri" pitchFamily="34" charset="-122"/>
+                <a:cs typeface="Calibri" pitchFamily="34" charset="-120"/>
+              </a:rPr>
+              <a:t>Technical training for field teams, dosing protocols and seasonal updates.</a:t>
+            </a:r>
+            <a:endParaRPr lang="en-US" sz="1200" dirty="0"/>
+          </a:p>
+        </p:txBody>
+      </p:sp>
+      <p:sp>
+        <p:nvSpPr>
+          <p:cNvPr id="14" name="Shape 12"/>
+          <p:cNvSpPr/>
+          <p:nvPr/>
+        </p:nvSpPr>
+        <p:spPr>
+          <a:xfrm>
+            <a:off x="6233008" y="1874520"/>
+            <a:ext cx="2545004" cy="2834640"/>
+          </a:xfrm>
+          <a:prstGeom prst="roundRect">
+            <a:avLst>
+              <a:gd name="adj" fmla="val 3593"/>
+            </a:avLst>
+          </a:prstGeom>
+          <a:solidFill>
+            <a:srgbClr val="F5EFF1"/>
+          </a:solidFill>
+          <a:ln w="9525">
+            <a:solidFill>
+              <a:srgbClr val="E5D9DE"/>
+            </a:solidFill>
+            <a:prstDash val="solid"/>
+          </a:ln>
+        </p:spPr>
+      </p:sp>
+      <p:sp>
+        <p:nvSpPr>
+          <p:cNvPr id="15" name="Shape 13"/>
+          <p:cNvSpPr/>
+          <p:nvPr/>
+        </p:nvSpPr>
+        <p:spPr>
+          <a:xfrm>
+            <a:off x="6461608" y="2103120"/>
+            <a:ext cx="566928" cy="566928"/>
+          </a:xfrm>
+          <a:prstGeom prst="ellipse">
+            <a:avLst/>
+          </a:prstGeom>
+          <a:solidFill>
+            <a:srgbClr val="6B2A44"/>
+          </a:solidFill>
+          <a:ln/>
+        </p:spPr>
+      </p:sp>
+      <p:sp>
+        <p:nvSpPr>
+          <p:cNvPr id="16" name="Text 14"/>
+          <p:cNvSpPr txBox="1"/>
+          <p:nvPr/>
+        </p:nvSpPr>
+        <p:spPr>
+          <a:xfrm>
+            <a:off x="6461608" y="2103120"/>
+            <a:ext cx="566928" cy="566928"/>
+          </a:xfrm>
+          <a:prstGeom prst="rect">
+            <a:avLst/>
+          </a:prstGeom>
+          <a:noFill/>
+          <a:ln/>
+        </p:spPr>
+        <p:txBody>
+          <a:bodyPr wrap="square" lIns="0" tIns="0" rIns="0" bIns="0" rtlCol="0" anchor="ctr"/>
+          <a:lstStyle/>
+          <a:p>
+            <a:pPr algn="ctr" indent="0" marL="0">
+              <a:buNone/>
+            </a:pPr>
+            <a:r>
+              <a:rPr lang="en-US" sz="1600" b="1" dirty="0">
+                <a:solidFill>
+                  <a:srgbClr val="FFFFFF"/>
+                </a:solidFill>
+                <a:latin typeface="Cambria" pitchFamily="34" charset="0"/>
+                <a:ea typeface="Cambria" pitchFamily="34" charset="-122"/>
+                <a:cs typeface="Cambria" pitchFamily="34" charset="-120"/>
+              </a:rPr>
+              <a:t>3</a:t>
+            </a:r>
+            <a:endParaRPr lang="en-US" sz="1600" dirty="0"/>
+          </a:p>
+        </p:txBody>
+      </p:sp>
+      <p:sp>
+        <p:nvSpPr>
+          <p:cNvPr id="17" name="Text 15"/>
+          <p:cNvSpPr txBox="1"/>
+          <p:nvPr/>
+        </p:nvSpPr>
+        <p:spPr>
+          <a:xfrm>
+            <a:off x="6461608" y="2788920"/>
+            <a:ext cx="2087804" cy="457200"/>
+          </a:xfrm>
+          <a:prstGeom prst="rect">
+            <a:avLst/>
+          </a:prstGeom>
+          <a:noFill/>
+          <a:ln/>
+        </p:spPr>
+        <p:txBody>
+          <a:bodyPr wrap="square" lIns="0" tIns="0" rIns="0" bIns="0" rtlCol="0" anchor="ctr"/>
+          <a:lstStyle/>
+          <a:p>
+            <a:pPr algn="l" indent="0" marL="0">
+              <a:buNone/>
+            </a:pPr>
+            <a:r>
+              <a:rPr lang="en-US" sz="1400" b="1" dirty="0">
+                <a:solidFill>
+                  <a:srgbClr val="6B2A44"/>
+                </a:solidFill>
+                <a:latin typeface="Cambria" pitchFamily="34" charset="0"/>
+                <a:ea typeface="Cambria" pitchFamily="34" charset="-122"/>
+                <a:cs typeface="Cambria" pitchFamily="34" charset="-120"/>
+              </a:rPr>
+              <a:t>Joint trials</a:t>
+            </a:r>
+            <a:endParaRPr lang="en-US" sz="1400" dirty="0"/>
+          </a:p>
+        </p:txBody>
+      </p:sp>
+      <p:sp>
+        <p:nvSpPr>
+          <p:cNvPr id="18" name="Text 16"/>
+          <p:cNvSpPr txBox="1"/>
+          <p:nvPr/>
+        </p:nvSpPr>
+        <p:spPr>
+          <a:xfrm>
+            <a:off x="6461608" y="3291840"/>
+            <a:ext cx="2087804" cy="1234440"/>
+          </a:xfrm>
+          <a:prstGeom prst="rect">
+            <a:avLst/>
+          </a:prstGeom>
+          <a:noFill/>
+          <a:ln/>
+        </p:spPr>
+        <p:txBody>
+          <a:bodyPr wrap="square" lIns="0" tIns="0" rIns="0" bIns="0" rtlCol="0" anchor="t"/>
+          <a:lstStyle/>
+          <a:p>
+            <a:pPr algn="l" indent="0" marL="0">
+              <a:lnSpc>
+                <a:spcPct val="120000"/>
+              </a:lnSpc>
+              <a:buNone/>
+            </a:pPr>
+            <a:r>
+              <a:rPr lang="en-US" sz="1200" dirty="0">
+                <a:solidFill>
+                  <a:srgbClr val="3F3138"/>
+                </a:solidFill>
+                <a:latin typeface="Calibri" pitchFamily="34" charset="0"/>
+                <a:ea typeface="Calibri" pitchFamily="34" charset="-122"/>
+                <a:cs typeface="Calibri" pitchFamily="34" charset="-120"/>
+              </a:rPr>
+              <a:t>Demonstration plots with a control, results shared with growers.</a:t>
+            </a:r>
+            <a:endParaRPr lang="en-US" sz="1200" dirty="0"/>
+          </a:p>
+        </p:txBody>
+      </p:sp>
+      <p:sp>
+        <p:nvSpPr>
+          <p:cNvPr id="19" name="Shape 17"/>
+          <p:cNvSpPr/>
+          <p:nvPr/>
+        </p:nvSpPr>
+        <p:spPr>
+          <a:xfrm>
+            <a:off x="9052331" y="1874520"/>
+            <a:ext cx="2545004" cy="2834640"/>
+          </a:xfrm>
+          <a:prstGeom prst="roundRect">
+            <a:avLst>
+              <a:gd name="adj" fmla="val 3593"/>
+            </a:avLst>
+          </a:prstGeom>
+          <a:solidFill>
+            <a:srgbClr val="F5EFF1"/>
+          </a:solidFill>
+          <a:ln w="9525">
+            <a:solidFill>
+              <a:srgbClr val="E5D9DE"/>
+            </a:solidFill>
+            <a:prstDash val="solid"/>
+          </a:ln>
+        </p:spPr>
+      </p:sp>
+      <p:sp>
+        <p:nvSpPr>
+          <p:cNvPr id="20" name="Shape 18"/>
+          <p:cNvSpPr/>
+          <p:nvPr/>
+        </p:nvSpPr>
+        <p:spPr>
+          <a:xfrm>
+            <a:off x="9280931" y="2103120"/>
+            <a:ext cx="566928" cy="566928"/>
+          </a:xfrm>
+          <a:prstGeom prst="ellipse">
+            <a:avLst/>
+          </a:prstGeom>
+          <a:solidFill>
+            <a:srgbClr val="6B2A44"/>
+          </a:solidFill>
+          <a:ln/>
+        </p:spPr>
+      </p:sp>
+      <p:sp>
+        <p:nvSpPr>
+          <p:cNvPr id="21" name="Text 19"/>
+          <p:cNvSpPr txBox="1"/>
+          <p:nvPr/>
+        </p:nvSpPr>
+        <p:spPr>
+          <a:xfrm>
+            <a:off x="9280931" y="2103120"/>
+            <a:ext cx="566928" cy="566928"/>
+          </a:xfrm>
+          <a:prstGeom prst="rect">
+            <a:avLst/>
+          </a:prstGeom>
+          <a:noFill/>
+          <a:ln/>
+        </p:spPr>
+        <p:txBody>
+          <a:bodyPr wrap="square" lIns="0" tIns="0" rIns="0" bIns="0" rtlCol="0" anchor="ctr"/>
+          <a:lstStyle/>
+          <a:p>
+            <a:pPr algn="ctr" indent="0" marL="0">
+              <a:buNone/>
+            </a:pPr>
+            <a:r>
+              <a:rPr lang="en-US" sz="1600" b="1" dirty="0">
+                <a:solidFill>
+                  <a:srgbClr val="FFFFFF"/>
+                </a:solidFill>
+                <a:latin typeface="Cambria" pitchFamily="34" charset="0"/>
+                <a:ea typeface="Cambria" pitchFamily="34" charset="-122"/>
+                <a:cs typeface="Cambria" pitchFamily="34" charset="-120"/>
+              </a:rPr>
+              <a:t>4</a:t>
+            </a:r>
+            <a:endParaRPr lang="en-US" sz="1600" dirty="0"/>
+          </a:p>
+        </p:txBody>
+      </p:sp>
+      <p:sp>
+        <p:nvSpPr>
+          <p:cNvPr id="22" name="Text 20"/>
+          <p:cNvSpPr txBox="1"/>
+          <p:nvPr/>
+        </p:nvSpPr>
+        <p:spPr>
+          <a:xfrm>
+            <a:off x="9280931" y="2788920"/>
+            <a:ext cx="2087804" cy="457200"/>
+          </a:xfrm>
+          <a:prstGeom prst="rect">
+            <a:avLst/>
+          </a:prstGeom>
+          <a:noFill/>
+          <a:ln/>
+        </p:spPr>
+        <p:txBody>
+          <a:bodyPr wrap="square" lIns="0" tIns="0" rIns="0" bIns="0" rtlCol="0" anchor="ctr"/>
+          <a:lstStyle/>
+          <a:p>
+            <a:pPr algn="l" indent="0" marL="0">
+              <a:buNone/>
+            </a:pPr>
+            <a:r>
+              <a:rPr lang="en-US" sz="1400" b="1" dirty="0">
+                <a:solidFill>
+                  <a:srgbClr val="6B2A44"/>
+                </a:solidFill>
+                <a:latin typeface="Cambria" pitchFamily="34" charset="0"/>
+                <a:ea typeface="Cambria" pitchFamily="34" charset="-122"/>
+                <a:cs typeface="Cambria" pitchFamily="34" charset="-120"/>
+              </a:rPr>
+              <a:t>Institutions</a:t>
+            </a:r>
+            <a:endParaRPr lang="en-US" sz="1400" dirty="0"/>
+          </a:p>
+        </p:txBody>
+      </p:sp>
+      <p:sp>
+        <p:nvSpPr>
+          <p:cNvPr id="23" name="Text 21"/>
+          <p:cNvSpPr txBox="1"/>
+          <p:nvPr/>
+        </p:nvSpPr>
+        <p:spPr>
+          <a:xfrm>
+            <a:off x="9280931" y="3291840"/>
+            <a:ext cx="2087804" cy="1234440"/>
+          </a:xfrm>
+          <a:prstGeom prst="rect">
+            <a:avLst/>
+          </a:prstGeom>
+          <a:noFill/>
+          <a:ln/>
+        </p:spPr>
+        <p:txBody>
+          <a:bodyPr wrap="square" lIns="0" tIns="0" rIns="0" bIns="0" rtlCol="0" anchor="t"/>
+          <a:lstStyle/>
+          <a:p>
+            <a:pPr algn="l" indent="0" marL="0">
+              <a:lnSpc>
+                <a:spcPct val="120000"/>
+              </a:lnSpc>
+              <a:buNone/>
+            </a:pPr>
+            <a:r>
+              <a:rPr lang="en-US" sz="1200" dirty="0">
+                <a:solidFill>
+                  <a:srgbClr val="3F3138"/>
+                </a:solidFill>
+                <a:latin typeface="Calibri" pitchFamily="34" charset="0"/>
+                <a:ea typeface="Calibri" pitchFamily="34" charset="-122"/>
+                <a:cs typeface="Calibri" pitchFamily="34" charset="-120"/>
+              </a:rPr>
+              <a:t>Dialogue with the Ministry of Agriculture and food-security programmes.</a:t>
+            </a:r>
+            <a:endParaRPr lang="en-US" sz="1200" dirty="0"/>
+          </a:p>
+        </p:txBody>
+      </p:sp>
+      <p:sp>
+        <p:nvSpPr>
+          <p:cNvPr id="24" name="Text 22"/>
+          <p:cNvSpPr txBox="1"/>
+          <p:nvPr/>
+        </p:nvSpPr>
+        <p:spPr>
+          <a:xfrm>
+            <a:off x="594360" y="4983480"/>
+            <a:ext cx="11002975" cy="822960"/>
+          </a:xfrm>
+          <a:prstGeom prst="rect">
+            <a:avLst/>
+          </a:prstGeom>
+          <a:noFill/>
+          <a:ln/>
+        </p:spPr>
+        <p:txBody>
+          <a:bodyPr wrap="square" lIns="0" tIns="0" rIns="0" bIns="0" rtlCol="0" anchor="t"/>
+          <a:lstStyle/>
+          <a:p>
+            <a:pPr algn="l" indent="0" marL="0">
+              <a:lnSpc>
+                <a:spcPct val="125000"/>
+              </a:lnSpc>
+              <a:buNone/>
+            </a:pPr>
+            <a:r>
+              <a:rPr lang="en-US" sz="1250" i="1" dirty="0">
+                <a:solidFill>
+                  <a:srgbClr val="7C6B73"/>
+                </a:solidFill>
+                <a:latin typeface="Calibri" pitchFamily="34" charset="0"/>
+                <a:ea typeface="Calibri" pitchFamily="34" charset="-122"/>
+                <a:cs typeface="Calibri" pitchFamily="34" charset="-120"/>
+              </a:rPr>
+              <a:t>The framework adapts to the territory: an importer, an input distributor or a growers' group can lead the partnership.</a:t>
+            </a:r>
+            <a:endParaRPr lang="en-US" sz="1250" dirty="0"/>
+          </a:p>
+        </p:txBody>
+      </p:sp>
+      <p:sp>
+        <p:nvSpPr>
+          <p:cNvPr id="25" name="Text 23"/>
+          <p:cNvSpPr txBox="1"/>
+          <p:nvPr/>
+        </p:nvSpPr>
+        <p:spPr>
+          <a:xfrm>
+            <a:off x="502920" y="6382512"/>
+            <a:ext cx="8229600" cy="274320"/>
+          </a:xfrm>
+          <a:prstGeom prst="rect">
+            <a:avLst/>
+          </a:prstGeom>
+          <a:noFill/>
+          <a:ln/>
+        </p:spPr>
+        <p:txBody>
+          <a:bodyPr wrap="square" lIns="0" tIns="0" rIns="0" bIns="0" rtlCol="0" anchor="ctr"/>
+          <a:lstStyle/>
+          <a:p>
+            <a:pPr algn="l" indent="0" marL="0">
+              <a:buNone/>
+            </a:pPr>
+            <a:r>
+              <a:rPr lang="en-US" sz="950" dirty="0">
+                <a:solidFill>
+                  <a:srgbClr val="7C6B73">
+                    <a:alpha val="80000"/>
+                  </a:srgbClr>
+                </a:solidFill>
+                <a:latin typeface="Calibri" pitchFamily="34" charset="0"/>
+                <a:ea typeface="Calibri" pitchFamily="34" charset="-122"/>
+                <a:cs typeface="Calibri" pitchFamily="34" charset="-120"/>
+              </a:rPr>
+              <a:t>Green Solutions · South Africa market dossier</a:t>
+            </a:r>
+            <a:endParaRPr lang="en-US" sz="950" dirty="0"/>
+          </a:p>
+        </p:txBody>
+      </p:sp>
+      <p:sp>
+        <p:nvSpPr>
+          <p:cNvPr id="26" name="Text 24"/>
+          <p:cNvSpPr txBox="1"/>
+          <p:nvPr/>
+        </p:nvSpPr>
+        <p:spPr>
+          <a:xfrm>
+            <a:off x="11140135" y="6382512"/>
+            <a:ext cx="548640" cy="274320"/>
+          </a:xfrm>
+          <a:prstGeom prst="rect">
+            <a:avLst/>
+          </a:prstGeom>
+          <a:noFill/>
+          <a:ln/>
+        </p:spPr>
+        <p:txBody>
+          <a:bodyPr wrap="square" lIns="0" tIns="0" rIns="0" bIns="0" rtlCol="0" anchor="ctr"/>
+          <a:lstStyle/>
+          <a:p>
+            <a:pPr algn="r" indent="0" marL="0">
+              <a:buNone/>
+            </a:pPr>
+            <a:r>
+              <a:rPr lang="en-US" sz="950" dirty="0">
+                <a:solidFill>
+                  <a:srgbClr val="7C6B73">
+                    <a:alpha val="80000"/>
+                  </a:srgbClr>
+                </a:solidFill>
+                <a:latin typeface="Calibri" pitchFamily="34" charset="0"/>
+                <a:ea typeface="Calibri" pitchFamily="34" charset="-122"/>
+                <a:cs typeface="Calibri" pitchFamily="34" charset="-120"/>
+              </a:rPr>
+              <a:t>14</a:t>
+            </a:r>
+            <a:endParaRPr lang="en-US" sz="950" dirty="0"/>
+          </a:p>
+        </p:txBody>
+      </p:sp>
+    </p:spTree>
+  </p:cSld>
+  <p:clrMapOvr>
+    <a:masterClrMapping/>
+  </p:clrMapOvr>
+</p:sld>
+</file>
+
+<file path=ppt/slides/slide16.xml><?xml version="1.0" encoding="utf-8"?>
+<p:sld xmlns:a="http://schemas.openxmlformats.org/drawingml/2006/main" xmlns:r="http://schemas.openxmlformats.org/officeDocument/2006/relationships" xmlns:p="http://schemas.openxmlformats.org/presentationml/2006/main">
+  <p:cSld name="Slide 16">
+    <p:bg>
+      <p:bgPr>
+        <a:solidFill>
+          <a:srgbClr val="FCFAFA"/>
+        </a:solidFill>
+      </p:bgPr>
+    </p:bg>
+    <p:spTree>
+      <p:nvGrpSpPr>
+        <p:cNvPr id="1" name=""/>
+        <p:cNvGrpSpPr/>
+        <p:nvPr/>
+      </p:nvGrpSpPr>
+      <p:grpSpPr>
+        <a:xfrm>
+          <a:off x="0" y="0"/>
+          <a:ext cx="0" cy="0"/>
+          <a:chOff x="0" y="0"/>
+          <a:chExt cx="0" cy="0"/>
+        </a:xfrm>
+      </p:grpSpPr>
+      <p:sp>
+        <p:nvSpPr>
+          <p:cNvPr id="2" name="Text 0"/>
+          <p:cNvSpPr txBox="1"/>
+          <p:nvPr/>
+        </p:nvSpPr>
+        <p:spPr>
+          <a:xfrm>
+            <a:off x="594360" y="411480"/>
+            <a:ext cx="10515600" cy="274320"/>
+          </a:xfrm>
+          <a:prstGeom prst="rect">
+            <a:avLst/>
+          </a:prstGeom>
+          <a:noFill/>
+          <a:ln/>
+        </p:spPr>
+        <p:txBody>
+          <a:bodyPr wrap="square" lIns="0" tIns="0" rIns="0" bIns="0" rtlCol="0" anchor="ctr"/>
+          <a:lstStyle/>
+          <a:p>
+            <a:pPr algn="l" indent="0" marL="0">
+              <a:buNone/>
+            </a:pPr>
+            <a:r>
+              <a:rPr lang="en-US" sz="1150" b="1" spc="200" kern="0" dirty="0">
+                <a:solidFill>
+                  <a:srgbClr val="C9A227"/>
+                </a:solidFill>
+                <a:latin typeface="Calibri" pitchFamily="34" charset="0"/>
+                <a:ea typeface="Calibri" pitchFamily="34" charset="-122"/>
+                <a:cs typeface="Calibri" pitchFamily="34" charset="-120"/>
+              </a:rPr>
+              <a:t>WHAT TO ANTICIPATE</a:t>
+            </a:r>
+            <a:endParaRPr lang="en-US" sz="1150" dirty="0"/>
+          </a:p>
+        </p:txBody>
+      </p:sp>
+      <p:sp>
+        <p:nvSpPr>
+          <p:cNvPr id="3" name="Text 1"/>
+          <p:cNvSpPr txBox="1"/>
+          <p:nvPr/>
+        </p:nvSpPr>
+        <p:spPr>
+          <a:xfrm>
+            <a:off x="594360" y="731520"/>
+            <a:ext cx="10881360" cy="731520"/>
+          </a:xfrm>
+          <a:prstGeom prst="rect">
+            <a:avLst/>
+          </a:prstGeom>
+          <a:noFill/>
+          <a:ln/>
+        </p:spPr>
+        <p:txBody>
+          <a:bodyPr wrap="square" lIns="0" tIns="0" rIns="0" bIns="0" rtlCol="0" anchor="ctr"/>
+          <a:lstStyle/>
+          <a:p>
+            <a:pPr algn="l" indent="0" marL="0">
+              <a:buNone/>
+            </a:pPr>
+            <a:r>
+              <a:rPr lang="en-US" sz="3000" b="1" dirty="0">
+                <a:solidFill>
+                  <a:srgbClr val="3F162A"/>
+                </a:solidFill>
+                <a:latin typeface="Cambria" pitchFamily="34" charset="0"/>
+                <a:ea typeface="Cambria" pitchFamily="34" charset="-122"/>
+                <a:cs typeface="Cambria" pitchFamily="34" charset="-120"/>
+              </a:rPr>
+              <a:t>Identified risks and our answers</a:t>
+            </a:r>
+            <a:endParaRPr lang="en-US" sz="3000" dirty="0"/>
+          </a:p>
+        </p:txBody>
+      </p:sp>
+      <p:sp>
+        <p:nvSpPr>
+          <p:cNvPr id="4" name="Text 2"/>
+          <p:cNvSpPr txBox="1"/>
+          <p:nvPr/>
+        </p:nvSpPr>
+        <p:spPr>
+          <a:xfrm>
+            <a:off x="594360" y="1783080"/>
+            <a:ext cx="5227168" cy="411480"/>
+          </a:xfrm>
+          <a:prstGeom prst="rect">
+            <a:avLst/>
+          </a:prstGeom>
+          <a:noFill/>
+          <a:ln/>
+        </p:spPr>
+        <p:txBody>
+          <a:bodyPr wrap="square" lIns="0" tIns="0" rIns="0" bIns="0" rtlCol="0" anchor="ctr"/>
+          <a:lstStyle/>
+          <a:p>
+            <a:pPr algn="l" indent="0" marL="0">
+              <a:buNone/>
+            </a:pPr>
+            <a:r>
+              <a:rPr lang="en-US" sz="1600" b="1" dirty="0">
+                <a:solidFill>
+                  <a:srgbClr val="6B2A44"/>
+                </a:solidFill>
+                <a:latin typeface="Cambria" pitchFamily="34" charset="0"/>
+                <a:ea typeface="Cambria" pitchFamily="34" charset="-122"/>
+                <a:cs typeface="Cambria" pitchFamily="34" charset="-120"/>
+              </a:rPr>
+              <a:t>Risks</a:t>
+            </a:r>
+            <a:endParaRPr lang="en-US" sz="1600" dirty="0"/>
+          </a:p>
+        </p:txBody>
+      </p:sp>
+      <p:sp>
+        <p:nvSpPr>
+          <p:cNvPr id="5" name="Text 3"/>
+          <p:cNvSpPr txBox="1"/>
+          <p:nvPr/>
+        </p:nvSpPr>
+        <p:spPr>
+          <a:xfrm>
+            <a:off x="594360" y="2286000"/>
+            <a:ext cx="5227168" cy="2468880"/>
+          </a:xfrm>
+          <a:prstGeom prst="rect">
+            <a:avLst/>
+          </a:prstGeom>
+          <a:noFill/>
+          <a:ln/>
+        </p:spPr>
+        <p:txBody>
+          <a:bodyPr wrap="square" lIns="0" tIns="0" rIns="0" bIns="0" rtlCol="0" anchor="t"/>
+          <a:lstStyle/>
+          <a:p>
+            <a:pPr algn="l" marL="342900" indent="-342900">
+              <a:lnSpc>
+                <a:spcPct val="122000"/>
+              </a:lnSpc>
+              <a:spcAft>
+                <a:spcPts val="1000"/>
+              </a:spcAft>
+              <a:buSzPct val="100000"/>
+              <a:buChar char="•"/>
+            </a:pPr>
+            <a:r>
+              <a:rPr lang="en-US" sz="1350" dirty="0">
+                <a:solidFill>
+                  <a:srgbClr val="3F3138"/>
+                </a:solidFill>
+                <a:latin typeface="Calibri" pitchFamily="34" charset="0"/>
+                <a:ea typeface="Calibri" pitchFamily="34" charset="-122"/>
+                <a:cs typeface="Calibri" pitchFamily="34" charset="-120"/>
+              </a:rPr>
+              <a:t>Rainfall variability: one good La Niña season is enough to mask the value of the product.</a:t>
+            </a:r>
+            <a:endParaRPr lang="en-US" sz="1350" dirty="0"/>
+          </a:p>
+          <a:p>
+            <a:pPr algn="l" marL="342900" indent="-342900">
+              <a:lnSpc>
+                <a:spcPct val="122000"/>
+              </a:lnSpc>
+              <a:spcAft>
+                <a:spcPts val="1000"/>
+              </a:spcAft>
+              <a:buSzPct val="100000"/>
+              <a:buChar char="•"/>
+            </a:pPr>
+            <a:r>
+              <a:rPr lang="en-US" sz="1350" dirty="0">
+                <a:solidFill>
+                  <a:srgbClr val="3F3138"/>
+                </a:solidFill>
+                <a:latin typeface="Calibri" pitchFamily="34" charset="0"/>
+                <a:ea typeface="Calibri" pitchFamily="34" charset="-122"/>
+                <a:cs typeface="Calibri" pitchFamily="34" charset="-120"/>
+              </a:rPr>
+              <a:t>Registration: fertilisers and soil amendments fall under Act 36 of 1947 and must be registered before commercial sale.</a:t>
+            </a:r>
+            <a:endParaRPr lang="en-US" sz="1350" dirty="0"/>
+          </a:p>
+          <a:p>
+            <a:pPr algn="l" marL="342900" indent="-342900">
+              <a:lnSpc>
+                <a:spcPct val="122000"/>
+              </a:lnSpc>
+              <a:spcAft>
+                <a:spcPts val="1000"/>
+              </a:spcAft>
+              <a:buSzPct val="100000"/>
+              <a:buChar char="•"/>
+            </a:pPr>
+            <a:r>
+              <a:rPr lang="en-US" sz="1350" dirty="0">
+                <a:solidFill>
+                  <a:srgbClr val="3F3138"/>
+                </a:solidFill>
+                <a:latin typeface="Calibri" pitchFamily="34" charset="0"/>
+                <a:ea typeface="Calibri" pitchFamily="34" charset="-122"/>
+                <a:cs typeface="Calibri" pitchFamily="34" charset="-120"/>
+              </a:rPr>
+              <a:t>The memory of cheap sodium-based polymers, which left a poor reputation in several regions.</a:t>
+            </a:r>
+            <a:endParaRPr lang="en-US" sz="1350" dirty="0"/>
+          </a:p>
+          <a:p>
+            <a:pPr algn="l" marL="342900" indent="-342900">
+              <a:lnSpc>
+                <a:spcPct val="122000"/>
+              </a:lnSpc>
+              <a:spcAft>
+                <a:spcPts val="1000"/>
+              </a:spcAft>
+              <a:buSzPct val="100000"/>
+              <a:buChar char="•"/>
+            </a:pPr>
+            <a:r>
+              <a:rPr lang="en-US" sz="1350" dirty="0">
+                <a:solidFill>
+                  <a:srgbClr val="3F3138"/>
+                </a:solidFill>
+                <a:latin typeface="Calibri" pitchFamily="34" charset="0"/>
+                <a:ea typeface="Calibri" pitchFamily="34" charset="-122"/>
+                <a:cs typeface="Calibri" pitchFamily="34" charset="-120"/>
+              </a:rPr>
+              <a:t>Farm cash flow after successive droughts, high input costs and a rand that raises the price of every imported input.</a:t>
+            </a:r>
+            <a:endParaRPr lang="en-US" sz="1350" dirty="0"/>
+          </a:p>
+        </p:txBody>
+      </p:sp>
+      <p:sp>
+        <p:nvSpPr>
+          <p:cNvPr id="6" name="Text 4"/>
+          <p:cNvSpPr txBox="1"/>
+          <p:nvPr/>
+        </p:nvSpPr>
+        <p:spPr>
+          <a:xfrm>
+            <a:off x="6370168" y="1783080"/>
+            <a:ext cx="5227168" cy="411480"/>
+          </a:xfrm>
+          <a:prstGeom prst="rect">
+            <a:avLst/>
+          </a:prstGeom>
+          <a:noFill/>
+          <a:ln/>
+        </p:spPr>
+        <p:txBody>
+          <a:bodyPr wrap="square" lIns="0" tIns="0" rIns="0" bIns="0" rtlCol="0" anchor="ctr"/>
+          <a:lstStyle/>
+          <a:p>
+            <a:pPr algn="l" indent="0" marL="0">
+              <a:buNone/>
+            </a:pPr>
+            <a:r>
+              <a:rPr lang="en-US" sz="1600" b="1" dirty="0">
+                <a:solidFill>
+                  <a:srgbClr val="6B2A44"/>
+                </a:solidFill>
+                <a:latin typeface="Cambria" pitchFamily="34" charset="0"/>
+                <a:ea typeface="Cambria" pitchFamily="34" charset="-122"/>
+                <a:cs typeface="Cambria" pitchFamily="34" charset="-120"/>
+              </a:rPr>
+              <a:t>Our answers</a:t>
+            </a:r>
+            <a:endParaRPr lang="en-US" sz="1600" dirty="0"/>
+          </a:p>
+        </p:txBody>
+      </p:sp>
+      <p:sp>
+        <p:nvSpPr>
+          <p:cNvPr id="7" name="Text 5"/>
+          <p:cNvSpPr txBox="1"/>
+          <p:nvPr/>
+        </p:nvSpPr>
+        <p:spPr>
+          <a:xfrm>
+            <a:off x="6370168" y="2286000"/>
+            <a:ext cx="5227168" cy="2468880"/>
+          </a:xfrm>
+          <a:prstGeom prst="rect">
+            <a:avLst/>
+          </a:prstGeom>
+          <a:noFill/>
+          <a:ln/>
+        </p:spPr>
+        <p:txBody>
+          <a:bodyPr wrap="square" lIns="0" tIns="0" rIns="0" bIns="0" rtlCol="0" anchor="t"/>
+          <a:lstStyle/>
+          <a:p>
+            <a:pPr algn="l" marL="342900" indent="-342900">
+              <a:lnSpc>
+                <a:spcPct val="122000"/>
+              </a:lnSpc>
+              <a:spcAft>
+                <a:spcPts val="1000"/>
+              </a:spcAft>
+              <a:buSzPct val="100000"/>
+              <a:buChar char="•"/>
+            </a:pPr>
+            <a:r>
+              <a:rPr lang="en-US" sz="1350" dirty="0">
+                <a:solidFill>
+                  <a:srgbClr val="3F3138"/>
+                </a:solidFill>
+                <a:latin typeface="Calibri" pitchFamily="34" charset="0"/>
+                <a:ea typeface="Calibri" pitchFamily="34" charset="-122"/>
+                <a:cs typeface="Calibri" pitchFamily="34" charset="-120"/>
+              </a:rPr>
+              <a:t>Run the trial over a full season against a control block, so the gain is measurable even in a favourable year.</a:t>
+            </a:r>
+            <a:endParaRPr lang="en-US" sz="1350" dirty="0"/>
+          </a:p>
+          <a:p>
+            <a:pPr algn="l" marL="342900" indent="-342900">
+              <a:lnSpc>
+                <a:spcPct val="122000"/>
+              </a:lnSpc>
+              <a:spcAft>
+                <a:spcPts val="1000"/>
+              </a:spcAft>
+              <a:buSzPct val="100000"/>
+              <a:buChar char="•"/>
+            </a:pPr>
+            <a:r>
+              <a:rPr lang="en-US" sz="1350" dirty="0">
+                <a:solidFill>
+                  <a:srgbClr val="3F3138"/>
+                </a:solidFill>
+                <a:latin typeface="Calibri" pitchFamily="34" charset="0"/>
+                <a:ea typeface="Calibri" pitchFamily="34" charset="-122"/>
+                <a:cs typeface="Calibri" pitchFamily="34" charset="-120"/>
+              </a:rPr>
+              <a:t>Open the registration file in parallel with the first trials rather than after them.</a:t>
+            </a:r>
+            <a:endParaRPr lang="en-US" sz="1350" dirty="0"/>
+          </a:p>
+          <a:p>
+            <a:pPr algn="l" marL="342900" indent="-342900">
+              <a:lnSpc>
+                <a:spcPct val="122000"/>
+              </a:lnSpc>
+              <a:spcAft>
+                <a:spcPts val="1000"/>
+              </a:spcAft>
+              <a:buSzPct val="100000"/>
+              <a:buChar char="•"/>
+            </a:pPr>
+            <a:r>
+              <a:rPr lang="en-US" sz="1350" dirty="0">
+                <a:solidFill>
+                  <a:srgbClr val="3F3138"/>
+                </a:solidFill>
+                <a:latin typeface="Calibri" pitchFamily="34" charset="0"/>
+                <a:ea typeface="Calibri" pitchFamily="34" charset="-122"/>
+                <a:cs typeface="Calibri" pitchFamily="34" charset="-120"/>
+              </a:rPr>
+              <a:t>Document the formulation: potassium, never sodium, and compatible with food crops.</a:t>
+            </a:r>
+            <a:endParaRPr lang="en-US" sz="1350" dirty="0"/>
+          </a:p>
+          <a:p>
+            <a:pPr algn="l" marL="342900" indent="-342900">
+              <a:lnSpc>
+                <a:spcPct val="122000"/>
+              </a:lnSpc>
+              <a:spcAft>
+                <a:spcPts val="1000"/>
+              </a:spcAft>
+              <a:buSzPct val="100000"/>
+              <a:buChar char="•"/>
+            </a:pPr>
+            <a:r>
+              <a:rPr lang="en-US" sz="1350" dirty="0">
+                <a:solidFill>
+                  <a:srgbClr val="3F3138"/>
+                </a:solidFill>
+                <a:latin typeface="Calibri" pitchFamily="34" charset="0"/>
+                <a:ea typeface="Calibri" pitchFamily="34" charset="-122"/>
+                <a:cs typeface="Calibri" pitchFamily="34" charset="-120"/>
+              </a:rPr>
+              <a:t>Spread the commitment: a useful life of 3 to 4 years amortises the cost over several seasons.</a:t>
+            </a:r>
+            <a:endParaRPr lang="en-US" sz="1350" dirty="0"/>
+          </a:p>
+        </p:txBody>
+      </p:sp>
+      <p:sp>
+        <p:nvSpPr>
+          <p:cNvPr id="8" name="Shape 6"/>
+          <p:cNvSpPr/>
+          <p:nvPr/>
+        </p:nvSpPr>
+        <p:spPr>
+          <a:xfrm>
+            <a:off x="594360" y="4846320"/>
+            <a:ext cx="11002975" cy="960120"/>
+          </a:xfrm>
+          <a:prstGeom prst="roundRect">
+            <a:avLst>
+              <a:gd name="adj" fmla="val 7619"/>
+            </a:avLst>
+          </a:prstGeom>
+          <a:solidFill>
+            <a:srgbClr val="F5EFF1"/>
+          </a:solidFill>
+          <a:ln w="9525">
+            <a:solidFill>
+              <a:srgbClr val="E5D9DE"/>
+            </a:solidFill>
+            <a:prstDash val="solid"/>
+          </a:ln>
+        </p:spPr>
+      </p:sp>
+      <p:sp>
+        <p:nvSpPr>
+          <p:cNvPr id="9" name="Text 7"/>
+          <p:cNvSpPr txBox="1"/>
+          <p:nvPr/>
+        </p:nvSpPr>
+        <p:spPr>
+          <a:xfrm>
+            <a:off x="822960" y="4983480"/>
+            <a:ext cx="10545775" cy="713232"/>
+          </a:xfrm>
+          <a:prstGeom prst="rect">
+            <a:avLst/>
+          </a:prstGeom>
+          <a:noFill/>
+          <a:ln/>
+        </p:spPr>
+        <p:txBody>
+          <a:bodyPr wrap="square" lIns="0" tIns="0" rIns="0" bIns="0" rtlCol="0" anchor="t"/>
+          <a:lstStyle/>
+          <a:p>
+            <a:pPr algn="l" indent="0" marL="0">
+              <a:lnSpc>
+                <a:spcPct val="118000"/>
+              </a:lnSpc>
+              <a:buNone/>
+            </a:pPr>
+            <a:r>
+              <a:rPr lang="en-US" sz="1100" dirty="0">
+                <a:solidFill>
+                  <a:srgbClr val="7C6B73"/>
+                </a:solidFill>
+                <a:latin typeface="Calibri" pitchFamily="34" charset="0"/>
+                <a:ea typeface="Calibri" pitchFamily="34" charset="-122"/>
+                <a:cs typeface="Calibri" pitchFamily="34" charset="-120"/>
+              </a:rPr>
+              <a:t>Acrylamide analysis (Polymex laboratory, ISO 9001, content below 3.0 µg/g) and REACH / SVHC screening (SGS) are available on request, together with the SOHISCERT certificate valid until 4 September 2027.</a:t>
+            </a:r>
+            <a:endParaRPr lang="en-US" sz="1100" dirty="0"/>
+          </a:p>
+        </p:txBody>
+      </p:sp>
+      <p:sp>
+        <p:nvSpPr>
+          <p:cNvPr id="10" name="Text 8"/>
+          <p:cNvSpPr txBox="1"/>
+          <p:nvPr/>
+        </p:nvSpPr>
+        <p:spPr>
+          <a:xfrm>
+            <a:off x="502920" y="6382512"/>
+            <a:ext cx="8229600" cy="274320"/>
+          </a:xfrm>
+          <a:prstGeom prst="rect">
+            <a:avLst/>
+          </a:prstGeom>
+          <a:noFill/>
+          <a:ln/>
+        </p:spPr>
+        <p:txBody>
+          <a:bodyPr wrap="square" lIns="0" tIns="0" rIns="0" bIns="0" rtlCol="0" anchor="ctr"/>
+          <a:lstStyle/>
+          <a:p>
+            <a:pPr algn="l" indent="0" marL="0">
+              <a:buNone/>
+            </a:pPr>
+            <a:r>
+              <a:rPr lang="en-US" sz="950" dirty="0">
+                <a:solidFill>
+                  <a:srgbClr val="7C6B73">
+                    <a:alpha val="80000"/>
+                  </a:srgbClr>
+                </a:solidFill>
+                <a:latin typeface="Calibri" pitchFamily="34" charset="0"/>
+                <a:ea typeface="Calibri" pitchFamily="34" charset="-122"/>
+                <a:cs typeface="Calibri" pitchFamily="34" charset="-120"/>
+              </a:rPr>
+              <a:t>Green Solutions · South Africa market dossier</a:t>
+            </a:r>
+            <a:endParaRPr lang="en-US" sz="950" dirty="0"/>
+          </a:p>
+        </p:txBody>
+      </p:sp>
+      <p:sp>
+        <p:nvSpPr>
+          <p:cNvPr id="11" name="Text 9"/>
+          <p:cNvSpPr txBox="1"/>
+          <p:nvPr/>
+        </p:nvSpPr>
+        <p:spPr>
+          <a:xfrm>
+            <a:off x="11140135" y="6382512"/>
+            <a:ext cx="548640" cy="274320"/>
+          </a:xfrm>
+          <a:prstGeom prst="rect">
+            <a:avLst/>
+          </a:prstGeom>
+          <a:noFill/>
+          <a:ln/>
+        </p:spPr>
+        <p:txBody>
+          <a:bodyPr wrap="square" lIns="0" tIns="0" rIns="0" bIns="0" rtlCol="0" anchor="ctr"/>
+          <a:lstStyle/>
+          <a:p>
+            <a:pPr algn="r" indent="0" marL="0">
+              <a:buNone/>
+            </a:pPr>
+            <a:r>
+              <a:rPr lang="en-US" sz="950" dirty="0">
+                <a:solidFill>
+                  <a:srgbClr val="7C6B73">
+                    <a:alpha val="80000"/>
+                  </a:srgbClr>
+                </a:solidFill>
+                <a:latin typeface="Calibri" pitchFamily="34" charset="0"/>
+                <a:ea typeface="Calibri" pitchFamily="34" charset="-122"/>
+                <a:cs typeface="Calibri" pitchFamily="34" charset="-120"/>
+              </a:rPr>
+              <a:t>15</a:t>
+            </a:r>
+            <a:endParaRPr lang="en-US" sz="950" dirty="0"/>
+          </a:p>
+        </p:txBody>
+      </p:sp>
+    </p:spTree>
+  </p:cSld>
+  <p:clrMapOvr>
+    <a:masterClrMapping/>
+  </p:clrMapOvr>
+</p:sld>
+</file>
+
+<file path=ppt/slides/slide17.xml><?xml version="1.0" encoding="utf-8"?>
+<p:sld xmlns:a="http://schemas.openxmlformats.org/drawingml/2006/main" xmlns:r="http://schemas.openxmlformats.org/officeDocument/2006/relationships" xmlns:p="http://schemas.openxmlformats.org/presentationml/2006/main">
+  <p:cSld name="Slide 17">
+    <p:bg>
+      <p:bgPr>
+        <a:solidFill>
+          <a:srgbClr val="FCFAFA"/>
+        </a:solidFill>
+      </p:bgPr>
+    </p:bg>
+    <p:spTree>
+      <p:nvGrpSpPr>
+        <p:cNvPr id="1" name=""/>
+        <p:cNvGrpSpPr/>
+        <p:nvPr/>
+      </p:nvGrpSpPr>
+      <p:grpSpPr>
+        <a:xfrm>
+          <a:off x="0" y="0"/>
+          <a:ext cx="0" cy="0"/>
+          <a:chOff x="0" y="0"/>
+          <a:chExt cx="0" cy="0"/>
+        </a:xfrm>
+      </p:grpSpPr>
+      <p:sp>
+        <p:nvSpPr>
+          <p:cNvPr id="2" name="Text 0"/>
+          <p:cNvSpPr txBox="1"/>
+          <p:nvPr/>
+        </p:nvSpPr>
+        <p:spPr>
+          <a:xfrm>
+            <a:off x="594360" y="411480"/>
+            <a:ext cx="10515600" cy="274320"/>
+          </a:xfrm>
+          <a:prstGeom prst="rect">
+            <a:avLst/>
+          </a:prstGeom>
+          <a:noFill/>
+          <a:ln/>
+        </p:spPr>
+        <p:txBody>
+          <a:bodyPr wrap="square" lIns="0" tIns="0" rIns="0" bIns="0" rtlCol="0" anchor="ctr"/>
+          <a:lstStyle/>
+          <a:p>
+            <a:pPr algn="l" indent="0" marL="0">
+              <a:buNone/>
+            </a:pPr>
+            <a:r>
+              <a:rPr lang="en-US" sz="1150" b="1" spc="200" kern="0" dirty="0">
+                <a:solidFill>
+                  <a:srgbClr val="C9A227"/>
+                </a:solidFill>
+                <a:latin typeface="Calibri" pitchFamily="34" charset="0"/>
+                <a:ea typeface="Calibri" pitchFamily="34" charset="-122"/>
+                <a:cs typeface="Calibri" pitchFamily="34" charset="-120"/>
+              </a:rPr>
+              <a:t>Sources</a:t>
+            </a:r>
+            <a:endParaRPr lang="en-US" sz="1150" dirty="0"/>
+          </a:p>
+        </p:txBody>
+      </p:sp>
+      <p:sp>
+        <p:nvSpPr>
+          <p:cNvPr id="3" name="Text 1"/>
+          <p:cNvSpPr txBox="1"/>
+          <p:nvPr/>
+        </p:nvSpPr>
+        <p:spPr>
+          <a:xfrm>
+            <a:off x="594360" y="731520"/>
+            <a:ext cx="10881360" cy="731520"/>
+          </a:xfrm>
+          <a:prstGeom prst="rect">
+            <a:avLst/>
+          </a:prstGeom>
+          <a:noFill/>
+          <a:ln/>
+        </p:spPr>
+        <p:txBody>
+          <a:bodyPr wrap="square" lIns="0" tIns="0" rIns="0" bIns="0" rtlCol="0" anchor="ctr"/>
+          <a:lstStyle/>
+          <a:p>
+            <a:pPr algn="l" indent="0" marL="0">
+              <a:buNone/>
+            </a:pPr>
+            <a:r>
+              <a:rPr lang="en-US" sz="3000" b="1" dirty="0">
+                <a:solidFill>
+                  <a:srgbClr val="3F162A"/>
+                </a:solidFill>
+                <a:latin typeface="Cambria" pitchFamily="34" charset="0"/>
+                <a:ea typeface="Cambria" pitchFamily="34" charset="-122"/>
+                <a:cs typeface="Cambria" pitchFamily="34" charset="-120"/>
+              </a:rPr>
+              <a:t>Sources and working assumptions</a:t>
+            </a:r>
+            <a:endParaRPr lang="en-US" sz="3000" dirty="0"/>
+          </a:p>
+        </p:txBody>
+      </p:sp>
+      <p:sp>
+        <p:nvSpPr>
+          <p:cNvPr id="4" name="Text 2"/>
+          <p:cNvSpPr txBox="1"/>
+          <p:nvPr/>
+        </p:nvSpPr>
+        <p:spPr>
+          <a:xfrm>
+            <a:off x="594360" y="1783080"/>
+            <a:ext cx="5227168" cy="411480"/>
+          </a:xfrm>
+          <a:prstGeom prst="rect">
+            <a:avLst/>
+          </a:prstGeom>
+          <a:noFill/>
+          <a:ln/>
+        </p:spPr>
+        <p:txBody>
+          <a:bodyPr wrap="square" lIns="0" tIns="0" rIns="0" bIns="0" rtlCol="0" anchor="ctr"/>
+          <a:lstStyle/>
+          <a:p>
+            <a:pPr algn="l" indent="0" marL="0">
+              <a:buNone/>
+            </a:pPr>
+            <a:r>
+              <a:rPr lang="en-US" sz="1600" b="1" dirty="0">
+                <a:solidFill>
+                  <a:srgbClr val="6B2A44"/>
+                </a:solidFill>
+                <a:latin typeface="Cambria" pitchFamily="34" charset="0"/>
+                <a:ea typeface="Cambria" pitchFamily="34" charset="-122"/>
+                <a:cs typeface="Cambria" pitchFamily="34" charset="-120"/>
+              </a:rPr>
+              <a:t>Main sources</a:t>
+            </a:r>
+            <a:endParaRPr lang="en-US" sz="1600" dirty="0"/>
+          </a:p>
+        </p:txBody>
+      </p:sp>
+      <p:sp>
+        <p:nvSpPr>
+          <p:cNvPr id="5" name="Text 3"/>
+          <p:cNvSpPr txBox="1"/>
+          <p:nvPr/>
+        </p:nvSpPr>
+        <p:spPr>
+          <a:xfrm>
+            <a:off x="594360" y="2286000"/>
+            <a:ext cx="5227168" cy="2468880"/>
+          </a:xfrm>
+          <a:prstGeom prst="rect">
+            <a:avLst/>
+          </a:prstGeom>
+          <a:noFill/>
+          <a:ln/>
+        </p:spPr>
+        <p:txBody>
+          <a:bodyPr wrap="square" lIns="0" tIns="0" rIns="0" bIns="0" rtlCol="0" anchor="t"/>
+          <a:lstStyle/>
+          <a:p>
+            <a:pPr algn="l" marL="342900" indent="-342900">
+              <a:lnSpc>
+                <a:spcPct val="122000"/>
+              </a:lnSpc>
+              <a:spcAft>
+                <a:spcPts val="1000"/>
+              </a:spcAft>
+              <a:buSzPct val="100000"/>
+              <a:buChar char="•"/>
+            </a:pPr>
+            <a:r>
+              <a:rPr lang="en-US" sz="1350" dirty="0">
+                <a:solidFill>
+                  <a:srgbClr val="3F3138"/>
+                </a:solidFill>
+                <a:latin typeface="Calibri" pitchFamily="34" charset="0"/>
+                <a:ea typeface="Calibri" pitchFamily="34" charset="-122"/>
+                <a:cs typeface="Calibri" pitchFamily="34" charset="-120"/>
+              </a:rPr>
+              <a:t>Statistics South Africa: GDP by industry, Quarterly Labour Force Survey, Census of Commercial Agriculture.</a:t>
+            </a:r>
+            <a:endParaRPr lang="en-US" sz="1350" dirty="0"/>
+          </a:p>
+          <a:p>
+            <a:pPr algn="l" marL="342900" indent="-342900">
+              <a:lnSpc>
+                <a:spcPct val="122000"/>
+              </a:lnSpc>
+              <a:spcAft>
+                <a:spcPts val="1000"/>
+              </a:spcAft>
+              <a:buSzPct val="100000"/>
+              <a:buChar char="•"/>
+            </a:pPr>
+            <a:r>
+              <a:rPr lang="en-US" sz="1350" dirty="0">
+                <a:solidFill>
+                  <a:srgbClr val="3F3138"/>
+                </a:solidFill>
+                <a:latin typeface="Calibri" pitchFamily="34" charset="0"/>
+                <a:ea typeface="Calibri" pitchFamily="34" charset="-122"/>
+                <a:cs typeface="Calibri" pitchFamily="34" charset="-120"/>
+              </a:rPr>
+              <a:t>Department of Agriculture: Abstract of Agricultural Statistics.</a:t>
+            </a:r>
+            <a:endParaRPr lang="en-US" sz="1350" dirty="0"/>
+          </a:p>
+          <a:p>
+            <a:pPr algn="l" marL="342900" indent="-342900">
+              <a:lnSpc>
+                <a:spcPct val="122000"/>
+              </a:lnSpc>
+              <a:spcAft>
+                <a:spcPts val="1000"/>
+              </a:spcAft>
+              <a:buSzPct val="100000"/>
+              <a:buChar char="•"/>
+            </a:pPr>
+            <a:r>
+              <a:rPr lang="en-US" sz="1350" dirty="0">
+                <a:solidFill>
+                  <a:srgbClr val="3F3138"/>
+                </a:solidFill>
+                <a:latin typeface="Calibri" pitchFamily="34" charset="0"/>
+                <a:ea typeface="Calibri" pitchFamily="34" charset="-122"/>
+                <a:cs typeface="Calibri" pitchFamily="34" charset="-120"/>
+              </a:rPr>
+              <a:t>Citrus Growers' Association; SAWIS for vineyard area.</a:t>
+            </a:r>
+            <a:endParaRPr lang="en-US" sz="1350" dirty="0"/>
+          </a:p>
+          <a:p>
+            <a:pPr algn="l" marL="342900" indent="-342900">
+              <a:lnSpc>
+                <a:spcPct val="122000"/>
+              </a:lnSpc>
+              <a:spcAft>
+                <a:spcPts val="1000"/>
+              </a:spcAft>
+              <a:buSzPct val="100000"/>
+              <a:buChar char="•"/>
+            </a:pPr>
+            <a:r>
+              <a:rPr lang="en-US" sz="1350" dirty="0">
+                <a:solidFill>
+                  <a:srgbClr val="3F3138"/>
+                </a:solidFill>
+                <a:latin typeface="Calibri" pitchFamily="34" charset="0"/>
+                <a:ea typeface="Calibri" pitchFamily="34" charset="-122"/>
+                <a:cs typeface="Calibri" pitchFamily="34" charset="-120"/>
+              </a:rPr>
+              <a:t>Department of Water and Sanitation; FAO (FAOSTAT, AQUASTAT); World Bank (WDI).</a:t>
+            </a:r>
+            <a:endParaRPr lang="en-US" sz="1350" dirty="0"/>
+          </a:p>
+        </p:txBody>
+      </p:sp>
+      <p:sp>
+        <p:nvSpPr>
+          <p:cNvPr id="6" name="Text 4"/>
+          <p:cNvSpPr txBox="1"/>
+          <p:nvPr/>
+        </p:nvSpPr>
+        <p:spPr>
+          <a:xfrm>
+            <a:off x="6370168" y="1783080"/>
+            <a:ext cx="5227168" cy="411480"/>
+          </a:xfrm>
+          <a:prstGeom prst="rect">
+            <a:avLst/>
+          </a:prstGeom>
+          <a:noFill/>
+          <a:ln/>
+        </p:spPr>
+        <p:txBody>
+          <a:bodyPr wrap="square" lIns="0" tIns="0" rIns="0" bIns="0" rtlCol="0" anchor="ctr"/>
+          <a:lstStyle/>
+          <a:p>
+            <a:pPr algn="l" indent="0" marL="0">
+              <a:buNone/>
+            </a:pPr>
+            <a:r>
+              <a:rPr lang="en-US" sz="1600" b="1" dirty="0">
+                <a:solidFill>
+                  <a:srgbClr val="6B2A44"/>
+                </a:solidFill>
+                <a:latin typeface="Cambria" pitchFamily="34" charset="0"/>
+                <a:ea typeface="Cambria" pitchFamily="34" charset="-122"/>
+                <a:cs typeface="Cambria" pitchFamily="34" charset="-120"/>
+              </a:rPr>
+              <a:t>Working assumptions</a:t>
+            </a:r>
+            <a:endParaRPr lang="en-US" sz="1600" dirty="0"/>
+          </a:p>
+        </p:txBody>
+      </p:sp>
+      <p:sp>
+        <p:nvSpPr>
+          <p:cNvPr id="7" name="Text 5"/>
+          <p:cNvSpPr txBox="1"/>
+          <p:nvPr/>
+        </p:nvSpPr>
+        <p:spPr>
+          <a:xfrm>
+            <a:off x="6370168" y="2286000"/>
+            <a:ext cx="5227168" cy="2468880"/>
+          </a:xfrm>
+          <a:prstGeom prst="rect">
+            <a:avLst/>
+          </a:prstGeom>
+          <a:noFill/>
+          <a:ln/>
+        </p:spPr>
+        <p:txBody>
+          <a:bodyPr wrap="square" lIns="0" tIns="0" rIns="0" bIns="0" rtlCol="0" anchor="t"/>
+          <a:lstStyle/>
+          <a:p>
+            <a:pPr algn="l" marL="342900" indent="-342900">
+              <a:lnSpc>
+                <a:spcPct val="122000"/>
+              </a:lnSpc>
+              <a:spcAft>
+                <a:spcPts val="1000"/>
+              </a:spcAft>
+              <a:buSzPct val="100000"/>
+              <a:buChar char="•"/>
+            </a:pPr>
+            <a:r>
+              <a:rPr lang="en-US" sz="1350" dirty="0">
+                <a:solidFill>
+                  <a:srgbClr val="3F3138"/>
+                </a:solidFill>
+                <a:latin typeface="Calibri" pitchFamily="34" charset="0"/>
+                <a:ea typeface="Calibri" pitchFamily="34" charset="-122"/>
+                <a:cs typeface="Calibri" pitchFamily="34" charset="-120"/>
+              </a:rPr>
+              <a:t>Figures are rounded orders of magnitude, taken from the latest public data available.</a:t>
+            </a:r>
+            <a:endParaRPr lang="en-US" sz="1350" dirty="0"/>
+          </a:p>
+          <a:p>
+            <a:pPr algn="l" marL="342900" indent="-342900">
+              <a:lnSpc>
+                <a:spcPct val="122000"/>
+              </a:lnSpc>
+              <a:spcAft>
+                <a:spcPts val="1000"/>
+              </a:spcAft>
+              <a:buSzPct val="100000"/>
+              <a:buChar char="•"/>
+            </a:pPr>
+            <a:r>
+              <a:rPr lang="en-US" sz="1350" dirty="0">
+                <a:solidFill>
+                  <a:srgbClr val="3F3138"/>
+                </a:solidFill>
+                <a:latin typeface="Calibri" pitchFamily="34" charset="0"/>
+                <a:ea typeface="Calibri" pitchFamily="34" charset="-122"/>
+                <a:cs typeface="Calibri" pitchFamily="34" charset="-120"/>
+              </a:rPr>
+              <a:t>Water and yield gains are indicative and vary with soil, climate and crop.</a:t>
+            </a:r>
+            <a:endParaRPr lang="en-US" sz="1350" dirty="0"/>
+          </a:p>
+          <a:p>
+            <a:pPr algn="l" marL="342900" indent="-342900">
+              <a:lnSpc>
+                <a:spcPct val="122000"/>
+              </a:lnSpc>
+              <a:spcAft>
+                <a:spcPts val="1000"/>
+              </a:spcAft>
+              <a:buSzPct val="100000"/>
+              <a:buChar char="•"/>
+            </a:pPr>
+            <a:r>
+              <a:rPr lang="en-US" sz="1350" dirty="0">
+                <a:solidFill>
+                  <a:srgbClr val="3F3138"/>
+                </a:solidFill>
+                <a:latin typeface="Calibri" pitchFamily="34" charset="0"/>
+                <a:ea typeface="Calibri" pitchFamily="34" charset="-122"/>
+                <a:cs typeface="Calibri" pitchFamily="34" charset="-120"/>
+              </a:rPr>
+              <a:t>Commercial working document: figures to be refreshed before any official submission.</a:t>
+            </a:r>
+            <a:endParaRPr lang="en-US" sz="1350" dirty="0"/>
+          </a:p>
+        </p:txBody>
+      </p:sp>
+      <p:sp>
+        <p:nvSpPr>
+          <p:cNvPr id="8" name="Shape 6"/>
+          <p:cNvSpPr/>
+          <p:nvPr/>
+        </p:nvSpPr>
+        <p:spPr>
+          <a:xfrm>
+            <a:off x="594360" y="4846320"/>
+            <a:ext cx="11002975" cy="960120"/>
+          </a:xfrm>
+          <a:prstGeom prst="roundRect">
+            <a:avLst>
+              <a:gd name="adj" fmla="val 7619"/>
+            </a:avLst>
+          </a:prstGeom>
+          <a:solidFill>
+            <a:srgbClr val="F5EFF1"/>
+          </a:solidFill>
+          <a:ln w="9525">
+            <a:solidFill>
+              <a:srgbClr val="E5D9DE"/>
+            </a:solidFill>
+            <a:prstDash val="solid"/>
+          </a:ln>
+        </p:spPr>
+      </p:sp>
+      <p:sp>
+        <p:nvSpPr>
+          <p:cNvPr id="9" name="Text 7"/>
+          <p:cNvSpPr txBox="1"/>
+          <p:nvPr/>
+        </p:nvSpPr>
+        <p:spPr>
+          <a:xfrm>
+            <a:off x="822960" y="4983480"/>
+            <a:ext cx="10545775" cy="713232"/>
+          </a:xfrm>
+          <a:prstGeom prst="rect">
+            <a:avLst/>
+          </a:prstGeom>
+          <a:noFill/>
+          <a:ln/>
+        </p:spPr>
+        <p:txBody>
+          <a:bodyPr wrap="square" lIns="0" tIns="0" rIns="0" bIns="0" rtlCol="0" anchor="t"/>
+          <a:lstStyle/>
+          <a:p>
+            <a:pPr algn="l" indent="0" marL="0">
+              <a:lnSpc>
+                <a:spcPct val="118000"/>
+              </a:lnSpc>
+              <a:buNone/>
+            </a:pPr>
+            <a:r>
+              <a:rPr lang="en-US" sz="1100" dirty="0">
+                <a:solidFill>
+                  <a:srgbClr val="7C6B73"/>
+                </a:solidFill>
+                <a:latin typeface="Calibri" pitchFamily="34" charset="0"/>
+                <a:ea typeface="Calibri" pitchFamily="34" charset="-122"/>
+                <a:cs typeface="Calibri" pitchFamily="34" charset="-120"/>
+              </a:rPr>
+              <a:t>Trial reports, certificates (SOHISCERT, Polymex and SGS analyses) and technical sheets: available on request.</a:t>
+            </a:r>
+            <a:endParaRPr lang="en-US" sz="1100" dirty="0"/>
+          </a:p>
+        </p:txBody>
+      </p:sp>
+      <p:sp>
+        <p:nvSpPr>
+          <p:cNvPr id="10" name="Text 8"/>
+          <p:cNvSpPr txBox="1"/>
+          <p:nvPr/>
+        </p:nvSpPr>
+        <p:spPr>
+          <a:xfrm>
+            <a:off x="502920" y="6382512"/>
+            <a:ext cx="8229600" cy="274320"/>
+          </a:xfrm>
+          <a:prstGeom prst="rect">
+            <a:avLst/>
+          </a:prstGeom>
+          <a:noFill/>
+          <a:ln/>
+        </p:spPr>
+        <p:txBody>
+          <a:bodyPr wrap="square" lIns="0" tIns="0" rIns="0" bIns="0" rtlCol="0" anchor="ctr"/>
+          <a:lstStyle/>
+          <a:p>
+            <a:pPr algn="l" indent="0" marL="0">
+              <a:buNone/>
+            </a:pPr>
+            <a:r>
+              <a:rPr lang="en-US" sz="950" dirty="0">
+                <a:solidFill>
+                  <a:srgbClr val="7C6B73">
+                    <a:alpha val="80000"/>
+                  </a:srgbClr>
+                </a:solidFill>
+                <a:latin typeface="Calibri" pitchFamily="34" charset="0"/>
+                <a:ea typeface="Calibri" pitchFamily="34" charset="-122"/>
+                <a:cs typeface="Calibri" pitchFamily="34" charset="-120"/>
+              </a:rPr>
+              <a:t>Green Solutions · South Africa market dossier</a:t>
+            </a:r>
+            <a:endParaRPr lang="en-US" sz="950" dirty="0"/>
+          </a:p>
+        </p:txBody>
+      </p:sp>
+      <p:sp>
+        <p:nvSpPr>
+          <p:cNvPr id="11" name="Text 9"/>
+          <p:cNvSpPr txBox="1"/>
+          <p:nvPr/>
+        </p:nvSpPr>
+        <p:spPr>
+          <a:xfrm>
+            <a:off x="11140135" y="6382512"/>
+            <a:ext cx="548640" cy="274320"/>
+          </a:xfrm>
+          <a:prstGeom prst="rect">
+            <a:avLst/>
+          </a:prstGeom>
+          <a:noFill/>
+          <a:ln/>
+        </p:spPr>
+        <p:txBody>
+          <a:bodyPr wrap="square" lIns="0" tIns="0" rIns="0" bIns="0" rtlCol="0" anchor="ctr"/>
+          <a:lstStyle/>
+          <a:p>
+            <a:pPr algn="r" indent="0" marL="0">
+              <a:buNone/>
+            </a:pPr>
+            <a:r>
+              <a:rPr lang="en-US" sz="950" dirty="0">
+                <a:solidFill>
+                  <a:srgbClr val="7C6B73">
+                    <a:alpha val="80000"/>
+                  </a:srgbClr>
+                </a:solidFill>
+                <a:latin typeface="Calibri" pitchFamily="34" charset="0"/>
+                <a:ea typeface="Calibri" pitchFamily="34" charset="-122"/>
+                <a:cs typeface="Calibri" pitchFamily="34" charset="-120"/>
+              </a:rPr>
+              <a:t>16</a:t>
+            </a:r>
+            <a:endParaRPr lang="en-US" sz="950" dirty="0"/>
+          </a:p>
+        </p:txBody>
+      </p:sp>
+    </p:spTree>
+  </p:cSld>
+  <p:clrMapOvr>
+    <a:masterClrMapping/>
+  </p:clrMapOvr>
+</p:sld>
+</file>
+
+<file path=ppt/slides/slide18.xml><?xml version="1.0" encoding="utf-8"?>
+<p:sld xmlns:a="http://schemas.openxmlformats.org/drawingml/2006/main" xmlns:r="http://schemas.openxmlformats.org/officeDocument/2006/relationships" xmlns:p="http://schemas.openxmlformats.org/presentationml/2006/main">
+  <p:cSld name="Slide 18">
     <p:spTree>
       <p:nvGrpSpPr>
         <p:cNvPr id="1" name=""/>
@@ -3944,7 +9643,7 @@
                 <a:ea typeface="Calibri" pitchFamily="34" charset="-122"/>
                 <a:cs typeface="Calibri" pitchFamily="34" charset="-120"/>
               </a:rPr>
-              <a:t>10</a:t>
+              <a:t>17</a:t>
             </a:r>
             <a:endParaRPr lang="en-US" sz="950" dirty="0"/>
           </a:p>
@@ -5423,7 +11122,7 @@
                 <a:ea typeface="Calibri" pitchFamily="34" charset="-122"/>
                 <a:cs typeface="Calibri" pitchFamily="34" charset="-120"/>
               </a:rPr>
-              <a:t>THE MAIN CROPS</a:t>
+              <a:t>ECONOMY AND FOOD SECURITY</a:t>
             </a:r>
             <a:endParaRPr lang="en-US" sz="1150" dirty="0"/>
           </a:p>
@@ -5462,42 +11161,26 @@
                 <a:ea typeface="Cambria" pitchFamily="34" charset="-122"/>
                 <a:cs typeface="Cambria" pitchFamily="34" charset="-120"/>
               </a:rPr>
-              <a:t>Five crops carry the volume and the value</a:t>
+              <a:t>A net food exporter with a two-speed farm economy</a:t>
             </a:r>
             <a:endParaRPr lang="en-US" sz="3000" dirty="0"/>
           </a:p>
         </p:txBody>
       </p:sp>
-      <p:graphicFrame>
-        <p:nvGraphicFramePr>
-          <p:cNvPr id="4" name="Chart 0" descr=""/>
-          <p:cNvGraphicFramePr/>
-          <p:nvPr/>
-        </p:nvGraphicFramePr>
-        <p:xfrm>
-          <a:off x="594360" y="1783080"/>
-          <a:ext cx="7360920" cy="3977640"/>
-        </p:xfrm>
-        <a:graphic xmlns:a="http://schemas.openxmlformats.org/drawingml/2006/main">
-          <a:graphicData uri="http://schemas.openxmlformats.org/drawingml/2006/chart">
-            <c:chart xmlns:c="http://schemas.openxmlformats.org/drawingml/2006/chart" r:id="rId1"/>
-          </a:graphicData>
-        </a:graphic>
-      </p:graphicFrame>
-      <p:sp>
-        <p:nvSpPr>
-          <p:cNvPr id="5" name="Shape 2"/>
+      <p:sp>
+        <p:nvSpPr>
+          <p:cNvPr id="4" name="Shape 2"/>
           <p:cNvSpPr/>
           <p:nvPr/>
         </p:nvSpPr>
         <p:spPr>
           <a:xfrm>
-            <a:off x="8275320" y="1783080"/>
-            <a:ext cx="3291840" cy="3977640"/>
+            <a:off x="594360" y="1874520"/>
+            <a:ext cx="2545004" cy="2514600"/>
           </a:xfrm>
           <a:prstGeom prst="roundRect">
             <a:avLst>
-              <a:gd name="adj" fmla="val 2778"/>
+              <a:gd name="adj" fmla="val 3636"/>
             </a:avLst>
           </a:prstGeom>
           <a:solidFill>
@@ -5513,14 +11196,14 @@
       </p:sp>
       <p:sp>
         <p:nvSpPr>
-          <p:cNvPr id="6" name="Text 3"/>
-          <p:cNvSpPr txBox="1"/>
-          <p:nvPr/>
-        </p:nvSpPr>
-        <p:spPr>
-          <a:xfrm>
-            <a:off x="8503920" y="2011680"/>
-            <a:ext cx="2834640" cy="457200"/>
+          <p:cNvPr id="5" name="Text 3"/>
+          <p:cNvSpPr txBox="1"/>
+          <p:nvPr/>
+        </p:nvSpPr>
+        <p:spPr>
+          <a:xfrm>
+            <a:off x="777240" y="2148840"/>
+            <a:ext cx="2179244" cy="960120"/>
           </a:xfrm>
           <a:prstGeom prst="rect">
             <a:avLst/>
@@ -5532,11 +11215,11 @@
           <a:bodyPr wrap="square" lIns="0" tIns="0" rIns="0" bIns="0" rtlCol="0" anchor="ctr"/>
           <a:lstStyle/>
           <a:p>
-            <a:pPr algn="l" indent="0" marL="0">
-              <a:buNone/>
-            </a:pPr>
-            <a:r>
-              <a:rPr lang="en-US" sz="1300" b="1" dirty="0">
+            <a:pPr algn="ctr" indent="0" marL="0">
+              <a:buNone/>
+            </a:pPr>
+            <a:r>
+              <a:rPr lang="en-US" sz="3800" b="1" dirty="0">
                 <a:solidFill>
                   <a:srgbClr val="6B2A44"/>
                 </a:solidFill>
@@ -5544,22 +11227,388 @@
                 <a:ea typeface="Cambria" pitchFamily="34" charset="-122"/>
                 <a:cs typeface="Cambria" pitchFamily="34" charset="-120"/>
               </a:rPr>
-              <a:t>Reading</a:t>
-            </a:r>
-            <a:endParaRPr lang="en-US" sz="1300" dirty="0"/>
-          </a:p>
-        </p:txBody>
-      </p:sp>
-      <p:sp>
-        <p:nvSpPr>
-          <p:cNvPr id="7" name="Text 4"/>
-          <p:cNvSpPr txBox="1"/>
-          <p:nvPr/>
-        </p:nvSpPr>
-        <p:spPr>
-          <a:xfrm>
-            <a:off x="8503920" y="2560320"/>
-            <a:ext cx="2834640" cy="3017520"/>
+              <a:t>No. 2</a:t>
+            </a:r>
+            <a:endParaRPr lang="en-US" sz="3800" dirty="0"/>
+          </a:p>
+        </p:txBody>
+      </p:sp>
+      <p:sp>
+        <p:nvSpPr>
+          <p:cNvPr id="6" name="Text 4"/>
+          <p:cNvSpPr txBox="1"/>
+          <p:nvPr/>
+        </p:nvSpPr>
+        <p:spPr>
+          <a:xfrm>
+            <a:off x="795528" y="3154680"/>
+            <a:ext cx="2142668" cy="1051560"/>
+          </a:xfrm>
+          <a:prstGeom prst="rect">
+            <a:avLst/>
+          </a:prstGeom>
+          <a:noFill/>
+          <a:ln/>
+        </p:spPr>
+        <p:txBody>
+          <a:bodyPr wrap="square" lIns="0" tIns="0" rIns="0" bIns="0" rtlCol="0" anchor="t"/>
+          <a:lstStyle/>
+          <a:p>
+            <a:pPr algn="ctr" indent="0" marL="0">
+              <a:lnSpc>
+                <a:spcPct val="118000"/>
+              </a:lnSpc>
+              <a:buNone/>
+            </a:pPr>
+            <a:r>
+              <a:rPr lang="en-US" sz="1250" dirty="0">
+                <a:solidFill>
+                  <a:srgbClr val="3F3138"/>
+                </a:solidFill>
+                <a:latin typeface="Calibri" pitchFamily="34" charset="0"/>
+                <a:ea typeface="Calibri" pitchFamily="34" charset="-122"/>
+                <a:cs typeface="Calibri" pitchFamily="34" charset="-120"/>
+              </a:rPr>
+              <a:t>exporter of fresh citrus in the world</a:t>
+            </a:r>
+            <a:endParaRPr lang="en-US" sz="1250" dirty="0"/>
+          </a:p>
+        </p:txBody>
+      </p:sp>
+      <p:sp>
+        <p:nvSpPr>
+          <p:cNvPr id="7" name="Shape 5"/>
+          <p:cNvSpPr/>
+          <p:nvPr/>
+        </p:nvSpPr>
+        <p:spPr>
+          <a:xfrm>
+            <a:off x="3413684" y="1874520"/>
+            <a:ext cx="2545004" cy="2514600"/>
+          </a:xfrm>
+          <a:prstGeom prst="roundRect">
+            <a:avLst>
+              <a:gd name="adj" fmla="val 3636"/>
+            </a:avLst>
+          </a:prstGeom>
+          <a:solidFill>
+            <a:srgbClr val="F5EFF1"/>
+          </a:solidFill>
+          <a:ln w="9525">
+            <a:solidFill>
+              <a:srgbClr val="E5D9DE"/>
+            </a:solidFill>
+            <a:prstDash val="solid"/>
+          </a:ln>
+        </p:spPr>
+      </p:sp>
+      <p:sp>
+        <p:nvSpPr>
+          <p:cNvPr id="8" name="Text 6"/>
+          <p:cNvSpPr txBox="1"/>
+          <p:nvPr/>
+        </p:nvSpPr>
+        <p:spPr>
+          <a:xfrm>
+            <a:off x="3596564" y="2148840"/>
+            <a:ext cx="2179244" cy="960120"/>
+          </a:xfrm>
+          <a:prstGeom prst="rect">
+            <a:avLst/>
+          </a:prstGeom>
+          <a:noFill/>
+          <a:ln/>
+        </p:spPr>
+        <p:txBody>
+          <a:bodyPr wrap="square" lIns="0" tIns="0" rIns="0" bIns="0" rtlCol="0" anchor="ctr"/>
+          <a:lstStyle/>
+          <a:p>
+            <a:pPr algn="ctr" indent="0" marL="0">
+              <a:buNone/>
+            </a:pPr>
+            <a:r>
+              <a:rPr lang="en-US" sz="3800" b="1" dirty="0">
+                <a:solidFill>
+                  <a:srgbClr val="6B2A44"/>
+                </a:solidFill>
+                <a:latin typeface="Cambria" pitchFamily="34" charset="0"/>
+                <a:ea typeface="Cambria" pitchFamily="34" charset="-122"/>
+                <a:cs typeface="Cambria" pitchFamily="34" charset="-120"/>
+              </a:rPr>
+              <a:t>≈ 0.9 M</a:t>
+            </a:r>
+            <a:endParaRPr lang="en-US" sz="3800" dirty="0"/>
+          </a:p>
+        </p:txBody>
+      </p:sp>
+      <p:sp>
+        <p:nvSpPr>
+          <p:cNvPr id="9" name="Text 7"/>
+          <p:cNvSpPr txBox="1"/>
+          <p:nvPr/>
+        </p:nvSpPr>
+        <p:spPr>
+          <a:xfrm>
+            <a:off x="3614852" y="3154680"/>
+            <a:ext cx="2142668" cy="1051560"/>
+          </a:xfrm>
+          <a:prstGeom prst="rect">
+            <a:avLst/>
+          </a:prstGeom>
+          <a:noFill/>
+          <a:ln/>
+        </p:spPr>
+        <p:txBody>
+          <a:bodyPr wrap="square" lIns="0" tIns="0" rIns="0" bIns="0" rtlCol="0" anchor="t"/>
+          <a:lstStyle/>
+          <a:p>
+            <a:pPr algn="ctr" indent="0" marL="0">
+              <a:lnSpc>
+                <a:spcPct val="118000"/>
+              </a:lnSpc>
+              <a:buNone/>
+            </a:pPr>
+            <a:r>
+              <a:rPr lang="en-US" sz="1250" dirty="0">
+                <a:solidFill>
+                  <a:srgbClr val="3F3138"/>
+                </a:solidFill>
+                <a:latin typeface="Calibri" pitchFamily="34" charset="0"/>
+                <a:ea typeface="Calibri" pitchFamily="34" charset="-122"/>
+                <a:cs typeface="Calibri" pitchFamily="34" charset="-120"/>
+              </a:rPr>
+              <a:t>people employed in primary agriculture</a:t>
+            </a:r>
+            <a:endParaRPr lang="en-US" sz="1250" dirty="0"/>
+          </a:p>
+        </p:txBody>
+      </p:sp>
+      <p:sp>
+        <p:nvSpPr>
+          <p:cNvPr id="10" name="Shape 8"/>
+          <p:cNvSpPr/>
+          <p:nvPr/>
+        </p:nvSpPr>
+        <p:spPr>
+          <a:xfrm>
+            <a:off x="6233008" y="1874520"/>
+            <a:ext cx="2545004" cy="2514600"/>
+          </a:xfrm>
+          <a:prstGeom prst="roundRect">
+            <a:avLst>
+              <a:gd name="adj" fmla="val 3636"/>
+            </a:avLst>
+          </a:prstGeom>
+          <a:solidFill>
+            <a:srgbClr val="F5EFF1"/>
+          </a:solidFill>
+          <a:ln w="9525">
+            <a:solidFill>
+              <a:srgbClr val="E5D9DE"/>
+            </a:solidFill>
+            <a:prstDash val="solid"/>
+          </a:ln>
+        </p:spPr>
+      </p:sp>
+      <p:sp>
+        <p:nvSpPr>
+          <p:cNvPr id="11" name="Text 9"/>
+          <p:cNvSpPr txBox="1"/>
+          <p:nvPr/>
+        </p:nvSpPr>
+        <p:spPr>
+          <a:xfrm>
+            <a:off x="6415888" y="2148840"/>
+            <a:ext cx="2179244" cy="960120"/>
+          </a:xfrm>
+          <a:prstGeom prst="rect">
+            <a:avLst/>
+          </a:prstGeom>
+          <a:noFill/>
+          <a:ln/>
+        </p:spPr>
+        <p:txBody>
+          <a:bodyPr wrap="square" lIns="0" tIns="0" rIns="0" bIns="0" rtlCol="0" anchor="ctr"/>
+          <a:lstStyle/>
+          <a:p>
+            <a:pPr algn="ctr" indent="0" marL="0">
+              <a:buNone/>
+            </a:pPr>
+            <a:r>
+              <a:rPr lang="en-US" sz="3800" b="1" dirty="0">
+                <a:solidFill>
+                  <a:srgbClr val="6B2A44"/>
+                </a:solidFill>
+                <a:latin typeface="Cambria" pitchFamily="34" charset="0"/>
+                <a:ea typeface="Cambria" pitchFamily="34" charset="-122"/>
+                <a:cs typeface="Cambria" pitchFamily="34" charset="-120"/>
+              </a:rPr>
+              <a:t>≈ 40,000</a:t>
+            </a:r>
+            <a:endParaRPr lang="en-US" sz="3800" dirty="0"/>
+          </a:p>
+        </p:txBody>
+      </p:sp>
+      <p:sp>
+        <p:nvSpPr>
+          <p:cNvPr id="12" name="Text 10"/>
+          <p:cNvSpPr txBox="1"/>
+          <p:nvPr/>
+        </p:nvSpPr>
+        <p:spPr>
+          <a:xfrm>
+            <a:off x="6434176" y="3154680"/>
+            <a:ext cx="2142668" cy="1051560"/>
+          </a:xfrm>
+          <a:prstGeom prst="rect">
+            <a:avLst/>
+          </a:prstGeom>
+          <a:noFill/>
+          <a:ln/>
+        </p:spPr>
+        <p:txBody>
+          <a:bodyPr wrap="square" lIns="0" tIns="0" rIns="0" bIns="0" rtlCol="0" anchor="t"/>
+          <a:lstStyle/>
+          <a:p>
+            <a:pPr algn="ctr" indent="0" marL="0">
+              <a:lnSpc>
+                <a:spcPct val="118000"/>
+              </a:lnSpc>
+              <a:buNone/>
+            </a:pPr>
+            <a:r>
+              <a:rPr lang="en-US" sz="1250" dirty="0">
+                <a:solidFill>
+                  <a:srgbClr val="3F3138"/>
+                </a:solidFill>
+                <a:latin typeface="Calibri" pitchFamily="34" charset="0"/>
+                <a:ea typeface="Calibri" pitchFamily="34" charset="-122"/>
+                <a:cs typeface="Calibri" pitchFamily="34" charset="-120"/>
+              </a:rPr>
+              <a:t>commercial farming units in the latest census</a:t>
+            </a:r>
+            <a:endParaRPr lang="en-US" sz="1250" dirty="0"/>
+          </a:p>
+        </p:txBody>
+      </p:sp>
+      <p:sp>
+        <p:nvSpPr>
+          <p:cNvPr id="13" name="Shape 11"/>
+          <p:cNvSpPr/>
+          <p:nvPr/>
+        </p:nvSpPr>
+        <p:spPr>
+          <a:xfrm>
+            <a:off x="9052331" y="1874520"/>
+            <a:ext cx="2545004" cy="2514600"/>
+          </a:xfrm>
+          <a:prstGeom prst="roundRect">
+            <a:avLst>
+              <a:gd name="adj" fmla="val 3636"/>
+            </a:avLst>
+          </a:prstGeom>
+          <a:solidFill>
+            <a:srgbClr val="F5EFF1"/>
+          </a:solidFill>
+          <a:ln w="9525">
+            <a:solidFill>
+              <a:srgbClr val="E5D9DE"/>
+            </a:solidFill>
+            <a:prstDash val="solid"/>
+          </a:ln>
+        </p:spPr>
+      </p:sp>
+      <p:sp>
+        <p:nvSpPr>
+          <p:cNvPr id="14" name="Text 12"/>
+          <p:cNvSpPr txBox="1"/>
+          <p:nvPr/>
+        </p:nvSpPr>
+        <p:spPr>
+          <a:xfrm>
+            <a:off x="9235211" y="2148840"/>
+            <a:ext cx="2179244" cy="960120"/>
+          </a:xfrm>
+          <a:prstGeom prst="rect">
+            <a:avLst/>
+          </a:prstGeom>
+          <a:noFill/>
+          <a:ln/>
+        </p:spPr>
+        <p:txBody>
+          <a:bodyPr wrap="square" lIns="0" tIns="0" rIns="0" bIns="0" rtlCol="0" anchor="ctr"/>
+          <a:lstStyle/>
+          <a:p>
+            <a:pPr algn="ctr" indent="0" marL="0">
+              <a:buNone/>
+            </a:pPr>
+            <a:r>
+              <a:rPr lang="en-US" sz="3800" b="1" dirty="0">
+                <a:solidFill>
+                  <a:srgbClr val="6B2A44"/>
+                </a:solidFill>
+                <a:latin typeface="Cambria" pitchFamily="34" charset="0"/>
+                <a:ea typeface="Cambria" pitchFamily="34" charset="-122"/>
+                <a:cs typeface="Cambria" pitchFamily="34" charset="-120"/>
+              </a:rPr>
+              <a:t>≈ 2.3 M</a:t>
+            </a:r>
+            <a:endParaRPr lang="en-US" sz="3800" dirty="0"/>
+          </a:p>
+        </p:txBody>
+      </p:sp>
+      <p:sp>
+        <p:nvSpPr>
+          <p:cNvPr id="15" name="Text 13"/>
+          <p:cNvSpPr txBox="1"/>
+          <p:nvPr/>
+        </p:nvSpPr>
+        <p:spPr>
+          <a:xfrm>
+            <a:off x="9253499" y="3154680"/>
+            <a:ext cx="2142668" cy="1051560"/>
+          </a:xfrm>
+          <a:prstGeom prst="rect">
+            <a:avLst/>
+          </a:prstGeom>
+          <a:noFill/>
+          <a:ln/>
+        </p:spPr>
+        <p:txBody>
+          <a:bodyPr wrap="square" lIns="0" tIns="0" rIns="0" bIns="0" rtlCol="0" anchor="t"/>
+          <a:lstStyle/>
+          <a:p>
+            <a:pPr algn="ctr" indent="0" marL="0">
+              <a:lnSpc>
+                <a:spcPct val="118000"/>
+              </a:lnSpc>
+              <a:buNone/>
+            </a:pPr>
+            <a:r>
+              <a:rPr lang="en-US" sz="1250" dirty="0">
+                <a:solidFill>
+                  <a:srgbClr val="3F3138"/>
+                </a:solidFill>
+                <a:latin typeface="Calibri" pitchFamily="34" charset="0"/>
+                <a:ea typeface="Calibri" pitchFamily="34" charset="-122"/>
+                <a:cs typeface="Calibri" pitchFamily="34" charset="-120"/>
+              </a:rPr>
+              <a:t>households farming on a small scale, mostly for their own food</a:t>
+            </a:r>
+            <a:endParaRPr lang="en-US" sz="1250" dirty="0"/>
+          </a:p>
+        </p:txBody>
+      </p:sp>
+      <p:sp>
+        <p:nvSpPr>
+          <p:cNvPr id="16" name="Text 14"/>
+          <p:cNvSpPr txBox="1"/>
+          <p:nvPr/>
+        </p:nvSpPr>
+        <p:spPr>
+          <a:xfrm>
+            <a:off x="594360" y="4709160"/>
+            <a:ext cx="11002975" cy="1097280"/>
           </a:xfrm>
           <a:prstGeom prst="rect">
             <a:avLst/>
@@ -5573,12 +11622,12 @@
           <a:p>
             <a:pPr algn="l" indent="0" marL="0">
               <a:lnSpc>
-                <a:spcPct val="125000"/>
+                <a:spcPct val="130000"/>
               </a:lnSpc>
               <a:buNone/>
             </a:pPr>
             <a:r>
-              <a:rPr lang="en-US" sz="1200" dirty="0">
+              <a:rPr lang="en-US" sz="1350" dirty="0">
                 <a:solidFill>
                   <a:srgbClr val="3F3138"/>
                 </a:solidFill>
@@ -5586,44 +11635,15 @@
                 <a:ea typeface="Calibri" pitchFamily="34" charset="-122"/>
                 <a:cs typeface="Calibri" pitchFamily="34" charset="-120"/>
               </a:rPr>
-              <a:t>Citrus and grapes are irrigated, export-bound and priced per carton: there, a litre saved converts into margin. The country ships about 2.6 million tonnes of citrus a year, second only to Spain.</a:t>
-            </a:r>
-            <a:endParaRPr lang="en-US" sz="1200" dirty="0"/>
-          </a:p>
-          <a:p>
-            <a:pPr algn="l" indent="0" marL="0">
-              <a:lnSpc>
-                <a:spcPct val="125000"/>
-              </a:lnSpc>
-              <a:buNone/>
-            </a:pPr>
-            <a:endParaRPr lang="en-US" sz="1200" dirty="0"/>
-          </a:p>
-          <a:p>
-            <a:pPr algn="l" indent="0" marL="0">
-              <a:lnSpc>
-                <a:spcPct val="125000"/>
-              </a:lnSpc>
-              <a:buNone/>
-            </a:pPr>
-            <a:r>
-              <a:rPr lang="en-US" sz="1200" dirty="0">
-                <a:solidFill>
-                  <a:srgbClr val="3F3138"/>
-                </a:solidFill>
-                <a:latin typeface="Calibri" pitchFamily="34" charset="0"/>
-                <a:ea typeface="Calibri" pitchFamily="34" charset="-122"/>
-                <a:cs typeface="Calibri" pitchFamily="34" charset="-120"/>
-              </a:rPr>
-              <a:t>* Maize is mostly rain-fed and swings by several million tonnes between seasons.</a:t>
-            </a:r>
-            <a:endParaRPr lang="en-US" sz="1200" dirty="0"/>
-          </a:p>
-        </p:txBody>
-      </p:sp>
-      <p:sp>
-        <p:nvSpPr>
-          <p:cNvPr id="8" name="Text 5"/>
+              <a:t>Commercial agriculture earns foreign exchange from fruit, wine, nuts and sugar, while millions of households farm small plots with little access to water. Water-use licensing, electricity load-shedding and land reform all weigh on investment decisions.</a:t>
+            </a:r>
+            <a:endParaRPr lang="en-US" sz="1350" dirty="0"/>
+          </a:p>
+        </p:txBody>
+      </p:sp>
+      <p:sp>
+        <p:nvSpPr>
+          <p:cNvPr id="17" name="Text 15"/>
           <p:cNvSpPr txBox="1"/>
           <p:nvPr/>
         </p:nvSpPr>
@@ -5664,7 +11684,7 @@
       </p:sp>
       <p:sp>
         <p:nvSpPr>
-          <p:cNvPr id="9" name="Text 6"/>
+          <p:cNvPr id="18" name="Text 16"/>
           <p:cNvSpPr txBox="1"/>
           <p:nvPr/>
         </p:nvSpPr>
@@ -5768,7 +11788,7 @@
                 <a:ea typeface="Calibri" pitchFamily="34" charset="-122"/>
                 <a:cs typeface="Calibri" pitchFamily="34" charset="-120"/>
               </a:rPr>
-              <a:t>OUR RESPONSE</a:t>
+              <a:t>THE MAIN CROPS</a:t>
             </a:r>
             <a:endParaRPr lang="en-US" sz="1150" dirty="0"/>
           </a:p>
@@ -5807,340 +11827,42 @@
                 <a:ea typeface="Cambria" pitchFamily="34" charset="-122"/>
                 <a:cs typeface="Cambria" pitchFamily="34" charset="-120"/>
               </a:rPr>
-              <a:t>Two technologies, two different constraints</a:t>
+              <a:t>Five crops carry the volume and the value</a:t>
             </a:r>
             <a:endParaRPr lang="en-US" sz="3000" dirty="0"/>
           </a:p>
         </p:txBody>
       </p:sp>
-      <p:sp>
-        <p:nvSpPr>
-          <p:cNvPr id="4" name="Text 2"/>
-          <p:cNvSpPr txBox="1"/>
-          <p:nvPr/>
-        </p:nvSpPr>
-        <p:spPr>
-          <a:xfrm>
-            <a:off x="594360" y="1783080"/>
-            <a:ext cx="5227168" cy="411480"/>
-          </a:xfrm>
-          <a:prstGeom prst="rect">
-            <a:avLst/>
-          </a:prstGeom>
-          <a:noFill/>
-          <a:ln/>
-        </p:spPr>
-        <p:txBody>
-          <a:bodyPr wrap="square" lIns="0" tIns="0" rIns="0" bIns="0" rtlCol="0" anchor="ctr"/>
-          <a:lstStyle/>
-          <a:p>
-            <a:pPr algn="l" indent="0" marL="0">
-              <a:buNone/>
-            </a:pPr>
-            <a:r>
-              <a:rPr lang="en-US" sz="1600" b="1" dirty="0">
-                <a:solidFill>
-                  <a:srgbClr val="6B2A44"/>
-                </a:solidFill>
-                <a:latin typeface="Cambria" pitchFamily="34" charset="0"/>
-                <a:ea typeface="Cambria" pitchFamily="34" charset="-122"/>
-                <a:cs typeface="Cambria" pitchFamily="34" charset="-120"/>
-              </a:rPr>
-              <a:t>EVERGREEN® — holding the water</a:t>
-            </a:r>
-            <a:endParaRPr lang="en-US" sz="1600" dirty="0"/>
-          </a:p>
-        </p:txBody>
-      </p:sp>
-      <p:sp>
-        <p:nvSpPr>
-          <p:cNvPr id="5" name="Text 3"/>
-          <p:cNvSpPr txBox="1"/>
-          <p:nvPr/>
-        </p:nvSpPr>
-        <p:spPr>
-          <a:xfrm>
-            <a:off x="594360" y="2286000"/>
-            <a:ext cx="5227168" cy="2468880"/>
-          </a:xfrm>
-          <a:prstGeom prst="rect">
-            <a:avLst/>
-          </a:prstGeom>
-          <a:noFill/>
-          <a:ln/>
-        </p:spPr>
-        <p:txBody>
-          <a:bodyPr wrap="square" lIns="0" tIns="0" rIns="0" bIns="0" rtlCol="0" anchor="t"/>
-          <a:lstStyle/>
-          <a:p>
-            <a:pPr algn="l" marL="342900" indent="-342900">
-              <a:lnSpc>
-                <a:spcPct val="122000"/>
-              </a:lnSpc>
-              <a:spcAft>
-                <a:spcPts val="1000"/>
-              </a:spcAft>
-              <a:buSzPct val="100000"/>
-              <a:buChar char="•"/>
-            </a:pPr>
-            <a:r>
-              <a:rPr lang="en-US" sz="1350" dirty="0">
-                <a:solidFill>
-                  <a:srgbClr val="3F3138"/>
-                </a:solidFill>
-                <a:latin typeface="Calibri" pitchFamily="34" charset="0"/>
-                <a:ea typeface="Calibri" pitchFamily="34" charset="-122"/>
-                <a:cs typeface="Calibri" pitchFamily="34" charset="-120"/>
-              </a:rPr>
-              <a:t>A potassium-based hydro-retainer placed in the root zone at planting or at replant.</a:t>
-            </a:r>
-            <a:endParaRPr lang="en-US" sz="1350" dirty="0"/>
-          </a:p>
-          <a:p>
-            <a:pPr algn="l" marL="342900" indent="-342900">
-              <a:lnSpc>
-                <a:spcPct val="122000"/>
-              </a:lnSpc>
-              <a:spcAft>
-                <a:spcPts val="1000"/>
-              </a:spcAft>
-              <a:buSzPct val="100000"/>
-              <a:buChar char="•"/>
-            </a:pPr>
-            <a:r>
-              <a:rPr lang="en-US" sz="1350" dirty="0">
-                <a:solidFill>
-                  <a:srgbClr val="3F3138"/>
-                </a:solidFill>
-                <a:latin typeface="Calibri" pitchFamily="34" charset="0"/>
-                <a:ea typeface="Calibri" pitchFamily="34" charset="-122"/>
-                <a:cs typeface="Calibri" pitchFamily="34" charset="-120"/>
-              </a:rPr>
-              <a:t>It captures rain and irrigation water and releases it back to the plant gradually, removing water stress through the critical stages.</a:t>
-            </a:r>
-            <a:endParaRPr lang="en-US" sz="1350" dirty="0"/>
-          </a:p>
-          <a:p>
-            <a:pPr algn="l" marL="342900" indent="-342900">
-              <a:lnSpc>
-                <a:spcPct val="122000"/>
-              </a:lnSpc>
-              <a:spcAft>
-                <a:spcPts val="1000"/>
-              </a:spcAft>
-              <a:buSzPct val="100000"/>
-              <a:buChar char="•"/>
-            </a:pPr>
-            <a:r>
-              <a:rPr lang="en-US" sz="1350" dirty="0">
-                <a:solidFill>
-                  <a:srgbClr val="3F3138"/>
-                </a:solidFill>
-                <a:latin typeface="Calibri" pitchFamily="34" charset="0"/>
-                <a:ea typeface="Calibri" pitchFamily="34" charset="-122"/>
-                <a:cs typeface="Calibri" pitchFamily="34" charset="-120"/>
-              </a:rPr>
-              <a:t>Absorbs on the order of 300 times its own weight; useful effect of 3 to 4 years in the soil.</a:t>
-            </a:r>
-            <a:endParaRPr lang="en-US" sz="1350" dirty="0"/>
-          </a:p>
-          <a:p>
-            <a:pPr algn="l" marL="342900" indent="-342900">
-              <a:lnSpc>
-                <a:spcPct val="122000"/>
-              </a:lnSpc>
-              <a:spcAft>
-                <a:spcPts val="1000"/>
-              </a:spcAft>
-              <a:buSzPct val="100000"/>
-              <a:buChar char="•"/>
-            </a:pPr>
-            <a:r>
-              <a:rPr lang="en-US" sz="1350" dirty="0">
-                <a:solidFill>
-                  <a:srgbClr val="3F3138"/>
-                </a:solidFill>
-                <a:latin typeface="Calibri" pitchFamily="34" charset="0"/>
-                <a:ea typeface="Calibri" pitchFamily="34" charset="-122"/>
-                <a:cs typeface="Calibri" pitchFamily="34" charset="-120"/>
-              </a:rPr>
-              <a:t>Breaks down by 20 to 25 % a year, with no build-up and no risk of overdosing.</a:t>
-            </a:r>
-            <a:endParaRPr lang="en-US" sz="1350" dirty="0"/>
-          </a:p>
-        </p:txBody>
-      </p:sp>
-      <p:sp>
-        <p:nvSpPr>
-          <p:cNvPr id="6" name="Text 4"/>
-          <p:cNvSpPr txBox="1"/>
-          <p:nvPr/>
-        </p:nvSpPr>
-        <p:spPr>
-          <a:xfrm>
-            <a:off x="6370168" y="1783080"/>
-            <a:ext cx="5227168" cy="411480"/>
-          </a:xfrm>
-          <a:prstGeom prst="rect">
-            <a:avLst/>
-          </a:prstGeom>
-          <a:noFill/>
-          <a:ln/>
-        </p:spPr>
-        <p:txBody>
-          <a:bodyPr wrap="square" lIns="0" tIns="0" rIns="0" bIns="0" rtlCol="0" anchor="ctr"/>
-          <a:lstStyle/>
-          <a:p>
-            <a:pPr algn="l" indent="0" marL="0">
-              <a:buNone/>
-            </a:pPr>
-            <a:r>
-              <a:rPr lang="en-US" sz="1600" b="1" dirty="0">
-                <a:solidFill>
-                  <a:srgbClr val="6B2A44"/>
-                </a:solidFill>
-                <a:latin typeface="Cambria" pitchFamily="34" charset="0"/>
-                <a:ea typeface="Cambria" pitchFamily="34" charset="-122"/>
-                <a:cs typeface="Cambria" pitchFamily="34" charset="-120"/>
-              </a:rPr>
-              <a:t>ECOFERT® — feeding without depleting</a:t>
-            </a:r>
-            <a:endParaRPr lang="en-US" sz="1600" dirty="0"/>
-          </a:p>
-        </p:txBody>
-      </p:sp>
-      <p:sp>
-        <p:nvSpPr>
-          <p:cNvPr id="7" name="Text 5"/>
-          <p:cNvSpPr txBox="1"/>
-          <p:nvPr/>
-        </p:nvSpPr>
-        <p:spPr>
-          <a:xfrm>
-            <a:off x="6370168" y="2286000"/>
-            <a:ext cx="5227168" cy="2468880"/>
-          </a:xfrm>
-          <a:prstGeom prst="rect">
-            <a:avLst/>
-          </a:prstGeom>
-          <a:noFill/>
-          <a:ln/>
-        </p:spPr>
-        <p:txBody>
-          <a:bodyPr wrap="square" lIns="0" tIns="0" rIns="0" bIns="0" rtlCol="0" anchor="t"/>
-          <a:lstStyle/>
-          <a:p>
-            <a:pPr algn="l" marL="342900" indent="-342900">
-              <a:lnSpc>
-                <a:spcPct val="122000"/>
-              </a:lnSpc>
-              <a:spcAft>
-                <a:spcPts val="1000"/>
-              </a:spcAft>
-              <a:buSzPct val="100000"/>
-              <a:buChar char="•"/>
-            </a:pPr>
-            <a:r>
-              <a:rPr lang="en-US" sz="1350" dirty="0">
-                <a:solidFill>
-                  <a:srgbClr val="3F3138"/>
-                </a:solidFill>
-                <a:latin typeface="Calibri" pitchFamily="34" charset="0"/>
-                <a:ea typeface="Calibri" pitchFamily="34" charset="-122"/>
-                <a:cs typeface="Calibri" pitchFamily="34" charset="-120"/>
-              </a:rPr>
-              <a:t>A micro-dose fertiliser of amino acids, nitrogen, phosphorus and potassium, made from renewable resources.</a:t>
-            </a:r>
-            <a:endParaRPr lang="en-US" sz="1350" dirty="0"/>
-          </a:p>
-          <a:p>
-            <a:pPr algn="l" marL="342900" indent="-342900">
-              <a:lnSpc>
-                <a:spcPct val="122000"/>
-              </a:lnSpc>
-              <a:spcAft>
-                <a:spcPts val="1000"/>
-              </a:spcAft>
-              <a:buSzPct val="100000"/>
-              <a:buChar char="•"/>
-            </a:pPr>
-            <a:r>
-              <a:rPr lang="en-US" sz="1350" dirty="0">
-                <a:solidFill>
-                  <a:srgbClr val="3F3138"/>
-                </a:solidFill>
-                <a:latin typeface="Calibri" pitchFamily="34" charset="0"/>
-                <a:ea typeface="Calibri" pitchFamily="34" charset="-122"/>
-                <a:cs typeface="Calibri" pitchFamily="34" charset="-120"/>
-              </a:rPr>
-              <a:t>Non-chelating: it does not strip the clay-humus complex and adds neither salinity nor nitrate load.</a:t>
-            </a:r>
-            <a:endParaRPr lang="en-US" sz="1350" dirty="0"/>
-          </a:p>
-          <a:p>
-            <a:pPr algn="l" marL="342900" indent="-342900">
-              <a:lnSpc>
-                <a:spcPct val="122000"/>
-              </a:lnSpc>
-              <a:spcAft>
-                <a:spcPts val="1000"/>
-              </a:spcAft>
-              <a:buSzPct val="100000"/>
-              <a:buChar char="•"/>
-            </a:pPr>
-            <a:r>
-              <a:rPr lang="en-US" sz="1350" dirty="0">
-                <a:solidFill>
-                  <a:srgbClr val="3F3138"/>
-                </a:solidFill>
-                <a:latin typeface="Calibri" pitchFamily="34" charset="0"/>
-                <a:ea typeface="Calibri" pitchFamily="34" charset="-122"/>
-                <a:cs typeface="Calibri" pitchFamily="34" charset="-120"/>
-              </a:rPr>
-              <a:t>Certified SOHISCERT and EU Bio, in use in 60 countries — the entry condition for European buyers' specifications.</a:t>
-            </a:r>
-            <a:endParaRPr lang="en-US" sz="1350" dirty="0"/>
-          </a:p>
-          <a:p>
-            <a:pPr algn="l" marL="342900" indent="-342900">
-              <a:lnSpc>
-                <a:spcPct val="122000"/>
-              </a:lnSpc>
-              <a:spcAft>
-                <a:spcPts val="1000"/>
-              </a:spcAft>
-              <a:buSzPct val="100000"/>
-              <a:buChar char="•"/>
-            </a:pPr>
-            <a:r>
-              <a:rPr lang="en-US" sz="1350" dirty="0">
-                <a:solidFill>
-                  <a:srgbClr val="3F3138"/>
-                </a:solidFill>
-                <a:latin typeface="Calibri" pitchFamily="34" charset="0"/>
-                <a:ea typeface="Calibri" pitchFamily="34" charset="-122"/>
-                <a:cs typeface="Calibri" pitchFamily="34" charset="-120"/>
-              </a:rPr>
-              <a:t>1 to 4 bottles of 140 ml per hectare, compatible with existing fertigation equipment.</a:t>
-            </a:r>
-            <a:endParaRPr lang="en-US" sz="1350" dirty="0"/>
-          </a:p>
-        </p:txBody>
-      </p:sp>
-      <p:sp>
-        <p:nvSpPr>
-          <p:cNvPr id="8" name="Shape 6"/>
+      <p:graphicFrame>
+        <p:nvGraphicFramePr>
+          <p:cNvPr id="4" name="Chart 0" descr=""/>
+          <p:cNvGraphicFramePr/>
+          <p:nvPr/>
+        </p:nvGraphicFramePr>
+        <p:xfrm>
+          <a:off x="594360" y="1783080"/>
+          <a:ext cx="7360920" cy="3977640"/>
+        </p:xfrm>
+        <a:graphic xmlns:a="http://schemas.openxmlformats.org/drawingml/2006/main">
+          <a:graphicData uri="http://schemas.openxmlformats.org/drawingml/2006/chart">
+            <c:chart xmlns:c="http://schemas.openxmlformats.org/drawingml/2006/chart" r:id="rId1"/>
+          </a:graphicData>
+        </a:graphic>
+      </p:graphicFrame>
+      <p:sp>
+        <p:nvSpPr>
+          <p:cNvPr id="5" name="Shape 2"/>
           <p:cNvSpPr/>
           <p:nvPr/>
         </p:nvSpPr>
         <p:spPr>
           <a:xfrm>
-            <a:off x="594360" y="4846320"/>
-            <a:ext cx="11002975" cy="960120"/>
+            <a:off x="8275320" y="1783080"/>
+            <a:ext cx="3291840" cy="3977640"/>
           </a:xfrm>
           <a:prstGeom prst="roundRect">
             <a:avLst>
-              <a:gd name="adj" fmla="val 7619"/>
+              <a:gd name="adj" fmla="val 2778"/>
             </a:avLst>
           </a:prstGeom>
           <a:solidFill>
@@ -6156,14 +11878,53 @@
       </p:sp>
       <p:sp>
         <p:nvSpPr>
-          <p:cNvPr id="9" name="Text 7"/>
-          <p:cNvSpPr txBox="1"/>
-          <p:nvPr/>
-        </p:nvSpPr>
-        <p:spPr>
-          <a:xfrm>
-            <a:off x="822960" y="4983480"/>
-            <a:ext cx="10545775" cy="713232"/>
+          <p:cNvPr id="6" name="Text 3"/>
+          <p:cNvSpPr txBox="1"/>
+          <p:nvPr/>
+        </p:nvSpPr>
+        <p:spPr>
+          <a:xfrm>
+            <a:off x="8503920" y="2011680"/>
+            <a:ext cx="2834640" cy="457200"/>
+          </a:xfrm>
+          <a:prstGeom prst="rect">
+            <a:avLst/>
+          </a:prstGeom>
+          <a:noFill/>
+          <a:ln/>
+        </p:spPr>
+        <p:txBody>
+          <a:bodyPr wrap="square" lIns="0" tIns="0" rIns="0" bIns="0" rtlCol="0" anchor="ctr"/>
+          <a:lstStyle/>
+          <a:p>
+            <a:pPr algn="l" indent="0" marL="0">
+              <a:buNone/>
+            </a:pPr>
+            <a:r>
+              <a:rPr lang="en-US" sz="1300" b="1" dirty="0">
+                <a:solidFill>
+                  <a:srgbClr val="6B2A44"/>
+                </a:solidFill>
+                <a:latin typeface="Cambria" pitchFamily="34" charset="0"/>
+                <a:ea typeface="Cambria" pitchFamily="34" charset="-122"/>
+                <a:cs typeface="Cambria" pitchFamily="34" charset="-120"/>
+              </a:rPr>
+              <a:t>Reading</a:t>
+            </a:r>
+            <a:endParaRPr lang="en-US" sz="1300" dirty="0"/>
+          </a:p>
+        </p:txBody>
+      </p:sp>
+      <p:sp>
+        <p:nvSpPr>
+          <p:cNvPr id="7" name="Text 4"/>
+          <p:cNvSpPr txBox="1"/>
+          <p:nvPr/>
+        </p:nvSpPr>
+        <p:spPr>
+          <a:xfrm>
+            <a:off x="8503920" y="2560320"/>
+            <a:ext cx="2834640" cy="3017520"/>
           </a:xfrm>
           <a:prstGeom prst="rect">
             <a:avLst/>
@@ -6177,28 +11938,57 @@
           <a:p>
             <a:pPr algn="l" indent="0" marL="0">
               <a:lnSpc>
-                <a:spcPct val="118000"/>
+                <a:spcPct val="125000"/>
               </a:lnSpc>
               <a:buNone/>
             </a:pPr>
             <a:r>
-              <a:rPr lang="en-US" sz="1100" dirty="0">
-                <a:solidFill>
-                  <a:srgbClr val="7C6B73"/>
-                </a:solidFill>
-                <a:latin typeface="Calibri" pitchFamily="34" charset="0"/>
-                <a:ea typeface="Calibri" pitchFamily="34" charset="-122"/>
-                <a:cs typeface="Calibri" pitchFamily="34" charset="-120"/>
-              </a:rPr>
-              <a:t>The two products are sold separately but were designed to reinforce each other: the hydro-retainer extends how long water stays available, the fertiliser puts that water to work without degrading the soil.</a:t>
-            </a:r>
-            <a:endParaRPr lang="en-US" sz="1100" dirty="0"/>
-          </a:p>
-        </p:txBody>
-      </p:sp>
-      <p:sp>
-        <p:nvSpPr>
-          <p:cNvPr id="10" name="Text 8"/>
+              <a:rPr lang="en-US" sz="1200" dirty="0">
+                <a:solidFill>
+                  <a:srgbClr val="3F3138"/>
+                </a:solidFill>
+                <a:latin typeface="Calibri" pitchFamily="34" charset="0"/>
+                <a:ea typeface="Calibri" pitchFamily="34" charset="-122"/>
+                <a:cs typeface="Calibri" pitchFamily="34" charset="-120"/>
+              </a:rPr>
+              <a:t>Citrus and grapes are irrigated, export-bound and priced per carton: there, a litre saved converts into margin. The country ships about 2.6 million tonnes of citrus a year, second only to Spain.</a:t>
+            </a:r>
+            <a:endParaRPr lang="en-US" sz="1200" dirty="0"/>
+          </a:p>
+          <a:p>
+            <a:pPr algn="l" indent="0" marL="0">
+              <a:lnSpc>
+                <a:spcPct val="125000"/>
+              </a:lnSpc>
+              <a:buNone/>
+            </a:pPr>
+            <a:endParaRPr lang="en-US" sz="1200" dirty="0"/>
+          </a:p>
+          <a:p>
+            <a:pPr algn="l" indent="0" marL="0">
+              <a:lnSpc>
+                <a:spcPct val="125000"/>
+              </a:lnSpc>
+              <a:buNone/>
+            </a:pPr>
+            <a:r>
+              <a:rPr lang="en-US" sz="1200" dirty="0">
+                <a:solidFill>
+                  <a:srgbClr val="3F3138"/>
+                </a:solidFill>
+                <a:latin typeface="Calibri" pitchFamily="34" charset="0"/>
+                <a:ea typeface="Calibri" pitchFamily="34" charset="-122"/>
+                <a:cs typeface="Calibri" pitchFamily="34" charset="-120"/>
+              </a:rPr>
+              <a:t>* Maize is mostly rain-fed and swings by several million tonnes between seasons.</a:t>
+            </a:r>
+            <a:endParaRPr lang="en-US" sz="1200" dirty="0"/>
+          </a:p>
+        </p:txBody>
+      </p:sp>
+      <p:sp>
+        <p:nvSpPr>
+          <p:cNvPr id="8" name="Text 5"/>
           <p:cNvSpPr txBox="1"/>
           <p:nvPr/>
         </p:nvSpPr>
@@ -6239,7 +12029,7 @@
       </p:sp>
       <p:sp>
         <p:nvSpPr>
-          <p:cNvPr id="11" name="Text 9"/>
+          <p:cNvPr id="9" name="Text 6"/>
           <p:cNvSpPr txBox="1"/>
           <p:nvPr/>
         </p:nvSpPr>
@@ -6343,7 +12133,7 @@
                 <a:ea typeface="Calibri" pitchFamily="34" charset="-122"/>
                 <a:cs typeface="Calibri" pitchFamily="34" charset="-120"/>
               </a:rPr>
-              <a:t>ORDERS OF MAGNITUDE</a:t>
+              <a:t>FIRST SECTOR</a:t>
             </a:r>
             <a:endParaRPr lang="en-US" sz="1150" dirty="0"/>
           </a:p>
@@ -6382,168 +12172,181 @@
                 <a:ea typeface="Cambria" pitchFamily="34" charset="-122"/>
                 <a:cs typeface="Cambria" pitchFamily="34" charset="-120"/>
               </a:rPr>
-              <a:t>Expected water saving by irrigation method</a:t>
+              <a:t>Citrus: an export leader on a tight water allocation</a:t>
             </a:r>
             <a:endParaRPr lang="en-US" sz="3000" dirty="0"/>
           </a:p>
         </p:txBody>
       </p:sp>
-      <p:graphicFrame>
-        <p:nvGraphicFramePr>
-          <p:cNvPr id="4" name="Chart 0" descr=""/>
-          <p:cNvGraphicFramePr/>
-          <p:nvPr/>
-        </p:nvGraphicFramePr>
-        <p:xfrm>
-          <a:off x="594360" y="1783080"/>
-          <a:ext cx="7360920" cy="3977640"/>
-        </p:xfrm>
-        <a:graphic xmlns:a="http://schemas.openxmlformats.org/drawingml/2006/main">
-          <a:graphicData uri="http://schemas.openxmlformats.org/drawingml/2006/chart">
-            <c:chart xmlns:c="http://schemas.openxmlformats.org/drawingml/2006/chart" r:id="rId1"/>
-          </a:graphicData>
-        </a:graphic>
-      </p:graphicFrame>
-      <p:sp>
-        <p:nvSpPr>
-          <p:cNvPr id="5" name="Shape 2"/>
-          <p:cNvSpPr/>
-          <p:nvPr/>
-        </p:nvSpPr>
-        <p:spPr>
-          <a:xfrm>
-            <a:off x="8275320" y="1783080"/>
-            <a:ext cx="3291840" cy="3977640"/>
-          </a:xfrm>
-          <a:prstGeom prst="roundRect">
-            <a:avLst>
-              <a:gd name="adj" fmla="val 2778"/>
-            </a:avLst>
-          </a:prstGeom>
-          <a:solidFill>
-            <a:srgbClr val="F5EFF1"/>
-          </a:solidFill>
-          <a:ln w="9525">
-            <a:solidFill>
-              <a:srgbClr val="E5D9DE"/>
-            </a:solidFill>
-            <a:prstDash val="solid"/>
-          </a:ln>
-        </p:spPr>
+      <p:pic>
+        <p:nvPicPr>
+          <p:cNvPr id="4" name="Image 0" descr="preencoded.png">    </p:cNvPr>
+          <p:cNvPicPr>
+            <a:picLocks noChangeAspect="1"/>
+          </p:cNvPicPr>
+          <p:nvPr/>
+        </p:nvPicPr>
+        <p:blipFill>
+          <a:blip r:embed="rId1"/>
+          <a:stretch>
+            <a:fillRect/>
+          </a:stretch>
+        </p:blipFill>
+        <p:spPr>
+          <a:xfrm>
+            <a:off x="6522415" y="1783080"/>
+            <a:ext cx="5074920" cy="3794760"/>
+          </a:xfrm>
+          <a:prstGeom prst="rect">
+            <a:avLst/>
+          </a:prstGeom>
+        </p:spPr>
+      </p:pic>
+      <p:sp>
+        <p:nvSpPr>
+          <p:cNvPr id="5" name="Text 2"/>
+          <p:cNvSpPr txBox="1"/>
+          <p:nvPr/>
+        </p:nvSpPr>
+        <p:spPr>
+          <a:xfrm>
+            <a:off x="594360" y="1783080"/>
+            <a:ext cx="5379415" cy="4251960"/>
+          </a:xfrm>
+          <a:prstGeom prst="rect">
+            <a:avLst/>
+          </a:prstGeom>
+          <a:noFill/>
+          <a:ln/>
+        </p:spPr>
+        <p:txBody>
+          <a:bodyPr wrap="square" lIns="0" tIns="0" rIns="0" bIns="0" rtlCol="0" anchor="t"/>
+          <a:lstStyle/>
+          <a:p>
+            <a:pPr algn="l" marL="342900" indent="-342900">
+              <a:lnSpc>
+                <a:spcPct val="122000"/>
+              </a:lnSpc>
+              <a:spcAft>
+                <a:spcPts val="1100"/>
+              </a:spcAft>
+              <a:buSzPct val="100000"/>
+              <a:buChar char="•"/>
+            </a:pPr>
+            <a:r>
+              <a:rPr lang="en-US" sz="1400" dirty="0">
+                <a:solidFill>
+                  <a:srgbClr val="3F3138"/>
+                </a:solidFill>
+                <a:latin typeface="Calibri" pitchFamily="34" charset="0"/>
+                <a:ea typeface="Calibri" pitchFamily="34" charset="-122"/>
+                <a:cs typeface="Calibri" pitchFamily="34" charset="-120"/>
+              </a:rPr>
+              <a:t>Citrus is grown in Limpopo, the Eastern Cape, Mpumalanga and the Western Cape, mostly under micro-irrigation.</a:t>
+            </a:r>
+            <a:endParaRPr lang="en-US" sz="1400" dirty="0"/>
+          </a:p>
+          <a:p>
+            <a:pPr algn="l" marL="342900" indent="-342900">
+              <a:lnSpc>
+                <a:spcPct val="122000"/>
+              </a:lnSpc>
+              <a:spcAft>
+                <a:spcPts val="1100"/>
+              </a:spcAft>
+              <a:buSzPct val="100000"/>
+              <a:buChar char="•"/>
+            </a:pPr>
+            <a:r>
+              <a:rPr lang="en-US" sz="1400" dirty="0">
+                <a:solidFill>
+                  <a:srgbClr val="3F3138"/>
+                </a:solidFill>
+                <a:latin typeface="Calibri" pitchFamily="34" charset="0"/>
+                <a:ea typeface="Calibri" pitchFamily="34" charset="-122"/>
+                <a:cs typeface="Calibri" pitchFamily="34" charset="-120"/>
+              </a:rPr>
+              <a:t>Orchards draw on allocated river and dam water, which is cut back in drought years.</a:t>
+            </a:r>
+            <a:endParaRPr lang="en-US" sz="1400" dirty="0"/>
+          </a:p>
+          <a:p>
+            <a:pPr algn="l" marL="342900" indent="-342900">
+              <a:lnSpc>
+                <a:spcPct val="122000"/>
+              </a:lnSpc>
+              <a:spcAft>
+                <a:spcPts val="1100"/>
+              </a:spcAft>
+              <a:buSzPct val="100000"/>
+              <a:buChar char="•"/>
+            </a:pPr>
+            <a:r>
+              <a:rPr lang="en-US" sz="1400" dirty="0">
+                <a:solidFill>
+                  <a:srgbClr val="3F3138"/>
+                </a:solidFill>
+                <a:latin typeface="Calibri" pitchFamily="34" charset="0"/>
+                <a:ea typeface="Calibri" pitchFamily="34" charset="-122"/>
+                <a:cs typeface="Calibri" pitchFamily="34" charset="-120"/>
+              </a:rPr>
+              <a:t>Load-shedding interrupts pumping schedules, so trees can miss irrigations during hot, dry spells.</a:t>
+            </a:r>
+            <a:endParaRPr lang="en-US" sz="1400" dirty="0"/>
+          </a:p>
+          <a:p>
+            <a:pPr algn="l" marL="342900" indent="-342900">
+              <a:lnSpc>
+                <a:spcPct val="122000"/>
+              </a:lnSpc>
+              <a:spcAft>
+                <a:spcPts val="1100"/>
+              </a:spcAft>
+              <a:buSzPct val="100000"/>
+              <a:buChar char="•"/>
+            </a:pPr>
+            <a:r>
+              <a:rPr lang="en-US" sz="1400" dirty="0">
+                <a:solidFill>
+                  <a:srgbClr val="3F3138"/>
+                </a:solidFill>
+                <a:latin typeface="Calibri" pitchFamily="34" charset="0"/>
+                <a:ea typeface="Calibri" pitchFamily="34" charset="-122"/>
+                <a:cs typeface="Calibri" pitchFamily="34" charset="-120"/>
+              </a:rPr>
+              <a:t>Export markets pay for size and appearance: steady soil moisture protects both at fruit set and sizing.</a:t>
+            </a:r>
+            <a:endParaRPr lang="en-US" sz="1400" dirty="0"/>
+          </a:p>
+          <a:p>
+            <a:pPr algn="l" marL="342900" indent="-342900">
+              <a:lnSpc>
+                <a:spcPct val="122000"/>
+              </a:lnSpc>
+              <a:spcAft>
+                <a:spcPts val="1100"/>
+              </a:spcAft>
+              <a:buSzPct val="100000"/>
+              <a:buChar char="•"/>
+            </a:pPr>
+            <a:r>
+              <a:rPr lang="en-US" sz="1400" dirty="0">
+                <a:solidFill>
+                  <a:srgbClr val="3F3138"/>
+                </a:solidFill>
+                <a:latin typeface="Calibri" pitchFamily="34" charset="0"/>
+                <a:ea typeface="Calibri" pitchFamily="34" charset="-122"/>
+                <a:cs typeface="Calibri" pitchFamily="34" charset="-120"/>
+              </a:rPr>
+              <a:t>NAPEMA® treats pests without residue, which matters under strict European maximum residue limits.</a:t>
+            </a:r>
+            <a:endParaRPr lang="en-US" sz="1400" dirty="0"/>
+          </a:p>
+        </p:txBody>
       </p:sp>
       <p:sp>
         <p:nvSpPr>
           <p:cNvPr id="6" name="Text 3"/>
-          <p:cNvSpPr txBox="1"/>
-          <p:nvPr/>
-        </p:nvSpPr>
-        <p:spPr>
-          <a:xfrm>
-            <a:off x="8503920" y="2011680"/>
-            <a:ext cx="2834640" cy="457200"/>
-          </a:xfrm>
-          <a:prstGeom prst="rect">
-            <a:avLst/>
-          </a:prstGeom>
-          <a:noFill/>
-          <a:ln/>
-        </p:spPr>
-        <p:txBody>
-          <a:bodyPr wrap="square" lIns="0" tIns="0" rIns="0" bIns="0" rtlCol="0" anchor="ctr"/>
-          <a:lstStyle/>
-          <a:p>
-            <a:pPr algn="l" indent="0" marL="0">
-              <a:buNone/>
-            </a:pPr>
-            <a:r>
-              <a:rPr lang="en-US" sz="1300" b="1" dirty="0">
-                <a:solidFill>
-                  <a:srgbClr val="6B2A44"/>
-                </a:solidFill>
-                <a:latin typeface="Cambria" pitchFamily="34" charset="0"/>
-                <a:ea typeface="Cambria" pitchFamily="34" charset="-122"/>
-                <a:cs typeface="Cambria" pitchFamily="34" charset="-120"/>
-              </a:rPr>
-              <a:t>Read with caution</a:t>
-            </a:r>
-            <a:endParaRPr lang="en-US" sz="1300" dirty="0"/>
-          </a:p>
-        </p:txBody>
-      </p:sp>
-      <p:sp>
-        <p:nvSpPr>
-          <p:cNvPr id="7" name="Text 4"/>
-          <p:cNvSpPr txBox="1"/>
-          <p:nvPr/>
-        </p:nvSpPr>
-        <p:spPr>
-          <a:xfrm>
-            <a:off x="8503920" y="2560320"/>
-            <a:ext cx="2834640" cy="3017520"/>
-          </a:xfrm>
-          <a:prstGeom prst="rect">
-            <a:avLst/>
-          </a:prstGeom>
-          <a:noFill/>
-          <a:ln/>
-        </p:spPr>
-        <p:txBody>
-          <a:bodyPr wrap="square" lIns="0" tIns="0" rIns="0" bIns="0" rtlCol="0" anchor="t"/>
-          <a:lstStyle/>
-          <a:p>
-            <a:pPr algn="l" indent="0" marL="0">
-              <a:lnSpc>
-                <a:spcPct val="125000"/>
-              </a:lnSpc>
-              <a:buNone/>
-            </a:pPr>
-            <a:r>
-              <a:rPr lang="en-US" sz="1200" dirty="0">
-                <a:solidFill>
-                  <a:srgbClr val="3F3138"/>
-                </a:solidFill>
-                <a:latin typeface="Calibri" pitchFamily="34" charset="0"/>
-                <a:ea typeface="Calibri" pitchFamily="34" charset="-122"/>
-                <a:cs typeface="Calibri" pitchFamily="34" charset="-120"/>
-              </a:rPr>
-              <a:t>These ranges are indicative and based on the savings documented for our hydro-retainers.</a:t>
-            </a:r>
-            <a:endParaRPr lang="en-US" sz="1200" dirty="0"/>
-          </a:p>
-          <a:p>
-            <a:pPr algn="l" indent="0" marL="0">
-              <a:lnSpc>
-                <a:spcPct val="125000"/>
-              </a:lnSpc>
-              <a:buNone/>
-            </a:pPr>
-            <a:endParaRPr lang="en-US" sz="1200" dirty="0"/>
-          </a:p>
-          <a:p>
-            <a:pPr algn="l" indent="0" marL="0">
-              <a:lnSpc>
-                <a:spcPct val="125000"/>
-              </a:lnSpc>
-              <a:buNone/>
-            </a:pPr>
-            <a:r>
-              <a:rPr lang="en-US" sz="1200" dirty="0">
-                <a:solidFill>
-                  <a:srgbClr val="3F3138"/>
-                </a:solidFill>
-                <a:latin typeface="Calibri" pitchFamily="34" charset="0"/>
-                <a:ea typeface="Calibri" pitchFamily="34" charset="-122"/>
-                <a:cs typeface="Calibri" pitchFamily="34" charset="-120"/>
-              </a:rPr>
-              <a:t>The actual result depends on the soil, the climate and the crop. They give an order of magnitude and are in no case a guaranteed, contractual or absolute value.</a:t>
-            </a:r>
-            <a:endParaRPr lang="en-US" sz="1200" dirty="0"/>
-          </a:p>
-        </p:txBody>
-      </p:sp>
-      <p:sp>
-        <p:nvSpPr>
-          <p:cNvPr id="8" name="Text 5"/>
           <p:cNvSpPr txBox="1"/>
           <p:nvPr/>
         </p:nvSpPr>
@@ -6584,7 +12387,7 @@
       </p:sp>
       <p:sp>
         <p:nvSpPr>
-          <p:cNvPr id="9" name="Text 6"/>
+          <p:cNvPr id="7" name="Text 4"/>
           <p:cNvSpPr txBox="1"/>
           <p:nvPr/>
         </p:nvSpPr>
@@ -6688,7 +12491,7 @@
                 <a:ea typeface="Calibri" pitchFamily="34" charset="-122"/>
                 <a:cs typeface="Calibri" pitchFamily="34" charset="-120"/>
               </a:rPr>
-              <a:t>THREE PRIORITY AREAS</a:t>
+              <a:t>SECOND SECTOR</a:t>
             </a:r>
             <a:endParaRPr lang="en-US" sz="1150" dirty="0"/>
           </a:p>
@@ -6727,42 +12530,15 @@
                 <a:ea typeface="Cambria" pitchFamily="34" charset="-122"/>
                 <a:cs typeface="Cambria" pitchFamily="34" charset="-120"/>
               </a:rPr>
-              <a:t>Where to run the first trials</a:t>
+              <a:t>Wine and table grapes in the Western Cape</a:t>
             </a:r>
             <a:endParaRPr lang="en-US" sz="3000" dirty="0"/>
           </a:p>
         </p:txBody>
-      </p:sp>
-      <p:sp>
-        <p:nvSpPr>
-          <p:cNvPr id="4" name="Shape 2"/>
-          <p:cNvSpPr/>
-          <p:nvPr/>
-        </p:nvSpPr>
-        <p:spPr>
-          <a:xfrm>
-            <a:off x="594360" y="1783080"/>
-            <a:ext cx="3472586" cy="4069080"/>
-          </a:xfrm>
-          <a:prstGeom prst="roundRect">
-            <a:avLst>
-              <a:gd name="adj" fmla="val 2633"/>
-            </a:avLst>
-          </a:prstGeom>
-          <a:solidFill>
-            <a:srgbClr val="F5EFF1"/>
-          </a:solidFill>
-          <a:ln w="9525">
-            <a:solidFill>
-              <a:srgbClr val="E5D9DE"/>
-            </a:solidFill>
-            <a:prstDash val="solid"/>
-          </a:ln>
-        </p:spPr>
       </p:sp>
       <p:pic>
         <p:nvPicPr>
-          <p:cNvPr id="5" name="Image 0" descr="preencoded.png">    </p:cNvPr>
+          <p:cNvPr id="4" name="Image 0" descr="preencoded.png">    </p:cNvPr>
           <p:cNvPicPr>
             <a:picLocks noChangeAspect="1"/>
           </p:cNvPicPr>
@@ -6777,7 +12553,7 @@
         <p:spPr>
           <a:xfrm>
             <a:off x="594360" y="1783080"/>
-            <a:ext cx="3472586" cy="1691640"/>
+            <a:ext cx="5074920" cy="3794760"/>
           </a:xfrm>
           <a:prstGeom prst="rect">
             <a:avLst/>
@@ -6786,92 +12562,14 @@
       </p:pic>
       <p:sp>
         <p:nvSpPr>
-          <p:cNvPr id="6" name="Text 3"/>
-          <p:cNvSpPr txBox="1"/>
-          <p:nvPr/>
-        </p:nvSpPr>
-        <p:spPr>
-          <a:xfrm>
-            <a:off x="795528" y="3639312"/>
-            <a:ext cx="3070250" cy="384048"/>
-          </a:xfrm>
-          <a:prstGeom prst="rect">
-            <a:avLst/>
-          </a:prstGeom>
-          <a:noFill/>
-          <a:ln/>
-        </p:spPr>
-        <p:txBody>
-          <a:bodyPr wrap="square" lIns="0" tIns="0" rIns="0" bIns="0" rtlCol="0" anchor="ctr"/>
-          <a:lstStyle/>
-          <a:p>
-            <a:pPr algn="l" indent="0" marL="0">
-              <a:buNone/>
-            </a:pPr>
-            <a:r>
-              <a:rPr lang="en-US" sz="1500" b="1" dirty="0">
-                <a:solidFill>
-                  <a:srgbClr val="6B2A44"/>
-                </a:solidFill>
-                <a:latin typeface="Cambria" pitchFamily="34" charset="0"/>
-                <a:ea typeface="Cambria" pitchFamily="34" charset="-122"/>
-                <a:cs typeface="Cambria" pitchFamily="34" charset="-120"/>
-              </a:rPr>
-              <a:t>Western Cape</a:t>
-            </a:r>
-            <a:endParaRPr lang="en-US" sz="1500" dirty="0"/>
-          </a:p>
-        </p:txBody>
-      </p:sp>
-      <p:sp>
-        <p:nvSpPr>
-          <p:cNvPr id="7" name="Text 4"/>
-          <p:cNvSpPr txBox="1"/>
-          <p:nvPr/>
-        </p:nvSpPr>
-        <p:spPr>
-          <a:xfrm>
-            <a:off x="795528" y="4041648"/>
-            <a:ext cx="3070250" cy="329184"/>
-          </a:xfrm>
-          <a:prstGeom prst="rect">
-            <a:avLst/>
-          </a:prstGeom>
-          <a:noFill/>
-          <a:ln/>
-        </p:spPr>
-        <p:txBody>
-          <a:bodyPr wrap="square" lIns="0" tIns="0" rIns="0" bIns="0" rtlCol="0" anchor="ctr"/>
-          <a:lstStyle/>
-          <a:p>
-            <a:pPr algn="l" indent="0" marL="0">
-              <a:buNone/>
-            </a:pPr>
-            <a:r>
-              <a:rPr lang="en-US" sz="1250" b="1" dirty="0">
-                <a:solidFill>
-                  <a:srgbClr val="8F6D0F"/>
-                </a:solidFill>
-                <a:latin typeface="Calibri" pitchFamily="34" charset="0"/>
-                <a:ea typeface="Calibri" pitchFamily="34" charset="-122"/>
-                <a:cs typeface="Calibri" pitchFamily="34" charset="-120"/>
-              </a:rPr>
-              <a:t>≈ 90,000 ha of vineyard</a:t>
-            </a:r>
-            <a:endParaRPr lang="en-US" sz="1250" dirty="0"/>
-          </a:p>
-        </p:txBody>
-      </p:sp>
-      <p:sp>
-        <p:nvSpPr>
-          <p:cNvPr id="8" name="Text 5"/>
-          <p:cNvSpPr txBox="1"/>
-          <p:nvPr/>
-        </p:nvSpPr>
-        <p:spPr>
-          <a:xfrm>
-            <a:off x="795528" y="4407408"/>
-            <a:ext cx="3070250" cy="1280160"/>
+          <p:cNvPr id="5" name="Text 2"/>
+          <p:cNvSpPr txBox="1"/>
+          <p:nvPr/>
+        </p:nvSpPr>
+        <p:spPr>
+          <a:xfrm>
+            <a:off x="6217920" y="1783080"/>
+            <a:ext cx="5379415" cy="4251960"/>
           </a:xfrm>
           <a:prstGeom prst="rect">
             <a:avLst/>
@@ -6885,16 +12583,16 @@
           <a:p>
             <a:pPr algn="l" marL="342900" indent="-342900">
               <a:lnSpc>
-                <a:spcPct val="116000"/>
+                <a:spcPct val="122000"/>
               </a:lnSpc>
               <a:spcAft>
-                <a:spcPts val="700"/>
+                <a:spcPts val="1100"/>
               </a:spcAft>
               <a:buSzPct val="100000"/>
               <a:buChar char="•"/>
             </a:pPr>
             <a:r>
-              <a:rPr lang="en-US" sz="1150" dirty="0">
+              <a:rPr lang="en-US" sz="1400" dirty="0">
                 <a:solidFill>
                   <a:srgbClr val="3F3138"/>
                 </a:solidFill>
@@ -6902,23 +12600,23 @@
                 <a:ea typeface="Calibri" pitchFamily="34" charset="-122"/>
                 <a:cs typeface="Calibri" pitchFamily="34" charset="-120"/>
               </a:rPr>
-              <a:t>Nearly all of the national vineyard, plus the deciduous fruit of the Breede and Olifants valleys.</a:t>
-            </a:r>
-            <a:endParaRPr lang="en-US" sz="1150" dirty="0"/>
+              <a:t>The Western Cape holds most of the vineyard area, from Stellenbosch to the Breede and Olifants river valleys.</a:t>
+            </a:r>
+            <a:endParaRPr lang="en-US" sz="1400" dirty="0"/>
           </a:p>
           <a:p>
             <a:pPr algn="l" marL="342900" indent="-342900">
               <a:lnSpc>
-                <a:spcPct val="116000"/>
+                <a:spcPct val="122000"/>
               </a:lnSpc>
               <a:spcAft>
-                <a:spcPts val="700"/>
+                <a:spcPts val="1100"/>
               </a:spcAft>
               <a:buSzPct val="100000"/>
               <a:buChar char="•"/>
             </a:pPr>
             <a:r>
-              <a:rPr lang="en-US" sz="1150" dirty="0">
+              <a:rPr lang="en-US" sz="1400" dirty="0">
                 <a:solidFill>
                   <a:srgbClr val="3F3138"/>
                 </a:solidFill>
@@ -6926,23 +12624,23 @@
                 <a:ea typeface="Calibri" pitchFamily="34" charset="-122"/>
                 <a:cs typeface="Calibri" pitchFamily="34" charset="-120"/>
               </a:rPr>
-              <a:t>Winter rainfall of 250 to 400 mm inland, and the 2015-2018 quota cuts are a live memory.</a:t>
-            </a:r>
-            <a:endParaRPr lang="en-US" sz="1150" dirty="0"/>
+              <a:t>The 2015–2018 drought brought Cape Town close to 'Day Zero', and farms lost much of their water allocation.</a:t>
+            </a:r>
+            <a:endParaRPr lang="en-US" sz="1400" dirty="0"/>
           </a:p>
           <a:p>
             <a:pPr algn="l" marL="342900" indent="-342900">
               <a:lnSpc>
-                <a:spcPct val="116000"/>
+                <a:spcPct val="122000"/>
               </a:lnSpc>
               <a:spcAft>
-                <a:spcPts val="700"/>
+                <a:spcPts val="1100"/>
               </a:spcAft>
               <a:buSzPct val="100000"/>
               <a:buChar char="•"/>
             </a:pPr>
             <a:r>
-              <a:rPr lang="en-US" sz="1150" dirty="0">
+              <a:rPr lang="en-US" sz="1400" dirty="0">
                 <a:solidFill>
                   <a:srgbClr val="3F3138"/>
                 </a:solidFill>
@@ -6950,174 +12648,23 @@
                 <a:ea typeface="Calibri" pitchFamily="34" charset="-122"/>
                 <a:cs typeface="Calibri" pitchFamily="34" charset="-120"/>
               </a:rPr>
-              <a:t>Export blocks already on drip or micro-sprinkler, with buyers asking for organic certification.</a:t>
-            </a:r>
-            <a:endParaRPr lang="en-US" sz="1150" dirty="0"/>
-          </a:p>
-        </p:txBody>
-      </p:sp>
-      <p:sp>
-        <p:nvSpPr>
-          <p:cNvPr id="9" name="Shape 6"/>
-          <p:cNvSpPr/>
-          <p:nvPr/>
-        </p:nvSpPr>
-        <p:spPr>
-          <a:xfrm>
-            <a:off x="4359554" y="1783080"/>
-            <a:ext cx="3472586" cy="4069080"/>
-          </a:xfrm>
-          <a:prstGeom prst="roundRect">
-            <a:avLst>
-              <a:gd name="adj" fmla="val 2633"/>
-            </a:avLst>
-          </a:prstGeom>
-          <a:solidFill>
-            <a:srgbClr val="F5EFF1"/>
-          </a:solidFill>
-          <a:ln w="9525">
-            <a:solidFill>
-              <a:srgbClr val="E5D9DE"/>
-            </a:solidFill>
-            <a:prstDash val="solid"/>
-          </a:ln>
-        </p:spPr>
-      </p:sp>
-      <p:pic>
-        <p:nvPicPr>
-          <p:cNvPr id="10" name="Image 1" descr="preencoded.png">    </p:cNvPr>
-          <p:cNvPicPr>
-            <a:picLocks noChangeAspect="1"/>
-          </p:cNvPicPr>
-          <p:nvPr/>
-        </p:nvPicPr>
-        <p:blipFill>
-          <a:blip r:embed="rId2"/>
-          <a:stretch>
-            <a:fillRect/>
-          </a:stretch>
-        </p:blipFill>
-        <p:spPr>
-          <a:xfrm>
-            <a:off x="4359554" y="1783080"/>
-            <a:ext cx="3472586" cy="1691640"/>
-          </a:xfrm>
-          <a:prstGeom prst="rect">
-            <a:avLst/>
-          </a:prstGeom>
-        </p:spPr>
-      </p:pic>
-      <p:sp>
-        <p:nvSpPr>
-          <p:cNvPr id="11" name="Text 7"/>
-          <p:cNvSpPr txBox="1"/>
-          <p:nvPr/>
-        </p:nvSpPr>
-        <p:spPr>
-          <a:xfrm>
-            <a:off x="4560722" y="3639312"/>
-            <a:ext cx="3070250" cy="384048"/>
-          </a:xfrm>
-          <a:prstGeom prst="rect">
-            <a:avLst/>
-          </a:prstGeom>
-          <a:noFill/>
-          <a:ln/>
-        </p:spPr>
-        <p:txBody>
-          <a:bodyPr wrap="square" lIns="0" tIns="0" rIns="0" bIns="0" rtlCol="0" anchor="ctr"/>
-          <a:lstStyle/>
-          <a:p>
-            <a:pPr algn="l" indent="0" marL="0">
-              <a:buNone/>
-            </a:pPr>
-            <a:r>
-              <a:rPr lang="en-US" sz="1500" b="1" dirty="0">
-                <a:solidFill>
-                  <a:srgbClr val="6B2A44"/>
-                </a:solidFill>
-                <a:latin typeface="Cambria" pitchFamily="34" charset="0"/>
-                <a:ea typeface="Cambria" pitchFamily="34" charset="-122"/>
-                <a:cs typeface="Cambria" pitchFamily="34" charset="-120"/>
-              </a:rPr>
-              <a:t>Limpopo</a:t>
-            </a:r>
-            <a:endParaRPr lang="en-US" sz="1500" dirty="0"/>
-          </a:p>
-        </p:txBody>
-      </p:sp>
-      <p:sp>
-        <p:nvSpPr>
-          <p:cNvPr id="12" name="Text 8"/>
-          <p:cNvSpPr txBox="1"/>
-          <p:nvPr/>
-        </p:nvSpPr>
-        <p:spPr>
-          <a:xfrm>
-            <a:off x="4560722" y="4041648"/>
-            <a:ext cx="3070250" cy="329184"/>
-          </a:xfrm>
-          <a:prstGeom prst="rect">
-            <a:avLst/>
-          </a:prstGeom>
-          <a:noFill/>
-          <a:ln/>
-        </p:spPr>
-        <p:txBody>
-          <a:bodyPr wrap="square" lIns="0" tIns="0" rIns="0" bIns="0" rtlCol="0" anchor="ctr"/>
-          <a:lstStyle/>
-          <a:p>
-            <a:pPr algn="l" indent="0" marL="0">
-              <a:buNone/>
-            </a:pPr>
-            <a:r>
-              <a:rPr lang="en-US" sz="1250" b="1" dirty="0">
-                <a:solidFill>
-                  <a:srgbClr val="8F6D0F"/>
-                </a:solidFill>
-                <a:latin typeface="Calibri" pitchFamily="34" charset="0"/>
-                <a:ea typeface="Calibri" pitchFamily="34" charset="-122"/>
-                <a:cs typeface="Calibri" pitchFamily="34" charset="-120"/>
-              </a:rPr>
-              <a:t>≈ 450 mm of rain a year</a:t>
-            </a:r>
-            <a:endParaRPr lang="en-US" sz="1250" dirty="0"/>
-          </a:p>
-        </p:txBody>
-      </p:sp>
-      <p:sp>
-        <p:nvSpPr>
-          <p:cNvPr id="13" name="Text 9"/>
-          <p:cNvSpPr txBox="1"/>
-          <p:nvPr/>
-        </p:nvSpPr>
-        <p:spPr>
-          <a:xfrm>
-            <a:off x="4560722" y="4407408"/>
-            <a:ext cx="3070250" cy="1280160"/>
-          </a:xfrm>
-          <a:prstGeom prst="rect">
-            <a:avLst/>
-          </a:prstGeom>
-          <a:noFill/>
-          <a:ln/>
-        </p:spPr>
-        <p:txBody>
-          <a:bodyPr wrap="square" lIns="0" tIns="0" rIns="0" bIns="0" rtlCol="0" anchor="t"/>
-          <a:lstStyle/>
+              <a:t>Table-grape growers in the Hex and Orange River valleys depend on long, hot seasons and dependable irrigation.</a:t>
+            </a:r>
+            <a:endParaRPr lang="en-US" sz="1400" dirty="0"/>
+          </a:p>
           <a:p>
             <a:pPr algn="l" marL="342900" indent="-342900">
               <a:lnSpc>
-                <a:spcPct val="116000"/>
+                <a:spcPct val="122000"/>
               </a:lnSpc>
               <a:spcAft>
-                <a:spcPts val="700"/>
+                <a:spcPts val="1100"/>
               </a:spcAft>
               <a:buSzPct val="100000"/>
               <a:buChar char="•"/>
             </a:pPr>
             <a:r>
-              <a:rPr lang="en-US" sz="1150" dirty="0">
+              <a:rPr lang="en-US" sz="1400" dirty="0">
                 <a:solidFill>
                   <a:srgbClr val="3F3138"/>
                 </a:solidFill>
@@ -7125,23 +12672,23 @@
                 <a:ea typeface="Calibri" pitchFamily="34" charset="-122"/>
                 <a:cs typeface="Calibri" pitchFamily="34" charset="-120"/>
               </a:rPr>
-              <a:t>The leading citrus province, with macadamia and avocado on sandy, low-retention soils.</a:t>
-            </a:r>
-            <a:endParaRPr lang="en-US" sz="1150" dirty="0"/>
+              <a:t>Replanting a vineyard costs several years of income: young vines must be kept free of water stress to establish.</a:t>
+            </a:r>
+            <a:endParaRPr lang="en-US" sz="1400" dirty="0"/>
           </a:p>
           <a:p>
             <a:pPr algn="l" marL="342900" indent="-342900">
               <a:lnSpc>
-                <a:spcPct val="116000"/>
+                <a:spcPct val="122000"/>
               </a:lnSpc>
               <a:spcAft>
-                <a:spcPts val="700"/>
+                <a:spcPts val="1100"/>
               </a:spcAft>
               <a:buSzPct val="100000"/>
               <a:buChar char="•"/>
             </a:pPr>
             <a:r>
-              <a:rPr lang="en-US" sz="1150" dirty="0">
+              <a:rPr lang="en-US" sz="1400" dirty="0">
                 <a:solidFill>
                   <a:srgbClr val="3F3138"/>
                 </a:solidFill>
@@ -7149,262 +12696,15 @@
                 <a:ea typeface="Calibri" pitchFamily="34" charset="-122"/>
                 <a:cs typeface="Calibri" pitchFamily="34" charset="-120"/>
               </a:rPr>
-              <a:t>High summer evaporation and a long dry winter: irrigation carries the whole season.</a:t>
-            </a:r>
-            <a:endParaRPr lang="en-US" sz="1150" dirty="0"/>
-          </a:p>
-          <a:p>
-            <a:pPr algn="l" marL="342900" indent="-342900">
-              <a:lnSpc>
-                <a:spcPct val="116000"/>
-              </a:lnSpc>
-              <a:spcAft>
-                <a:spcPts val="700"/>
-              </a:spcAft>
-              <a:buSzPct val="100000"/>
-              <a:buChar char="•"/>
-            </a:pPr>
-            <a:r>
-              <a:rPr lang="en-US" sz="1150" dirty="0">
-                <a:solidFill>
-                  <a:srgbClr val="3F3138"/>
-                </a:solidFill>
-                <a:latin typeface="Calibri" pitchFamily="34" charset="0"/>
-                <a:ea typeface="Calibri" pitchFamily="34" charset="-122"/>
-                <a:cs typeface="Calibri" pitchFamily="34" charset="-120"/>
-              </a:rPr>
-              <a:t>Orchards planted for twenty years or more — planting is exactly when the retainer goes in.</a:t>
-            </a:r>
-            <a:endParaRPr lang="en-US" sz="1150" dirty="0"/>
-          </a:p>
-        </p:txBody>
-      </p:sp>
-      <p:sp>
-        <p:nvSpPr>
-          <p:cNvPr id="14" name="Shape 10"/>
-          <p:cNvSpPr/>
-          <p:nvPr/>
-        </p:nvSpPr>
-        <p:spPr>
-          <a:xfrm>
-            <a:off x="8124749" y="1783080"/>
-            <a:ext cx="3472586" cy="4069080"/>
-          </a:xfrm>
-          <a:prstGeom prst="roundRect">
-            <a:avLst>
-              <a:gd name="adj" fmla="val 2633"/>
-            </a:avLst>
-          </a:prstGeom>
-          <a:solidFill>
-            <a:srgbClr val="F5EFF1"/>
-          </a:solidFill>
-          <a:ln w="9525">
-            <a:solidFill>
-              <a:srgbClr val="E5D9DE"/>
-            </a:solidFill>
-            <a:prstDash val="solid"/>
-          </a:ln>
-        </p:spPr>
-      </p:sp>
-      <p:pic>
-        <p:nvPicPr>
-          <p:cNvPr id="15" name="Image 2" descr="preencoded.png">    </p:cNvPr>
-          <p:cNvPicPr>
-            <a:picLocks noChangeAspect="1"/>
-          </p:cNvPicPr>
-          <p:nvPr/>
-        </p:nvPicPr>
-        <p:blipFill>
-          <a:blip r:embed="rId3"/>
-          <a:stretch>
-            <a:fillRect/>
-          </a:stretch>
-        </p:blipFill>
-        <p:spPr>
-          <a:xfrm>
-            <a:off x="8124749" y="1783080"/>
-            <a:ext cx="3472586" cy="1691640"/>
-          </a:xfrm>
-          <a:prstGeom prst="rect">
-            <a:avLst/>
-          </a:prstGeom>
-        </p:spPr>
-      </p:pic>
-      <p:sp>
-        <p:nvSpPr>
-          <p:cNvPr id="16" name="Text 11"/>
-          <p:cNvSpPr txBox="1"/>
-          <p:nvPr/>
-        </p:nvSpPr>
-        <p:spPr>
-          <a:xfrm>
-            <a:off x="8325917" y="3639312"/>
-            <a:ext cx="3070250" cy="384048"/>
-          </a:xfrm>
-          <a:prstGeom prst="rect">
-            <a:avLst/>
-          </a:prstGeom>
-          <a:noFill/>
-          <a:ln/>
-        </p:spPr>
-        <p:txBody>
-          <a:bodyPr wrap="square" lIns="0" tIns="0" rIns="0" bIns="0" rtlCol="0" anchor="ctr"/>
-          <a:lstStyle/>
-          <a:p>
-            <a:pPr algn="l" indent="0" marL="0">
-              <a:buNone/>
-            </a:pPr>
-            <a:r>
-              <a:rPr lang="en-US" sz="1500" b="1" dirty="0">
-                <a:solidFill>
-                  <a:srgbClr val="6B2A44"/>
-                </a:solidFill>
-                <a:latin typeface="Cambria" pitchFamily="34" charset="0"/>
-                <a:ea typeface="Cambria" pitchFamily="34" charset="-122"/>
-                <a:cs typeface="Cambria" pitchFamily="34" charset="-120"/>
-              </a:rPr>
-              <a:t>KwaZulu-Natal</a:t>
-            </a:r>
-            <a:endParaRPr lang="en-US" sz="1500" dirty="0"/>
-          </a:p>
-        </p:txBody>
-      </p:sp>
-      <p:sp>
-        <p:nvSpPr>
-          <p:cNvPr id="17" name="Text 12"/>
-          <p:cNvSpPr txBox="1"/>
-          <p:nvPr/>
-        </p:nvSpPr>
-        <p:spPr>
-          <a:xfrm>
-            <a:off x="8325917" y="4041648"/>
-            <a:ext cx="3070250" cy="329184"/>
-          </a:xfrm>
-          <a:prstGeom prst="rect">
-            <a:avLst/>
-          </a:prstGeom>
-          <a:noFill/>
-          <a:ln/>
-        </p:spPr>
-        <p:txBody>
-          <a:bodyPr wrap="square" lIns="0" tIns="0" rIns="0" bIns="0" rtlCol="0" anchor="ctr"/>
-          <a:lstStyle/>
-          <a:p>
-            <a:pPr algn="l" indent="0" marL="0">
-              <a:buNone/>
-            </a:pPr>
-            <a:r>
-              <a:rPr lang="en-US" sz="1250" b="1" dirty="0">
-                <a:solidFill>
-                  <a:srgbClr val="8F6D0F"/>
-                </a:solidFill>
-                <a:latin typeface="Calibri" pitchFamily="34" charset="0"/>
-                <a:ea typeface="Calibri" pitchFamily="34" charset="-122"/>
-                <a:cs typeface="Calibri" pitchFamily="34" charset="-120"/>
-              </a:rPr>
-              <a:t>≈ 300,000 ha of cane</a:t>
-            </a:r>
-            <a:endParaRPr lang="en-US" sz="1250" dirty="0"/>
-          </a:p>
-        </p:txBody>
-      </p:sp>
-      <p:sp>
-        <p:nvSpPr>
-          <p:cNvPr id="18" name="Text 13"/>
-          <p:cNvSpPr txBox="1"/>
-          <p:nvPr/>
-        </p:nvSpPr>
-        <p:spPr>
-          <a:xfrm>
-            <a:off x="8325917" y="4407408"/>
-            <a:ext cx="3070250" cy="1280160"/>
-          </a:xfrm>
-          <a:prstGeom prst="rect">
-            <a:avLst/>
-          </a:prstGeom>
-          <a:noFill/>
-          <a:ln/>
-        </p:spPr>
-        <p:txBody>
-          <a:bodyPr wrap="square" lIns="0" tIns="0" rIns="0" bIns="0" rtlCol="0" anchor="t"/>
-          <a:lstStyle/>
-          <a:p>
-            <a:pPr algn="l" marL="342900" indent="-342900">
-              <a:lnSpc>
-                <a:spcPct val="116000"/>
-              </a:lnSpc>
-              <a:spcAft>
-                <a:spcPts val="700"/>
-              </a:spcAft>
-              <a:buSzPct val="100000"/>
-              <a:buChar char="•"/>
-            </a:pPr>
-            <a:r>
-              <a:rPr lang="en-US" sz="1150" dirty="0">
-                <a:solidFill>
-                  <a:srgbClr val="3F3138"/>
-                </a:solidFill>
-                <a:latin typeface="Calibri" pitchFamily="34" charset="0"/>
-                <a:ea typeface="Calibri" pitchFamily="34" charset="-122"/>
-                <a:cs typeface="Calibri" pitchFamily="34" charset="-120"/>
-              </a:rPr>
-              <a:t>A sugar belt from the North Coast to Zululand, carrying most of a national crop of roughly 18 million tonnes.</a:t>
-            </a:r>
-            <a:endParaRPr lang="en-US" sz="1150" dirty="0"/>
-          </a:p>
-          <a:p>
-            <a:pPr algn="l" marL="342900" indent="-342900">
-              <a:lnSpc>
-                <a:spcPct val="116000"/>
-              </a:lnSpc>
-              <a:spcAft>
-                <a:spcPts val="700"/>
-              </a:spcAft>
-              <a:buSzPct val="100000"/>
-              <a:buChar char="•"/>
-            </a:pPr>
-            <a:r>
-              <a:rPr lang="en-US" sz="1150" dirty="0">
-                <a:solidFill>
-                  <a:srgbClr val="3F3138"/>
-                </a:solidFill>
-                <a:latin typeface="Calibri" pitchFamily="34" charset="0"/>
-                <a:ea typeface="Calibri" pitchFamily="34" charset="-122"/>
-                <a:cs typeface="Calibri" pitchFamily="34" charset="-120"/>
-              </a:rPr>
-              <a:t>Largely rain-fed: the gain is in holding the rain that falls, not in trimming a dose.</a:t>
-            </a:r>
-            <a:endParaRPr lang="en-US" sz="1150" dirty="0"/>
-          </a:p>
-          <a:p>
-            <a:pPr algn="l" marL="342900" indent="-342900">
-              <a:lnSpc>
-                <a:spcPct val="116000"/>
-              </a:lnSpc>
-              <a:spcAft>
-                <a:spcPts val="700"/>
-              </a:spcAft>
-              <a:buSzPct val="100000"/>
-              <a:buChar char="•"/>
-            </a:pPr>
-            <a:r>
-              <a:rPr lang="en-US" sz="1150" dirty="0">
-                <a:solidFill>
-                  <a:srgbClr val="3F3138"/>
-                </a:solidFill>
-                <a:latin typeface="Calibri" pitchFamily="34" charset="0"/>
-                <a:ea typeface="Calibri" pitchFamily="34" charset="-122"/>
-                <a:cs typeface="Calibri" pitchFamily="34" charset="-120"/>
-              </a:rPr>
-              <a:t>Around twenty thousand growers organised around mills — one route to a coordinated trial.</a:t>
-            </a:r>
-            <a:endParaRPr lang="en-US" sz="1150" dirty="0"/>
-          </a:p>
-        </p:txBody>
-      </p:sp>
-      <p:sp>
-        <p:nvSpPr>
-          <p:cNvPr id="19" name="Text 14"/>
+              <a:t>EVERGREEN® placed in the planting furrow holds water around young roots between irrigations.</a:t>
+            </a:r>
+            <a:endParaRPr lang="en-US" sz="1400" dirty="0"/>
+          </a:p>
+        </p:txBody>
+      </p:sp>
+      <p:sp>
+        <p:nvSpPr>
+          <p:cNvPr id="6" name="Text 3"/>
           <p:cNvSpPr txBox="1"/>
           <p:nvPr/>
         </p:nvSpPr>
@@ -7445,7 +12745,7 @@
       </p:sp>
       <p:sp>
         <p:nvSpPr>
-          <p:cNvPr id="20" name="Text 15"/>
+          <p:cNvPr id="7" name="Text 4"/>
           <p:cNvSpPr txBox="1"/>
           <p:nvPr/>
         </p:nvSpPr>
@@ -7549,7 +12849,7 @@
                 <a:ea typeface="Calibri" pitchFamily="34" charset="-122"/>
                 <a:cs typeface="Calibri" pitchFamily="34" charset="-120"/>
               </a:rPr>
-              <a:t>HOW WE WORK</a:t>
+              <a:t>Yield potential</a:t>
             </a:r>
             <a:endParaRPr lang="en-US" sz="1150" dirty="0"/>
           </a:p>
@@ -7588,26 +12888,42 @@
                 <a:ea typeface="Cambria" pitchFamily="34" charset="-122"/>
                 <a:cs typeface="Cambria" pitchFamily="34" charset="-120"/>
               </a:rPr>
-              <a:t>A staged rollout, measured at every step</a:t>
+              <a:t>Expected yield gain by crop</a:t>
             </a:r>
             <a:endParaRPr lang="en-US" sz="3000" dirty="0"/>
           </a:p>
         </p:txBody>
       </p:sp>
-      <p:sp>
-        <p:nvSpPr>
-          <p:cNvPr id="4" name="Shape 2"/>
+      <p:graphicFrame>
+        <p:nvGraphicFramePr>
+          <p:cNvPr id="4" name="Chart 0" descr=""/>
+          <p:cNvGraphicFramePr/>
+          <p:nvPr/>
+        </p:nvGraphicFramePr>
+        <p:xfrm>
+          <a:off x="594360" y="1783080"/>
+          <a:ext cx="7360920" cy="3977640"/>
+        </p:xfrm>
+        <a:graphic xmlns:a="http://schemas.openxmlformats.org/drawingml/2006/main">
+          <a:graphicData uri="http://schemas.openxmlformats.org/drawingml/2006/chart">
+            <c:chart xmlns:c="http://schemas.openxmlformats.org/drawingml/2006/chart" r:id="rId1"/>
+          </a:graphicData>
+        </a:graphic>
+      </p:graphicFrame>
+      <p:sp>
+        <p:nvSpPr>
+          <p:cNvPr id="5" name="Shape 2"/>
           <p:cNvSpPr/>
           <p:nvPr/>
         </p:nvSpPr>
         <p:spPr>
           <a:xfrm>
-            <a:off x="594360" y="1874520"/>
-            <a:ext cx="2545004" cy="2834640"/>
+            <a:off x="8275320" y="1783080"/>
+            <a:ext cx="3291840" cy="3977640"/>
           </a:xfrm>
           <a:prstGeom prst="roundRect">
             <a:avLst>
-              <a:gd name="adj" fmla="val 3593"/>
+              <a:gd name="adj" fmla="val 2778"/>
             </a:avLst>
           </a:prstGeom>
           <a:solidFill>
@@ -7623,34 +12939,14 @@
       </p:sp>
       <p:sp>
         <p:nvSpPr>
-          <p:cNvPr id="5" name="Shape 3"/>
-          <p:cNvSpPr/>
-          <p:nvPr/>
-        </p:nvSpPr>
-        <p:spPr>
-          <a:xfrm>
-            <a:off x="822960" y="2103120"/>
-            <a:ext cx="566928" cy="566928"/>
-          </a:xfrm>
-          <a:prstGeom prst="ellipse">
-            <a:avLst/>
-          </a:prstGeom>
-          <a:solidFill>
-            <a:srgbClr val="6B2A44"/>
-          </a:solidFill>
-          <a:ln/>
-        </p:spPr>
-      </p:sp>
-      <p:sp>
-        <p:nvSpPr>
-          <p:cNvPr id="6" name="Text 4"/>
-          <p:cNvSpPr txBox="1"/>
-          <p:nvPr/>
-        </p:nvSpPr>
-        <p:spPr>
-          <a:xfrm>
-            <a:off x="822960" y="2103120"/>
-            <a:ext cx="566928" cy="566928"/>
+          <p:cNvPr id="6" name="Text 3"/>
+          <p:cNvSpPr txBox="1"/>
+          <p:nvPr/>
+        </p:nvSpPr>
+        <p:spPr>
+          <a:xfrm>
+            <a:off x="8503920" y="2011680"/>
+            <a:ext cx="2834640" cy="457200"/>
           </a:xfrm>
           <a:prstGeom prst="rect">
             <a:avLst/>
@@ -7662,616 +12958,34 @@
           <a:bodyPr wrap="square" lIns="0" tIns="0" rIns="0" bIns="0" rtlCol="0" anchor="ctr"/>
           <a:lstStyle/>
           <a:p>
-            <a:pPr algn="ctr" indent="0" marL="0">
-              <a:buNone/>
-            </a:pPr>
-            <a:r>
-              <a:rPr lang="en-US" sz="1600" b="1" dirty="0">
-                <a:solidFill>
-                  <a:srgbClr val="FFFFFF"/>
+            <a:pPr algn="l" indent="0" marL="0">
+              <a:buNone/>
+            </a:pPr>
+            <a:r>
+              <a:rPr lang="en-US" sz="1300" b="1" dirty="0">
+                <a:solidFill>
+                  <a:srgbClr val="6B2A44"/>
                 </a:solidFill>
                 <a:latin typeface="Cambria" pitchFamily="34" charset="0"/>
                 <a:ea typeface="Cambria" pitchFamily="34" charset="-122"/>
                 <a:cs typeface="Cambria" pitchFamily="34" charset="-120"/>
               </a:rPr>
-              <a:t>1</a:t>
-            </a:r>
-            <a:endParaRPr lang="en-US" sz="1600" dirty="0"/>
-          </a:p>
-        </p:txBody>
-      </p:sp>
-      <p:sp>
-        <p:nvSpPr>
-          <p:cNvPr id="7" name="Text 5"/>
-          <p:cNvSpPr txBox="1"/>
-          <p:nvPr/>
-        </p:nvSpPr>
-        <p:spPr>
-          <a:xfrm>
-            <a:off x="822960" y="2788920"/>
-            <a:ext cx="2087804" cy="457200"/>
-          </a:xfrm>
-          <a:prstGeom prst="rect">
-            <a:avLst/>
-          </a:prstGeom>
-          <a:noFill/>
-          <a:ln/>
-        </p:spPr>
-        <p:txBody>
-          <a:bodyPr wrap="square" lIns="0" tIns="0" rIns="0" bIns="0" rtlCol="0" anchor="ctr"/>
-          <a:lstStyle/>
-          <a:p>
-            <a:pPr algn="l" indent="0" marL="0">
-              <a:buNone/>
-            </a:pPr>
-            <a:r>
-              <a:rPr lang="en-US" sz="1400" b="1" dirty="0">
-                <a:solidFill>
-                  <a:srgbClr val="6B2A44"/>
-                </a:solidFill>
-                <a:latin typeface="Cambria" pitchFamily="34" charset="0"/>
-                <a:ea typeface="Cambria" pitchFamily="34" charset="-122"/>
-                <a:cs typeface="Cambria" pitchFamily="34" charset="-120"/>
-              </a:rPr>
-              <a:t>Assessment</a:t>
-            </a:r>
-            <a:endParaRPr lang="en-US" sz="1400" dirty="0"/>
-          </a:p>
-        </p:txBody>
-      </p:sp>
-      <p:sp>
-        <p:nvSpPr>
-          <p:cNvPr id="8" name="Text 6"/>
-          <p:cNvSpPr txBox="1"/>
-          <p:nvPr/>
-        </p:nvSpPr>
-        <p:spPr>
-          <a:xfrm>
-            <a:off x="822960" y="3291840"/>
-            <a:ext cx="2087804" cy="1234440"/>
-          </a:xfrm>
-          <a:prstGeom prst="rect">
-            <a:avLst/>
-          </a:prstGeom>
-          <a:noFill/>
-          <a:ln/>
-        </p:spPr>
-        <p:txBody>
-          <a:bodyPr wrap="square" lIns="0" tIns="0" rIns="0" bIns="0" rtlCol="0" anchor="t"/>
-          <a:lstStyle/>
-          <a:p>
-            <a:pPr algn="l" indent="0" marL="0">
-              <a:lnSpc>
-                <a:spcPct val="120000"/>
-              </a:lnSpc>
-              <a:buNone/>
-            </a:pPr>
-            <a:r>
-              <a:rPr lang="en-US" sz="1200" dirty="0">
-                <a:solidFill>
-                  <a:srgbClr val="3F3138"/>
-                </a:solidFill>
-                <a:latin typeface="Calibri" pitchFamily="34" charset="0"/>
-                <a:ea typeface="Calibri" pitchFamily="34" charset="-122"/>
-                <a:cs typeface="Calibri" pitchFamily="34" charset="-120"/>
-              </a:rPr>
-              <a:t>Soil, irrigation method and crop are reviewed. No commitment at this stage.</a:t>
-            </a:r>
-            <a:endParaRPr lang="en-US" sz="1200" dirty="0"/>
-          </a:p>
-        </p:txBody>
-      </p:sp>
-      <p:sp>
-        <p:nvSpPr>
-          <p:cNvPr id="9" name="Shape 7"/>
-          <p:cNvSpPr/>
-          <p:nvPr/>
-        </p:nvSpPr>
-        <p:spPr>
-          <a:xfrm>
-            <a:off x="3413684" y="1874520"/>
-            <a:ext cx="2545004" cy="2834640"/>
-          </a:xfrm>
-          <a:prstGeom prst="roundRect">
-            <a:avLst>
-              <a:gd name="adj" fmla="val 3593"/>
-            </a:avLst>
-          </a:prstGeom>
-          <a:solidFill>
-            <a:srgbClr val="F5EFF1"/>
-          </a:solidFill>
-          <a:ln w="9525">
-            <a:solidFill>
-              <a:srgbClr val="E5D9DE"/>
-            </a:solidFill>
-            <a:prstDash val="solid"/>
-          </a:ln>
-        </p:spPr>
-      </p:sp>
-      <p:sp>
-        <p:nvSpPr>
-          <p:cNvPr id="10" name="Shape 8"/>
-          <p:cNvSpPr/>
-          <p:nvPr/>
-        </p:nvSpPr>
-        <p:spPr>
-          <a:xfrm>
-            <a:off x="3642284" y="2103120"/>
-            <a:ext cx="566928" cy="566928"/>
-          </a:xfrm>
-          <a:prstGeom prst="ellipse">
-            <a:avLst/>
-          </a:prstGeom>
-          <a:solidFill>
-            <a:srgbClr val="6B2A44"/>
-          </a:solidFill>
-          <a:ln/>
-        </p:spPr>
-      </p:sp>
-      <p:sp>
-        <p:nvSpPr>
-          <p:cNvPr id="11" name="Text 9"/>
-          <p:cNvSpPr txBox="1"/>
-          <p:nvPr/>
-        </p:nvSpPr>
-        <p:spPr>
-          <a:xfrm>
-            <a:off x="3642284" y="2103120"/>
-            <a:ext cx="566928" cy="566928"/>
-          </a:xfrm>
-          <a:prstGeom prst="rect">
-            <a:avLst/>
-          </a:prstGeom>
-          <a:noFill/>
-          <a:ln/>
-        </p:spPr>
-        <p:txBody>
-          <a:bodyPr wrap="square" lIns="0" tIns="0" rIns="0" bIns="0" rtlCol="0" anchor="ctr"/>
-          <a:lstStyle/>
-          <a:p>
-            <a:pPr algn="ctr" indent="0" marL="0">
-              <a:buNone/>
-            </a:pPr>
-            <a:r>
-              <a:rPr lang="en-US" sz="1600" b="1" dirty="0">
-                <a:solidFill>
-                  <a:srgbClr val="FFFFFF"/>
-                </a:solidFill>
-                <a:latin typeface="Cambria" pitchFamily="34" charset="0"/>
-                <a:ea typeface="Cambria" pitchFamily="34" charset="-122"/>
-                <a:cs typeface="Cambria" pitchFamily="34" charset="-120"/>
-              </a:rPr>
-              <a:t>2</a:t>
-            </a:r>
-            <a:endParaRPr lang="en-US" sz="1600" dirty="0"/>
-          </a:p>
-        </p:txBody>
-      </p:sp>
-      <p:sp>
-        <p:nvSpPr>
-          <p:cNvPr id="12" name="Text 10"/>
-          <p:cNvSpPr txBox="1"/>
-          <p:nvPr/>
-        </p:nvSpPr>
-        <p:spPr>
-          <a:xfrm>
-            <a:off x="3642284" y="2788920"/>
-            <a:ext cx="2087804" cy="457200"/>
-          </a:xfrm>
-          <a:prstGeom prst="rect">
-            <a:avLst/>
-          </a:prstGeom>
-          <a:noFill/>
-          <a:ln/>
-        </p:spPr>
-        <p:txBody>
-          <a:bodyPr wrap="square" lIns="0" tIns="0" rIns="0" bIns="0" rtlCol="0" anchor="ctr"/>
-          <a:lstStyle/>
-          <a:p>
-            <a:pPr algn="l" indent="0" marL="0">
-              <a:buNone/>
-            </a:pPr>
-            <a:r>
-              <a:rPr lang="en-US" sz="1400" b="1" dirty="0">
-                <a:solidFill>
-                  <a:srgbClr val="6B2A44"/>
-                </a:solidFill>
-                <a:latin typeface="Cambria" pitchFamily="34" charset="0"/>
-                <a:ea typeface="Cambria" pitchFamily="34" charset="-122"/>
-                <a:cs typeface="Cambria" pitchFamily="34" charset="-120"/>
-              </a:rPr>
-              <a:t>Trial block</a:t>
-            </a:r>
-            <a:endParaRPr lang="en-US" sz="1400" dirty="0"/>
-          </a:p>
-        </p:txBody>
-      </p:sp>
-      <p:sp>
-        <p:nvSpPr>
-          <p:cNvPr id="13" name="Text 11"/>
-          <p:cNvSpPr txBox="1"/>
-          <p:nvPr/>
-        </p:nvSpPr>
-        <p:spPr>
-          <a:xfrm>
-            <a:off x="3642284" y="3291840"/>
-            <a:ext cx="2087804" cy="1234440"/>
-          </a:xfrm>
-          <a:prstGeom prst="rect">
-            <a:avLst/>
-          </a:prstGeom>
-          <a:noFill/>
-          <a:ln/>
-        </p:spPr>
-        <p:txBody>
-          <a:bodyPr wrap="square" lIns="0" tIns="0" rIns="0" bIns="0" rtlCol="0" anchor="t"/>
-          <a:lstStyle/>
-          <a:p>
-            <a:pPr algn="l" indent="0" marL="0">
-              <a:lnSpc>
-                <a:spcPct val="120000"/>
-              </a:lnSpc>
-              <a:buNone/>
-            </a:pPr>
-            <a:r>
-              <a:rPr lang="en-US" sz="1200" dirty="0">
-                <a:solidFill>
-                  <a:srgbClr val="3F3138"/>
-                </a:solidFill>
-                <a:latin typeface="Calibri" pitchFamily="34" charset="0"/>
-                <a:ea typeface="Calibri" pitchFamily="34" charset="-122"/>
-                <a:cs typeface="Calibri" pitchFamily="34" charset="-120"/>
-              </a:rPr>
-              <a:t>One comparative trial block, against a control block managed identically.</a:t>
-            </a:r>
-            <a:endParaRPr lang="en-US" sz="1200" dirty="0"/>
-          </a:p>
-        </p:txBody>
-      </p:sp>
-      <p:sp>
-        <p:nvSpPr>
-          <p:cNvPr id="14" name="Shape 12"/>
-          <p:cNvSpPr/>
-          <p:nvPr/>
-        </p:nvSpPr>
-        <p:spPr>
-          <a:xfrm>
-            <a:off x="6233008" y="1874520"/>
-            <a:ext cx="2545004" cy="2834640"/>
-          </a:xfrm>
-          <a:prstGeom prst="roundRect">
-            <a:avLst>
-              <a:gd name="adj" fmla="val 3593"/>
-            </a:avLst>
-          </a:prstGeom>
-          <a:solidFill>
-            <a:srgbClr val="F5EFF1"/>
-          </a:solidFill>
-          <a:ln w="9525">
-            <a:solidFill>
-              <a:srgbClr val="E5D9DE"/>
-            </a:solidFill>
-            <a:prstDash val="solid"/>
-          </a:ln>
-        </p:spPr>
-      </p:sp>
-      <p:sp>
-        <p:nvSpPr>
-          <p:cNvPr id="15" name="Shape 13"/>
-          <p:cNvSpPr/>
-          <p:nvPr/>
-        </p:nvSpPr>
-        <p:spPr>
-          <a:xfrm>
-            <a:off x="6461608" y="2103120"/>
-            <a:ext cx="566928" cy="566928"/>
-          </a:xfrm>
-          <a:prstGeom prst="ellipse">
-            <a:avLst/>
-          </a:prstGeom>
-          <a:solidFill>
-            <a:srgbClr val="6B2A44"/>
-          </a:solidFill>
-          <a:ln/>
-        </p:spPr>
-      </p:sp>
-      <p:sp>
-        <p:nvSpPr>
-          <p:cNvPr id="16" name="Text 14"/>
-          <p:cNvSpPr txBox="1"/>
-          <p:nvPr/>
-        </p:nvSpPr>
-        <p:spPr>
-          <a:xfrm>
-            <a:off x="6461608" y="2103120"/>
-            <a:ext cx="566928" cy="566928"/>
-          </a:xfrm>
-          <a:prstGeom prst="rect">
-            <a:avLst/>
-          </a:prstGeom>
-          <a:noFill/>
-          <a:ln/>
-        </p:spPr>
-        <p:txBody>
-          <a:bodyPr wrap="square" lIns="0" tIns="0" rIns="0" bIns="0" rtlCol="0" anchor="ctr"/>
-          <a:lstStyle/>
-          <a:p>
-            <a:pPr algn="ctr" indent="0" marL="0">
-              <a:buNone/>
-            </a:pPr>
-            <a:r>
-              <a:rPr lang="en-US" sz="1600" b="1" dirty="0">
-                <a:solidFill>
-                  <a:srgbClr val="FFFFFF"/>
-                </a:solidFill>
-                <a:latin typeface="Cambria" pitchFamily="34" charset="0"/>
-                <a:ea typeface="Cambria" pitchFamily="34" charset="-122"/>
-                <a:cs typeface="Cambria" pitchFamily="34" charset="-120"/>
-              </a:rPr>
-              <a:t>3</a:t>
-            </a:r>
-            <a:endParaRPr lang="en-US" sz="1600" dirty="0"/>
-          </a:p>
-        </p:txBody>
-      </p:sp>
-      <p:sp>
-        <p:nvSpPr>
-          <p:cNvPr id="17" name="Text 15"/>
-          <p:cNvSpPr txBox="1"/>
-          <p:nvPr/>
-        </p:nvSpPr>
-        <p:spPr>
-          <a:xfrm>
-            <a:off x="6461608" y="2788920"/>
-            <a:ext cx="2087804" cy="457200"/>
-          </a:xfrm>
-          <a:prstGeom prst="rect">
-            <a:avLst/>
-          </a:prstGeom>
-          <a:noFill/>
-          <a:ln/>
-        </p:spPr>
-        <p:txBody>
-          <a:bodyPr wrap="square" lIns="0" tIns="0" rIns="0" bIns="0" rtlCol="0" anchor="ctr"/>
-          <a:lstStyle/>
-          <a:p>
-            <a:pPr algn="l" indent="0" marL="0">
-              <a:buNone/>
-            </a:pPr>
-            <a:r>
-              <a:rPr lang="en-US" sz="1400" b="1" dirty="0">
-                <a:solidFill>
-                  <a:srgbClr val="6B2A44"/>
-                </a:solidFill>
-                <a:latin typeface="Cambria" pitchFamily="34" charset="0"/>
-                <a:ea typeface="Cambria" pitchFamily="34" charset="-122"/>
-                <a:cs typeface="Cambria" pitchFamily="34" charset="-120"/>
-              </a:rPr>
-              <a:t>Measurement</a:t>
-            </a:r>
-            <a:endParaRPr lang="en-US" sz="1400" dirty="0"/>
-          </a:p>
-        </p:txBody>
-      </p:sp>
-      <p:sp>
-        <p:nvSpPr>
-          <p:cNvPr id="18" name="Text 16"/>
-          <p:cNvSpPr txBox="1"/>
-          <p:nvPr/>
-        </p:nvSpPr>
-        <p:spPr>
-          <a:xfrm>
-            <a:off x="6461608" y="3291840"/>
-            <a:ext cx="2087804" cy="1234440"/>
-          </a:xfrm>
-          <a:prstGeom prst="rect">
-            <a:avLst/>
-          </a:prstGeom>
-          <a:noFill/>
-          <a:ln/>
-        </p:spPr>
-        <p:txBody>
-          <a:bodyPr wrap="square" lIns="0" tIns="0" rIns="0" bIns="0" rtlCol="0" anchor="t"/>
-          <a:lstStyle/>
-          <a:p>
-            <a:pPr algn="l" indent="0" marL="0">
-              <a:lnSpc>
-                <a:spcPct val="120000"/>
-              </a:lnSpc>
-              <a:buNone/>
-            </a:pPr>
-            <a:r>
-              <a:rPr lang="en-US" sz="1200" dirty="0">
-                <a:solidFill>
-                  <a:srgbClr val="3F3138"/>
-                </a:solidFill>
-                <a:latin typeface="Calibri" pitchFamily="34" charset="0"/>
-                <a:ea typeface="Calibri" pitchFamily="34" charset="-122"/>
-                <a:cs typeface="Calibri" pitchFamily="34" charset="-120"/>
-              </a:rPr>
-              <a:t>Water use and yield recorded over a full growing season.</a:t>
-            </a:r>
-            <a:endParaRPr lang="en-US" sz="1200" dirty="0"/>
-          </a:p>
-        </p:txBody>
-      </p:sp>
-      <p:sp>
-        <p:nvSpPr>
-          <p:cNvPr id="19" name="Shape 17"/>
-          <p:cNvSpPr/>
-          <p:nvPr/>
-        </p:nvSpPr>
-        <p:spPr>
-          <a:xfrm>
-            <a:off x="9052331" y="1874520"/>
-            <a:ext cx="2545004" cy="2834640"/>
-          </a:xfrm>
-          <a:prstGeom prst="roundRect">
-            <a:avLst>
-              <a:gd name="adj" fmla="val 3593"/>
-            </a:avLst>
-          </a:prstGeom>
-          <a:solidFill>
-            <a:srgbClr val="F5EFF1"/>
-          </a:solidFill>
-          <a:ln w="9525">
-            <a:solidFill>
-              <a:srgbClr val="E5D9DE"/>
-            </a:solidFill>
-            <a:prstDash val="solid"/>
-          </a:ln>
-        </p:spPr>
-      </p:sp>
-      <p:sp>
-        <p:nvSpPr>
-          <p:cNvPr id="20" name="Shape 18"/>
-          <p:cNvSpPr/>
-          <p:nvPr/>
-        </p:nvSpPr>
-        <p:spPr>
-          <a:xfrm>
-            <a:off x="9280931" y="2103120"/>
-            <a:ext cx="566928" cy="566928"/>
-          </a:xfrm>
-          <a:prstGeom prst="ellipse">
-            <a:avLst/>
-          </a:prstGeom>
-          <a:solidFill>
-            <a:srgbClr val="6B2A44"/>
-          </a:solidFill>
-          <a:ln/>
-        </p:spPr>
-      </p:sp>
-      <p:sp>
-        <p:nvSpPr>
-          <p:cNvPr id="21" name="Text 19"/>
-          <p:cNvSpPr txBox="1"/>
-          <p:nvPr/>
-        </p:nvSpPr>
-        <p:spPr>
-          <a:xfrm>
-            <a:off x="9280931" y="2103120"/>
-            <a:ext cx="566928" cy="566928"/>
-          </a:xfrm>
-          <a:prstGeom prst="rect">
-            <a:avLst/>
-          </a:prstGeom>
-          <a:noFill/>
-          <a:ln/>
-        </p:spPr>
-        <p:txBody>
-          <a:bodyPr wrap="square" lIns="0" tIns="0" rIns="0" bIns="0" rtlCol="0" anchor="ctr"/>
-          <a:lstStyle/>
-          <a:p>
-            <a:pPr algn="ctr" indent="0" marL="0">
-              <a:buNone/>
-            </a:pPr>
-            <a:r>
-              <a:rPr lang="en-US" sz="1600" b="1" dirty="0">
-                <a:solidFill>
-                  <a:srgbClr val="FFFFFF"/>
-                </a:solidFill>
-                <a:latin typeface="Cambria" pitchFamily="34" charset="0"/>
-                <a:ea typeface="Cambria" pitchFamily="34" charset="-122"/>
-                <a:cs typeface="Cambria" pitchFamily="34" charset="-120"/>
-              </a:rPr>
-              <a:t>4</a:t>
-            </a:r>
-            <a:endParaRPr lang="en-US" sz="1600" dirty="0"/>
-          </a:p>
-        </p:txBody>
-      </p:sp>
-      <p:sp>
-        <p:nvSpPr>
-          <p:cNvPr id="22" name="Text 20"/>
-          <p:cNvSpPr txBox="1"/>
-          <p:nvPr/>
-        </p:nvSpPr>
-        <p:spPr>
-          <a:xfrm>
-            <a:off x="9280931" y="2788920"/>
-            <a:ext cx="2087804" cy="457200"/>
-          </a:xfrm>
-          <a:prstGeom prst="rect">
-            <a:avLst/>
-          </a:prstGeom>
-          <a:noFill/>
-          <a:ln/>
-        </p:spPr>
-        <p:txBody>
-          <a:bodyPr wrap="square" lIns="0" tIns="0" rIns="0" bIns="0" rtlCol="0" anchor="ctr"/>
-          <a:lstStyle/>
-          <a:p>
-            <a:pPr algn="l" indent="0" marL="0">
-              <a:buNone/>
-            </a:pPr>
-            <a:r>
-              <a:rPr lang="en-US" sz="1400" b="1" dirty="0">
-                <a:solidFill>
-                  <a:srgbClr val="6B2A44"/>
-                </a:solidFill>
-                <a:latin typeface="Cambria" pitchFamily="34" charset="0"/>
-                <a:ea typeface="Cambria" pitchFamily="34" charset="-122"/>
-                <a:cs typeface="Cambria" pitchFamily="34" charset="-120"/>
-              </a:rPr>
-              <a:t>Extension</a:t>
-            </a:r>
-            <a:endParaRPr lang="en-US" sz="1400" dirty="0"/>
-          </a:p>
-        </p:txBody>
-      </p:sp>
-      <p:sp>
-        <p:nvSpPr>
-          <p:cNvPr id="23" name="Text 21"/>
-          <p:cNvSpPr txBox="1"/>
-          <p:nvPr/>
-        </p:nvSpPr>
-        <p:spPr>
-          <a:xfrm>
-            <a:off x="9280931" y="3291840"/>
-            <a:ext cx="2087804" cy="1234440"/>
-          </a:xfrm>
-          <a:prstGeom prst="rect">
-            <a:avLst/>
-          </a:prstGeom>
-          <a:noFill/>
-          <a:ln/>
-        </p:spPr>
-        <p:txBody>
-          <a:bodyPr wrap="square" lIns="0" tIns="0" rIns="0" bIns="0" rtlCol="0" anchor="t"/>
-          <a:lstStyle/>
-          <a:p>
-            <a:pPr algn="l" indent="0" marL="0">
-              <a:lnSpc>
-                <a:spcPct val="120000"/>
-              </a:lnSpc>
-              <a:buNone/>
-            </a:pPr>
-            <a:r>
-              <a:rPr lang="en-US" sz="1200" dirty="0">
-                <a:solidFill>
-                  <a:srgbClr val="3F3138"/>
-                </a:solidFill>
-                <a:latin typeface="Calibri" pitchFamily="34" charset="0"/>
-                <a:ea typeface="Calibri" pitchFamily="34" charset="-122"/>
-                <a:cs typeface="Calibri" pitchFamily="34" charset="-120"/>
-              </a:rPr>
-              <a:t>Gradual rollout to the remaining blocks, on the basis of what was measured.</a:t>
-            </a:r>
-            <a:endParaRPr lang="en-US" sz="1200" dirty="0"/>
-          </a:p>
-        </p:txBody>
-      </p:sp>
-      <p:sp>
-        <p:nvSpPr>
-          <p:cNvPr id="24" name="Text 22"/>
-          <p:cNvSpPr txBox="1"/>
-          <p:nvPr/>
-        </p:nvSpPr>
-        <p:spPr>
-          <a:xfrm>
-            <a:off x="594360" y="4983480"/>
-            <a:ext cx="11002975" cy="822960"/>
+              <a:t>Read with care</a:t>
+            </a:r>
+            <a:endParaRPr lang="en-US" sz="1300" dirty="0"/>
+          </a:p>
+        </p:txBody>
+      </p:sp>
+      <p:sp>
+        <p:nvSpPr>
+          <p:cNvPr id="7" name="Text 4"/>
+          <p:cNvSpPr txBox="1"/>
+          <p:nvPr/>
+        </p:nvSpPr>
+        <p:spPr>
+          <a:xfrm>
+            <a:off x="8503920" y="2560320"/>
+            <a:ext cx="2834640" cy="3017520"/>
           </a:xfrm>
           <a:prstGeom prst="rect">
             <a:avLst/>
@@ -8290,23 +13004,52 @@
               <a:buNone/>
             </a:pPr>
             <a:r>
-              <a:rPr lang="en-US" sz="1250" i="1" dirty="0">
-                <a:solidFill>
-                  <a:srgbClr val="7C6B73"/>
-                </a:solidFill>
-                <a:latin typeface="Calibri" pitchFamily="34" charset="0"/>
-                <a:ea typeface="Calibri" pitchFamily="34" charset="-122"/>
-                <a:cs typeface="Calibri" pitchFamily="34" charset="-120"/>
-              </a:rPr>
-              <a:t>The dosing rule is the same everywhere: 3 grams per litre of useful soil. What changes from one site to the next is the volume of soil the roots actually explore.</a:t>
-            </a:r>
-            <a:endParaRPr lang="en-US" sz="1250" dirty="0"/>
-          </a:p>
-        </p:txBody>
-      </p:sp>
-      <p:sp>
-        <p:nvSpPr>
-          <p:cNvPr id="25" name="Text 23"/>
+              <a:rPr lang="en-US" sz="1200" dirty="0">
+                <a:solidFill>
+                  <a:srgbClr val="3F3138"/>
+                </a:solidFill>
+                <a:latin typeface="Calibri" pitchFamily="34" charset="0"/>
+                <a:ea typeface="Calibri" pitchFamily="34" charset="-122"/>
+                <a:cs typeface="Calibri" pitchFamily="34" charset="-120"/>
+              </a:rPr>
+              <a:t>Ranges used by our dose calculator, for a normally managed crop with EVERGREEN® applied at planting.</a:t>
+            </a:r>
+            <a:endParaRPr lang="en-US" sz="1200" dirty="0"/>
+          </a:p>
+          <a:p>
+            <a:pPr algn="l" indent="0" marL="0">
+              <a:lnSpc>
+                <a:spcPct val="125000"/>
+              </a:lnSpc>
+              <a:buNone/>
+            </a:pPr>
+            <a:endParaRPr lang="en-US" sz="1200" dirty="0"/>
+          </a:p>
+          <a:p>
+            <a:pPr algn="l" indent="0" marL="0">
+              <a:lnSpc>
+                <a:spcPct val="125000"/>
+              </a:lnSpc>
+              <a:buNone/>
+            </a:pPr>
+            <a:r>
+              <a:rPr lang="en-US" sz="1200" dirty="0">
+                <a:solidFill>
+                  <a:srgbClr val="3F3138"/>
+                </a:solidFill>
+                <a:latin typeface="Calibri" pitchFamily="34" charset="0"/>
+                <a:ea typeface="Calibri" pitchFamily="34" charset="-122"/>
+                <a:cs typeface="Calibri" pitchFamily="34" charset="-120"/>
+              </a:rPr>
+              <a:t>Actual results depend on soil, climate and management. For cereals, no gain is claimed without a field trial.</a:t>
+            </a:r>
+            <a:endParaRPr lang="en-US" sz="1200" dirty="0"/>
+          </a:p>
+        </p:txBody>
+      </p:sp>
+      <p:sp>
+        <p:nvSpPr>
+          <p:cNvPr id="8" name="Text 5"/>
           <p:cNvSpPr txBox="1"/>
           <p:nvPr/>
         </p:nvSpPr>
@@ -8347,7 +13090,7 @@
       </p:sp>
       <p:sp>
         <p:nvSpPr>
-          <p:cNvPr id="26" name="Text 24"/>
+          <p:cNvPr id="9" name="Text 6"/>
           <p:cNvSpPr txBox="1"/>
           <p:nvPr/>
         </p:nvSpPr>

--- a/public/documents/countries/afrique-du-sud.pptx
+++ b/public/documents/countries/afrique-du-sud.pptx
@@ -3744,7 +3744,7 @@
       </p:sp>
       <p:pic>
         <p:nvPicPr>
-          <p:cNvPr id="5" name="Image 1" descr="C:\Users\Utilisateur\dev\green-solutions-web\public\images\logo-icon.png">    </p:cNvPr>
+          <p:cNvPr id="5" name="Image 1" descr="C:\Users\Utilisateur\dev\gsw-dossiers\public\images\logo-icon.png">    </p:cNvPr>
           <p:cNvPicPr>
             <a:picLocks noChangeAspect="1"/>
           </p:cNvPicPr>
@@ -3768,7 +3768,7 @@
       </p:pic>
       <p:pic>
         <p:nvPicPr>
-          <p:cNvPr id="6" name="Image 2" descr="C:\Users\Utilisateur\dev\green-solutions-web\scripts\dossiers\drapeaux\afrique-du-sud.png">    </p:cNvPr>
+          <p:cNvPr id="6" name="Image 2" descr="C:\Users\Utilisateur\dev\gsw-dossiers\scripts\dossiers\drapeaux\afrique-du-sud.png">    </p:cNvPr>
           <p:cNvPicPr>
             <a:picLocks noChangeAspect="1"/>
           </p:cNvPicPr>
@@ -9535,7 +9535,7 @@
                 <a:ea typeface="Calibri" pitchFamily="34" charset="-122"/>
                 <a:cs typeface="Calibri" pitchFamily="34" charset="-120"/>
               </a:rPr>
-              <a:t>contact@evergreen-ecosorb.com · 821 Chemin des Clapiers, 83220 Le Pradet, France</a:t>
+              <a:t>contact@evergreen-ecosorb.com · Green Solutions Groupe AIM SA, 46, route de la Condémine, 1475 Forel, Switzerland</a:t>
             </a:r>
             <a:endParaRPr lang="en-US" sz="1400" dirty="0"/>
           </a:p>
@@ -9543,7 +9543,7 @@
       </p:sp>
       <p:pic>
         <p:nvPicPr>
-          <p:cNvPr id="6" name="Image 1" descr="C:\Users\Utilisateur\dev\green-solutions-web\scripts\dossiers\sceau-aim-clair.png">    </p:cNvPr>
+          <p:cNvPr id="6" name="Image 1" descr="C:\Users\Utilisateur\dev\gsw-dossiers\scripts\dossiers\sceau-aim-clair.png">    </p:cNvPr>
           <p:cNvPicPr>
             <a:picLocks noChangeAspect="1"/>
           </p:cNvPicPr>

--- a/public/documents/countries/afrique-du-sud.pptx
+++ b/public/documents/countries/afrique-du-sud.pptx
@@ -124,7 +124,7 @@
 </p:presentation>
 </file>
 
-<file path=ppt/charts/chart1.xml><?xml version="1.0" encoding="utf-8"?>
+<file path=ppt/charts/chart5.xml><?xml version="1.0" encoding="utf-8"?>
 <c:chartSpace xmlns:c="http://schemas.openxmlformats.org/drawingml/2006/chart" xmlns:a="http://schemas.openxmlformats.org/drawingml/2006/main" xmlns:r="http://schemas.openxmlformats.org/officeDocument/2006/relationships">
   <c:date1904 val="0"/>
   <c:roundedCorners val="1"/>
@@ -369,7 +369,7 @@
 </c:chartSpace>
 </file>
 
-<file path=ppt/charts/chart2.xml><?xml version="1.0" encoding="utf-8"?>
+<file path=ppt/charts/chart6.xml><?xml version="1.0" encoding="utf-8"?>
 <c:chartSpace xmlns:c="http://schemas.openxmlformats.org/drawingml/2006/chart" xmlns:a="http://schemas.openxmlformats.org/drawingml/2006/main" xmlns:r="http://schemas.openxmlformats.org/officeDocument/2006/relationships">
   <c:date1904 val="0"/>
   <c:roundedCorners val="1"/>
@@ -677,7 +677,7 @@
 </c:chartSpace>
 </file>
 
-<file path=ppt/charts/chart3.xml><?xml version="1.0" encoding="utf-8"?>
+<file path=ppt/charts/chart7.xml><?xml version="1.0" encoding="utf-8"?>
 <c:chartSpace xmlns:c="http://schemas.openxmlformats.org/drawingml/2006/chart" xmlns:a="http://schemas.openxmlformats.org/drawingml/2006/main" xmlns:r="http://schemas.openxmlformats.org/officeDocument/2006/relationships">
   <c:date1904 val="0"/>
   <c:roundedCorners val="1"/>
@@ -1042,7 +1042,7 @@
 </c:chartSpace>
 </file>
 
-<file path=ppt/charts/chart4.xml><?xml version="1.0" encoding="utf-8"?>
+<file path=ppt/charts/chart8.xml><?xml version="1.0" encoding="utf-8"?>
 <c:chartSpace xmlns:c="http://schemas.openxmlformats.org/drawingml/2006/chart" xmlns:a="http://schemas.openxmlformats.org/drawingml/2006/main" xmlns:r="http://schemas.openxmlformats.org/officeDocument/2006/relationships">
   <c:date1904 val="0"/>
   <c:roundedCorners val="1"/>
@@ -3744,7 +3744,7 @@
       </p:sp>
       <p:pic>
         <p:nvPicPr>
-          <p:cNvPr id="5" name="Image 1" descr="C:\Users\Utilisateur\dev\gsw-dossiers\public\images\logo-icon.png">    </p:cNvPr>
+          <p:cNvPr id="5" name="Image 1" descr="C:\Users\Utilisateur\dev\green-solutions-web\public\images\logo-icon.png">    </p:cNvPr>
           <p:cNvPicPr>
             <a:picLocks noChangeAspect="1"/>
           </p:cNvPicPr>
@@ -3768,7 +3768,7 @@
       </p:pic>
       <p:pic>
         <p:nvPicPr>
-          <p:cNvPr id="6" name="Image 2" descr="C:\Users\Utilisateur\dev\gsw-dossiers\scripts\dossiers\drapeaux\afrique-du-sud.png">    </p:cNvPr>
+          <p:cNvPr id="6" name="Image 2" descr="C:\Users\Utilisateur\dev\green-solutions-web\scripts\dossiers\drapeaux\afrique-du-sud.png">    </p:cNvPr>
           <p:cNvPicPr>
             <a:picLocks noChangeAspect="1"/>
           </p:cNvPicPr>
@@ -3782,8 +3782,8 @@
         </p:blipFill>
         <p:spPr>
           <a:xfrm>
-            <a:off x="3648456" y="1389888"/>
-            <a:ext cx="1965960" cy="1310640"/>
+            <a:off x="3649991" y="1389888"/>
+            <a:ext cx="1964425" cy="1310640"/>
           </a:xfrm>
           <a:prstGeom prst="rect">
             <a:avLst/>
@@ -3798,8 +3798,8 @@
         </p:nvSpPr>
         <p:spPr>
           <a:xfrm>
-            <a:off x="3648456" y="1389888"/>
-            <a:ext cx="1965960" cy="1310640"/>
+            <a:off x="3649991" y="1389888"/>
+            <a:ext cx="1964425" cy="1310640"/>
           </a:xfrm>
           <a:prstGeom prst="rect">
             <a:avLst/>
@@ -9053,6 +9053,30 @@
             </a:r>
             <a:endParaRPr lang="en-US" sz="1350" dirty="0"/>
           </a:p>
+          <a:p>
+            <a:pPr algn="l" marL="342900" indent="-342900">
+              <a:lnSpc>
+                <a:spcPct val="122000"/>
+              </a:lnSpc>
+              <a:spcAft>
+                <a:spcPts val="1000"/>
+              </a:spcAft>
+              <a:buSzPct val="100000"/>
+              <a:buChar char="•"/>
+            </a:pPr>
+            <a:r>
+              <a:rPr lang="en-US" sz="1350" dirty="0">
+                <a:solidFill>
+                  <a:srgbClr val="3F3138"/>
+                </a:solidFill>
+                <a:latin typeface="Calibri" pitchFamily="34" charset="0"/>
+                <a:ea typeface="Calibri" pitchFamily="34" charset="-122"/>
+                <a:cs typeface="Calibri" pitchFamily="34" charset="-120"/>
+              </a:rPr>
+              <a:t>Photographs: Amada44 (Public domain), Barry haynes (CC BY-SA 4.0), Haytam123258 (CC BY-SA 4.0), Ossewa (CC BY-SA 4.0) — via Wikimedia Commons.</a:t>
+            </a:r>
+            <a:endParaRPr lang="en-US" sz="1350" dirty="0"/>
+          </a:p>
         </p:txBody>
       </p:sp>
       <p:sp>
@@ -9543,7 +9567,7 @@
       </p:sp>
       <p:pic>
         <p:nvPicPr>
-          <p:cNvPr id="6" name="Image 1" descr="C:\Users\Utilisateur\dev\gsw-dossiers\scripts\dossiers\sceau-aim-clair.png">    </p:cNvPr>
+          <p:cNvPr id="6" name="Image 1" descr="C:\Users\Utilisateur\dev\green-solutions-web\scripts\dossiers\sceau-aim-clair.png">    </p:cNvPr>
           <p:cNvPicPr>
             <a:picLocks noChangeAspect="1"/>
           </p:cNvPicPr>

--- a/public/documents/countries/afrique-du-sud.pptx
+++ b/public/documents/countries/afrique-du-sud.pptx
@@ -23,9 +23,10 @@
     <p:sldId id="271" r:id="rId17"/>
     <p:sldId id="272" r:id="rId18"/>
     <p:sldId id="273" r:id="rId19"/>
+    <p:sldId id="274" r:id="rId20"/>
   </p:sldIdLst>
   <p:notesMasterIdLst>
-    <p:notesMasterId r:id="rId20"/>
+    <p:notesMasterId r:id="rId21"/>
   </p:notesMasterIdLst>
   <p:sldSz cx="12192000" cy="6858000"/>
   <p:notesSz cx="6858000" cy="12192000"/>
@@ -124,7 +125,266 @@
 </p:presentation>
 </file>
 
-<file path=ppt/charts/chart5.xml><?xml version="1.0" encoding="utf-8"?>
+<file path=ppt/charts/chart1.xml><?xml version="1.0" encoding="utf-8"?>
+<c:chartSpace xmlns:c="http://schemas.openxmlformats.org/drawingml/2006/chart" xmlns:a="http://schemas.openxmlformats.org/drawingml/2006/main" xmlns:r="http://schemas.openxmlformats.org/officeDocument/2006/relationships">
+  <c:date1904 val="0"/>
+  <c:roundedCorners val="1"/>
+  <c:chart>
+    <c:autoTitleDeleted val="1"/>
+    <c:plotArea>
+      <c:layout/>
+      <c:barChart>
+        <c:barDir val="col"/>
+        <c:grouping val="clustered"/>
+        <c:varyColors val="0"/>
+        <c:ser>
+          <c:idx val="0"/>
+          <c:order val="0"/>
+          <c:tx>
+            <c:strRef>
+              <c:f>Sheet1!$B$1</c:f>
+              <c:strCache>
+                <c:ptCount val="1"/>
+                <c:pt idx="0">
+                  <c:v>Global index of drought number and duration</c:v>
+                </c:pt>
+              </c:strCache>
+            </c:strRef>
+          </c:tx>
+          <c:spPr>
+            <a:solidFill>
+              <a:srgbClr val="6B2A44"/>
+            </a:solidFill>
+            <a:effectLst/>
+          </c:spPr>
+          <c:invertIfNegative val="0"/>
+          <c:dLbls>
+            <c:numFmt formatCode="[$-409]0" sourceLinked="0"/>
+            <c:txPr>
+              <a:bodyPr/>
+              <a:lstStyle/>
+              <a:p>
+                <a:pPr>
+                  <a:defRPr b="0" i="0" strike="noStrike" sz="1100" u="none">
+                    <a:solidFill>
+                      <a:srgbClr val="3F162A"/>
+                    </a:solidFill>
+                    <a:latin typeface="Calibri"/>
+                  </a:defRPr>
+                </a:pPr>
+              </a:p>
+            </c:txPr>
+            <c:showLegendKey val="0"/>
+            <c:showVal val="1"/>
+            <c:showCatName val="0"/>
+            <c:showSerName val="0"/>
+            <c:showPercent val="0"/>
+            <c:showBubbleSize val="0"/>
+            <c:showLeaderLines val="0"/>
+          </c:dLbls>
+          <c:dPt>
+            <c:idx val="0"/>
+            <c:invertIfNegative val="0"/>
+            <c:bubble3D val="0"/>
+            <c:spPr>
+              <a:solidFill>
+                <a:srgbClr val="6B2A44"/>
+              </a:solidFill>
+              <a:effectLst/>
+            </c:spPr>
+          </c:dPt>
+          <c:dPt>
+            <c:idx val="1"/>
+            <c:invertIfNegative val="0"/>
+            <c:bubble3D val="0"/>
+            <c:spPr>
+              <a:solidFill>
+                <a:srgbClr val="C9A227"/>
+              </a:solidFill>
+              <a:effectLst/>
+            </c:spPr>
+          </c:dPt>
+          <c:cat>
+            <c:multiLvlStrRef>
+              <c:f>Sheet1!$A$2:$A$3</c:f>
+              <c:multiLvlStrCache>
+                <c:ptCount val="2"/>
+                <c:lvl>
+                  <c:pt idx="0">
+                    <c:v>1980–1999</c:v>
+                  </c:pt>
+                  <c:pt idx="1">
+                    <c:v>Since 2000</c:v>
+                  </c:pt>
+                </c:lvl>
+              </c:multiLvlStrCache>
+            </c:multiLvlStrRef>
+          </c:cat>
+          <c:val>
+            <c:numRef>
+              <c:f>Sheet1!$B$2:$B$3</c:f>
+              <c:numCache>
+                <c:formatCode>General</c:formatCode>
+                <c:ptCount val="2"/>
+                <c:pt idx="0">
+                  <c:v>100</c:v>
+                </c:pt>
+                <c:pt idx="1">
+                  <c:v>129</c:v>
+                </c:pt>
+              </c:numCache>
+            </c:numRef>
+          </c:val>
+        </c:ser>
+        <c:dLbls>
+          <c:numFmt formatCode="[$-409]0" sourceLinked="0"/>
+          <c:txPr>
+            <a:bodyPr/>
+            <a:lstStyle/>
+            <a:p>
+              <a:pPr>
+                <a:defRPr b="0" i="0" strike="noStrike" sz="1100" u="none">
+                  <a:solidFill>
+                    <a:srgbClr val="3F162A"/>
+                  </a:solidFill>
+                  <a:latin typeface="Calibri"/>
+                </a:defRPr>
+              </a:pPr>
+            </a:p>
+          </c:txPr>
+          <c:showLegendKey val="0"/>
+          <c:showVal val="1"/>
+          <c:showCatName val="0"/>
+          <c:showSerName val="0"/>
+          <c:showPercent val="0"/>
+          <c:showBubbleSize val="0"/>
+          <c:showLeaderLines val="0"/>
+        </c:dLbls>
+        <c:gapWidth val="150"/>
+        <c:overlap val="0"/>
+        <c:axId val="2094734554"/>
+        <c:axId val="2094734552"/>
+        <c:axId val="2094734556"/>
+      </c:barChart>
+      <c:catAx>
+        <c:axId val="2094734554"/>
+        <c:scaling>
+          <c:orientation val="minMax"/>
+        </c:scaling>
+        <c:delete val="0"/>
+        <c:axPos val="b"/>
+        <c:numFmt formatCode="General" sourceLinked="1"/>
+        <c:majorTickMark val="out"/>
+        <c:minorTickMark val="none"/>
+        <c:tickLblPos val="low"/>
+        <c:spPr>
+          <a:ln w="12700" cap="flat">
+            <a:solidFill>
+              <a:srgbClr val="888888"/>
+            </a:solidFill>
+            <a:prstDash val="solid"/>
+            <a:round/>
+          </a:ln>
+        </c:spPr>
+        <c:txPr>
+          <a:bodyPr/>
+          <a:lstStyle/>
+          <a:p>
+            <a:pPr>
+              <a:defRPr sz="1100" b="0" i="0" u="none" strike="noStrike">
+                <a:solidFill>
+                  <a:srgbClr val="7C6B73"/>
+                </a:solidFill>
+                <a:latin typeface="Calibri"/>
+              </a:defRPr>
+            </a:pPr>
+            <a:endParaRPr lang="en-US"/>
+          </a:p>
+        </c:txPr>
+        <c:crossAx val="2094734552"/>
+        <c:crosses val="autoZero"/>
+        <c:auto val="1"/>
+        <c:lblAlgn val="ctr"/>
+        <c:noMultiLvlLbl val="1"/>
+      </c:catAx>
+      <c:valAx>
+        <c:axId val="2094734552"/>
+        <c:scaling>
+          <c:orientation val="minMax"/>
+          <c:max val="140"/>
+          <c:min val="0"/>
+        </c:scaling>
+        <c:delete val="0"/>
+        <c:axPos val="l"/>
+        <c:majorGridlines>
+          <c:spPr>
+            <a:ln w="9525" cap="flat">
+              <a:solidFill>
+                <a:srgbClr val="E5D9DE"/>
+              </a:solidFill>
+              <a:prstDash val="solid"/>
+              <a:round/>
+            </a:ln>
+          </c:spPr>
+        </c:majorGridlines>
+        <c:numFmt formatCode="General" sourceLinked="0"/>
+        <c:majorTickMark val="out"/>
+        <c:minorTickMark val="none"/>
+        <c:tickLblPos val="nextTo"/>
+        <c:spPr>
+          <a:ln w="12700" cap="flat">
+            <a:solidFill>
+              <a:srgbClr val="888888"/>
+            </a:solidFill>
+            <a:prstDash val="solid"/>
+            <a:round/>
+          </a:ln>
+        </c:spPr>
+        <c:txPr>
+          <a:bodyPr/>
+          <a:lstStyle/>
+          <a:p>
+            <a:pPr>
+              <a:defRPr sz="1100" b="0" i="0" u="none" strike="noStrike">
+                <a:solidFill>
+                  <a:srgbClr val="7C6B73"/>
+                </a:solidFill>
+                <a:latin typeface="Calibri"/>
+              </a:defRPr>
+            </a:pPr>
+            <a:endParaRPr lang="en-US"/>
+          </a:p>
+        </c:txPr>
+        <c:crossAx val="2094734554"/>
+        <c:crosses val="autoZero"/>
+        <c:crossBetween val="between"/>
+        <c:majorUnit val="20"/>
+      </c:valAx>
+      <c:spPr>
+        <a:noFill/>
+        <a:ln>
+          <a:noFill/>
+        </a:ln>
+        <a:effectLst/>
+      </c:spPr>
+    </c:plotArea>
+    <c:plotVisOnly val="1"/>
+    <c:dispBlanksAs val="span"/>
+  </c:chart>
+  <c:spPr>
+    <a:noFill/>
+    <a:ln>
+      <a:noFill/>
+    </a:ln>
+    <a:effectLst/>
+  </c:spPr>
+  <c:externalData r:id="rId1">
+    <c:autoUpdate val="0"/>
+  </c:externalData>
+</c:chartSpace>
+</file>
+
+<file path=ppt/charts/chart2.xml><?xml version="1.0" encoding="utf-8"?>
 <c:chartSpace xmlns:c="http://schemas.openxmlformats.org/drawingml/2006/chart" xmlns:a="http://schemas.openxmlformats.org/drawingml/2006/main" xmlns:r="http://schemas.openxmlformats.org/officeDocument/2006/relationships">
   <c:date1904 val="0"/>
   <c:roundedCorners val="1"/>
@@ -369,7 +629,7 @@
 </c:chartSpace>
 </file>
 
-<file path=ppt/charts/chart6.xml><?xml version="1.0" encoding="utf-8"?>
+<file path=ppt/charts/chart3.xml><?xml version="1.0" encoding="utf-8"?>
 <c:chartSpace xmlns:c="http://schemas.openxmlformats.org/drawingml/2006/chart" xmlns:a="http://schemas.openxmlformats.org/drawingml/2006/main" xmlns:r="http://schemas.openxmlformats.org/officeDocument/2006/relationships">
   <c:date1904 val="0"/>
   <c:roundedCorners val="1"/>
@@ -677,7 +937,7 @@
 </c:chartSpace>
 </file>
 
-<file path=ppt/charts/chart7.xml><?xml version="1.0" encoding="utf-8"?>
+<file path=ppt/charts/chart4.xml><?xml version="1.0" encoding="utf-8"?>
 <c:chartSpace xmlns:c="http://schemas.openxmlformats.org/drawingml/2006/chart" xmlns:a="http://schemas.openxmlformats.org/drawingml/2006/main" xmlns:r="http://schemas.openxmlformats.org/officeDocument/2006/relationships">
   <c:date1904 val="0"/>
   <c:roundedCorners val="1"/>
@@ -1042,7 +1302,7 @@
 </c:chartSpace>
 </file>
 
-<file path=ppt/charts/chart8.xml><?xml version="1.0" encoding="utf-8"?>
+<file path=ppt/charts/chart5.xml><?xml version="1.0" encoding="utf-8"?>
 <c:chartSpace xmlns:c="http://schemas.openxmlformats.org/drawingml/2006/chart" xmlns:a="http://schemas.openxmlformats.org/drawingml/2006/main" xmlns:r="http://schemas.openxmlformats.org/officeDocument/2006/relationships">
   <c:date1904 val="0"/>
   <c:roundedCorners val="1"/>
@@ -2606,6 +2866,94 @@
             <a:fld id="{F7021451-1387-4CA6-816F-3879F97B5CBC}" type="slidenum">
               <a:rPr lang="en-US"/>
               <a:t>18</a:t>
+            </a:fld>
+            <a:endParaRPr lang="en-US"/>
+          </a:p>
+        </p:txBody>
+      </p:sp>
+    </p:spTree>
+    <p:extLst>
+      <p:ext uri="{BB962C8B-B14F-4D97-AF65-F5344CB8AC3E}">
+        <p14:creationId xmlns:p14="http://schemas.microsoft.com/office/powerpoint/2010/main" val="1024086991"/>
+      </p:ext>
+    </p:extLst>
+  </p:cSld>
+  <p:clrMapOvr>
+    <a:masterClrMapping/>
+  </p:clrMapOvr>
+</p:notes>
+</file>
+
+<file path=ppt/notesSlides/notesSlide19.xml><?xml version="1.0" encoding="utf-8"?>
+<p:notes xmlns:a="http://schemas.openxmlformats.org/drawingml/2006/main" xmlns:r="http://schemas.openxmlformats.org/officeDocument/2006/relationships" xmlns:p="http://schemas.openxmlformats.org/presentationml/2006/main">
+  <p:cSld>
+    <p:spTree>
+      <p:nvGrpSpPr>
+        <p:cNvPr id="1" name=""/>
+        <p:cNvGrpSpPr/>
+        <p:nvPr/>
+      </p:nvGrpSpPr>
+      <p:grpSpPr>
+        <a:xfrm>
+          <a:off x="0" y="0"/>
+          <a:ext cx="0" cy="0"/>
+          <a:chOff x="0" y="0"/>
+          <a:chExt cx="0" cy="0"/>
+        </a:xfrm>
+      </p:grpSpPr>
+      <p:sp>
+        <p:nvSpPr>
+          <p:cNvPr id="2" name="Slide Image Placeholder 1"/>
+          <p:cNvSpPr>
+            <a:spLocks noGrp="1" noRot="1" noChangeAspect="1"/>
+          </p:cNvSpPr>
+          <p:nvPr>
+            <p:ph type="sldImg"/>
+          </p:nvPr>
+        </p:nvSpPr>
+        <p:spPr/>
+      </p:sp>
+      <p:sp>
+        <p:nvSpPr>
+          <p:cNvPr id="3" name="Notes Placeholder 2"/>
+          <p:cNvSpPr>
+            <a:spLocks noGrp="1"/>
+          </p:cNvSpPr>
+          <p:nvPr>
+            <p:ph type="body" idx="1"/>
+          </p:nvPr>
+        </p:nvSpPr>
+        <p:spPr/>
+        <p:txBody>
+          <a:bodyPr/>
+          <a:lstStyle/>
+          <a:p>
+            <a:r>
+              <a:rPr lang="en-US" dirty="0"/>
+              <a:t/>
+            </a:r>
+            <a:endParaRPr lang="en-US" dirty="0"/>
+          </a:p>
+        </p:txBody>
+      </p:sp>
+      <p:sp>
+        <p:nvSpPr>
+          <p:cNvPr id="4" name="Slide Number Placeholder 3"/>
+          <p:cNvSpPr>
+            <a:spLocks noGrp="1"/>
+          </p:cNvSpPr>
+          <p:nvPr>
+            <p:ph type="sldNum" sz="quarter" idx="10"/>
+          </p:nvPr>
+        </p:nvSpPr>
+        <p:spPr/>
+        <p:txBody>
+          <a:bodyPr/>
+          <a:lstStyle/>
+          <a:p>
+            <a:fld id="{F7021451-1387-4CA6-816F-3879F97B5CBC}" type="slidenum">
+              <a:rPr lang="en-US"/>
+              <a:t>19</a:t>
             </a:fld>
             <a:endParaRPr lang="en-US"/>
           </a:p>
@@ -3744,7 +4092,7 @@
       </p:sp>
       <p:pic>
         <p:nvPicPr>
-          <p:cNvPr id="5" name="Image 1" descr="C:\Users\Utilisateur\dev\green-solutions-web\public\images\logo-icon.png">    </p:cNvPr>
+          <p:cNvPr id="5" name="Image 1" descr="/workspace/scratch/50eb4f7d8e13/green-solutions-web/public/images/logo-icon.png">    </p:cNvPr>
           <p:cNvPicPr>
             <a:picLocks noChangeAspect="1"/>
           </p:cNvPicPr>
@@ -3768,7 +4116,7 @@
       </p:pic>
       <p:pic>
         <p:nvPicPr>
-          <p:cNvPr id="6" name="Image 2" descr="C:\Users\Utilisateur\dev\green-solutions-web\scripts\dossiers\drapeaux\afrique-du-sud.png">    </p:cNvPr>
+          <p:cNvPr id="6" name="Image 2" descr="/workspace/scratch/50eb4f7d8e13/green-solutions-web/scripts/dossiers/drapeaux/afrique-du-sud.png">    </p:cNvPr>
           <p:cNvPicPr>
             <a:picLocks noChangeAspect="1"/>
           </p:cNvPicPr>
@@ -4118,7 +4466,7 @@
                 <a:ea typeface="Calibri" pitchFamily="34" charset="-122"/>
                 <a:cs typeface="Calibri" pitchFamily="34" charset="-120"/>
               </a:rPr>
-              <a:t>OUR RESPONSE</a:t>
+              <a:t>Yield potential</a:t>
             </a:r>
             <a:endParaRPr lang="en-US" sz="1150" dirty="0"/>
           </a:p>
@@ -4157,340 +4505,42 @@
                 <a:ea typeface="Cambria" pitchFamily="34" charset="-122"/>
                 <a:cs typeface="Cambria" pitchFamily="34" charset="-120"/>
               </a:rPr>
-              <a:t>Two technologies, two different constraints</a:t>
+              <a:t>Expected yield gain by crop</a:t>
             </a:r>
             <a:endParaRPr lang="en-US" sz="3000" dirty="0"/>
           </a:p>
         </p:txBody>
       </p:sp>
-      <p:sp>
-        <p:nvSpPr>
-          <p:cNvPr id="4" name="Text 2"/>
-          <p:cNvSpPr txBox="1"/>
-          <p:nvPr/>
-        </p:nvSpPr>
-        <p:spPr>
-          <a:xfrm>
-            <a:off x="594360" y="1783080"/>
-            <a:ext cx="5227168" cy="411480"/>
-          </a:xfrm>
-          <a:prstGeom prst="rect">
-            <a:avLst/>
-          </a:prstGeom>
-          <a:noFill/>
-          <a:ln/>
-        </p:spPr>
-        <p:txBody>
-          <a:bodyPr wrap="square" lIns="0" tIns="0" rIns="0" bIns="0" rtlCol="0" anchor="ctr"/>
-          <a:lstStyle/>
-          <a:p>
-            <a:pPr algn="l" indent="0" marL="0">
-              <a:buNone/>
-            </a:pPr>
-            <a:r>
-              <a:rPr lang="en-US" sz="1600" b="1" dirty="0">
-                <a:solidFill>
-                  <a:srgbClr val="6B2A44"/>
-                </a:solidFill>
-                <a:latin typeface="Cambria" pitchFamily="34" charset="0"/>
-                <a:ea typeface="Cambria" pitchFamily="34" charset="-122"/>
-                <a:cs typeface="Cambria" pitchFamily="34" charset="-120"/>
-              </a:rPr>
-              <a:t>EVERGREEN® — holding the water</a:t>
-            </a:r>
-            <a:endParaRPr lang="en-US" sz="1600" dirty="0"/>
-          </a:p>
-        </p:txBody>
-      </p:sp>
-      <p:sp>
-        <p:nvSpPr>
-          <p:cNvPr id="5" name="Text 3"/>
-          <p:cNvSpPr txBox="1"/>
-          <p:nvPr/>
-        </p:nvSpPr>
-        <p:spPr>
-          <a:xfrm>
-            <a:off x="594360" y="2286000"/>
-            <a:ext cx="5227168" cy="2468880"/>
-          </a:xfrm>
-          <a:prstGeom prst="rect">
-            <a:avLst/>
-          </a:prstGeom>
-          <a:noFill/>
-          <a:ln/>
-        </p:spPr>
-        <p:txBody>
-          <a:bodyPr wrap="square" lIns="0" tIns="0" rIns="0" bIns="0" rtlCol="0" anchor="t"/>
-          <a:lstStyle/>
-          <a:p>
-            <a:pPr algn="l" marL="342900" indent="-342900">
-              <a:lnSpc>
-                <a:spcPct val="122000"/>
-              </a:lnSpc>
-              <a:spcAft>
-                <a:spcPts val="1000"/>
-              </a:spcAft>
-              <a:buSzPct val="100000"/>
-              <a:buChar char="•"/>
-            </a:pPr>
-            <a:r>
-              <a:rPr lang="en-US" sz="1350" dirty="0">
-                <a:solidFill>
-                  <a:srgbClr val="3F3138"/>
-                </a:solidFill>
-                <a:latin typeface="Calibri" pitchFamily="34" charset="0"/>
-                <a:ea typeface="Calibri" pitchFamily="34" charset="-122"/>
-                <a:cs typeface="Calibri" pitchFamily="34" charset="-120"/>
-              </a:rPr>
-              <a:t>A potassium-based hydro-retainer placed in the root zone at planting or at replant.</a:t>
-            </a:r>
-            <a:endParaRPr lang="en-US" sz="1350" dirty="0"/>
-          </a:p>
-          <a:p>
-            <a:pPr algn="l" marL="342900" indent="-342900">
-              <a:lnSpc>
-                <a:spcPct val="122000"/>
-              </a:lnSpc>
-              <a:spcAft>
-                <a:spcPts val="1000"/>
-              </a:spcAft>
-              <a:buSzPct val="100000"/>
-              <a:buChar char="•"/>
-            </a:pPr>
-            <a:r>
-              <a:rPr lang="en-US" sz="1350" dirty="0">
-                <a:solidFill>
-                  <a:srgbClr val="3F3138"/>
-                </a:solidFill>
-                <a:latin typeface="Calibri" pitchFamily="34" charset="0"/>
-                <a:ea typeface="Calibri" pitchFamily="34" charset="-122"/>
-                <a:cs typeface="Calibri" pitchFamily="34" charset="-120"/>
-              </a:rPr>
-              <a:t>It captures rain and irrigation water and releases it back to the plant gradually, removing water stress through the critical stages.</a:t>
-            </a:r>
-            <a:endParaRPr lang="en-US" sz="1350" dirty="0"/>
-          </a:p>
-          <a:p>
-            <a:pPr algn="l" marL="342900" indent="-342900">
-              <a:lnSpc>
-                <a:spcPct val="122000"/>
-              </a:lnSpc>
-              <a:spcAft>
-                <a:spcPts val="1000"/>
-              </a:spcAft>
-              <a:buSzPct val="100000"/>
-              <a:buChar char="•"/>
-            </a:pPr>
-            <a:r>
-              <a:rPr lang="en-US" sz="1350" dirty="0">
-                <a:solidFill>
-                  <a:srgbClr val="3F3138"/>
-                </a:solidFill>
-                <a:latin typeface="Calibri" pitchFamily="34" charset="0"/>
-                <a:ea typeface="Calibri" pitchFamily="34" charset="-122"/>
-                <a:cs typeface="Calibri" pitchFamily="34" charset="-120"/>
-              </a:rPr>
-              <a:t>Absorbs on the order of 300 times its own weight; useful effect of 3 to 4 years in the soil.</a:t>
-            </a:r>
-            <a:endParaRPr lang="en-US" sz="1350" dirty="0"/>
-          </a:p>
-          <a:p>
-            <a:pPr algn="l" marL="342900" indent="-342900">
-              <a:lnSpc>
-                <a:spcPct val="122000"/>
-              </a:lnSpc>
-              <a:spcAft>
-                <a:spcPts val="1000"/>
-              </a:spcAft>
-              <a:buSzPct val="100000"/>
-              <a:buChar char="•"/>
-            </a:pPr>
-            <a:r>
-              <a:rPr lang="en-US" sz="1350" dirty="0">
-                <a:solidFill>
-                  <a:srgbClr val="3F3138"/>
-                </a:solidFill>
-                <a:latin typeface="Calibri" pitchFamily="34" charset="0"/>
-                <a:ea typeface="Calibri" pitchFamily="34" charset="-122"/>
-                <a:cs typeface="Calibri" pitchFamily="34" charset="-120"/>
-              </a:rPr>
-              <a:t>Breaks down by 20 to 25 % a year, with no build-up and no risk of overdosing.</a:t>
-            </a:r>
-            <a:endParaRPr lang="en-US" sz="1350" dirty="0"/>
-          </a:p>
-        </p:txBody>
-      </p:sp>
-      <p:sp>
-        <p:nvSpPr>
-          <p:cNvPr id="6" name="Text 4"/>
-          <p:cNvSpPr txBox="1"/>
-          <p:nvPr/>
-        </p:nvSpPr>
-        <p:spPr>
-          <a:xfrm>
-            <a:off x="6370168" y="1783080"/>
-            <a:ext cx="5227168" cy="411480"/>
-          </a:xfrm>
-          <a:prstGeom prst="rect">
-            <a:avLst/>
-          </a:prstGeom>
-          <a:noFill/>
-          <a:ln/>
-        </p:spPr>
-        <p:txBody>
-          <a:bodyPr wrap="square" lIns="0" tIns="0" rIns="0" bIns="0" rtlCol="0" anchor="ctr"/>
-          <a:lstStyle/>
-          <a:p>
-            <a:pPr algn="l" indent="0" marL="0">
-              <a:buNone/>
-            </a:pPr>
-            <a:r>
-              <a:rPr lang="en-US" sz="1600" b="1" dirty="0">
-                <a:solidFill>
-                  <a:srgbClr val="6B2A44"/>
-                </a:solidFill>
-                <a:latin typeface="Cambria" pitchFamily="34" charset="0"/>
-                <a:ea typeface="Cambria" pitchFamily="34" charset="-122"/>
-                <a:cs typeface="Cambria" pitchFamily="34" charset="-120"/>
-              </a:rPr>
-              <a:t>ECOFERT® — feeding without depleting</a:t>
-            </a:r>
-            <a:endParaRPr lang="en-US" sz="1600" dirty="0"/>
-          </a:p>
-        </p:txBody>
-      </p:sp>
-      <p:sp>
-        <p:nvSpPr>
-          <p:cNvPr id="7" name="Text 5"/>
-          <p:cNvSpPr txBox="1"/>
-          <p:nvPr/>
-        </p:nvSpPr>
-        <p:spPr>
-          <a:xfrm>
-            <a:off x="6370168" y="2286000"/>
-            <a:ext cx="5227168" cy="2468880"/>
-          </a:xfrm>
-          <a:prstGeom prst="rect">
-            <a:avLst/>
-          </a:prstGeom>
-          <a:noFill/>
-          <a:ln/>
-        </p:spPr>
-        <p:txBody>
-          <a:bodyPr wrap="square" lIns="0" tIns="0" rIns="0" bIns="0" rtlCol="0" anchor="t"/>
-          <a:lstStyle/>
-          <a:p>
-            <a:pPr algn="l" marL="342900" indent="-342900">
-              <a:lnSpc>
-                <a:spcPct val="122000"/>
-              </a:lnSpc>
-              <a:spcAft>
-                <a:spcPts val="1000"/>
-              </a:spcAft>
-              <a:buSzPct val="100000"/>
-              <a:buChar char="•"/>
-            </a:pPr>
-            <a:r>
-              <a:rPr lang="en-US" sz="1350" dirty="0">
-                <a:solidFill>
-                  <a:srgbClr val="3F3138"/>
-                </a:solidFill>
-                <a:latin typeface="Calibri" pitchFamily="34" charset="0"/>
-                <a:ea typeface="Calibri" pitchFamily="34" charset="-122"/>
-                <a:cs typeface="Calibri" pitchFamily="34" charset="-120"/>
-              </a:rPr>
-              <a:t>A micro-dose fertiliser of amino acids, nitrogen, phosphorus and potassium, made from renewable resources.</a:t>
-            </a:r>
-            <a:endParaRPr lang="en-US" sz="1350" dirty="0"/>
-          </a:p>
-          <a:p>
-            <a:pPr algn="l" marL="342900" indent="-342900">
-              <a:lnSpc>
-                <a:spcPct val="122000"/>
-              </a:lnSpc>
-              <a:spcAft>
-                <a:spcPts val="1000"/>
-              </a:spcAft>
-              <a:buSzPct val="100000"/>
-              <a:buChar char="•"/>
-            </a:pPr>
-            <a:r>
-              <a:rPr lang="en-US" sz="1350" dirty="0">
-                <a:solidFill>
-                  <a:srgbClr val="3F3138"/>
-                </a:solidFill>
-                <a:latin typeface="Calibri" pitchFamily="34" charset="0"/>
-                <a:ea typeface="Calibri" pitchFamily="34" charset="-122"/>
-                <a:cs typeface="Calibri" pitchFamily="34" charset="-120"/>
-              </a:rPr>
-              <a:t>Non-chelating: it does not strip the clay-humus complex and adds neither salinity nor nitrate load.</a:t>
-            </a:r>
-            <a:endParaRPr lang="en-US" sz="1350" dirty="0"/>
-          </a:p>
-          <a:p>
-            <a:pPr algn="l" marL="342900" indent="-342900">
-              <a:lnSpc>
-                <a:spcPct val="122000"/>
-              </a:lnSpc>
-              <a:spcAft>
-                <a:spcPts val="1000"/>
-              </a:spcAft>
-              <a:buSzPct val="100000"/>
-              <a:buChar char="•"/>
-            </a:pPr>
-            <a:r>
-              <a:rPr lang="en-US" sz="1350" dirty="0">
-                <a:solidFill>
-                  <a:srgbClr val="3F3138"/>
-                </a:solidFill>
-                <a:latin typeface="Calibri" pitchFamily="34" charset="0"/>
-                <a:ea typeface="Calibri" pitchFamily="34" charset="-122"/>
-                <a:cs typeface="Calibri" pitchFamily="34" charset="-120"/>
-              </a:rPr>
-              <a:t>Certified SOHISCERT and EU Bio, in use in 60 countries — the entry condition for European buyers' specifications.</a:t>
-            </a:r>
-            <a:endParaRPr lang="en-US" sz="1350" dirty="0"/>
-          </a:p>
-          <a:p>
-            <a:pPr algn="l" marL="342900" indent="-342900">
-              <a:lnSpc>
-                <a:spcPct val="122000"/>
-              </a:lnSpc>
-              <a:spcAft>
-                <a:spcPts val="1000"/>
-              </a:spcAft>
-              <a:buSzPct val="100000"/>
-              <a:buChar char="•"/>
-            </a:pPr>
-            <a:r>
-              <a:rPr lang="en-US" sz="1350" dirty="0">
-                <a:solidFill>
-                  <a:srgbClr val="3F3138"/>
-                </a:solidFill>
-                <a:latin typeface="Calibri" pitchFamily="34" charset="0"/>
-                <a:ea typeface="Calibri" pitchFamily="34" charset="-122"/>
-                <a:cs typeface="Calibri" pitchFamily="34" charset="-120"/>
-              </a:rPr>
-              <a:t>1 to 4 bottles of 140 ml per hectare, compatible with existing fertigation equipment.</a:t>
-            </a:r>
-            <a:endParaRPr lang="en-US" sz="1350" dirty="0"/>
-          </a:p>
-        </p:txBody>
-      </p:sp>
-      <p:sp>
-        <p:nvSpPr>
-          <p:cNvPr id="8" name="Shape 6"/>
+      <p:graphicFrame>
+        <p:nvGraphicFramePr>
+          <p:cNvPr id="4" name="Chart 0" descr=""/>
+          <p:cNvGraphicFramePr/>
+          <p:nvPr/>
+        </p:nvGraphicFramePr>
+        <p:xfrm>
+          <a:off x="594360" y="1783080"/>
+          <a:ext cx="7360920" cy="3977640"/>
+        </p:xfrm>
+        <a:graphic xmlns:a="http://schemas.openxmlformats.org/drawingml/2006/main">
+          <a:graphicData uri="http://schemas.openxmlformats.org/drawingml/2006/chart">
+            <c:chart xmlns:c="http://schemas.openxmlformats.org/drawingml/2006/chart" r:id="rId1"/>
+          </a:graphicData>
+        </a:graphic>
+      </p:graphicFrame>
+      <p:sp>
+        <p:nvSpPr>
+          <p:cNvPr id="5" name="Shape 2"/>
           <p:cNvSpPr/>
           <p:nvPr/>
         </p:nvSpPr>
         <p:spPr>
           <a:xfrm>
-            <a:off x="594360" y="4846320"/>
-            <a:ext cx="11002975" cy="960120"/>
+            <a:off x="8275320" y="1783080"/>
+            <a:ext cx="3291840" cy="3977640"/>
           </a:xfrm>
           <a:prstGeom prst="roundRect">
             <a:avLst>
-              <a:gd name="adj" fmla="val 7619"/>
+              <a:gd name="adj" fmla="val 2778"/>
             </a:avLst>
           </a:prstGeom>
           <a:solidFill>
@@ -4506,14 +4556,53 @@
       </p:sp>
       <p:sp>
         <p:nvSpPr>
-          <p:cNvPr id="9" name="Text 7"/>
-          <p:cNvSpPr txBox="1"/>
-          <p:nvPr/>
-        </p:nvSpPr>
-        <p:spPr>
-          <a:xfrm>
-            <a:off x="822960" y="4983480"/>
-            <a:ext cx="10545775" cy="713232"/>
+          <p:cNvPr id="6" name="Text 3"/>
+          <p:cNvSpPr txBox="1"/>
+          <p:nvPr/>
+        </p:nvSpPr>
+        <p:spPr>
+          <a:xfrm>
+            <a:off x="8503920" y="2011680"/>
+            <a:ext cx="2834640" cy="457200"/>
+          </a:xfrm>
+          <a:prstGeom prst="rect">
+            <a:avLst/>
+          </a:prstGeom>
+          <a:noFill/>
+          <a:ln/>
+        </p:spPr>
+        <p:txBody>
+          <a:bodyPr wrap="square" lIns="0" tIns="0" rIns="0" bIns="0" rtlCol="0" anchor="ctr"/>
+          <a:lstStyle/>
+          <a:p>
+            <a:pPr algn="l" indent="0" marL="0">
+              <a:buNone/>
+            </a:pPr>
+            <a:r>
+              <a:rPr lang="en-US" sz="1300" b="1" dirty="0">
+                <a:solidFill>
+                  <a:srgbClr val="6B2A44"/>
+                </a:solidFill>
+                <a:latin typeface="Cambria" pitchFamily="34" charset="0"/>
+                <a:ea typeface="Cambria" pitchFamily="34" charset="-122"/>
+                <a:cs typeface="Cambria" pitchFamily="34" charset="-120"/>
+              </a:rPr>
+              <a:t>Read with care</a:t>
+            </a:r>
+            <a:endParaRPr lang="en-US" sz="1300" dirty="0"/>
+          </a:p>
+        </p:txBody>
+      </p:sp>
+      <p:sp>
+        <p:nvSpPr>
+          <p:cNvPr id="7" name="Text 4"/>
+          <p:cNvSpPr txBox="1"/>
+          <p:nvPr/>
+        </p:nvSpPr>
+        <p:spPr>
+          <a:xfrm>
+            <a:off x="8503920" y="2560320"/>
+            <a:ext cx="2834640" cy="3017520"/>
           </a:xfrm>
           <a:prstGeom prst="rect">
             <a:avLst/>
@@ -4527,28 +4616,57 @@
           <a:p>
             <a:pPr algn="l" indent="0" marL="0">
               <a:lnSpc>
-                <a:spcPct val="118000"/>
+                <a:spcPct val="125000"/>
               </a:lnSpc>
               <a:buNone/>
             </a:pPr>
             <a:r>
-              <a:rPr lang="en-US" sz="1100" dirty="0">
-                <a:solidFill>
-                  <a:srgbClr val="7C6B73"/>
-                </a:solidFill>
-                <a:latin typeface="Calibri" pitchFamily="34" charset="0"/>
-                <a:ea typeface="Calibri" pitchFamily="34" charset="-122"/>
-                <a:cs typeface="Calibri" pitchFamily="34" charset="-120"/>
-              </a:rPr>
-              <a:t>The two products are sold separately but were designed to reinforce each other: the hydro-retainer extends how long water stays available, the fertiliser puts that water to work without degrading the soil.</a:t>
-            </a:r>
-            <a:endParaRPr lang="en-US" sz="1100" dirty="0"/>
-          </a:p>
-        </p:txBody>
-      </p:sp>
-      <p:sp>
-        <p:nvSpPr>
-          <p:cNvPr id="10" name="Text 8"/>
+              <a:rPr lang="en-US" sz="1200" dirty="0">
+                <a:solidFill>
+                  <a:srgbClr val="3F3138"/>
+                </a:solidFill>
+                <a:latin typeface="Calibri" pitchFamily="34" charset="0"/>
+                <a:ea typeface="Calibri" pitchFamily="34" charset="-122"/>
+                <a:cs typeface="Calibri" pitchFamily="34" charset="-120"/>
+              </a:rPr>
+              <a:t>Ranges used by our dose calculator, for a normally managed crop with EVERGREEN® applied at planting.</a:t>
+            </a:r>
+            <a:endParaRPr lang="en-US" sz="1200" dirty="0"/>
+          </a:p>
+          <a:p>
+            <a:pPr algn="l" indent="0" marL="0">
+              <a:lnSpc>
+                <a:spcPct val="125000"/>
+              </a:lnSpc>
+              <a:buNone/>
+            </a:pPr>
+            <a:endParaRPr lang="en-US" sz="1200" dirty="0"/>
+          </a:p>
+          <a:p>
+            <a:pPr algn="l" indent="0" marL="0">
+              <a:lnSpc>
+                <a:spcPct val="125000"/>
+              </a:lnSpc>
+              <a:buNone/>
+            </a:pPr>
+            <a:r>
+              <a:rPr lang="en-US" sz="1200" dirty="0">
+                <a:solidFill>
+                  <a:srgbClr val="3F3138"/>
+                </a:solidFill>
+                <a:latin typeface="Calibri" pitchFamily="34" charset="0"/>
+                <a:ea typeface="Calibri" pitchFamily="34" charset="-122"/>
+                <a:cs typeface="Calibri" pitchFamily="34" charset="-120"/>
+              </a:rPr>
+              <a:t>Actual results depend on soil, climate and management. For cereals, no gain is claimed without a field trial.</a:t>
+            </a:r>
+            <a:endParaRPr lang="en-US" sz="1200" dirty="0"/>
+          </a:p>
+        </p:txBody>
+      </p:sp>
+      <p:sp>
+        <p:nvSpPr>
+          <p:cNvPr id="8" name="Text 5"/>
           <p:cNvSpPr txBox="1"/>
           <p:nvPr/>
         </p:nvSpPr>
@@ -4589,7 +4707,7 @@
       </p:sp>
       <p:sp>
         <p:nvSpPr>
-          <p:cNvPr id="11" name="Text 9"/>
+          <p:cNvPr id="9" name="Text 6"/>
           <p:cNvSpPr txBox="1"/>
           <p:nvPr/>
         </p:nvSpPr>
@@ -4693,7 +4811,7 @@
                 <a:ea typeface="Calibri" pitchFamily="34" charset="-122"/>
                 <a:cs typeface="Calibri" pitchFamily="34" charset="-120"/>
               </a:rPr>
-              <a:t>The rest of the range</a:t>
+              <a:t>OUR RESPONSE</a:t>
             </a:r>
             <a:endParaRPr lang="en-US" sz="1150" dirty="0"/>
           </a:p>
@@ -4732,7 +4850,7 @@
                 <a:ea typeface="Cambria" pitchFamily="34" charset="-122"/>
                 <a:cs typeface="Cambria" pitchFamily="34" charset="-120"/>
               </a:rPr>
-              <a:t>Protecting crops, holding soils</a:t>
+              <a:t>Two technologies, two different constraints</a:t>
             </a:r>
             <a:endParaRPr lang="en-US" sz="3000" dirty="0"/>
           </a:p>
@@ -4771,7 +4889,7 @@
                 <a:ea typeface="Cambria" pitchFamily="34" charset="-122"/>
                 <a:cs typeface="Cambria" pitchFamily="34" charset="-120"/>
               </a:rPr>
-              <a:t>NAPEMA® — protection without residue</a:t>
+              <a:t>EVERGREEN® — holding the water</a:t>
             </a:r>
             <a:endParaRPr lang="en-US" sz="1600" dirty="0"/>
           </a:p>
@@ -4817,7 +4935,7 @@
                 <a:ea typeface="Calibri" pitchFamily="34" charset="-122"/>
                 <a:cs typeface="Calibri" pitchFamily="34" charset="-120"/>
               </a:rPr>
-              <a:t>Controls diseases, parasites, fungi and pests, with no synthetic molecule.</a:t>
+              <a:t>A potassium-based hydro-retainer placed in the root zone at planting or at replant.</a:t>
             </a:r>
             <a:endParaRPr lang="en-US" sz="1350" dirty="0"/>
           </a:p>
@@ -4841,7 +4959,7 @@
                 <a:ea typeface="Calibri" pitchFamily="34" charset="-122"/>
                 <a:cs typeface="Calibri" pitchFamily="34" charset="-120"/>
               </a:rPr>
-              <a:t>Foliar and root spraying, working both preventively and curatively.</a:t>
+              <a:t>It captures rain and irrigation water and releases it back to the plant gradually, removing water stress through the critical stages.</a:t>
             </a:r>
             <a:endParaRPr lang="en-US" sz="1350" dirty="0"/>
           </a:p>
@@ -4865,7 +4983,7 @@
                 <a:ea typeface="Calibri" pitchFamily="34" charset="-122"/>
                 <a:cs typeface="Calibri" pitchFamily="34" charset="-120"/>
               </a:rPr>
-              <a:t>No residue in soil, plant or air: pollinators and beneficial insects are spared.</a:t>
+              <a:t>Absorbs on the order of 300 times its own weight; useful effect of 3 to 4 years in the soil.</a:t>
             </a:r>
             <a:endParaRPr lang="en-US" sz="1350" dirty="0"/>
           </a:p>
@@ -4889,7 +5007,7 @@
                 <a:ea typeface="Calibri" pitchFamily="34" charset="-122"/>
                 <a:cs typeface="Calibri" pitchFamily="34" charset="-120"/>
               </a:rPr>
-              <a:t>Formulated for one precise problem: mealybug, citrus greening (HLB), nematodes.</a:t>
+              <a:t>Breaks down by 20 to 25 % a year, with no build-up and no risk of overdosing.</a:t>
             </a:r>
             <a:endParaRPr lang="en-US" sz="1350" dirty="0"/>
           </a:p>
@@ -4928,7 +5046,7 @@
                 <a:ea typeface="Cambria" pitchFamily="34" charset="-122"/>
                 <a:cs typeface="Cambria" pitchFamily="34" charset="-120"/>
               </a:rPr>
-              <a:t>Paulownia ALTIFOLIA® — the tree for hot regions</a:t>
+              <a:t>ECOFERT® — feeding without depleting</a:t>
             </a:r>
             <a:endParaRPr lang="en-US" sz="1600" dirty="0"/>
           </a:p>
@@ -4974,7 +5092,7 @@
                 <a:ea typeface="Calibri" pitchFamily="34" charset="-122"/>
                 <a:cs typeface="Calibri" pitchFamily="34" charset="-120"/>
               </a:rPr>
-              <a:t>13 to 15 m in six to eight years, with a wide trunk.</a:t>
+              <a:t>A micro-dose fertiliser of amino acids, nitrogen, phosphorus and potassium, made from renewable resources.</a:t>
             </a:r>
             <a:endParaRPr lang="en-US" sz="1350" dirty="0"/>
           </a:p>
@@ -4998,7 +5116,7 @@
                 <a:ea typeface="Calibri" pitchFamily="34" charset="-122"/>
                 <a:cs typeface="Calibri" pitchFamily="34" charset="-120"/>
               </a:rPr>
-              <a:t>Combined with 100 g of EVERGREEN® per plant, irrigation needs drop by 50%.</a:t>
+              <a:t>Non-chelating: it does not strip the clay-humus complex and adds neither salinity nor nitrate load.</a:t>
             </a:r>
             <a:endParaRPr lang="en-US" sz="1350" dirty="0"/>
           </a:p>
@@ -5022,7 +5140,7 @@
                 <a:ea typeface="Calibri" pitchFamily="34" charset="-122"/>
                 <a:cs typeface="Calibri" pitchFamily="34" charset="-120"/>
               </a:rPr>
-              <a:t>Withstands −25 °C to +45 °C; the wood only ignites above 426 °C.</a:t>
+              <a:t>Certified SOHISCERT and EU Bio, in use in 60 countries — the entry condition for European buyers' specifications.</a:t>
             </a:r>
             <a:endParaRPr lang="en-US" sz="1350" dirty="0"/>
           </a:p>
@@ -5046,7 +5164,7 @@
                 <a:ea typeface="Calibri" pitchFamily="34" charset="-122"/>
                 <a:cs typeface="Calibri" pitchFamily="34" charset="-120"/>
               </a:rPr>
-              <a:t>Windbreak, protection against soil erosion, 400 to 700 kg of honey per hectare.</a:t>
+              <a:t>1 to 4 bottles of 140 ml per hectare, compatible with existing fertigation equipment.</a:t>
             </a:r>
             <a:endParaRPr lang="en-US" sz="1350" dirty="0"/>
           </a:p>
@@ -5115,7 +5233,7 @@
                 <a:ea typeface="Calibri" pitchFamily="34" charset="-122"/>
                 <a:cs typeface="Calibri" pitchFamily="34" charset="-120"/>
               </a:rPr>
-              <a:t>Plants delivered potted (25 to 30 cm), certified disease-free and replaced under warranty in case of loss. First harvest at the end of year six, with wood valued at around €400 to €450 per m³.</a:t>
+              <a:t>The two products are sold separately but were designed to reinforce each other: the hydro-retainer extends how long water stays available, the fertiliser puts that water to work without degrading the soil.</a:t>
             </a:r>
             <a:endParaRPr lang="en-US" sz="1100" dirty="0"/>
           </a:p>
@@ -5268,7 +5386,7 @@
                 <a:ea typeface="Calibri" pitchFamily="34" charset="-122"/>
                 <a:cs typeface="Calibri" pitchFamily="34" charset="-120"/>
               </a:rPr>
-              <a:t>ORDERS OF MAGNITUDE</a:t>
+              <a:t>The rest of the range</a:t>
             </a:r>
             <a:endParaRPr lang="en-US" sz="1150" dirty="0"/>
           </a:p>
@@ -5307,42 +5425,340 @@
                 <a:ea typeface="Cambria" pitchFamily="34" charset="-122"/>
                 <a:cs typeface="Cambria" pitchFamily="34" charset="-120"/>
               </a:rPr>
-              <a:t>Expected water saving by irrigation method</a:t>
+              <a:t>Protecting crops, holding soils</a:t>
             </a:r>
             <a:endParaRPr lang="en-US" sz="3000" dirty="0"/>
           </a:p>
         </p:txBody>
       </p:sp>
-      <p:graphicFrame>
-        <p:nvGraphicFramePr>
-          <p:cNvPr id="4" name="Chart 0" descr=""/>
-          <p:cNvGraphicFramePr/>
-          <p:nvPr/>
-        </p:nvGraphicFramePr>
-        <p:xfrm>
-          <a:off x="594360" y="1783080"/>
-          <a:ext cx="7360920" cy="3977640"/>
-        </p:xfrm>
-        <a:graphic xmlns:a="http://schemas.openxmlformats.org/drawingml/2006/main">
-          <a:graphicData uri="http://schemas.openxmlformats.org/drawingml/2006/chart">
-            <c:chart xmlns:c="http://schemas.openxmlformats.org/drawingml/2006/chart" r:id="rId1"/>
-          </a:graphicData>
-        </a:graphic>
-      </p:graphicFrame>
-      <p:sp>
-        <p:nvSpPr>
-          <p:cNvPr id="5" name="Shape 2"/>
+      <p:sp>
+        <p:nvSpPr>
+          <p:cNvPr id="4" name="Text 2"/>
+          <p:cNvSpPr txBox="1"/>
+          <p:nvPr/>
+        </p:nvSpPr>
+        <p:spPr>
+          <a:xfrm>
+            <a:off x="594360" y="1783080"/>
+            <a:ext cx="5227168" cy="411480"/>
+          </a:xfrm>
+          <a:prstGeom prst="rect">
+            <a:avLst/>
+          </a:prstGeom>
+          <a:noFill/>
+          <a:ln/>
+        </p:spPr>
+        <p:txBody>
+          <a:bodyPr wrap="square" lIns="0" tIns="0" rIns="0" bIns="0" rtlCol="0" anchor="ctr"/>
+          <a:lstStyle/>
+          <a:p>
+            <a:pPr algn="l" indent="0" marL="0">
+              <a:buNone/>
+            </a:pPr>
+            <a:r>
+              <a:rPr lang="en-US" sz="1600" b="1" dirty="0">
+                <a:solidFill>
+                  <a:srgbClr val="6B2A44"/>
+                </a:solidFill>
+                <a:latin typeface="Cambria" pitchFamily="34" charset="0"/>
+                <a:ea typeface="Cambria" pitchFamily="34" charset="-122"/>
+                <a:cs typeface="Cambria" pitchFamily="34" charset="-120"/>
+              </a:rPr>
+              <a:t>NAPEMA® — protection without residue</a:t>
+            </a:r>
+            <a:endParaRPr lang="en-US" sz="1600" dirty="0"/>
+          </a:p>
+        </p:txBody>
+      </p:sp>
+      <p:sp>
+        <p:nvSpPr>
+          <p:cNvPr id="5" name="Text 3"/>
+          <p:cNvSpPr txBox="1"/>
+          <p:nvPr/>
+        </p:nvSpPr>
+        <p:spPr>
+          <a:xfrm>
+            <a:off x="594360" y="2286000"/>
+            <a:ext cx="5227168" cy="2468880"/>
+          </a:xfrm>
+          <a:prstGeom prst="rect">
+            <a:avLst/>
+          </a:prstGeom>
+          <a:noFill/>
+          <a:ln/>
+        </p:spPr>
+        <p:txBody>
+          <a:bodyPr wrap="square" lIns="0" tIns="0" rIns="0" bIns="0" rtlCol="0" anchor="t"/>
+          <a:lstStyle/>
+          <a:p>
+            <a:pPr algn="l" marL="342900" indent="-342900">
+              <a:lnSpc>
+                <a:spcPct val="122000"/>
+              </a:lnSpc>
+              <a:spcAft>
+                <a:spcPts val="1000"/>
+              </a:spcAft>
+              <a:buSzPct val="100000"/>
+              <a:buChar char="•"/>
+            </a:pPr>
+            <a:r>
+              <a:rPr lang="en-US" sz="1350" dirty="0">
+                <a:solidFill>
+                  <a:srgbClr val="3F3138"/>
+                </a:solidFill>
+                <a:latin typeface="Calibri" pitchFamily="34" charset="0"/>
+                <a:ea typeface="Calibri" pitchFamily="34" charset="-122"/>
+                <a:cs typeface="Calibri" pitchFamily="34" charset="-120"/>
+              </a:rPr>
+              <a:t>Controls diseases, parasites, fungi and pests, with no synthetic molecule.</a:t>
+            </a:r>
+            <a:endParaRPr lang="en-US" sz="1350" dirty="0"/>
+          </a:p>
+          <a:p>
+            <a:pPr algn="l" marL="342900" indent="-342900">
+              <a:lnSpc>
+                <a:spcPct val="122000"/>
+              </a:lnSpc>
+              <a:spcAft>
+                <a:spcPts val="1000"/>
+              </a:spcAft>
+              <a:buSzPct val="100000"/>
+              <a:buChar char="•"/>
+            </a:pPr>
+            <a:r>
+              <a:rPr lang="en-US" sz="1350" dirty="0">
+                <a:solidFill>
+                  <a:srgbClr val="3F3138"/>
+                </a:solidFill>
+                <a:latin typeface="Calibri" pitchFamily="34" charset="0"/>
+                <a:ea typeface="Calibri" pitchFamily="34" charset="-122"/>
+                <a:cs typeface="Calibri" pitchFamily="34" charset="-120"/>
+              </a:rPr>
+              <a:t>Foliar and root spraying, working both preventively and curatively.</a:t>
+            </a:r>
+            <a:endParaRPr lang="en-US" sz="1350" dirty="0"/>
+          </a:p>
+          <a:p>
+            <a:pPr algn="l" marL="342900" indent="-342900">
+              <a:lnSpc>
+                <a:spcPct val="122000"/>
+              </a:lnSpc>
+              <a:spcAft>
+                <a:spcPts val="1000"/>
+              </a:spcAft>
+              <a:buSzPct val="100000"/>
+              <a:buChar char="•"/>
+            </a:pPr>
+            <a:r>
+              <a:rPr lang="en-US" sz="1350" dirty="0">
+                <a:solidFill>
+                  <a:srgbClr val="3F3138"/>
+                </a:solidFill>
+                <a:latin typeface="Calibri" pitchFamily="34" charset="0"/>
+                <a:ea typeface="Calibri" pitchFamily="34" charset="-122"/>
+                <a:cs typeface="Calibri" pitchFamily="34" charset="-120"/>
+              </a:rPr>
+              <a:t>No residue in soil, plant or air: pollinators and beneficial insects are spared.</a:t>
+            </a:r>
+            <a:endParaRPr lang="en-US" sz="1350" dirty="0"/>
+          </a:p>
+          <a:p>
+            <a:pPr algn="l" marL="342900" indent="-342900">
+              <a:lnSpc>
+                <a:spcPct val="122000"/>
+              </a:lnSpc>
+              <a:spcAft>
+                <a:spcPts val="1000"/>
+              </a:spcAft>
+              <a:buSzPct val="100000"/>
+              <a:buChar char="•"/>
+            </a:pPr>
+            <a:r>
+              <a:rPr lang="en-US" sz="1350" dirty="0">
+                <a:solidFill>
+                  <a:srgbClr val="3F3138"/>
+                </a:solidFill>
+                <a:latin typeface="Calibri" pitchFamily="34" charset="0"/>
+                <a:ea typeface="Calibri" pitchFamily="34" charset="-122"/>
+                <a:cs typeface="Calibri" pitchFamily="34" charset="-120"/>
+              </a:rPr>
+              <a:t>Formulated for one precise problem: mealybug, citrus greening (HLB), nematodes.</a:t>
+            </a:r>
+            <a:endParaRPr lang="en-US" sz="1350" dirty="0"/>
+          </a:p>
+        </p:txBody>
+      </p:sp>
+      <p:sp>
+        <p:nvSpPr>
+          <p:cNvPr id="6" name="Text 4"/>
+          <p:cNvSpPr txBox="1"/>
+          <p:nvPr/>
+        </p:nvSpPr>
+        <p:spPr>
+          <a:xfrm>
+            <a:off x="6370168" y="1783080"/>
+            <a:ext cx="5227168" cy="411480"/>
+          </a:xfrm>
+          <a:prstGeom prst="rect">
+            <a:avLst/>
+          </a:prstGeom>
+          <a:noFill/>
+          <a:ln/>
+        </p:spPr>
+        <p:txBody>
+          <a:bodyPr wrap="square" lIns="0" tIns="0" rIns="0" bIns="0" rtlCol="0" anchor="ctr"/>
+          <a:lstStyle/>
+          <a:p>
+            <a:pPr algn="l" indent="0" marL="0">
+              <a:buNone/>
+            </a:pPr>
+            <a:r>
+              <a:rPr lang="en-US" sz="1600" b="1" dirty="0">
+                <a:solidFill>
+                  <a:srgbClr val="6B2A44"/>
+                </a:solidFill>
+                <a:latin typeface="Cambria" pitchFamily="34" charset="0"/>
+                <a:ea typeface="Cambria" pitchFamily="34" charset="-122"/>
+                <a:cs typeface="Cambria" pitchFamily="34" charset="-120"/>
+              </a:rPr>
+              <a:t>Paulownia ALTIFOLIA® — the tree for hot regions</a:t>
+            </a:r>
+            <a:endParaRPr lang="en-US" sz="1600" dirty="0"/>
+          </a:p>
+        </p:txBody>
+      </p:sp>
+      <p:sp>
+        <p:nvSpPr>
+          <p:cNvPr id="7" name="Text 5"/>
+          <p:cNvSpPr txBox="1"/>
+          <p:nvPr/>
+        </p:nvSpPr>
+        <p:spPr>
+          <a:xfrm>
+            <a:off x="6370168" y="2286000"/>
+            <a:ext cx="5227168" cy="2468880"/>
+          </a:xfrm>
+          <a:prstGeom prst="rect">
+            <a:avLst/>
+          </a:prstGeom>
+          <a:noFill/>
+          <a:ln/>
+        </p:spPr>
+        <p:txBody>
+          <a:bodyPr wrap="square" lIns="0" tIns="0" rIns="0" bIns="0" rtlCol="0" anchor="t"/>
+          <a:lstStyle/>
+          <a:p>
+            <a:pPr algn="l" marL="342900" indent="-342900">
+              <a:lnSpc>
+                <a:spcPct val="122000"/>
+              </a:lnSpc>
+              <a:spcAft>
+                <a:spcPts val="1000"/>
+              </a:spcAft>
+              <a:buSzPct val="100000"/>
+              <a:buChar char="•"/>
+            </a:pPr>
+            <a:r>
+              <a:rPr lang="en-US" sz="1350" dirty="0">
+                <a:solidFill>
+                  <a:srgbClr val="3F3138"/>
+                </a:solidFill>
+                <a:latin typeface="Calibri" pitchFamily="34" charset="0"/>
+                <a:ea typeface="Calibri" pitchFamily="34" charset="-122"/>
+                <a:cs typeface="Calibri" pitchFamily="34" charset="-120"/>
+              </a:rPr>
+              <a:t>13 to 15 m in six to eight years, with a wide trunk.</a:t>
+            </a:r>
+            <a:endParaRPr lang="en-US" sz="1350" dirty="0"/>
+          </a:p>
+          <a:p>
+            <a:pPr algn="l" marL="342900" indent="-342900">
+              <a:lnSpc>
+                <a:spcPct val="122000"/>
+              </a:lnSpc>
+              <a:spcAft>
+                <a:spcPts val="1000"/>
+              </a:spcAft>
+              <a:buSzPct val="100000"/>
+              <a:buChar char="•"/>
+            </a:pPr>
+            <a:r>
+              <a:rPr lang="en-US" sz="1350" dirty="0">
+                <a:solidFill>
+                  <a:srgbClr val="3F3138"/>
+                </a:solidFill>
+                <a:latin typeface="Calibri" pitchFamily="34" charset="0"/>
+                <a:ea typeface="Calibri" pitchFamily="34" charset="-122"/>
+                <a:cs typeface="Calibri" pitchFamily="34" charset="-120"/>
+              </a:rPr>
+              <a:t>Combined with 100 g of EVERGREEN® per plant, irrigation needs drop by 50%.</a:t>
+            </a:r>
+            <a:endParaRPr lang="en-US" sz="1350" dirty="0"/>
+          </a:p>
+          <a:p>
+            <a:pPr algn="l" marL="342900" indent="-342900">
+              <a:lnSpc>
+                <a:spcPct val="122000"/>
+              </a:lnSpc>
+              <a:spcAft>
+                <a:spcPts val="1000"/>
+              </a:spcAft>
+              <a:buSzPct val="100000"/>
+              <a:buChar char="•"/>
+            </a:pPr>
+            <a:r>
+              <a:rPr lang="en-US" sz="1350" dirty="0">
+                <a:solidFill>
+                  <a:srgbClr val="3F3138"/>
+                </a:solidFill>
+                <a:latin typeface="Calibri" pitchFamily="34" charset="0"/>
+                <a:ea typeface="Calibri" pitchFamily="34" charset="-122"/>
+                <a:cs typeface="Calibri" pitchFamily="34" charset="-120"/>
+              </a:rPr>
+              <a:t>Withstands −25 °C to +45 °C; the wood only ignites above 426 °C.</a:t>
+            </a:r>
+            <a:endParaRPr lang="en-US" sz="1350" dirty="0"/>
+          </a:p>
+          <a:p>
+            <a:pPr algn="l" marL="342900" indent="-342900">
+              <a:lnSpc>
+                <a:spcPct val="122000"/>
+              </a:lnSpc>
+              <a:spcAft>
+                <a:spcPts val="1000"/>
+              </a:spcAft>
+              <a:buSzPct val="100000"/>
+              <a:buChar char="•"/>
+            </a:pPr>
+            <a:r>
+              <a:rPr lang="en-US" sz="1350" dirty="0">
+                <a:solidFill>
+                  <a:srgbClr val="3F3138"/>
+                </a:solidFill>
+                <a:latin typeface="Calibri" pitchFamily="34" charset="0"/>
+                <a:ea typeface="Calibri" pitchFamily="34" charset="-122"/>
+                <a:cs typeface="Calibri" pitchFamily="34" charset="-120"/>
+              </a:rPr>
+              <a:t>Windbreak, protection against soil erosion, 400 to 700 kg of honey per hectare.</a:t>
+            </a:r>
+            <a:endParaRPr lang="en-US" sz="1350" dirty="0"/>
+          </a:p>
+        </p:txBody>
+      </p:sp>
+      <p:sp>
+        <p:nvSpPr>
+          <p:cNvPr id="8" name="Shape 6"/>
           <p:cNvSpPr/>
           <p:nvPr/>
         </p:nvSpPr>
         <p:spPr>
           <a:xfrm>
-            <a:off x="8275320" y="1783080"/>
-            <a:ext cx="3291840" cy="3977640"/>
+            <a:off x="594360" y="4846320"/>
+            <a:ext cx="11002975" cy="960120"/>
           </a:xfrm>
           <a:prstGeom prst="roundRect">
             <a:avLst>
-              <a:gd name="adj" fmla="val 2778"/>
+              <a:gd name="adj" fmla="val 7619"/>
             </a:avLst>
           </a:prstGeom>
           <a:solidFill>
@@ -5358,53 +5774,14 @@
       </p:sp>
       <p:sp>
         <p:nvSpPr>
-          <p:cNvPr id="6" name="Text 3"/>
-          <p:cNvSpPr txBox="1"/>
-          <p:nvPr/>
-        </p:nvSpPr>
-        <p:spPr>
-          <a:xfrm>
-            <a:off x="8503920" y="2011680"/>
-            <a:ext cx="2834640" cy="457200"/>
-          </a:xfrm>
-          <a:prstGeom prst="rect">
-            <a:avLst/>
-          </a:prstGeom>
-          <a:noFill/>
-          <a:ln/>
-        </p:spPr>
-        <p:txBody>
-          <a:bodyPr wrap="square" lIns="0" tIns="0" rIns="0" bIns="0" rtlCol="0" anchor="ctr"/>
-          <a:lstStyle/>
-          <a:p>
-            <a:pPr algn="l" indent="0" marL="0">
-              <a:buNone/>
-            </a:pPr>
-            <a:r>
-              <a:rPr lang="en-US" sz="1300" b="1" dirty="0">
-                <a:solidFill>
-                  <a:srgbClr val="6B2A44"/>
-                </a:solidFill>
-                <a:latin typeface="Cambria" pitchFamily="34" charset="0"/>
-                <a:ea typeface="Cambria" pitchFamily="34" charset="-122"/>
-                <a:cs typeface="Cambria" pitchFamily="34" charset="-120"/>
-              </a:rPr>
-              <a:t>Read with caution</a:t>
-            </a:r>
-            <a:endParaRPr lang="en-US" sz="1300" dirty="0"/>
-          </a:p>
-        </p:txBody>
-      </p:sp>
-      <p:sp>
-        <p:nvSpPr>
-          <p:cNvPr id="7" name="Text 4"/>
-          <p:cNvSpPr txBox="1"/>
-          <p:nvPr/>
-        </p:nvSpPr>
-        <p:spPr>
-          <a:xfrm>
-            <a:off x="8503920" y="2560320"/>
-            <a:ext cx="2834640" cy="3017520"/>
+          <p:cNvPr id="9" name="Text 7"/>
+          <p:cNvSpPr txBox="1"/>
+          <p:nvPr/>
+        </p:nvSpPr>
+        <p:spPr>
+          <a:xfrm>
+            <a:off x="822960" y="4983480"/>
+            <a:ext cx="10545775" cy="713232"/>
           </a:xfrm>
           <a:prstGeom prst="rect">
             <a:avLst/>
@@ -5418,57 +5795,28 @@
           <a:p>
             <a:pPr algn="l" indent="0" marL="0">
               <a:lnSpc>
-                <a:spcPct val="125000"/>
+                <a:spcPct val="118000"/>
               </a:lnSpc>
               <a:buNone/>
             </a:pPr>
             <a:r>
-              <a:rPr lang="en-US" sz="1200" dirty="0">
-                <a:solidFill>
-                  <a:srgbClr val="3F3138"/>
-                </a:solidFill>
-                <a:latin typeface="Calibri" pitchFamily="34" charset="0"/>
-                <a:ea typeface="Calibri" pitchFamily="34" charset="-122"/>
-                <a:cs typeface="Calibri" pitchFamily="34" charset="-120"/>
-              </a:rPr>
-              <a:t>These ranges are indicative and based on the savings documented for our hydro-retainers.</a:t>
-            </a:r>
-            <a:endParaRPr lang="en-US" sz="1200" dirty="0"/>
-          </a:p>
-          <a:p>
-            <a:pPr algn="l" indent="0" marL="0">
-              <a:lnSpc>
-                <a:spcPct val="125000"/>
-              </a:lnSpc>
-              <a:buNone/>
-            </a:pPr>
-            <a:endParaRPr lang="en-US" sz="1200" dirty="0"/>
-          </a:p>
-          <a:p>
-            <a:pPr algn="l" indent="0" marL="0">
-              <a:lnSpc>
-                <a:spcPct val="125000"/>
-              </a:lnSpc>
-              <a:buNone/>
-            </a:pPr>
-            <a:r>
-              <a:rPr lang="en-US" sz="1200" dirty="0">
-                <a:solidFill>
-                  <a:srgbClr val="3F3138"/>
-                </a:solidFill>
-                <a:latin typeface="Calibri" pitchFamily="34" charset="0"/>
-                <a:ea typeface="Calibri" pitchFamily="34" charset="-122"/>
-                <a:cs typeface="Calibri" pitchFamily="34" charset="-120"/>
-              </a:rPr>
-              <a:t>The actual result depends on the soil, the climate and the crop. They give an order of magnitude and are in no case a guaranteed, contractual or absolute value.</a:t>
-            </a:r>
-            <a:endParaRPr lang="en-US" sz="1200" dirty="0"/>
-          </a:p>
-        </p:txBody>
-      </p:sp>
-      <p:sp>
-        <p:nvSpPr>
-          <p:cNvPr id="8" name="Text 5"/>
+              <a:rPr lang="en-US" sz="1100" dirty="0">
+                <a:solidFill>
+                  <a:srgbClr val="7C6B73"/>
+                </a:solidFill>
+                <a:latin typeface="Calibri" pitchFamily="34" charset="0"/>
+                <a:ea typeface="Calibri" pitchFamily="34" charset="-122"/>
+                <a:cs typeface="Calibri" pitchFamily="34" charset="-120"/>
+              </a:rPr>
+              <a:t>Plants delivered potted (25 to 30 cm), certified disease-free and replaced under warranty in case of loss. First harvest at the end of year six, with wood valued at around €400 to €450 per m³.</a:t>
+            </a:r>
+            <a:endParaRPr lang="en-US" sz="1100" dirty="0"/>
+          </a:p>
+        </p:txBody>
+      </p:sp>
+      <p:sp>
+        <p:nvSpPr>
+          <p:cNvPr id="10" name="Text 8"/>
           <p:cNvSpPr txBox="1"/>
           <p:nvPr/>
         </p:nvSpPr>
@@ -5509,7 +5857,7 @@
       </p:sp>
       <p:sp>
         <p:nvSpPr>
-          <p:cNvPr id="9" name="Text 6"/>
+          <p:cNvPr id="11" name="Text 9"/>
           <p:cNvSpPr txBox="1"/>
           <p:nvPr/>
         </p:nvSpPr>
@@ -5613,7 +5961,7 @@
                 <a:ea typeface="Calibri" pitchFamily="34" charset="-122"/>
                 <a:cs typeface="Calibri" pitchFamily="34" charset="-120"/>
               </a:rPr>
-              <a:t>THREE PRIORITY AREAS</a:t>
+              <a:t>ORDERS OF MAGNITUDE</a:t>
             </a:r>
             <a:endParaRPr lang="en-US" sz="1150" dirty="0"/>
           </a:p>
@@ -5652,26 +6000,42 @@
                 <a:ea typeface="Cambria" pitchFamily="34" charset="-122"/>
                 <a:cs typeface="Cambria" pitchFamily="34" charset="-120"/>
               </a:rPr>
-              <a:t>Where to run the first trials</a:t>
+              <a:t>Expected water saving by irrigation method</a:t>
             </a:r>
             <a:endParaRPr lang="en-US" sz="3000" dirty="0"/>
           </a:p>
         </p:txBody>
       </p:sp>
-      <p:sp>
-        <p:nvSpPr>
-          <p:cNvPr id="4" name="Shape 2"/>
+      <p:graphicFrame>
+        <p:nvGraphicFramePr>
+          <p:cNvPr id="4" name="Chart 0" descr=""/>
+          <p:cNvGraphicFramePr/>
+          <p:nvPr/>
+        </p:nvGraphicFramePr>
+        <p:xfrm>
+          <a:off x="594360" y="1783080"/>
+          <a:ext cx="7360920" cy="3977640"/>
+        </p:xfrm>
+        <a:graphic xmlns:a="http://schemas.openxmlformats.org/drawingml/2006/main">
+          <a:graphicData uri="http://schemas.openxmlformats.org/drawingml/2006/chart">
+            <c:chart xmlns:c="http://schemas.openxmlformats.org/drawingml/2006/chart" r:id="rId1"/>
+          </a:graphicData>
+        </a:graphic>
+      </p:graphicFrame>
+      <p:sp>
+        <p:nvSpPr>
+          <p:cNvPr id="5" name="Shape 2"/>
           <p:cNvSpPr/>
           <p:nvPr/>
         </p:nvSpPr>
         <p:spPr>
           <a:xfrm>
-            <a:off x="594360" y="1783080"/>
-            <a:ext cx="3472586" cy="4069080"/>
+            <a:off x="8275320" y="1783080"/>
+            <a:ext cx="3291840" cy="3977640"/>
           </a:xfrm>
           <a:prstGeom prst="roundRect">
             <a:avLst>
-              <a:gd name="adj" fmla="val 2633"/>
+              <a:gd name="adj" fmla="val 2778"/>
             </a:avLst>
           </a:prstGeom>
           <a:solidFill>
@@ -5685,30 +6049,6 @@
           </a:ln>
         </p:spPr>
       </p:sp>
-      <p:pic>
-        <p:nvPicPr>
-          <p:cNvPr id="5" name="Image 0" descr="preencoded.png">    </p:cNvPr>
-          <p:cNvPicPr>
-            <a:picLocks noChangeAspect="1"/>
-          </p:cNvPicPr>
-          <p:nvPr/>
-        </p:nvPicPr>
-        <p:blipFill>
-          <a:blip r:embed="rId1"/>
-          <a:stretch>
-            <a:fillRect/>
-          </a:stretch>
-        </p:blipFill>
-        <p:spPr>
-          <a:xfrm>
-            <a:off x="594360" y="1783080"/>
-            <a:ext cx="3472586" cy="1691640"/>
-          </a:xfrm>
-          <a:prstGeom prst="rect">
-            <a:avLst/>
-          </a:prstGeom>
-        </p:spPr>
-      </p:pic>
       <p:sp>
         <p:nvSpPr>
           <p:cNvPr id="6" name="Text 3"/>
@@ -5717,8 +6057,8 @@
         </p:nvSpPr>
         <p:spPr>
           <a:xfrm>
-            <a:off x="795528" y="3639312"/>
-            <a:ext cx="3070250" cy="384048"/>
+            <a:off x="8503920" y="2011680"/>
+            <a:ext cx="2834640" cy="457200"/>
           </a:xfrm>
           <a:prstGeom prst="rect">
             <a:avLst/>
@@ -5734,7 +6074,7 @@
               <a:buNone/>
             </a:pPr>
             <a:r>
-              <a:rPr lang="en-US" sz="1500" b="1" dirty="0">
+              <a:rPr lang="en-US" sz="1300" b="1" dirty="0">
                 <a:solidFill>
                   <a:srgbClr val="6B2A44"/>
                 </a:solidFill>
@@ -5742,9 +6082,9 @@
                 <a:ea typeface="Cambria" pitchFamily="34" charset="-122"/>
                 <a:cs typeface="Cambria" pitchFamily="34" charset="-120"/>
               </a:rPr>
-              <a:t>Western Cape</a:t>
-            </a:r>
-            <a:endParaRPr lang="en-US" sz="1500" dirty="0"/>
+              <a:t>Read with caution</a:t>
+            </a:r>
+            <a:endParaRPr lang="en-US" sz="1300" dirty="0"/>
           </a:p>
         </p:txBody>
       </p:sp>
@@ -5756,580 +6096,72 @@
         </p:nvSpPr>
         <p:spPr>
           <a:xfrm>
-            <a:off x="795528" y="4041648"/>
-            <a:ext cx="3070250" cy="329184"/>
-          </a:xfrm>
-          <a:prstGeom prst="rect">
-            <a:avLst/>
-          </a:prstGeom>
-          <a:noFill/>
-          <a:ln/>
-        </p:spPr>
-        <p:txBody>
-          <a:bodyPr wrap="square" lIns="0" tIns="0" rIns="0" bIns="0" rtlCol="0" anchor="ctr"/>
+            <a:off x="8503920" y="2560320"/>
+            <a:ext cx="2834640" cy="3017520"/>
+          </a:xfrm>
+          <a:prstGeom prst="rect">
+            <a:avLst/>
+          </a:prstGeom>
+          <a:noFill/>
+          <a:ln/>
+        </p:spPr>
+        <p:txBody>
+          <a:bodyPr wrap="square" lIns="0" tIns="0" rIns="0" bIns="0" rtlCol="0" anchor="t"/>
           <a:lstStyle/>
           <a:p>
             <a:pPr algn="l" indent="0" marL="0">
-              <a:buNone/>
-            </a:pPr>
-            <a:r>
-              <a:rPr lang="en-US" sz="1250" b="1" dirty="0">
-                <a:solidFill>
-                  <a:srgbClr val="8F6D0F"/>
-                </a:solidFill>
-                <a:latin typeface="Calibri" pitchFamily="34" charset="0"/>
-                <a:ea typeface="Calibri" pitchFamily="34" charset="-122"/>
-                <a:cs typeface="Calibri" pitchFamily="34" charset="-120"/>
-              </a:rPr>
-              <a:t>≈ 90,000 ha of vineyard</a:t>
-            </a:r>
-            <a:endParaRPr lang="en-US" sz="1250" dirty="0"/>
+              <a:lnSpc>
+                <a:spcPct val="125000"/>
+              </a:lnSpc>
+              <a:buNone/>
+            </a:pPr>
+            <a:r>
+              <a:rPr lang="en-US" sz="1200" dirty="0">
+                <a:solidFill>
+                  <a:srgbClr val="3F3138"/>
+                </a:solidFill>
+                <a:latin typeface="Calibri" pitchFamily="34" charset="0"/>
+                <a:ea typeface="Calibri" pitchFamily="34" charset="-122"/>
+                <a:cs typeface="Calibri" pitchFamily="34" charset="-120"/>
+              </a:rPr>
+              <a:t>These ranges are indicative and based on the savings documented for our hydro-retainers.</a:t>
+            </a:r>
+            <a:endParaRPr lang="en-US" sz="1200" dirty="0"/>
+          </a:p>
+          <a:p>
+            <a:pPr algn="l" indent="0" marL="0">
+              <a:lnSpc>
+                <a:spcPct val="125000"/>
+              </a:lnSpc>
+              <a:buNone/>
+            </a:pPr>
+            <a:endParaRPr lang="en-US" sz="1200" dirty="0"/>
+          </a:p>
+          <a:p>
+            <a:pPr algn="l" indent="0" marL="0">
+              <a:lnSpc>
+                <a:spcPct val="125000"/>
+              </a:lnSpc>
+              <a:buNone/>
+            </a:pPr>
+            <a:r>
+              <a:rPr lang="en-US" sz="1200" dirty="0">
+                <a:solidFill>
+                  <a:srgbClr val="3F3138"/>
+                </a:solidFill>
+                <a:latin typeface="Calibri" pitchFamily="34" charset="0"/>
+                <a:ea typeface="Calibri" pitchFamily="34" charset="-122"/>
+                <a:cs typeface="Calibri" pitchFamily="34" charset="-120"/>
+              </a:rPr>
+              <a:t>The actual result depends on the soil, the climate and the crop. They give an order of magnitude and are in no case a guaranteed, contractual or absolute value.</a:t>
+            </a:r>
+            <a:endParaRPr lang="en-US" sz="1200" dirty="0"/>
           </a:p>
         </p:txBody>
       </p:sp>
       <p:sp>
         <p:nvSpPr>
           <p:cNvPr id="8" name="Text 5"/>
-          <p:cNvSpPr txBox="1"/>
-          <p:nvPr/>
-        </p:nvSpPr>
-        <p:spPr>
-          <a:xfrm>
-            <a:off x="795528" y="4407408"/>
-            <a:ext cx="3070250" cy="1280160"/>
-          </a:xfrm>
-          <a:prstGeom prst="rect">
-            <a:avLst/>
-          </a:prstGeom>
-          <a:noFill/>
-          <a:ln/>
-        </p:spPr>
-        <p:txBody>
-          <a:bodyPr wrap="square" lIns="0" tIns="0" rIns="0" bIns="0" rtlCol="0" anchor="t"/>
-          <a:lstStyle/>
-          <a:p>
-            <a:pPr algn="l" marL="342900" indent="-342900">
-              <a:lnSpc>
-                <a:spcPct val="116000"/>
-              </a:lnSpc>
-              <a:spcAft>
-                <a:spcPts val="700"/>
-              </a:spcAft>
-              <a:buSzPct val="100000"/>
-              <a:buChar char="•"/>
-            </a:pPr>
-            <a:r>
-              <a:rPr lang="en-US" sz="1150" dirty="0">
-                <a:solidFill>
-                  <a:srgbClr val="3F3138"/>
-                </a:solidFill>
-                <a:latin typeface="Calibri" pitchFamily="34" charset="0"/>
-                <a:ea typeface="Calibri" pitchFamily="34" charset="-122"/>
-                <a:cs typeface="Calibri" pitchFamily="34" charset="-120"/>
-              </a:rPr>
-              <a:t>Nearly all of the national vineyard, plus the deciduous fruit of the Breede and Olifants valleys.</a:t>
-            </a:r>
-            <a:endParaRPr lang="en-US" sz="1150" dirty="0"/>
-          </a:p>
-          <a:p>
-            <a:pPr algn="l" marL="342900" indent="-342900">
-              <a:lnSpc>
-                <a:spcPct val="116000"/>
-              </a:lnSpc>
-              <a:spcAft>
-                <a:spcPts val="700"/>
-              </a:spcAft>
-              <a:buSzPct val="100000"/>
-              <a:buChar char="•"/>
-            </a:pPr>
-            <a:r>
-              <a:rPr lang="en-US" sz="1150" dirty="0">
-                <a:solidFill>
-                  <a:srgbClr val="3F3138"/>
-                </a:solidFill>
-                <a:latin typeface="Calibri" pitchFamily="34" charset="0"/>
-                <a:ea typeface="Calibri" pitchFamily="34" charset="-122"/>
-                <a:cs typeface="Calibri" pitchFamily="34" charset="-120"/>
-              </a:rPr>
-              <a:t>Winter rainfall of 250 to 400 mm inland, and the 2015-2018 quota cuts are a live memory.</a:t>
-            </a:r>
-            <a:endParaRPr lang="en-US" sz="1150" dirty="0"/>
-          </a:p>
-          <a:p>
-            <a:pPr algn="l" marL="342900" indent="-342900">
-              <a:lnSpc>
-                <a:spcPct val="116000"/>
-              </a:lnSpc>
-              <a:spcAft>
-                <a:spcPts val="700"/>
-              </a:spcAft>
-              <a:buSzPct val="100000"/>
-              <a:buChar char="•"/>
-            </a:pPr>
-            <a:r>
-              <a:rPr lang="en-US" sz="1150" dirty="0">
-                <a:solidFill>
-                  <a:srgbClr val="3F3138"/>
-                </a:solidFill>
-                <a:latin typeface="Calibri" pitchFamily="34" charset="0"/>
-                <a:ea typeface="Calibri" pitchFamily="34" charset="-122"/>
-                <a:cs typeface="Calibri" pitchFamily="34" charset="-120"/>
-              </a:rPr>
-              <a:t>Export blocks already on drip or micro-sprinkler, with buyers asking for organic certification.</a:t>
-            </a:r>
-            <a:endParaRPr lang="en-US" sz="1150" dirty="0"/>
-          </a:p>
-        </p:txBody>
-      </p:sp>
-      <p:sp>
-        <p:nvSpPr>
-          <p:cNvPr id="9" name="Shape 6"/>
-          <p:cNvSpPr/>
-          <p:nvPr/>
-        </p:nvSpPr>
-        <p:spPr>
-          <a:xfrm>
-            <a:off x="4359554" y="1783080"/>
-            <a:ext cx="3472586" cy="4069080"/>
-          </a:xfrm>
-          <a:prstGeom prst="roundRect">
-            <a:avLst>
-              <a:gd name="adj" fmla="val 2633"/>
-            </a:avLst>
-          </a:prstGeom>
-          <a:solidFill>
-            <a:srgbClr val="F5EFF1"/>
-          </a:solidFill>
-          <a:ln w="9525">
-            <a:solidFill>
-              <a:srgbClr val="E5D9DE"/>
-            </a:solidFill>
-            <a:prstDash val="solid"/>
-          </a:ln>
-        </p:spPr>
-      </p:sp>
-      <p:pic>
-        <p:nvPicPr>
-          <p:cNvPr id="10" name="Image 1" descr="preencoded.png">    </p:cNvPr>
-          <p:cNvPicPr>
-            <a:picLocks noChangeAspect="1"/>
-          </p:cNvPicPr>
-          <p:nvPr/>
-        </p:nvPicPr>
-        <p:blipFill>
-          <a:blip r:embed="rId2"/>
-          <a:stretch>
-            <a:fillRect/>
-          </a:stretch>
-        </p:blipFill>
-        <p:spPr>
-          <a:xfrm>
-            <a:off x="4359554" y="1783080"/>
-            <a:ext cx="3472586" cy="1691640"/>
-          </a:xfrm>
-          <a:prstGeom prst="rect">
-            <a:avLst/>
-          </a:prstGeom>
-        </p:spPr>
-      </p:pic>
-      <p:sp>
-        <p:nvSpPr>
-          <p:cNvPr id="11" name="Text 7"/>
-          <p:cNvSpPr txBox="1"/>
-          <p:nvPr/>
-        </p:nvSpPr>
-        <p:spPr>
-          <a:xfrm>
-            <a:off x="4560722" y="3639312"/>
-            <a:ext cx="3070250" cy="384048"/>
-          </a:xfrm>
-          <a:prstGeom prst="rect">
-            <a:avLst/>
-          </a:prstGeom>
-          <a:noFill/>
-          <a:ln/>
-        </p:spPr>
-        <p:txBody>
-          <a:bodyPr wrap="square" lIns="0" tIns="0" rIns="0" bIns="0" rtlCol="0" anchor="ctr"/>
-          <a:lstStyle/>
-          <a:p>
-            <a:pPr algn="l" indent="0" marL="0">
-              <a:buNone/>
-            </a:pPr>
-            <a:r>
-              <a:rPr lang="en-US" sz="1500" b="1" dirty="0">
-                <a:solidFill>
-                  <a:srgbClr val="6B2A44"/>
-                </a:solidFill>
-                <a:latin typeface="Cambria" pitchFamily="34" charset="0"/>
-                <a:ea typeface="Cambria" pitchFamily="34" charset="-122"/>
-                <a:cs typeface="Cambria" pitchFamily="34" charset="-120"/>
-              </a:rPr>
-              <a:t>Limpopo</a:t>
-            </a:r>
-            <a:endParaRPr lang="en-US" sz="1500" dirty="0"/>
-          </a:p>
-        </p:txBody>
-      </p:sp>
-      <p:sp>
-        <p:nvSpPr>
-          <p:cNvPr id="12" name="Text 8"/>
-          <p:cNvSpPr txBox="1"/>
-          <p:nvPr/>
-        </p:nvSpPr>
-        <p:spPr>
-          <a:xfrm>
-            <a:off x="4560722" y="4041648"/>
-            <a:ext cx="3070250" cy="329184"/>
-          </a:xfrm>
-          <a:prstGeom prst="rect">
-            <a:avLst/>
-          </a:prstGeom>
-          <a:noFill/>
-          <a:ln/>
-        </p:spPr>
-        <p:txBody>
-          <a:bodyPr wrap="square" lIns="0" tIns="0" rIns="0" bIns="0" rtlCol="0" anchor="ctr"/>
-          <a:lstStyle/>
-          <a:p>
-            <a:pPr algn="l" indent="0" marL="0">
-              <a:buNone/>
-            </a:pPr>
-            <a:r>
-              <a:rPr lang="en-US" sz="1250" b="1" dirty="0">
-                <a:solidFill>
-                  <a:srgbClr val="8F6D0F"/>
-                </a:solidFill>
-                <a:latin typeface="Calibri" pitchFamily="34" charset="0"/>
-                <a:ea typeface="Calibri" pitchFamily="34" charset="-122"/>
-                <a:cs typeface="Calibri" pitchFamily="34" charset="-120"/>
-              </a:rPr>
-              <a:t>≈ 450 mm of rain a year</a:t>
-            </a:r>
-            <a:endParaRPr lang="en-US" sz="1250" dirty="0"/>
-          </a:p>
-        </p:txBody>
-      </p:sp>
-      <p:sp>
-        <p:nvSpPr>
-          <p:cNvPr id="13" name="Text 9"/>
-          <p:cNvSpPr txBox="1"/>
-          <p:nvPr/>
-        </p:nvSpPr>
-        <p:spPr>
-          <a:xfrm>
-            <a:off x="4560722" y="4407408"/>
-            <a:ext cx="3070250" cy="1280160"/>
-          </a:xfrm>
-          <a:prstGeom prst="rect">
-            <a:avLst/>
-          </a:prstGeom>
-          <a:noFill/>
-          <a:ln/>
-        </p:spPr>
-        <p:txBody>
-          <a:bodyPr wrap="square" lIns="0" tIns="0" rIns="0" bIns="0" rtlCol="0" anchor="t"/>
-          <a:lstStyle/>
-          <a:p>
-            <a:pPr algn="l" marL="342900" indent="-342900">
-              <a:lnSpc>
-                <a:spcPct val="116000"/>
-              </a:lnSpc>
-              <a:spcAft>
-                <a:spcPts val="700"/>
-              </a:spcAft>
-              <a:buSzPct val="100000"/>
-              <a:buChar char="•"/>
-            </a:pPr>
-            <a:r>
-              <a:rPr lang="en-US" sz="1150" dirty="0">
-                <a:solidFill>
-                  <a:srgbClr val="3F3138"/>
-                </a:solidFill>
-                <a:latin typeface="Calibri" pitchFamily="34" charset="0"/>
-                <a:ea typeface="Calibri" pitchFamily="34" charset="-122"/>
-                <a:cs typeface="Calibri" pitchFamily="34" charset="-120"/>
-              </a:rPr>
-              <a:t>The leading citrus province, with macadamia and avocado on sandy, low-retention soils.</a:t>
-            </a:r>
-            <a:endParaRPr lang="en-US" sz="1150" dirty="0"/>
-          </a:p>
-          <a:p>
-            <a:pPr algn="l" marL="342900" indent="-342900">
-              <a:lnSpc>
-                <a:spcPct val="116000"/>
-              </a:lnSpc>
-              <a:spcAft>
-                <a:spcPts val="700"/>
-              </a:spcAft>
-              <a:buSzPct val="100000"/>
-              <a:buChar char="•"/>
-            </a:pPr>
-            <a:r>
-              <a:rPr lang="en-US" sz="1150" dirty="0">
-                <a:solidFill>
-                  <a:srgbClr val="3F3138"/>
-                </a:solidFill>
-                <a:latin typeface="Calibri" pitchFamily="34" charset="0"/>
-                <a:ea typeface="Calibri" pitchFamily="34" charset="-122"/>
-                <a:cs typeface="Calibri" pitchFamily="34" charset="-120"/>
-              </a:rPr>
-              <a:t>High summer evaporation and a long dry winter: irrigation carries the whole season.</a:t>
-            </a:r>
-            <a:endParaRPr lang="en-US" sz="1150" dirty="0"/>
-          </a:p>
-          <a:p>
-            <a:pPr algn="l" marL="342900" indent="-342900">
-              <a:lnSpc>
-                <a:spcPct val="116000"/>
-              </a:lnSpc>
-              <a:spcAft>
-                <a:spcPts val="700"/>
-              </a:spcAft>
-              <a:buSzPct val="100000"/>
-              <a:buChar char="•"/>
-            </a:pPr>
-            <a:r>
-              <a:rPr lang="en-US" sz="1150" dirty="0">
-                <a:solidFill>
-                  <a:srgbClr val="3F3138"/>
-                </a:solidFill>
-                <a:latin typeface="Calibri" pitchFamily="34" charset="0"/>
-                <a:ea typeface="Calibri" pitchFamily="34" charset="-122"/>
-                <a:cs typeface="Calibri" pitchFamily="34" charset="-120"/>
-              </a:rPr>
-              <a:t>Orchards planted for twenty years or more — planting is exactly when the retainer goes in.</a:t>
-            </a:r>
-            <a:endParaRPr lang="en-US" sz="1150" dirty="0"/>
-          </a:p>
-        </p:txBody>
-      </p:sp>
-      <p:sp>
-        <p:nvSpPr>
-          <p:cNvPr id="14" name="Shape 10"/>
-          <p:cNvSpPr/>
-          <p:nvPr/>
-        </p:nvSpPr>
-        <p:spPr>
-          <a:xfrm>
-            <a:off x="8124749" y="1783080"/>
-            <a:ext cx="3472586" cy="4069080"/>
-          </a:xfrm>
-          <a:prstGeom prst="roundRect">
-            <a:avLst>
-              <a:gd name="adj" fmla="val 2633"/>
-            </a:avLst>
-          </a:prstGeom>
-          <a:solidFill>
-            <a:srgbClr val="F5EFF1"/>
-          </a:solidFill>
-          <a:ln w="9525">
-            <a:solidFill>
-              <a:srgbClr val="E5D9DE"/>
-            </a:solidFill>
-            <a:prstDash val="solid"/>
-          </a:ln>
-        </p:spPr>
-      </p:sp>
-      <p:pic>
-        <p:nvPicPr>
-          <p:cNvPr id="15" name="Image 2" descr="preencoded.png">    </p:cNvPr>
-          <p:cNvPicPr>
-            <a:picLocks noChangeAspect="1"/>
-          </p:cNvPicPr>
-          <p:nvPr/>
-        </p:nvPicPr>
-        <p:blipFill>
-          <a:blip r:embed="rId3"/>
-          <a:stretch>
-            <a:fillRect/>
-          </a:stretch>
-        </p:blipFill>
-        <p:spPr>
-          <a:xfrm>
-            <a:off x="8124749" y="1783080"/>
-            <a:ext cx="3472586" cy="1691640"/>
-          </a:xfrm>
-          <a:prstGeom prst="rect">
-            <a:avLst/>
-          </a:prstGeom>
-        </p:spPr>
-      </p:pic>
-      <p:sp>
-        <p:nvSpPr>
-          <p:cNvPr id="16" name="Text 11"/>
-          <p:cNvSpPr txBox="1"/>
-          <p:nvPr/>
-        </p:nvSpPr>
-        <p:spPr>
-          <a:xfrm>
-            <a:off x="8325917" y="3639312"/>
-            <a:ext cx="3070250" cy="384048"/>
-          </a:xfrm>
-          <a:prstGeom prst="rect">
-            <a:avLst/>
-          </a:prstGeom>
-          <a:noFill/>
-          <a:ln/>
-        </p:spPr>
-        <p:txBody>
-          <a:bodyPr wrap="square" lIns="0" tIns="0" rIns="0" bIns="0" rtlCol="0" anchor="ctr"/>
-          <a:lstStyle/>
-          <a:p>
-            <a:pPr algn="l" indent="0" marL="0">
-              <a:buNone/>
-            </a:pPr>
-            <a:r>
-              <a:rPr lang="en-US" sz="1500" b="1" dirty="0">
-                <a:solidFill>
-                  <a:srgbClr val="6B2A44"/>
-                </a:solidFill>
-                <a:latin typeface="Cambria" pitchFamily="34" charset="0"/>
-                <a:ea typeface="Cambria" pitchFamily="34" charset="-122"/>
-                <a:cs typeface="Cambria" pitchFamily="34" charset="-120"/>
-              </a:rPr>
-              <a:t>KwaZulu-Natal</a:t>
-            </a:r>
-            <a:endParaRPr lang="en-US" sz="1500" dirty="0"/>
-          </a:p>
-        </p:txBody>
-      </p:sp>
-      <p:sp>
-        <p:nvSpPr>
-          <p:cNvPr id="17" name="Text 12"/>
-          <p:cNvSpPr txBox="1"/>
-          <p:nvPr/>
-        </p:nvSpPr>
-        <p:spPr>
-          <a:xfrm>
-            <a:off x="8325917" y="4041648"/>
-            <a:ext cx="3070250" cy="329184"/>
-          </a:xfrm>
-          <a:prstGeom prst="rect">
-            <a:avLst/>
-          </a:prstGeom>
-          <a:noFill/>
-          <a:ln/>
-        </p:spPr>
-        <p:txBody>
-          <a:bodyPr wrap="square" lIns="0" tIns="0" rIns="0" bIns="0" rtlCol="0" anchor="ctr"/>
-          <a:lstStyle/>
-          <a:p>
-            <a:pPr algn="l" indent="0" marL="0">
-              <a:buNone/>
-            </a:pPr>
-            <a:r>
-              <a:rPr lang="en-US" sz="1250" b="1" dirty="0">
-                <a:solidFill>
-                  <a:srgbClr val="8F6D0F"/>
-                </a:solidFill>
-                <a:latin typeface="Calibri" pitchFamily="34" charset="0"/>
-                <a:ea typeface="Calibri" pitchFamily="34" charset="-122"/>
-                <a:cs typeface="Calibri" pitchFamily="34" charset="-120"/>
-              </a:rPr>
-              <a:t>≈ 300,000 ha of cane</a:t>
-            </a:r>
-            <a:endParaRPr lang="en-US" sz="1250" dirty="0"/>
-          </a:p>
-        </p:txBody>
-      </p:sp>
-      <p:sp>
-        <p:nvSpPr>
-          <p:cNvPr id="18" name="Text 13"/>
-          <p:cNvSpPr txBox="1"/>
-          <p:nvPr/>
-        </p:nvSpPr>
-        <p:spPr>
-          <a:xfrm>
-            <a:off x="8325917" y="4407408"/>
-            <a:ext cx="3070250" cy="1280160"/>
-          </a:xfrm>
-          <a:prstGeom prst="rect">
-            <a:avLst/>
-          </a:prstGeom>
-          <a:noFill/>
-          <a:ln/>
-        </p:spPr>
-        <p:txBody>
-          <a:bodyPr wrap="square" lIns="0" tIns="0" rIns="0" bIns="0" rtlCol="0" anchor="t"/>
-          <a:lstStyle/>
-          <a:p>
-            <a:pPr algn="l" marL="342900" indent="-342900">
-              <a:lnSpc>
-                <a:spcPct val="116000"/>
-              </a:lnSpc>
-              <a:spcAft>
-                <a:spcPts val="700"/>
-              </a:spcAft>
-              <a:buSzPct val="100000"/>
-              <a:buChar char="•"/>
-            </a:pPr>
-            <a:r>
-              <a:rPr lang="en-US" sz="1150" dirty="0">
-                <a:solidFill>
-                  <a:srgbClr val="3F3138"/>
-                </a:solidFill>
-                <a:latin typeface="Calibri" pitchFamily="34" charset="0"/>
-                <a:ea typeface="Calibri" pitchFamily="34" charset="-122"/>
-                <a:cs typeface="Calibri" pitchFamily="34" charset="-120"/>
-              </a:rPr>
-              <a:t>A sugar belt from the North Coast to Zululand, carrying most of a national crop of roughly 18 million tonnes.</a:t>
-            </a:r>
-            <a:endParaRPr lang="en-US" sz="1150" dirty="0"/>
-          </a:p>
-          <a:p>
-            <a:pPr algn="l" marL="342900" indent="-342900">
-              <a:lnSpc>
-                <a:spcPct val="116000"/>
-              </a:lnSpc>
-              <a:spcAft>
-                <a:spcPts val="700"/>
-              </a:spcAft>
-              <a:buSzPct val="100000"/>
-              <a:buChar char="•"/>
-            </a:pPr>
-            <a:r>
-              <a:rPr lang="en-US" sz="1150" dirty="0">
-                <a:solidFill>
-                  <a:srgbClr val="3F3138"/>
-                </a:solidFill>
-                <a:latin typeface="Calibri" pitchFamily="34" charset="0"/>
-                <a:ea typeface="Calibri" pitchFamily="34" charset="-122"/>
-                <a:cs typeface="Calibri" pitchFamily="34" charset="-120"/>
-              </a:rPr>
-              <a:t>Largely rain-fed: the gain is in holding the rain that falls, not in trimming a dose.</a:t>
-            </a:r>
-            <a:endParaRPr lang="en-US" sz="1150" dirty="0"/>
-          </a:p>
-          <a:p>
-            <a:pPr algn="l" marL="342900" indent="-342900">
-              <a:lnSpc>
-                <a:spcPct val="116000"/>
-              </a:lnSpc>
-              <a:spcAft>
-                <a:spcPts val="700"/>
-              </a:spcAft>
-              <a:buSzPct val="100000"/>
-              <a:buChar char="•"/>
-            </a:pPr>
-            <a:r>
-              <a:rPr lang="en-US" sz="1150" dirty="0">
-                <a:solidFill>
-                  <a:srgbClr val="3F3138"/>
-                </a:solidFill>
-                <a:latin typeface="Calibri" pitchFamily="34" charset="0"/>
-                <a:ea typeface="Calibri" pitchFamily="34" charset="-122"/>
-                <a:cs typeface="Calibri" pitchFamily="34" charset="-120"/>
-              </a:rPr>
-              <a:t>Around twenty thousand growers organised around mills — one route to a coordinated trial.</a:t>
-            </a:r>
-            <a:endParaRPr lang="en-US" sz="1150" dirty="0"/>
-          </a:p>
-        </p:txBody>
-      </p:sp>
-      <p:sp>
-        <p:nvSpPr>
-          <p:cNvPr id="19" name="Text 14"/>
           <p:cNvSpPr txBox="1"/>
           <p:nvPr/>
         </p:nvSpPr>
@@ -6370,7 +6202,7 @@
       </p:sp>
       <p:sp>
         <p:nvSpPr>
-          <p:cNvPr id="20" name="Text 15"/>
+          <p:cNvPr id="9" name="Text 6"/>
           <p:cNvSpPr txBox="1"/>
           <p:nvPr/>
         </p:nvSpPr>
@@ -6474,7 +6306,7 @@
                 <a:ea typeface="Calibri" pitchFamily="34" charset="-122"/>
                 <a:cs typeface="Calibri" pitchFamily="34" charset="-120"/>
               </a:rPr>
-              <a:t>HOW WE WORK</a:t>
+              <a:t>THREE PRIORITY AREAS</a:t>
             </a:r>
             <a:endParaRPr lang="en-US" sz="1150" dirty="0"/>
           </a:p>
@@ -6513,7 +6345,7 @@
                 <a:ea typeface="Cambria" pitchFamily="34" charset="-122"/>
                 <a:cs typeface="Cambria" pitchFamily="34" charset="-120"/>
               </a:rPr>
-              <a:t>A staged rollout, measured at every step</a:t>
+              <a:t>Where to run the first trials</a:t>
             </a:r>
             <a:endParaRPr lang="en-US" sz="3000" dirty="0"/>
           </a:p>
@@ -6527,12 +6359,12 @@
         </p:nvSpPr>
         <p:spPr>
           <a:xfrm>
-            <a:off x="594360" y="1874520"/>
-            <a:ext cx="2545004" cy="2834640"/>
+            <a:off x="594360" y="1783080"/>
+            <a:ext cx="3472586" cy="4069080"/>
           </a:xfrm>
           <a:prstGeom prst="roundRect">
             <a:avLst>
-              <a:gd name="adj" fmla="val 3593"/>
+              <a:gd name="adj" fmla="val 2633"/>
             </a:avLst>
           </a:prstGeom>
           <a:solidFill>
@@ -6546,36 +6378,40 @@
           </a:ln>
         </p:spPr>
       </p:sp>
-      <p:sp>
-        <p:nvSpPr>
-          <p:cNvPr id="5" name="Shape 3"/>
-          <p:cNvSpPr/>
-          <p:nvPr/>
-        </p:nvSpPr>
-        <p:spPr>
-          <a:xfrm>
-            <a:off x="822960" y="2103120"/>
-            <a:ext cx="566928" cy="566928"/>
-          </a:xfrm>
-          <a:prstGeom prst="ellipse">
-            <a:avLst/>
-          </a:prstGeom>
-          <a:solidFill>
-            <a:srgbClr val="6B2A44"/>
-          </a:solidFill>
-          <a:ln/>
-        </p:spPr>
-      </p:sp>
-      <p:sp>
-        <p:nvSpPr>
-          <p:cNvPr id="6" name="Text 4"/>
-          <p:cNvSpPr txBox="1"/>
-          <p:nvPr/>
-        </p:nvSpPr>
-        <p:spPr>
-          <a:xfrm>
-            <a:off x="822960" y="2103120"/>
-            <a:ext cx="566928" cy="566928"/>
+      <p:pic>
+        <p:nvPicPr>
+          <p:cNvPr id="5" name="Image 0" descr="preencoded.png">    </p:cNvPr>
+          <p:cNvPicPr>
+            <a:picLocks noChangeAspect="1"/>
+          </p:cNvPicPr>
+          <p:nvPr/>
+        </p:nvPicPr>
+        <p:blipFill>
+          <a:blip r:embed="rId1"/>
+          <a:stretch>
+            <a:fillRect/>
+          </a:stretch>
+        </p:blipFill>
+        <p:spPr>
+          <a:xfrm>
+            <a:off x="594360" y="1783080"/>
+            <a:ext cx="3472586" cy="1691640"/>
+          </a:xfrm>
+          <a:prstGeom prst="rect">
+            <a:avLst/>
+          </a:prstGeom>
+        </p:spPr>
+      </p:pic>
+      <p:sp>
+        <p:nvSpPr>
+          <p:cNvPr id="6" name="Text 3"/>
+          <p:cNvSpPr txBox="1"/>
+          <p:nvPr/>
+        </p:nvSpPr>
+        <p:spPr>
+          <a:xfrm>
+            <a:off x="795528" y="3639312"/>
+            <a:ext cx="3070250" cy="384048"/>
           </a:xfrm>
           <a:prstGeom prst="rect">
             <a:avLst/>
@@ -6587,34 +6423,34 @@
           <a:bodyPr wrap="square" lIns="0" tIns="0" rIns="0" bIns="0" rtlCol="0" anchor="ctr"/>
           <a:lstStyle/>
           <a:p>
-            <a:pPr algn="ctr" indent="0" marL="0">
-              <a:buNone/>
-            </a:pPr>
-            <a:r>
-              <a:rPr lang="en-US" sz="1600" b="1" dirty="0">
-                <a:solidFill>
-                  <a:srgbClr val="FFFFFF"/>
+            <a:pPr algn="l" indent="0" marL="0">
+              <a:buNone/>
+            </a:pPr>
+            <a:r>
+              <a:rPr lang="en-US" sz="1500" b="1" dirty="0">
+                <a:solidFill>
+                  <a:srgbClr val="6B2A44"/>
                 </a:solidFill>
                 <a:latin typeface="Cambria" pitchFamily="34" charset="0"/>
                 <a:ea typeface="Cambria" pitchFamily="34" charset="-122"/>
                 <a:cs typeface="Cambria" pitchFamily="34" charset="-120"/>
               </a:rPr>
-              <a:t>1</a:t>
-            </a:r>
-            <a:endParaRPr lang="en-US" sz="1600" dirty="0"/>
-          </a:p>
-        </p:txBody>
-      </p:sp>
-      <p:sp>
-        <p:nvSpPr>
-          <p:cNvPr id="7" name="Text 5"/>
-          <p:cNvSpPr txBox="1"/>
-          <p:nvPr/>
-        </p:nvSpPr>
-        <p:spPr>
-          <a:xfrm>
-            <a:off x="822960" y="2788920"/>
-            <a:ext cx="2087804" cy="457200"/>
+              <a:t>Western Cape</a:t>
+            </a:r>
+            <a:endParaRPr lang="en-US" sz="1500" dirty="0"/>
+          </a:p>
+        </p:txBody>
+      </p:sp>
+      <p:sp>
+        <p:nvSpPr>
+          <p:cNvPr id="7" name="Text 4"/>
+          <p:cNvSpPr txBox="1"/>
+          <p:nvPr/>
+        </p:nvSpPr>
+        <p:spPr>
+          <a:xfrm>
+            <a:off x="795528" y="4041648"/>
+            <a:ext cx="3070250" cy="329184"/>
           </a:xfrm>
           <a:prstGeom prst="rect">
             <a:avLst/>
@@ -6630,30 +6466,30 @@
               <a:buNone/>
             </a:pPr>
             <a:r>
-              <a:rPr lang="en-US" sz="1400" b="1" dirty="0">
-                <a:solidFill>
-                  <a:srgbClr val="6B2A44"/>
-                </a:solidFill>
-                <a:latin typeface="Cambria" pitchFamily="34" charset="0"/>
-                <a:ea typeface="Cambria" pitchFamily="34" charset="-122"/>
-                <a:cs typeface="Cambria" pitchFamily="34" charset="-120"/>
-              </a:rPr>
-              <a:t>Assessment</a:t>
-            </a:r>
-            <a:endParaRPr lang="en-US" sz="1400" dirty="0"/>
-          </a:p>
-        </p:txBody>
-      </p:sp>
-      <p:sp>
-        <p:nvSpPr>
-          <p:cNvPr id="8" name="Text 6"/>
-          <p:cNvSpPr txBox="1"/>
-          <p:nvPr/>
-        </p:nvSpPr>
-        <p:spPr>
-          <a:xfrm>
-            <a:off x="822960" y="3291840"/>
-            <a:ext cx="2087804" cy="1234440"/>
+              <a:rPr lang="en-US" sz="1250" b="1" dirty="0">
+                <a:solidFill>
+                  <a:srgbClr val="8F6D0F"/>
+                </a:solidFill>
+                <a:latin typeface="Calibri" pitchFamily="34" charset="0"/>
+                <a:ea typeface="Calibri" pitchFamily="34" charset="-122"/>
+                <a:cs typeface="Calibri" pitchFamily="34" charset="-120"/>
+              </a:rPr>
+              <a:t>≈ 90,000 ha of vineyard</a:t>
+            </a:r>
+            <a:endParaRPr lang="en-US" sz="1250" dirty="0"/>
+          </a:p>
+        </p:txBody>
+      </p:sp>
+      <p:sp>
+        <p:nvSpPr>
+          <p:cNvPr id="8" name="Text 5"/>
+          <p:cNvSpPr txBox="1"/>
+          <p:nvPr/>
+        </p:nvSpPr>
+        <p:spPr>
+          <a:xfrm>
+            <a:off x="795528" y="4407408"/>
+            <a:ext cx="3070250" cy="1280160"/>
           </a:xfrm>
           <a:prstGeom prst="rect">
             <a:avLst/>
@@ -6665,14 +6501,18 @@
           <a:bodyPr wrap="square" lIns="0" tIns="0" rIns="0" bIns="0" rtlCol="0" anchor="t"/>
           <a:lstStyle/>
           <a:p>
-            <a:pPr algn="l" indent="0" marL="0">
+            <a:pPr algn="l" marL="342900" indent="-342900">
               <a:lnSpc>
-                <a:spcPct val="120000"/>
+                <a:spcPct val="116000"/>
               </a:lnSpc>
-              <a:buNone/>
-            </a:pPr>
-            <a:r>
-              <a:rPr lang="en-US" sz="1200" dirty="0">
+              <a:spcAft>
+                <a:spcPts val="700"/>
+              </a:spcAft>
+              <a:buSzPct val="100000"/>
+              <a:buChar char="•"/>
+            </a:pPr>
+            <a:r>
+              <a:rPr lang="en-US" sz="1150" dirty="0">
                 <a:solidFill>
                   <a:srgbClr val="3F3138"/>
                 </a:solidFill>
@@ -6680,26 +6520,74 @@
                 <a:ea typeface="Calibri" pitchFamily="34" charset="-122"/>
                 <a:cs typeface="Calibri" pitchFamily="34" charset="-120"/>
               </a:rPr>
-              <a:t>Soil, irrigation method and crop are reviewed. No commitment at this stage.</a:t>
-            </a:r>
-            <a:endParaRPr lang="en-US" sz="1200" dirty="0"/>
-          </a:p>
-        </p:txBody>
-      </p:sp>
-      <p:sp>
-        <p:nvSpPr>
-          <p:cNvPr id="9" name="Shape 7"/>
+              <a:t>Nearly all of the national vineyard, plus the deciduous fruit of the Breede and Olifants valleys.</a:t>
+            </a:r>
+            <a:endParaRPr lang="en-US" sz="1150" dirty="0"/>
+          </a:p>
+          <a:p>
+            <a:pPr algn="l" marL="342900" indent="-342900">
+              <a:lnSpc>
+                <a:spcPct val="116000"/>
+              </a:lnSpc>
+              <a:spcAft>
+                <a:spcPts val="700"/>
+              </a:spcAft>
+              <a:buSzPct val="100000"/>
+              <a:buChar char="•"/>
+            </a:pPr>
+            <a:r>
+              <a:rPr lang="en-US" sz="1150" dirty="0">
+                <a:solidFill>
+                  <a:srgbClr val="3F3138"/>
+                </a:solidFill>
+                <a:latin typeface="Calibri" pitchFamily="34" charset="0"/>
+                <a:ea typeface="Calibri" pitchFamily="34" charset="-122"/>
+                <a:cs typeface="Calibri" pitchFamily="34" charset="-120"/>
+              </a:rPr>
+              <a:t>Winter rainfall of 250 to 400 mm inland, and the 2015-2018 quota cuts are a live memory.</a:t>
+            </a:r>
+            <a:endParaRPr lang="en-US" sz="1150" dirty="0"/>
+          </a:p>
+          <a:p>
+            <a:pPr algn="l" marL="342900" indent="-342900">
+              <a:lnSpc>
+                <a:spcPct val="116000"/>
+              </a:lnSpc>
+              <a:spcAft>
+                <a:spcPts val="700"/>
+              </a:spcAft>
+              <a:buSzPct val="100000"/>
+              <a:buChar char="•"/>
+            </a:pPr>
+            <a:r>
+              <a:rPr lang="en-US" sz="1150" dirty="0">
+                <a:solidFill>
+                  <a:srgbClr val="3F3138"/>
+                </a:solidFill>
+                <a:latin typeface="Calibri" pitchFamily="34" charset="0"/>
+                <a:ea typeface="Calibri" pitchFamily="34" charset="-122"/>
+                <a:cs typeface="Calibri" pitchFamily="34" charset="-120"/>
+              </a:rPr>
+              <a:t>Export blocks already on drip or micro-sprinkler, with buyers asking for organic certification.</a:t>
+            </a:r>
+            <a:endParaRPr lang="en-US" sz="1150" dirty="0"/>
+          </a:p>
+        </p:txBody>
+      </p:sp>
+      <p:sp>
+        <p:nvSpPr>
+          <p:cNvPr id="9" name="Shape 6"/>
           <p:cNvSpPr/>
           <p:nvPr/>
         </p:nvSpPr>
         <p:spPr>
           <a:xfrm>
-            <a:off x="3413684" y="1874520"/>
-            <a:ext cx="2545004" cy="2834640"/>
+            <a:off x="4359554" y="1783080"/>
+            <a:ext cx="3472586" cy="4069080"/>
           </a:xfrm>
           <a:prstGeom prst="roundRect">
             <a:avLst>
-              <a:gd name="adj" fmla="val 3593"/>
+              <a:gd name="adj" fmla="val 2633"/>
             </a:avLst>
           </a:prstGeom>
           <a:solidFill>
@@ -6713,36 +6601,40 @@
           </a:ln>
         </p:spPr>
       </p:sp>
-      <p:sp>
-        <p:nvSpPr>
-          <p:cNvPr id="10" name="Shape 8"/>
-          <p:cNvSpPr/>
-          <p:nvPr/>
-        </p:nvSpPr>
-        <p:spPr>
-          <a:xfrm>
-            <a:off x="3642284" y="2103120"/>
-            <a:ext cx="566928" cy="566928"/>
-          </a:xfrm>
-          <a:prstGeom prst="ellipse">
-            <a:avLst/>
-          </a:prstGeom>
-          <a:solidFill>
-            <a:srgbClr val="6B2A44"/>
-          </a:solidFill>
-          <a:ln/>
-        </p:spPr>
-      </p:sp>
-      <p:sp>
-        <p:nvSpPr>
-          <p:cNvPr id="11" name="Text 9"/>
-          <p:cNvSpPr txBox="1"/>
-          <p:nvPr/>
-        </p:nvSpPr>
-        <p:spPr>
-          <a:xfrm>
-            <a:off x="3642284" y="2103120"/>
-            <a:ext cx="566928" cy="566928"/>
+      <p:pic>
+        <p:nvPicPr>
+          <p:cNvPr id="10" name="Image 1" descr="preencoded.png">    </p:cNvPr>
+          <p:cNvPicPr>
+            <a:picLocks noChangeAspect="1"/>
+          </p:cNvPicPr>
+          <p:nvPr/>
+        </p:nvPicPr>
+        <p:blipFill>
+          <a:blip r:embed="rId2"/>
+          <a:stretch>
+            <a:fillRect/>
+          </a:stretch>
+        </p:blipFill>
+        <p:spPr>
+          <a:xfrm>
+            <a:off x="4359554" y="1783080"/>
+            <a:ext cx="3472586" cy="1691640"/>
+          </a:xfrm>
+          <a:prstGeom prst="rect">
+            <a:avLst/>
+          </a:prstGeom>
+        </p:spPr>
+      </p:pic>
+      <p:sp>
+        <p:nvSpPr>
+          <p:cNvPr id="11" name="Text 7"/>
+          <p:cNvSpPr txBox="1"/>
+          <p:nvPr/>
+        </p:nvSpPr>
+        <p:spPr>
+          <a:xfrm>
+            <a:off x="4560722" y="3639312"/>
+            <a:ext cx="3070250" cy="384048"/>
           </a:xfrm>
           <a:prstGeom prst="rect">
             <a:avLst/>
@@ -6754,34 +6646,34 @@
           <a:bodyPr wrap="square" lIns="0" tIns="0" rIns="0" bIns="0" rtlCol="0" anchor="ctr"/>
           <a:lstStyle/>
           <a:p>
-            <a:pPr algn="ctr" indent="0" marL="0">
-              <a:buNone/>
-            </a:pPr>
-            <a:r>
-              <a:rPr lang="en-US" sz="1600" b="1" dirty="0">
-                <a:solidFill>
-                  <a:srgbClr val="FFFFFF"/>
+            <a:pPr algn="l" indent="0" marL="0">
+              <a:buNone/>
+            </a:pPr>
+            <a:r>
+              <a:rPr lang="en-US" sz="1500" b="1" dirty="0">
+                <a:solidFill>
+                  <a:srgbClr val="6B2A44"/>
                 </a:solidFill>
                 <a:latin typeface="Cambria" pitchFamily="34" charset="0"/>
                 <a:ea typeface="Cambria" pitchFamily="34" charset="-122"/>
                 <a:cs typeface="Cambria" pitchFamily="34" charset="-120"/>
               </a:rPr>
-              <a:t>2</a:t>
-            </a:r>
-            <a:endParaRPr lang="en-US" sz="1600" dirty="0"/>
-          </a:p>
-        </p:txBody>
-      </p:sp>
-      <p:sp>
-        <p:nvSpPr>
-          <p:cNvPr id="12" name="Text 10"/>
-          <p:cNvSpPr txBox="1"/>
-          <p:nvPr/>
-        </p:nvSpPr>
-        <p:spPr>
-          <a:xfrm>
-            <a:off x="3642284" y="2788920"/>
-            <a:ext cx="2087804" cy="457200"/>
+              <a:t>Limpopo</a:t>
+            </a:r>
+            <a:endParaRPr lang="en-US" sz="1500" dirty="0"/>
+          </a:p>
+        </p:txBody>
+      </p:sp>
+      <p:sp>
+        <p:nvSpPr>
+          <p:cNvPr id="12" name="Text 8"/>
+          <p:cNvSpPr txBox="1"/>
+          <p:nvPr/>
+        </p:nvSpPr>
+        <p:spPr>
+          <a:xfrm>
+            <a:off x="4560722" y="4041648"/>
+            <a:ext cx="3070250" cy="329184"/>
           </a:xfrm>
           <a:prstGeom prst="rect">
             <a:avLst/>
@@ -6797,30 +6689,30 @@
               <a:buNone/>
             </a:pPr>
             <a:r>
-              <a:rPr lang="en-US" sz="1400" b="1" dirty="0">
-                <a:solidFill>
-                  <a:srgbClr val="6B2A44"/>
-                </a:solidFill>
-                <a:latin typeface="Cambria" pitchFamily="34" charset="0"/>
-                <a:ea typeface="Cambria" pitchFamily="34" charset="-122"/>
-                <a:cs typeface="Cambria" pitchFamily="34" charset="-120"/>
-              </a:rPr>
-              <a:t>Trial block</a:t>
-            </a:r>
-            <a:endParaRPr lang="en-US" sz="1400" dirty="0"/>
-          </a:p>
-        </p:txBody>
-      </p:sp>
-      <p:sp>
-        <p:nvSpPr>
-          <p:cNvPr id="13" name="Text 11"/>
-          <p:cNvSpPr txBox="1"/>
-          <p:nvPr/>
-        </p:nvSpPr>
-        <p:spPr>
-          <a:xfrm>
-            <a:off x="3642284" y="3291840"/>
-            <a:ext cx="2087804" cy="1234440"/>
+              <a:rPr lang="en-US" sz="1250" b="1" dirty="0">
+                <a:solidFill>
+                  <a:srgbClr val="8F6D0F"/>
+                </a:solidFill>
+                <a:latin typeface="Calibri" pitchFamily="34" charset="0"/>
+                <a:ea typeface="Calibri" pitchFamily="34" charset="-122"/>
+                <a:cs typeface="Calibri" pitchFamily="34" charset="-120"/>
+              </a:rPr>
+              <a:t>≈ 450 mm of rain a year</a:t>
+            </a:r>
+            <a:endParaRPr lang="en-US" sz="1250" dirty="0"/>
+          </a:p>
+        </p:txBody>
+      </p:sp>
+      <p:sp>
+        <p:nvSpPr>
+          <p:cNvPr id="13" name="Text 9"/>
+          <p:cNvSpPr txBox="1"/>
+          <p:nvPr/>
+        </p:nvSpPr>
+        <p:spPr>
+          <a:xfrm>
+            <a:off x="4560722" y="4407408"/>
+            <a:ext cx="3070250" cy="1280160"/>
           </a:xfrm>
           <a:prstGeom prst="rect">
             <a:avLst/>
@@ -6832,14 +6724,18 @@
           <a:bodyPr wrap="square" lIns="0" tIns="0" rIns="0" bIns="0" rtlCol="0" anchor="t"/>
           <a:lstStyle/>
           <a:p>
-            <a:pPr algn="l" indent="0" marL="0">
+            <a:pPr algn="l" marL="342900" indent="-342900">
               <a:lnSpc>
-                <a:spcPct val="120000"/>
+                <a:spcPct val="116000"/>
               </a:lnSpc>
-              <a:buNone/>
-            </a:pPr>
-            <a:r>
-              <a:rPr lang="en-US" sz="1200" dirty="0">
+              <a:spcAft>
+                <a:spcPts val="700"/>
+              </a:spcAft>
+              <a:buSzPct val="100000"/>
+              <a:buChar char="•"/>
+            </a:pPr>
+            <a:r>
+              <a:rPr lang="en-US" sz="1150" dirty="0">
                 <a:solidFill>
                   <a:srgbClr val="3F3138"/>
                 </a:solidFill>
@@ -6847,26 +6743,74 @@
                 <a:ea typeface="Calibri" pitchFamily="34" charset="-122"/>
                 <a:cs typeface="Calibri" pitchFamily="34" charset="-120"/>
               </a:rPr>
-              <a:t>One comparative trial block, against a control block managed identically.</a:t>
-            </a:r>
-            <a:endParaRPr lang="en-US" sz="1200" dirty="0"/>
-          </a:p>
-        </p:txBody>
-      </p:sp>
-      <p:sp>
-        <p:nvSpPr>
-          <p:cNvPr id="14" name="Shape 12"/>
+              <a:t>The leading citrus province, with macadamia and avocado on sandy, low-retention soils.</a:t>
+            </a:r>
+            <a:endParaRPr lang="en-US" sz="1150" dirty="0"/>
+          </a:p>
+          <a:p>
+            <a:pPr algn="l" marL="342900" indent="-342900">
+              <a:lnSpc>
+                <a:spcPct val="116000"/>
+              </a:lnSpc>
+              <a:spcAft>
+                <a:spcPts val="700"/>
+              </a:spcAft>
+              <a:buSzPct val="100000"/>
+              <a:buChar char="•"/>
+            </a:pPr>
+            <a:r>
+              <a:rPr lang="en-US" sz="1150" dirty="0">
+                <a:solidFill>
+                  <a:srgbClr val="3F3138"/>
+                </a:solidFill>
+                <a:latin typeface="Calibri" pitchFamily="34" charset="0"/>
+                <a:ea typeface="Calibri" pitchFamily="34" charset="-122"/>
+                <a:cs typeface="Calibri" pitchFamily="34" charset="-120"/>
+              </a:rPr>
+              <a:t>High summer evaporation and a long dry winter: irrigation carries the whole season.</a:t>
+            </a:r>
+            <a:endParaRPr lang="en-US" sz="1150" dirty="0"/>
+          </a:p>
+          <a:p>
+            <a:pPr algn="l" marL="342900" indent="-342900">
+              <a:lnSpc>
+                <a:spcPct val="116000"/>
+              </a:lnSpc>
+              <a:spcAft>
+                <a:spcPts val="700"/>
+              </a:spcAft>
+              <a:buSzPct val="100000"/>
+              <a:buChar char="•"/>
+            </a:pPr>
+            <a:r>
+              <a:rPr lang="en-US" sz="1150" dirty="0">
+                <a:solidFill>
+                  <a:srgbClr val="3F3138"/>
+                </a:solidFill>
+                <a:latin typeface="Calibri" pitchFamily="34" charset="0"/>
+                <a:ea typeface="Calibri" pitchFamily="34" charset="-122"/>
+                <a:cs typeface="Calibri" pitchFamily="34" charset="-120"/>
+              </a:rPr>
+              <a:t>Orchards planted for twenty years or more — planting is exactly when the retainer goes in.</a:t>
+            </a:r>
+            <a:endParaRPr lang="en-US" sz="1150" dirty="0"/>
+          </a:p>
+        </p:txBody>
+      </p:sp>
+      <p:sp>
+        <p:nvSpPr>
+          <p:cNvPr id="14" name="Shape 10"/>
           <p:cNvSpPr/>
           <p:nvPr/>
         </p:nvSpPr>
         <p:spPr>
           <a:xfrm>
-            <a:off x="6233008" y="1874520"/>
-            <a:ext cx="2545004" cy="2834640"/>
+            <a:off x="8124749" y="1783080"/>
+            <a:ext cx="3472586" cy="4069080"/>
           </a:xfrm>
           <a:prstGeom prst="roundRect">
             <a:avLst>
-              <a:gd name="adj" fmla="val 3593"/>
+              <a:gd name="adj" fmla="val 2633"/>
             </a:avLst>
           </a:prstGeom>
           <a:solidFill>
@@ -6880,36 +6824,40 @@
           </a:ln>
         </p:spPr>
       </p:sp>
-      <p:sp>
-        <p:nvSpPr>
-          <p:cNvPr id="15" name="Shape 13"/>
-          <p:cNvSpPr/>
-          <p:nvPr/>
-        </p:nvSpPr>
-        <p:spPr>
-          <a:xfrm>
-            <a:off x="6461608" y="2103120"/>
-            <a:ext cx="566928" cy="566928"/>
-          </a:xfrm>
-          <a:prstGeom prst="ellipse">
-            <a:avLst/>
-          </a:prstGeom>
-          <a:solidFill>
-            <a:srgbClr val="6B2A44"/>
-          </a:solidFill>
-          <a:ln/>
-        </p:spPr>
-      </p:sp>
-      <p:sp>
-        <p:nvSpPr>
-          <p:cNvPr id="16" name="Text 14"/>
-          <p:cNvSpPr txBox="1"/>
-          <p:nvPr/>
-        </p:nvSpPr>
-        <p:spPr>
-          <a:xfrm>
-            <a:off x="6461608" y="2103120"/>
-            <a:ext cx="566928" cy="566928"/>
+      <p:pic>
+        <p:nvPicPr>
+          <p:cNvPr id="15" name="Image 2" descr="preencoded.png">    </p:cNvPr>
+          <p:cNvPicPr>
+            <a:picLocks noChangeAspect="1"/>
+          </p:cNvPicPr>
+          <p:nvPr/>
+        </p:nvPicPr>
+        <p:blipFill>
+          <a:blip r:embed="rId3"/>
+          <a:stretch>
+            <a:fillRect/>
+          </a:stretch>
+        </p:blipFill>
+        <p:spPr>
+          <a:xfrm>
+            <a:off x="8124749" y="1783080"/>
+            <a:ext cx="3472586" cy="1691640"/>
+          </a:xfrm>
+          <a:prstGeom prst="rect">
+            <a:avLst/>
+          </a:prstGeom>
+        </p:spPr>
+      </p:pic>
+      <p:sp>
+        <p:nvSpPr>
+          <p:cNvPr id="16" name="Text 11"/>
+          <p:cNvSpPr txBox="1"/>
+          <p:nvPr/>
+        </p:nvSpPr>
+        <p:spPr>
+          <a:xfrm>
+            <a:off x="8325917" y="3639312"/>
+            <a:ext cx="3070250" cy="384048"/>
           </a:xfrm>
           <a:prstGeom prst="rect">
             <a:avLst/>
@@ -6921,34 +6869,34 @@
           <a:bodyPr wrap="square" lIns="0" tIns="0" rIns="0" bIns="0" rtlCol="0" anchor="ctr"/>
           <a:lstStyle/>
           <a:p>
-            <a:pPr algn="ctr" indent="0" marL="0">
-              <a:buNone/>
-            </a:pPr>
-            <a:r>
-              <a:rPr lang="en-US" sz="1600" b="1" dirty="0">
-                <a:solidFill>
-                  <a:srgbClr val="FFFFFF"/>
+            <a:pPr algn="l" indent="0" marL="0">
+              <a:buNone/>
+            </a:pPr>
+            <a:r>
+              <a:rPr lang="en-US" sz="1500" b="1" dirty="0">
+                <a:solidFill>
+                  <a:srgbClr val="6B2A44"/>
                 </a:solidFill>
                 <a:latin typeface="Cambria" pitchFamily="34" charset="0"/>
                 <a:ea typeface="Cambria" pitchFamily="34" charset="-122"/>
                 <a:cs typeface="Cambria" pitchFamily="34" charset="-120"/>
               </a:rPr>
-              <a:t>3</a:t>
-            </a:r>
-            <a:endParaRPr lang="en-US" sz="1600" dirty="0"/>
-          </a:p>
-        </p:txBody>
-      </p:sp>
-      <p:sp>
-        <p:nvSpPr>
-          <p:cNvPr id="17" name="Text 15"/>
-          <p:cNvSpPr txBox="1"/>
-          <p:nvPr/>
-        </p:nvSpPr>
-        <p:spPr>
-          <a:xfrm>
-            <a:off x="6461608" y="2788920"/>
-            <a:ext cx="2087804" cy="457200"/>
+              <a:t>KwaZulu-Natal</a:t>
+            </a:r>
+            <a:endParaRPr lang="en-US" sz="1500" dirty="0"/>
+          </a:p>
+        </p:txBody>
+      </p:sp>
+      <p:sp>
+        <p:nvSpPr>
+          <p:cNvPr id="17" name="Text 12"/>
+          <p:cNvSpPr txBox="1"/>
+          <p:nvPr/>
+        </p:nvSpPr>
+        <p:spPr>
+          <a:xfrm>
+            <a:off x="8325917" y="4041648"/>
+            <a:ext cx="3070250" cy="329184"/>
           </a:xfrm>
           <a:prstGeom prst="rect">
             <a:avLst/>
@@ -6964,30 +6912,30 @@
               <a:buNone/>
             </a:pPr>
             <a:r>
-              <a:rPr lang="en-US" sz="1400" b="1" dirty="0">
-                <a:solidFill>
-                  <a:srgbClr val="6B2A44"/>
-                </a:solidFill>
-                <a:latin typeface="Cambria" pitchFamily="34" charset="0"/>
-                <a:ea typeface="Cambria" pitchFamily="34" charset="-122"/>
-                <a:cs typeface="Cambria" pitchFamily="34" charset="-120"/>
-              </a:rPr>
-              <a:t>Measurement</a:t>
-            </a:r>
-            <a:endParaRPr lang="en-US" sz="1400" dirty="0"/>
-          </a:p>
-        </p:txBody>
-      </p:sp>
-      <p:sp>
-        <p:nvSpPr>
-          <p:cNvPr id="18" name="Text 16"/>
-          <p:cNvSpPr txBox="1"/>
-          <p:nvPr/>
-        </p:nvSpPr>
-        <p:spPr>
-          <a:xfrm>
-            <a:off x="6461608" y="3291840"/>
-            <a:ext cx="2087804" cy="1234440"/>
+              <a:rPr lang="en-US" sz="1250" b="1" dirty="0">
+                <a:solidFill>
+                  <a:srgbClr val="8F6D0F"/>
+                </a:solidFill>
+                <a:latin typeface="Calibri" pitchFamily="34" charset="0"/>
+                <a:ea typeface="Calibri" pitchFamily="34" charset="-122"/>
+                <a:cs typeface="Calibri" pitchFamily="34" charset="-120"/>
+              </a:rPr>
+              <a:t>≈ 300,000 ha of cane</a:t>
+            </a:r>
+            <a:endParaRPr lang="en-US" sz="1250" dirty="0"/>
+          </a:p>
+        </p:txBody>
+      </p:sp>
+      <p:sp>
+        <p:nvSpPr>
+          <p:cNvPr id="18" name="Text 13"/>
+          <p:cNvSpPr txBox="1"/>
+          <p:nvPr/>
+        </p:nvSpPr>
+        <p:spPr>
+          <a:xfrm>
+            <a:off x="8325917" y="4407408"/>
+            <a:ext cx="3070250" cy="1280160"/>
           </a:xfrm>
           <a:prstGeom prst="rect">
             <a:avLst/>
@@ -6999,14 +6947,18 @@
           <a:bodyPr wrap="square" lIns="0" tIns="0" rIns="0" bIns="0" rtlCol="0" anchor="t"/>
           <a:lstStyle/>
           <a:p>
-            <a:pPr algn="l" indent="0" marL="0">
+            <a:pPr algn="l" marL="342900" indent="-342900">
               <a:lnSpc>
-                <a:spcPct val="120000"/>
+                <a:spcPct val="116000"/>
               </a:lnSpc>
-              <a:buNone/>
-            </a:pPr>
-            <a:r>
-              <a:rPr lang="en-US" sz="1200" dirty="0">
+              <a:spcAft>
+                <a:spcPts val="700"/>
+              </a:spcAft>
+              <a:buSzPct val="100000"/>
+              <a:buChar char="•"/>
+            </a:pPr>
+            <a:r>
+              <a:rPr lang="en-US" sz="1150" dirty="0">
                 <a:solidFill>
                   <a:srgbClr val="3F3138"/>
                 </a:solidFill>
@@ -7014,166 +6966,23 @@
                 <a:ea typeface="Calibri" pitchFamily="34" charset="-122"/>
                 <a:cs typeface="Calibri" pitchFamily="34" charset="-120"/>
               </a:rPr>
-              <a:t>Water use and yield recorded over a full growing season.</a:t>
-            </a:r>
-            <a:endParaRPr lang="en-US" sz="1200" dirty="0"/>
-          </a:p>
-        </p:txBody>
-      </p:sp>
-      <p:sp>
-        <p:nvSpPr>
-          <p:cNvPr id="19" name="Shape 17"/>
-          <p:cNvSpPr/>
-          <p:nvPr/>
-        </p:nvSpPr>
-        <p:spPr>
-          <a:xfrm>
-            <a:off x="9052331" y="1874520"/>
-            <a:ext cx="2545004" cy="2834640"/>
-          </a:xfrm>
-          <a:prstGeom prst="roundRect">
-            <a:avLst>
-              <a:gd name="adj" fmla="val 3593"/>
-            </a:avLst>
-          </a:prstGeom>
-          <a:solidFill>
-            <a:srgbClr val="F5EFF1"/>
-          </a:solidFill>
-          <a:ln w="9525">
-            <a:solidFill>
-              <a:srgbClr val="E5D9DE"/>
-            </a:solidFill>
-            <a:prstDash val="solid"/>
-          </a:ln>
-        </p:spPr>
-      </p:sp>
-      <p:sp>
-        <p:nvSpPr>
-          <p:cNvPr id="20" name="Shape 18"/>
-          <p:cNvSpPr/>
-          <p:nvPr/>
-        </p:nvSpPr>
-        <p:spPr>
-          <a:xfrm>
-            <a:off x="9280931" y="2103120"/>
-            <a:ext cx="566928" cy="566928"/>
-          </a:xfrm>
-          <a:prstGeom prst="ellipse">
-            <a:avLst/>
-          </a:prstGeom>
-          <a:solidFill>
-            <a:srgbClr val="6B2A44"/>
-          </a:solidFill>
-          <a:ln/>
-        </p:spPr>
-      </p:sp>
-      <p:sp>
-        <p:nvSpPr>
-          <p:cNvPr id="21" name="Text 19"/>
-          <p:cNvSpPr txBox="1"/>
-          <p:nvPr/>
-        </p:nvSpPr>
-        <p:spPr>
-          <a:xfrm>
-            <a:off x="9280931" y="2103120"/>
-            <a:ext cx="566928" cy="566928"/>
-          </a:xfrm>
-          <a:prstGeom prst="rect">
-            <a:avLst/>
-          </a:prstGeom>
-          <a:noFill/>
-          <a:ln/>
-        </p:spPr>
-        <p:txBody>
-          <a:bodyPr wrap="square" lIns="0" tIns="0" rIns="0" bIns="0" rtlCol="0" anchor="ctr"/>
-          <a:lstStyle/>
-          <a:p>
-            <a:pPr algn="ctr" indent="0" marL="0">
-              <a:buNone/>
-            </a:pPr>
-            <a:r>
-              <a:rPr lang="en-US" sz="1600" b="1" dirty="0">
-                <a:solidFill>
-                  <a:srgbClr val="FFFFFF"/>
-                </a:solidFill>
-                <a:latin typeface="Cambria" pitchFamily="34" charset="0"/>
-                <a:ea typeface="Cambria" pitchFamily="34" charset="-122"/>
-                <a:cs typeface="Cambria" pitchFamily="34" charset="-120"/>
-              </a:rPr>
-              <a:t>4</a:t>
-            </a:r>
-            <a:endParaRPr lang="en-US" sz="1600" dirty="0"/>
-          </a:p>
-        </p:txBody>
-      </p:sp>
-      <p:sp>
-        <p:nvSpPr>
-          <p:cNvPr id="22" name="Text 20"/>
-          <p:cNvSpPr txBox="1"/>
-          <p:nvPr/>
-        </p:nvSpPr>
-        <p:spPr>
-          <a:xfrm>
-            <a:off x="9280931" y="2788920"/>
-            <a:ext cx="2087804" cy="457200"/>
-          </a:xfrm>
-          <a:prstGeom prst="rect">
-            <a:avLst/>
-          </a:prstGeom>
-          <a:noFill/>
-          <a:ln/>
-        </p:spPr>
-        <p:txBody>
-          <a:bodyPr wrap="square" lIns="0" tIns="0" rIns="0" bIns="0" rtlCol="0" anchor="ctr"/>
-          <a:lstStyle/>
-          <a:p>
-            <a:pPr algn="l" indent="0" marL="0">
-              <a:buNone/>
-            </a:pPr>
-            <a:r>
-              <a:rPr lang="en-US" sz="1400" b="1" dirty="0">
-                <a:solidFill>
-                  <a:srgbClr val="6B2A44"/>
-                </a:solidFill>
-                <a:latin typeface="Cambria" pitchFamily="34" charset="0"/>
-                <a:ea typeface="Cambria" pitchFamily="34" charset="-122"/>
-                <a:cs typeface="Cambria" pitchFamily="34" charset="-120"/>
-              </a:rPr>
-              <a:t>Extension</a:t>
-            </a:r>
-            <a:endParaRPr lang="en-US" sz="1400" dirty="0"/>
-          </a:p>
-        </p:txBody>
-      </p:sp>
-      <p:sp>
-        <p:nvSpPr>
-          <p:cNvPr id="23" name="Text 21"/>
-          <p:cNvSpPr txBox="1"/>
-          <p:nvPr/>
-        </p:nvSpPr>
-        <p:spPr>
-          <a:xfrm>
-            <a:off x="9280931" y="3291840"/>
-            <a:ext cx="2087804" cy="1234440"/>
-          </a:xfrm>
-          <a:prstGeom prst="rect">
-            <a:avLst/>
-          </a:prstGeom>
-          <a:noFill/>
-          <a:ln/>
-        </p:spPr>
-        <p:txBody>
-          <a:bodyPr wrap="square" lIns="0" tIns="0" rIns="0" bIns="0" rtlCol="0" anchor="t"/>
-          <a:lstStyle/>
-          <a:p>
-            <a:pPr algn="l" indent="0" marL="0">
+              <a:t>A sugar belt from the North Coast to Zululand, carrying most of a national crop of roughly 18 million tonnes.</a:t>
+            </a:r>
+            <a:endParaRPr lang="en-US" sz="1150" dirty="0"/>
+          </a:p>
+          <a:p>
+            <a:pPr algn="l" marL="342900" indent="-342900">
               <a:lnSpc>
-                <a:spcPct val="120000"/>
+                <a:spcPct val="116000"/>
               </a:lnSpc>
-              <a:buNone/>
-            </a:pPr>
-            <a:r>
-              <a:rPr lang="en-US" sz="1200" dirty="0">
+              <a:spcAft>
+                <a:spcPts val="700"/>
+              </a:spcAft>
+              <a:buSzPct val="100000"/>
+              <a:buChar char="•"/>
+            </a:pPr>
+            <a:r>
+              <a:rPr lang="en-US" sz="1150" dirty="0">
                 <a:solidFill>
                   <a:srgbClr val="3F3138"/>
                 </a:solidFill>
@@ -7181,57 +6990,39 @@
                 <a:ea typeface="Calibri" pitchFamily="34" charset="-122"/>
                 <a:cs typeface="Calibri" pitchFamily="34" charset="-120"/>
               </a:rPr>
-              <a:t>Gradual rollout to the remaining blocks, on the basis of what was measured.</a:t>
-            </a:r>
-            <a:endParaRPr lang="en-US" sz="1200" dirty="0"/>
-          </a:p>
-        </p:txBody>
-      </p:sp>
-      <p:sp>
-        <p:nvSpPr>
-          <p:cNvPr id="24" name="Text 22"/>
-          <p:cNvSpPr txBox="1"/>
-          <p:nvPr/>
-        </p:nvSpPr>
-        <p:spPr>
-          <a:xfrm>
-            <a:off x="594360" y="4983480"/>
-            <a:ext cx="11002975" cy="822960"/>
-          </a:xfrm>
-          <a:prstGeom prst="rect">
-            <a:avLst/>
-          </a:prstGeom>
-          <a:noFill/>
-          <a:ln/>
-        </p:spPr>
-        <p:txBody>
-          <a:bodyPr wrap="square" lIns="0" tIns="0" rIns="0" bIns="0" rtlCol="0" anchor="t"/>
-          <a:lstStyle/>
-          <a:p>
-            <a:pPr algn="l" indent="0" marL="0">
+              <a:t>Largely rain-fed: the gain is in holding the rain that falls, not in trimming a dose.</a:t>
+            </a:r>
+            <a:endParaRPr lang="en-US" sz="1150" dirty="0"/>
+          </a:p>
+          <a:p>
+            <a:pPr algn="l" marL="342900" indent="-342900">
               <a:lnSpc>
-                <a:spcPct val="125000"/>
+                <a:spcPct val="116000"/>
               </a:lnSpc>
-              <a:buNone/>
-            </a:pPr>
-            <a:r>
-              <a:rPr lang="en-US" sz="1250" i="1" dirty="0">
-                <a:solidFill>
-                  <a:srgbClr val="7C6B73"/>
-                </a:solidFill>
-                <a:latin typeface="Calibri" pitchFamily="34" charset="0"/>
-                <a:ea typeface="Calibri" pitchFamily="34" charset="-122"/>
-                <a:cs typeface="Calibri" pitchFamily="34" charset="-120"/>
-              </a:rPr>
-              <a:t>The dosing rule is the same everywhere: 3 grams per litre of useful soil. What changes from one site to the next is the volume of soil the roots actually explore.</a:t>
-            </a:r>
-            <a:endParaRPr lang="en-US" sz="1250" dirty="0"/>
-          </a:p>
-        </p:txBody>
-      </p:sp>
-      <p:sp>
-        <p:nvSpPr>
-          <p:cNvPr id="25" name="Text 23"/>
+              <a:spcAft>
+                <a:spcPts val="700"/>
+              </a:spcAft>
+              <a:buSzPct val="100000"/>
+              <a:buChar char="•"/>
+            </a:pPr>
+            <a:r>
+              <a:rPr lang="en-US" sz="1150" dirty="0">
+                <a:solidFill>
+                  <a:srgbClr val="3F3138"/>
+                </a:solidFill>
+                <a:latin typeface="Calibri" pitchFamily="34" charset="0"/>
+                <a:ea typeface="Calibri" pitchFamily="34" charset="-122"/>
+                <a:cs typeface="Calibri" pitchFamily="34" charset="-120"/>
+              </a:rPr>
+              <a:t>Around twenty thousand growers organised around mills — one route to a coordinated trial.</a:t>
+            </a:r>
+            <a:endParaRPr lang="en-US" sz="1150" dirty="0"/>
+          </a:p>
+        </p:txBody>
+      </p:sp>
+      <p:sp>
+        <p:nvSpPr>
+          <p:cNvPr id="19" name="Text 14"/>
           <p:cNvSpPr txBox="1"/>
           <p:nvPr/>
         </p:nvSpPr>
@@ -7272,7 +7063,7 @@
       </p:sp>
       <p:sp>
         <p:nvSpPr>
-          <p:cNvPr id="26" name="Text 24"/>
+          <p:cNvPr id="20" name="Text 15"/>
           <p:cNvSpPr txBox="1"/>
           <p:nvPr/>
         </p:nvSpPr>
@@ -7376,7 +7167,7 @@
                 <a:ea typeface="Calibri" pitchFamily="34" charset="-122"/>
                 <a:cs typeface="Calibri" pitchFamily="34" charset="-120"/>
               </a:rPr>
-              <a:t>Working together</a:t>
+              <a:t>HOW WE WORK</a:t>
             </a:r>
             <a:endParaRPr lang="en-US" sz="1150" dirty="0"/>
           </a:p>
@@ -7415,7 +7206,7 @@
                 <a:ea typeface="Cambria" pitchFamily="34" charset="-122"/>
                 <a:cs typeface="Cambria" pitchFamily="34" charset="-120"/>
               </a:rPr>
-              <a:t>A local partner for South Africa</a:t>
+              <a:t>A staged rollout, measured at every step</a:t>
             </a:r>
             <a:endParaRPr lang="en-US" sz="3000" dirty="0"/>
           </a:p>
@@ -7540,7 +7331,7 @@
                 <a:ea typeface="Cambria" pitchFamily="34" charset="-122"/>
                 <a:cs typeface="Cambria" pitchFamily="34" charset="-120"/>
               </a:rPr>
-              <a:t>Distribution</a:t>
+              <a:t>Assessment</a:t>
             </a:r>
             <a:endParaRPr lang="en-US" sz="1400" dirty="0"/>
           </a:p>
@@ -7582,7 +7373,7 @@
                 <a:ea typeface="Calibri" pitchFamily="34" charset="-122"/>
                 <a:cs typeface="Calibri" pitchFamily="34" charset="-120"/>
               </a:rPr>
-              <a:t>Territorial exclusivity and launch stock for the first commercial season.</a:t>
+              <a:t>Soil, irrigation method and crop are reviewed. No commitment at this stage.</a:t>
             </a:r>
             <a:endParaRPr lang="en-US" sz="1200" dirty="0"/>
           </a:p>
@@ -7707,7 +7498,7 @@
                 <a:ea typeface="Cambria" pitchFamily="34" charset="-122"/>
                 <a:cs typeface="Cambria" pitchFamily="34" charset="-120"/>
               </a:rPr>
-              <a:t>Training</a:t>
+              <a:t>Trial block</a:t>
             </a:r>
             <a:endParaRPr lang="en-US" sz="1400" dirty="0"/>
           </a:p>
@@ -7749,7 +7540,7 @@
                 <a:ea typeface="Calibri" pitchFamily="34" charset="-122"/>
                 <a:cs typeface="Calibri" pitchFamily="34" charset="-120"/>
               </a:rPr>
-              <a:t>Technical training for field teams, dosing protocols and seasonal updates.</a:t>
+              <a:t>One comparative trial block, against a control block managed identically.</a:t>
             </a:r>
             <a:endParaRPr lang="en-US" sz="1200" dirty="0"/>
           </a:p>
@@ -7874,7 +7665,7 @@
                 <a:ea typeface="Cambria" pitchFamily="34" charset="-122"/>
                 <a:cs typeface="Cambria" pitchFamily="34" charset="-120"/>
               </a:rPr>
-              <a:t>Joint trials</a:t>
+              <a:t>Measurement</a:t>
             </a:r>
             <a:endParaRPr lang="en-US" sz="1400" dirty="0"/>
           </a:p>
@@ -7916,7 +7707,7 @@
                 <a:ea typeface="Calibri" pitchFamily="34" charset="-122"/>
                 <a:cs typeface="Calibri" pitchFamily="34" charset="-120"/>
               </a:rPr>
-              <a:t>Demonstration plots with a control, results shared with growers.</a:t>
+              <a:t>Water use and yield recorded over a full growing season.</a:t>
             </a:r>
             <a:endParaRPr lang="en-US" sz="1200" dirty="0"/>
           </a:p>
@@ -8041,7 +7832,7 @@
                 <a:ea typeface="Cambria" pitchFamily="34" charset="-122"/>
                 <a:cs typeface="Cambria" pitchFamily="34" charset="-120"/>
               </a:rPr>
-              <a:t>Institutions</a:t>
+              <a:t>Extension</a:t>
             </a:r>
             <a:endParaRPr lang="en-US" sz="1400" dirty="0"/>
           </a:p>
@@ -8083,7 +7874,7 @@
                 <a:ea typeface="Calibri" pitchFamily="34" charset="-122"/>
                 <a:cs typeface="Calibri" pitchFamily="34" charset="-120"/>
               </a:rPr>
-              <a:t>Dialogue with the Ministry of Agriculture and food-security programmes.</a:t>
+              <a:t>Gradual rollout to the remaining blocks, on the basis of what was measured.</a:t>
             </a:r>
             <a:endParaRPr lang="en-US" sz="1200" dirty="0"/>
           </a:p>
@@ -8125,7 +7916,7 @@
                 <a:ea typeface="Calibri" pitchFamily="34" charset="-122"/>
                 <a:cs typeface="Calibri" pitchFamily="34" charset="-120"/>
               </a:rPr>
-              <a:t>The framework adapts to the territory: an importer, an input distributor or a growers' group can lead the partnership.</a:t>
+              <a:t>The dosing rule is the same everywhere: 3 grams per litre of useful soil. What changes from one site to the next is the volume of soil the roots actually explore.</a:t>
             </a:r>
             <a:endParaRPr lang="en-US" sz="1250" dirty="0"/>
           </a:p>
@@ -8278,7 +8069,7 @@
                 <a:ea typeface="Calibri" pitchFamily="34" charset="-122"/>
                 <a:cs typeface="Calibri" pitchFamily="34" charset="-120"/>
               </a:rPr>
-              <a:t>WHAT TO ANTICIPATE</a:t>
+              <a:t>Working together</a:t>
             </a:r>
             <a:endParaRPr lang="en-US" sz="1150" dirty="0"/>
           </a:p>
@@ -8317,7 +8108,7 @@
                 <a:ea typeface="Cambria" pitchFamily="34" charset="-122"/>
                 <a:cs typeface="Cambria" pitchFamily="34" charset="-120"/>
               </a:rPr>
-              <a:t>Identified risks and our answers</a:t>
+              <a:t>A local partner for South Africa</a:t>
             </a:r>
             <a:endParaRPr lang="en-US" sz="3000" dirty="0"/>
           </a:p>
@@ -8325,332 +8116,18 @@
       </p:sp>
       <p:sp>
         <p:nvSpPr>
-          <p:cNvPr id="4" name="Text 2"/>
-          <p:cNvSpPr txBox="1"/>
-          <p:nvPr/>
-        </p:nvSpPr>
-        <p:spPr>
-          <a:xfrm>
-            <a:off x="594360" y="1783080"/>
-            <a:ext cx="5227168" cy="411480"/>
-          </a:xfrm>
-          <a:prstGeom prst="rect">
-            <a:avLst/>
-          </a:prstGeom>
-          <a:noFill/>
-          <a:ln/>
-        </p:spPr>
-        <p:txBody>
-          <a:bodyPr wrap="square" lIns="0" tIns="0" rIns="0" bIns="0" rtlCol="0" anchor="ctr"/>
-          <a:lstStyle/>
-          <a:p>
-            <a:pPr algn="l" indent="0" marL="0">
-              <a:buNone/>
-            </a:pPr>
-            <a:r>
-              <a:rPr lang="en-US" sz="1600" b="1" dirty="0">
-                <a:solidFill>
-                  <a:srgbClr val="6B2A44"/>
-                </a:solidFill>
-                <a:latin typeface="Cambria" pitchFamily="34" charset="0"/>
-                <a:ea typeface="Cambria" pitchFamily="34" charset="-122"/>
-                <a:cs typeface="Cambria" pitchFamily="34" charset="-120"/>
-              </a:rPr>
-              <a:t>Risks</a:t>
-            </a:r>
-            <a:endParaRPr lang="en-US" sz="1600" dirty="0"/>
-          </a:p>
-        </p:txBody>
-      </p:sp>
-      <p:sp>
-        <p:nvSpPr>
-          <p:cNvPr id="5" name="Text 3"/>
-          <p:cNvSpPr txBox="1"/>
-          <p:nvPr/>
-        </p:nvSpPr>
-        <p:spPr>
-          <a:xfrm>
-            <a:off x="594360" y="2286000"/>
-            <a:ext cx="5227168" cy="2468880"/>
-          </a:xfrm>
-          <a:prstGeom prst="rect">
-            <a:avLst/>
-          </a:prstGeom>
-          <a:noFill/>
-          <a:ln/>
-        </p:spPr>
-        <p:txBody>
-          <a:bodyPr wrap="square" lIns="0" tIns="0" rIns="0" bIns="0" rtlCol="0" anchor="t"/>
-          <a:lstStyle/>
-          <a:p>
-            <a:pPr algn="l" marL="342900" indent="-342900">
-              <a:lnSpc>
-                <a:spcPct val="122000"/>
-              </a:lnSpc>
-              <a:spcAft>
-                <a:spcPts val="1000"/>
-              </a:spcAft>
-              <a:buSzPct val="100000"/>
-              <a:buChar char="•"/>
-            </a:pPr>
-            <a:r>
-              <a:rPr lang="en-US" sz="1350" dirty="0">
-                <a:solidFill>
-                  <a:srgbClr val="3F3138"/>
-                </a:solidFill>
-                <a:latin typeface="Calibri" pitchFamily="34" charset="0"/>
-                <a:ea typeface="Calibri" pitchFamily="34" charset="-122"/>
-                <a:cs typeface="Calibri" pitchFamily="34" charset="-120"/>
-              </a:rPr>
-              <a:t>Rainfall variability: one good La Niña season is enough to mask the value of the product.</a:t>
-            </a:r>
-            <a:endParaRPr lang="en-US" sz="1350" dirty="0"/>
-          </a:p>
-          <a:p>
-            <a:pPr algn="l" marL="342900" indent="-342900">
-              <a:lnSpc>
-                <a:spcPct val="122000"/>
-              </a:lnSpc>
-              <a:spcAft>
-                <a:spcPts val="1000"/>
-              </a:spcAft>
-              <a:buSzPct val="100000"/>
-              <a:buChar char="•"/>
-            </a:pPr>
-            <a:r>
-              <a:rPr lang="en-US" sz="1350" dirty="0">
-                <a:solidFill>
-                  <a:srgbClr val="3F3138"/>
-                </a:solidFill>
-                <a:latin typeface="Calibri" pitchFamily="34" charset="0"/>
-                <a:ea typeface="Calibri" pitchFamily="34" charset="-122"/>
-                <a:cs typeface="Calibri" pitchFamily="34" charset="-120"/>
-              </a:rPr>
-              <a:t>Registration: fertilisers and soil amendments fall under Act 36 of 1947 and must be registered before commercial sale.</a:t>
-            </a:r>
-            <a:endParaRPr lang="en-US" sz="1350" dirty="0"/>
-          </a:p>
-          <a:p>
-            <a:pPr algn="l" marL="342900" indent="-342900">
-              <a:lnSpc>
-                <a:spcPct val="122000"/>
-              </a:lnSpc>
-              <a:spcAft>
-                <a:spcPts val="1000"/>
-              </a:spcAft>
-              <a:buSzPct val="100000"/>
-              <a:buChar char="•"/>
-            </a:pPr>
-            <a:r>
-              <a:rPr lang="en-US" sz="1350" dirty="0">
-                <a:solidFill>
-                  <a:srgbClr val="3F3138"/>
-                </a:solidFill>
-                <a:latin typeface="Calibri" pitchFamily="34" charset="0"/>
-                <a:ea typeface="Calibri" pitchFamily="34" charset="-122"/>
-                <a:cs typeface="Calibri" pitchFamily="34" charset="-120"/>
-              </a:rPr>
-              <a:t>The memory of cheap sodium-based polymers, which left a poor reputation in several regions.</a:t>
-            </a:r>
-            <a:endParaRPr lang="en-US" sz="1350" dirty="0"/>
-          </a:p>
-          <a:p>
-            <a:pPr algn="l" marL="342900" indent="-342900">
-              <a:lnSpc>
-                <a:spcPct val="122000"/>
-              </a:lnSpc>
-              <a:spcAft>
-                <a:spcPts val="1000"/>
-              </a:spcAft>
-              <a:buSzPct val="100000"/>
-              <a:buChar char="•"/>
-            </a:pPr>
-            <a:r>
-              <a:rPr lang="en-US" sz="1350" dirty="0">
-                <a:solidFill>
-                  <a:srgbClr val="3F3138"/>
-                </a:solidFill>
-                <a:latin typeface="Calibri" pitchFamily="34" charset="0"/>
-                <a:ea typeface="Calibri" pitchFamily="34" charset="-122"/>
-                <a:cs typeface="Calibri" pitchFamily="34" charset="-120"/>
-              </a:rPr>
-              <a:t>Farm cash flow after successive droughts, high input costs and a rand that raises the price of every imported input.</a:t>
-            </a:r>
-            <a:endParaRPr lang="en-US" sz="1350" dirty="0"/>
-          </a:p>
-        </p:txBody>
-      </p:sp>
-      <p:sp>
-        <p:nvSpPr>
-          <p:cNvPr id="6" name="Text 4"/>
-          <p:cNvSpPr txBox="1"/>
-          <p:nvPr/>
-        </p:nvSpPr>
-        <p:spPr>
-          <a:xfrm>
-            <a:off x="6370168" y="1783080"/>
-            <a:ext cx="5227168" cy="411480"/>
-          </a:xfrm>
-          <a:prstGeom prst="rect">
-            <a:avLst/>
-          </a:prstGeom>
-          <a:noFill/>
-          <a:ln/>
-        </p:spPr>
-        <p:txBody>
-          <a:bodyPr wrap="square" lIns="0" tIns="0" rIns="0" bIns="0" rtlCol="0" anchor="ctr"/>
-          <a:lstStyle/>
-          <a:p>
-            <a:pPr algn="l" indent="0" marL="0">
-              <a:buNone/>
-            </a:pPr>
-            <a:r>
-              <a:rPr lang="en-US" sz="1600" b="1" dirty="0">
-                <a:solidFill>
-                  <a:srgbClr val="6B2A44"/>
-                </a:solidFill>
-                <a:latin typeface="Cambria" pitchFamily="34" charset="0"/>
-                <a:ea typeface="Cambria" pitchFamily="34" charset="-122"/>
-                <a:cs typeface="Cambria" pitchFamily="34" charset="-120"/>
-              </a:rPr>
-              <a:t>Our answers</a:t>
-            </a:r>
-            <a:endParaRPr lang="en-US" sz="1600" dirty="0"/>
-          </a:p>
-        </p:txBody>
-      </p:sp>
-      <p:sp>
-        <p:nvSpPr>
-          <p:cNvPr id="7" name="Text 5"/>
-          <p:cNvSpPr txBox="1"/>
-          <p:nvPr/>
-        </p:nvSpPr>
-        <p:spPr>
-          <a:xfrm>
-            <a:off x="6370168" y="2286000"/>
-            <a:ext cx="5227168" cy="2468880"/>
-          </a:xfrm>
-          <a:prstGeom prst="rect">
-            <a:avLst/>
-          </a:prstGeom>
-          <a:noFill/>
-          <a:ln/>
-        </p:spPr>
-        <p:txBody>
-          <a:bodyPr wrap="square" lIns="0" tIns="0" rIns="0" bIns="0" rtlCol="0" anchor="t"/>
-          <a:lstStyle/>
-          <a:p>
-            <a:pPr algn="l" marL="342900" indent="-342900">
-              <a:lnSpc>
-                <a:spcPct val="122000"/>
-              </a:lnSpc>
-              <a:spcAft>
-                <a:spcPts val="1000"/>
-              </a:spcAft>
-              <a:buSzPct val="100000"/>
-              <a:buChar char="•"/>
-            </a:pPr>
-            <a:r>
-              <a:rPr lang="en-US" sz="1350" dirty="0">
-                <a:solidFill>
-                  <a:srgbClr val="3F3138"/>
-                </a:solidFill>
-                <a:latin typeface="Calibri" pitchFamily="34" charset="0"/>
-                <a:ea typeface="Calibri" pitchFamily="34" charset="-122"/>
-                <a:cs typeface="Calibri" pitchFamily="34" charset="-120"/>
-              </a:rPr>
-              <a:t>Run the trial over a full season against a control block, so the gain is measurable even in a favourable year.</a:t>
-            </a:r>
-            <a:endParaRPr lang="en-US" sz="1350" dirty="0"/>
-          </a:p>
-          <a:p>
-            <a:pPr algn="l" marL="342900" indent="-342900">
-              <a:lnSpc>
-                <a:spcPct val="122000"/>
-              </a:lnSpc>
-              <a:spcAft>
-                <a:spcPts val="1000"/>
-              </a:spcAft>
-              <a:buSzPct val="100000"/>
-              <a:buChar char="•"/>
-            </a:pPr>
-            <a:r>
-              <a:rPr lang="en-US" sz="1350" dirty="0">
-                <a:solidFill>
-                  <a:srgbClr val="3F3138"/>
-                </a:solidFill>
-                <a:latin typeface="Calibri" pitchFamily="34" charset="0"/>
-                <a:ea typeface="Calibri" pitchFamily="34" charset="-122"/>
-                <a:cs typeface="Calibri" pitchFamily="34" charset="-120"/>
-              </a:rPr>
-              <a:t>Open the registration file in parallel with the first trials rather than after them.</a:t>
-            </a:r>
-            <a:endParaRPr lang="en-US" sz="1350" dirty="0"/>
-          </a:p>
-          <a:p>
-            <a:pPr algn="l" marL="342900" indent="-342900">
-              <a:lnSpc>
-                <a:spcPct val="122000"/>
-              </a:lnSpc>
-              <a:spcAft>
-                <a:spcPts val="1000"/>
-              </a:spcAft>
-              <a:buSzPct val="100000"/>
-              <a:buChar char="•"/>
-            </a:pPr>
-            <a:r>
-              <a:rPr lang="en-US" sz="1350" dirty="0">
-                <a:solidFill>
-                  <a:srgbClr val="3F3138"/>
-                </a:solidFill>
-                <a:latin typeface="Calibri" pitchFamily="34" charset="0"/>
-                <a:ea typeface="Calibri" pitchFamily="34" charset="-122"/>
-                <a:cs typeface="Calibri" pitchFamily="34" charset="-120"/>
-              </a:rPr>
-              <a:t>Document the formulation: potassium, never sodium, and compatible with food crops.</a:t>
-            </a:r>
-            <a:endParaRPr lang="en-US" sz="1350" dirty="0"/>
-          </a:p>
-          <a:p>
-            <a:pPr algn="l" marL="342900" indent="-342900">
-              <a:lnSpc>
-                <a:spcPct val="122000"/>
-              </a:lnSpc>
-              <a:spcAft>
-                <a:spcPts val="1000"/>
-              </a:spcAft>
-              <a:buSzPct val="100000"/>
-              <a:buChar char="•"/>
-            </a:pPr>
-            <a:r>
-              <a:rPr lang="en-US" sz="1350" dirty="0">
-                <a:solidFill>
-                  <a:srgbClr val="3F3138"/>
-                </a:solidFill>
-                <a:latin typeface="Calibri" pitchFamily="34" charset="0"/>
-                <a:ea typeface="Calibri" pitchFamily="34" charset="-122"/>
-                <a:cs typeface="Calibri" pitchFamily="34" charset="-120"/>
-              </a:rPr>
-              <a:t>Spread the commitment: a useful life of 3 to 4 years amortises the cost over several seasons.</a:t>
-            </a:r>
-            <a:endParaRPr lang="en-US" sz="1350" dirty="0"/>
-          </a:p>
-        </p:txBody>
-      </p:sp>
-      <p:sp>
-        <p:nvSpPr>
-          <p:cNvPr id="8" name="Shape 6"/>
+          <p:cNvPr id="4" name="Shape 2"/>
           <p:cNvSpPr/>
           <p:nvPr/>
         </p:nvSpPr>
         <p:spPr>
           <a:xfrm>
-            <a:off x="594360" y="4846320"/>
-            <a:ext cx="11002975" cy="960120"/>
+            <a:off x="594360" y="1874520"/>
+            <a:ext cx="2545004" cy="2834640"/>
           </a:xfrm>
           <a:prstGeom prst="roundRect">
             <a:avLst>
-              <a:gd name="adj" fmla="val 7619"/>
+              <a:gd name="adj" fmla="val 3593"/>
             </a:avLst>
           </a:prstGeom>
           <a:solidFill>
@@ -8666,14 +8143,112 @@
       </p:sp>
       <p:sp>
         <p:nvSpPr>
-          <p:cNvPr id="9" name="Text 7"/>
-          <p:cNvSpPr txBox="1"/>
-          <p:nvPr/>
-        </p:nvSpPr>
-        <p:spPr>
-          <a:xfrm>
-            <a:off x="822960" y="4983480"/>
-            <a:ext cx="10545775" cy="713232"/>
+          <p:cNvPr id="5" name="Shape 3"/>
+          <p:cNvSpPr/>
+          <p:nvPr/>
+        </p:nvSpPr>
+        <p:spPr>
+          <a:xfrm>
+            <a:off x="822960" y="2103120"/>
+            <a:ext cx="566928" cy="566928"/>
+          </a:xfrm>
+          <a:prstGeom prst="ellipse">
+            <a:avLst/>
+          </a:prstGeom>
+          <a:solidFill>
+            <a:srgbClr val="6B2A44"/>
+          </a:solidFill>
+          <a:ln/>
+        </p:spPr>
+      </p:sp>
+      <p:sp>
+        <p:nvSpPr>
+          <p:cNvPr id="6" name="Text 4"/>
+          <p:cNvSpPr txBox="1"/>
+          <p:nvPr/>
+        </p:nvSpPr>
+        <p:spPr>
+          <a:xfrm>
+            <a:off x="822960" y="2103120"/>
+            <a:ext cx="566928" cy="566928"/>
+          </a:xfrm>
+          <a:prstGeom prst="rect">
+            <a:avLst/>
+          </a:prstGeom>
+          <a:noFill/>
+          <a:ln/>
+        </p:spPr>
+        <p:txBody>
+          <a:bodyPr wrap="square" lIns="0" tIns="0" rIns="0" bIns="0" rtlCol="0" anchor="ctr"/>
+          <a:lstStyle/>
+          <a:p>
+            <a:pPr algn="ctr" indent="0" marL="0">
+              <a:buNone/>
+            </a:pPr>
+            <a:r>
+              <a:rPr lang="en-US" sz="1600" b="1" dirty="0">
+                <a:solidFill>
+                  <a:srgbClr val="FFFFFF"/>
+                </a:solidFill>
+                <a:latin typeface="Cambria" pitchFamily="34" charset="0"/>
+                <a:ea typeface="Cambria" pitchFamily="34" charset="-122"/>
+                <a:cs typeface="Cambria" pitchFamily="34" charset="-120"/>
+              </a:rPr>
+              <a:t>1</a:t>
+            </a:r>
+            <a:endParaRPr lang="en-US" sz="1600" dirty="0"/>
+          </a:p>
+        </p:txBody>
+      </p:sp>
+      <p:sp>
+        <p:nvSpPr>
+          <p:cNvPr id="7" name="Text 5"/>
+          <p:cNvSpPr txBox="1"/>
+          <p:nvPr/>
+        </p:nvSpPr>
+        <p:spPr>
+          <a:xfrm>
+            <a:off x="822960" y="2788920"/>
+            <a:ext cx="2087804" cy="457200"/>
+          </a:xfrm>
+          <a:prstGeom prst="rect">
+            <a:avLst/>
+          </a:prstGeom>
+          <a:noFill/>
+          <a:ln/>
+        </p:spPr>
+        <p:txBody>
+          <a:bodyPr wrap="square" lIns="0" tIns="0" rIns="0" bIns="0" rtlCol="0" anchor="ctr"/>
+          <a:lstStyle/>
+          <a:p>
+            <a:pPr algn="l" indent="0" marL="0">
+              <a:buNone/>
+            </a:pPr>
+            <a:r>
+              <a:rPr lang="en-US" sz="1400" b="1" dirty="0">
+                <a:solidFill>
+                  <a:srgbClr val="6B2A44"/>
+                </a:solidFill>
+                <a:latin typeface="Cambria" pitchFamily="34" charset="0"/>
+                <a:ea typeface="Cambria" pitchFamily="34" charset="-122"/>
+                <a:cs typeface="Cambria" pitchFamily="34" charset="-120"/>
+              </a:rPr>
+              <a:t>Distribution</a:t>
+            </a:r>
+            <a:endParaRPr lang="en-US" sz="1400" dirty="0"/>
+          </a:p>
+        </p:txBody>
+      </p:sp>
+      <p:sp>
+        <p:nvSpPr>
+          <p:cNvPr id="8" name="Text 6"/>
+          <p:cNvSpPr txBox="1"/>
+          <p:nvPr/>
+        </p:nvSpPr>
+        <p:spPr>
+          <a:xfrm>
+            <a:off x="822960" y="3291840"/>
+            <a:ext cx="2087804" cy="1234440"/>
           </a:xfrm>
           <a:prstGeom prst="rect">
             <a:avLst/>
@@ -8687,12 +8262,555 @@
           <a:p>
             <a:pPr algn="l" indent="0" marL="0">
               <a:lnSpc>
-                <a:spcPct val="118000"/>
+                <a:spcPct val="120000"/>
               </a:lnSpc>
               <a:buNone/>
             </a:pPr>
             <a:r>
-              <a:rPr lang="en-US" sz="1100" dirty="0">
+              <a:rPr lang="en-US" sz="1200" dirty="0">
+                <a:solidFill>
+                  <a:srgbClr val="3F3138"/>
+                </a:solidFill>
+                <a:latin typeface="Calibri" pitchFamily="34" charset="0"/>
+                <a:ea typeface="Calibri" pitchFamily="34" charset="-122"/>
+                <a:cs typeface="Calibri" pitchFamily="34" charset="-120"/>
+              </a:rPr>
+              <a:t>Territorial exclusivity and launch stock for the first commercial season.</a:t>
+            </a:r>
+            <a:endParaRPr lang="en-US" sz="1200" dirty="0"/>
+          </a:p>
+        </p:txBody>
+      </p:sp>
+      <p:sp>
+        <p:nvSpPr>
+          <p:cNvPr id="9" name="Shape 7"/>
+          <p:cNvSpPr/>
+          <p:nvPr/>
+        </p:nvSpPr>
+        <p:spPr>
+          <a:xfrm>
+            <a:off x="3413684" y="1874520"/>
+            <a:ext cx="2545004" cy="2834640"/>
+          </a:xfrm>
+          <a:prstGeom prst="roundRect">
+            <a:avLst>
+              <a:gd name="adj" fmla="val 3593"/>
+            </a:avLst>
+          </a:prstGeom>
+          <a:solidFill>
+            <a:srgbClr val="F5EFF1"/>
+          </a:solidFill>
+          <a:ln w="9525">
+            <a:solidFill>
+              <a:srgbClr val="E5D9DE"/>
+            </a:solidFill>
+            <a:prstDash val="solid"/>
+          </a:ln>
+        </p:spPr>
+      </p:sp>
+      <p:sp>
+        <p:nvSpPr>
+          <p:cNvPr id="10" name="Shape 8"/>
+          <p:cNvSpPr/>
+          <p:nvPr/>
+        </p:nvSpPr>
+        <p:spPr>
+          <a:xfrm>
+            <a:off x="3642284" y="2103120"/>
+            <a:ext cx="566928" cy="566928"/>
+          </a:xfrm>
+          <a:prstGeom prst="ellipse">
+            <a:avLst/>
+          </a:prstGeom>
+          <a:solidFill>
+            <a:srgbClr val="6B2A44"/>
+          </a:solidFill>
+          <a:ln/>
+        </p:spPr>
+      </p:sp>
+      <p:sp>
+        <p:nvSpPr>
+          <p:cNvPr id="11" name="Text 9"/>
+          <p:cNvSpPr txBox="1"/>
+          <p:nvPr/>
+        </p:nvSpPr>
+        <p:spPr>
+          <a:xfrm>
+            <a:off x="3642284" y="2103120"/>
+            <a:ext cx="566928" cy="566928"/>
+          </a:xfrm>
+          <a:prstGeom prst="rect">
+            <a:avLst/>
+          </a:prstGeom>
+          <a:noFill/>
+          <a:ln/>
+        </p:spPr>
+        <p:txBody>
+          <a:bodyPr wrap="square" lIns="0" tIns="0" rIns="0" bIns="0" rtlCol="0" anchor="ctr"/>
+          <a:lstStyle/>
+          <a:p>
+            <a:pPr algn="ctr" indent="0" marL="0">
+              <a:buNone/>
+            </a:pPr>
+            <a:r>
+              <a:rPr lang="en-US" sz="1600" b="1" dirty="0">
+                <a:solidFill>
+                  <a:srgbClr val="FFFFFF"/>
+                </a:solidFill>
+                <a:latin typeface="Cambria" pitchFamily="34" charset="0"/>
+                <a:ea typeface="Cambria" pitchFamily="34" charset="-122"/>
+                <a:cs typeface="Cambria" pitchFamily="34" charset="-120"/>
+              </a:rPr>
+              <a:t>2</a:t>
+            </a:r>
+            <a:endParaRPr lang="en-US" sz="1600" dirty="0"/>
+          </a:p>
+        </p:txBody>
+      </p:sp>
+      <p:sp>
+        <p:nvSpPr>
+          <p:cNvPr id="12" name="Text 10"/>
+          <p:cNvSpPr txBox="1"/>
+          <p:nvPr/>
+        </p:nvSpPr>
+        <p:spPr>
+          <a:xfrm>
+            <a:off x="3642284" y="2788920"/>
+            <a:ext cx="2087804" cy="457200"/>
+          </a:xfrm>
+          <a:prstGeom prst="rect">
+            <a:avLst/>
+          </a:prstGeom>
+          <a:noFill/>
+          <a:ln/>
+        </p:spPr>
+        <p:txBody>
+          <a:bodyPr wrap="square" lIns="0" tIns="0" rIns="0" bIns="0" rtlCol="0" anchor="ctr"/>
+          <a:lstStyle/>
+          <a:p>
+            <a:pPr algn="l" indent="0" marL="0">
+              <a:buNone/>
+            </a:pPr>
+            <a:r>
+              <a:rPr lang="en-US" sz="1400" b="1" dirty="0">
+                <a:solidFill>
+                  <a:srgbClr val="6B2A44"/>
+                </a:solidFill>
+                <a:latin typeface="Cambria" pitchFamily="34" charset="0"/>
+                <a:ea typeface="Cambria" pitchFamily="34" charset="-122"/>
+                <a:cs typeface="Cambria" pitchFamily="34" charset="-120"/>
+              </a:rPr>
+              <a:t>Training</a:t>
+            </a:r>
+            <a:endParaRPr lang="en-US" sz="1400" dirty="0"/>
+          </a:p>
+        </p:txBody>
+      </p:sp>
+      <p:sp>
+        <p:nvSpPr>
+          <p:cNvPr id="13" name="Text 11"/>
+          <p:cNvSpPr txBox="1"/>
+          <p:nvPr/>
+        </p:nvSpPr>
+        <p:spPr>
+          <a:xfrm>
+            <a:off x="3642284" y="3291840"/>
+            <a:ext cx="2087804" cy="1234440"/>
+          </a:xfrm>
+          <a:prstGeom prst="rect">
+            <a:avLst/>
+          </a:prstGeom>
+          <a:noFill/>
+          <a:ln/>
+        </p:spPr>
+        <p:txBody>
+          <a:bodyPr wrap="square" lIns="0" tIns="0" rIns="0" bIns="0" rtlCol="0" anchor="t"/>
+          <a:lstStyle/>
+          <a:p>
+            <a:pPr algn="l" indent="0" marL="0">
+              <a:lnSpc>
+                <a:spcPct val="120000"/>
+              </a:lnSpc>
+              <a:buNone/>
+            </a:pPr>
+            <a:r>
+              <a:rPr lang="en-US" sz="1200" dirty="0">
+                <a:solidFill>
+                  <a:srgbClr val="3F3138"/>
+                </a:solidFill>
+                <a:latin typeface="Calibri" pitchFamily="34" charset="0"/>
+                <a:ea typeface="Calibri" pitchFamily="34" charset="-122"/>
+                <a:cs typeface="Calibri" pitchFamily="34" charset="-120"/>
+              </a:rPr>
+              <a:t>Technical training for field teams, dosing protocols and seasonal updates.</a:t>
+            </a:r>
+            <a:endParaRPr lang="en-US" sz="1200" dirty="0"/>
+          </a:p>
+        </p:txBody>
+      </p:sp>
+      <p:sp>
+        <p:nvSpPr>
+          <p:cNvPr id="14" name="Shape 12"/>
+          <p:cNvSpPr/>
+          <p:nvPr/>
+        </p:nvSpPr>
+        <p:spPr>
+          <a:xfrm>
+            <a:off x="6233008" y="1874520"/>
+            <a:ext cx="2545004" cy="2834640"/>
+          </a:xfrm>
+          <a:prstGeom prst="roundRect">
+            <a:avLst>
+              <a:gd name="adj" fmla="val 3593"/>
+            </a:avLst>
+          </a:prstGeom>
+          <a:solidFill>
+            <a:srgbClr val="F5EFF1"/>
+          </a:solidFill>
+          <a:ln w="9525">
+            <a:solidFill>
+              <a:srgbClr val="E5D9DE"/>
+            </a:solidFill>
+            <a:prstDash val="solid"/>
+          </a:ln>
+        </p:spPr>
+      </p:sp>
+      <p:sp>
+        <p:nvSpPr>
+          <p:cNvPr id="15" name="Shape 13"/>
+          <p:cNvSpPr/>
+          <p:nvPr/>
+        </p:nvSpPr>
+        <p:spPr>
+          <a:xfrm>
+            <a:off x="6461608" y="2103120"/>
+            <a:ext cx="566928" cy="566928"/>
+          </a:xfrm>
+          <a:prstGeom prst="ellipse">
+            <a:avLst/>
+          </a:prstGeom>
+          <a:solidFill>
+            <a:srgbClr val="6B2A44"/>
+          </a:solidFill>
+          <a:ln/>
+        </p:spPr>
+      </p:sp>
+      <p:sp>
+        <p:nvSpPr>
+          <p:cNvPr id="16" name="Text 14"/>
+          <p:cNvSpPr txBox="1"/>
+          <p:nvPr/>
+        </p:nvSpPr>
+        <p:spPr>
+          <a:xfrm>
+            <a:off x="6461608" y="2103120"/>
+            <a:ext cx="566928" cy="566928"/>
+          </a:xfrm>
+          <a:prstGeom prst="rect">
+            <a:avLst/>
+          </a:prstGeom>
+          <a:noFill/>
+          <a:ln/>
+        </p:spPr>
+        <p:txBody>
+          <a:bodyPr wrap="square" lIns="0" tIns="0" rIns="0" bIns="0" rtlCol="0" anchor="ctr"/>
+          <a:lstStyle/>
+          <a:p>
+            <a:pPr algn="ctr" indent="0" marL="0">
+              <a:buNone/>
+            </a:pPr>
+            <a:r>
+              <a:rPr lang="en-US" sz="1600" b="1" dirty="0">
+                <a:solidFill>
+                  <a:srgbClr val="FFFFFF"/>
+                </a:solidFill>
+                <a:latin typeface="Cambria" pitchFamily="34" charset="0"/>
+                <a:ea typeface="Cambria" pitchFamily="34" charset="-122"/>
+                <a:cs typeface="Cambria" pitchFamily="34" charset="-120"/>
+              </a:rPr>
+              <a:t>3</a:t>
+            </a:r>
+            <a:endParaRPr lang="en-US" sz="1600" dirty="0"/>
+          </a:p>
+        </p:txBody>
+      </p:sp>
+      <p:sp>
+        <p:nvSpPr>
+          <p:cNvPr id="17" name="Text 15"/>
+          <p:cNvSpPr txBox="1"/>
+          <p:nvPr/>
+        </p:nvSpPr>
+        <p:spPr>
+          <a:xfrm>
+            <a:off x="6461608" y="2788920"/>
+            <a:ext cx="2087804" cy="457200"/>
+          </a:xfrm>
+          <a:prstGeom prst="rect">
+            <a:avLst/>
+          </a:prstGeom>
+          <a:noFill/>
+          <a:ln/>
+        </p:spPr>
+        <p:txBody>
+          <a:bodyPr wrap="square" lIns="0" tIns="0" rIns="0" bIns="0" rtlCol="0" anchor="ctr"/>
+          <a:lstStyle/>
+          <a:p>
+            <a:pPr algn="l" indent="0" marL="0">
+              <a:buNone/>
+            </a:pPr>
+            <a:r>
+              <a:rPr lang="en-US" sz="1400" b="1" dirty="0">
+                <a:solidFill>
+                  <a:srgbClr val="6B2A44"/>
+                </a:solidFill>
+                <a:latin typeface="Cambria" pitchFamily="34" charset="0"/>
+                <a:ea typeface="Cambria" pitchFamily="34" charset="-122"/>
+                <a:cs typeface="Cambria" pitchFamily="34" charset="-120"/>
+              </a:rPr>
+              <a:t>Joint trials</a:t>
+            </a:r>
+            <a:endParaRPr lang="en-US" sz="1400" dirty="0"/>
+          </a:p>
+        </p:txBody>
+      </p:sp>
+      <p:sp>
+        <p:nvSpPr>
+          <p:cNvPr id="18" name="Text 16"/>
+          <p:cNvSpPr txBox="1"/>
+          <p:nvPr/>
+        </p:nvSpPr>
+        <p:spPr>
+          <a:xfrm>
+            <a:off x="6461608" y="3291840"/>
+            <a:ext cx="2087804" cy="1234440"/>
+          </a:xfrm>
+          <a:prstGeom prst="rect">
+            <a:avLst/>
+          </a:prstGeom>
+          <a:noFill/>
+          <a:ln/>
+        </p:spPr>
+        <p:txBody>
+          <a:bodyPr wrap="square" lIns="0" tIns="0" rIns="0" bIns="0" rtlCol="0" anchor="t"/>
+          <a:lstStyle/>
+          <a:p>
+            <a:pPr algn="l" indent="0" marL="0">
+              <a:lnSpc>
+                <a:spcPct val="120000"/>
+              </a:lnSpc>
+              <a:buNone/>
+            </a:pPr>
+            <a:r>
+              <a:rPr lang="en-US" sz="1200" dirty="0">
+                <a:solidFill>
+                  <a:srgbClr val="3F3138"/>
+                </a:solidFill>
+                <a:latin typeface="Calibri" pitchFamily="34" charset="0"/>
+                <a:ea typeface="Calibri" pitchFamily="34" charset="-122"/>
+                <a:cs typeface="Calibri" pitchFamily="34" charset="-120"/>
+              </a:rPr>
+              <a:t>Demonstration plots with a control, results shared with growers.</a:t>
+            </a:r>
+            <a:endParaRPr lang="en-US" sz="1200" dirty="0"/>
+          </a:p>
+        </p:txBody>
+      </p:sp>
+      <p:sp>
+        <p:nvSpPr>
+          <p:cNvPr id="19" name="Shape 17"/>
+          <p:cNvSpPr/>
+          <p:nvPr/>
+        </p:nvSpPr>
+        <p:spPr>
+          <a:xfrm>
+            <a:off x="9052331" y="1874520"/>
+            <a:ext cx="2545004" cy="2834640"/>
+          </a:xfrm>
+          <a:prstGeom prst="roundRect">
+            <a:avLst>
+              <a:gd name="adj" fmla="val 3593"/>
+            </a:avLst>
+          </a:prstGeom>
+          <a:solidFill>
+            <a:srgbClr val="F5EFF1"/>
+          </a:solidFill>
+          <a:ln w="9525">
+            <a:solidFill>
+              <a:srgbClr val="E5D9DE"/>
+            </a:solidFill>
+            <a:prstDash val="solid"/>
+          </a:ln>
+        </p:spPr>
+      </p:sp>
+      <p:sp>
+        <p:nvSpPr>
+          <p:cNvPr id="20" name="Shape 18"/>
+          <p:cNvSpPr/>
+          <p:nvPr/>
+        </p:nvSpPr>
+        <p:spPr>
+          <a:xfrm>
+            <a:off x="9280931" y="2103120"/>
+            <a:ext cx="566928" cy="566928"/>
+          </a:xfrm>
+          <a:prstGeom prst="ellipse">
+            <a:avLst/>
+          </a:prstGeom>
+          <a:solidFill>
+            <a:srgbClr val="6B2A44"/>
+          </a:solidFill>
+          <a:ln/>
+        </p:spPr>
+      </p:sp>
+      <p:sp>
+        <p:nvSpPr>
+          <p:cNvPr id="21" name="Text 19"/>
+          <p:cNvSpPr txBox="1"/>
+          <p:nvPr/>
+        </p:nvSpPr>
+        <p:spPr>
+          <a:xfrm>
+            <a:off x="9280931" y="2103120"/>
+            <a:ext cx="566928" cy="566928"/>
+          </a:xfrm>
+          <a:prstGeom prst="rect">
+            <a:avLst/>
+          </a:prstGeom>
+          <a:noFill/>
+          <a:ln/>
+        </p:spPr>
+        <p:txBody>
+          <a:bodyPr wrap="square" lIns="0" tIns="0" rIns="0" bIns="0" rtlCol="0" anchor="ctr"/>
+          <a:lstStyle/>
+          <a:p>
+            <a:pPr algn="ctr" indent="0" marL="0">
+              <a:buNone/>
+            </a:pPr>
+            <a:r>
+              <a:rPr lang="en-US" sz="1600" b="1" dirty="0">
+                <a:solidFill>
+                  <a:srgbClr val="FFFFFF"/>
+                </a:solidFill>
+                <a:latin typeface="Cambria" pitchFamily="34" charset="0"/>
+                <a:ea typeface="Cambria" pitchFamily="34" charset="-122"/>
+                <a:cs typeface="Cambria" pitchFamily="34" charset="-120"/>
+              </a:rPr>
+              <a:t>4</a:t>
+            </a:r>
+            <a:endParaRPr lang="en-US" sz="1600" dirty="0"/>
+          </a:p>
+        </p:txBody>
+      </p:sp>
+      <p:sp>
+        <p:nvSpPr>
+          <p:cNvPr id="22" name="Text 20"/>
+          <p:cNvSpPr txBox="1"/>
+          <p:nvPr/>
+        </p:nvSpPr>
+        <p:spPr>
+          <a:xfrm>
+            <a:off x="9280931" y="2788920"/>
+            <a:ext cx="2087804" cy="457200"/>
+          </a:xfrm>
+          <a:prstGeom prst="rect">
+            <a:avLst/>
+          </a:prstGeom>
+          <a:noFill/>
+          <a:ln/>
+        </p:spPr>
+        <p:txBody>
+          <a:bodyPr wrap="square" lIns="0" tIns="0" rIns="0" bIns="0" rtlCol="0" anchor="ctr"/>
+          <a:lstStyle/>
+          <a:p>
+            <a:pPr algn="l" indent="0" marL="0">
+              <a:buNone/>
+            </a:pPr>
+            <a:r>
+              <a:rPr lang="en-US" sz="1400" b="1" dirty="0">
+                <a:solidFill>
+                  <a:srgbClr val="6B2A44"/>
+                </a:solidFill>
+                <a:latin typeface="Cambria" pitchFamily="34" charset="0"/>
+                <a:ea typeface="Cambria" pitchFamily="34" charset="-122"/>
+                <a:cs typeface="Cambria" pitchFamily="34" charset="-120"/>
+              </a:rPr>
+              <a:t>Institutions</a:t>
+            </a:r>
+            <a:endParaRPr lang="en-US" sz="1400" dirty="0"/>
+          </a:p>
+        </p:txBody>
+      </p:sp>
+      <p:sp>
+        <p:nvSpPr>
+          <p:cNvPr id="23" name="Text 21"/>
+          <p:cNvSpPr txBox="1"/>
+          <p:nvPr/>
+        </p:nvSpPr>
+        <p:spPr>
+          <a:xfrm>
+            <a:off x="9280931" y="3291840"/>
+            <a:ext cx="2087804" cy="1234440"/>
+          </a:xfrm>
+          <a:prstGeom prst="rect">
+            <a:avLst/>
+          </a:prstGeom>
+          <a:noFill/>
+          <a:ln/>
+        </p:spPr>
+        <p:txBody>
+          <a:bodyPr wrap="square" lIns="0" tIns="0" rIns="0" bIns="0" rtlCol="0" anchor="t"/>
+          <a:lstStyle/>
+          <a:p>
+            <a:pPr algn="l" indent="0" marL="0">
+              <a:lnSpc>
+                <a:spcPct val="120000"/>
+              </a:lnSpc>
+              <a:buNone/>
+            </a:pPr>
+            <a:r>
+              <a:rPr lang="en-US" sz="1200" dirty="0">
+                <a:solidFill>
+                  <a:srgbClr val="3F3138"/>
+                </a:solidFill>
+                <a:latin typeface="Calibri" pitchFamily="34" charset="0"/>
+                <a:ea typeface="Calibri" pitchFamily="34" charset="-122"/>
+                <a:cs typeface="Calibri" pitchFamily="34" charset="-120"/>
+              </a:rPr>
+              <a:t>Dialogue with the Ministry of Agriculture and food-security programmes.</a:t>
+            </a:r>
+            <a:endParaRPr lang="en-US" sz="1200" dirty="0"/>
+          </a:p>
+        </p:txBody>
+      </p:sp>
+      <p:sp>
+        <p:nvSpPr>
+          <p:cNvPr id="24" name="Text 22"/>
+          <p:cNvSpPr txBox="1"/>
+          <p:nvPr/>
+        </p:nvSpPr>
+        <p:spPr>
+          <a:xfrm>
+            <a:off x="594360" y="4983480"/>
+            <a:ext cx="11002975" cy="822960"/>
+          </a:xfrm>
+          <a:prstGeom prst="rect">
+            <a:avLst/>
+          </a:prstGeom>
+          <a:noFill/>
+          <a:ln/>
+        </p:spPr>
+        <p:txBody>
+          <a:bodyPr wrap="square" lIns="0" tIns="0" rIns="0" bIns="0" rtlCol="0" anchor="t"/>
+          <a:lstStyle/>
+          <a:p>
+            <a:pPr algn="l" indent="0" marL="0">
+              <a:lnSpc>
+                <a:spcPct val="125000"/>
+              </a:lnSpc>
+              <a:buNone/>
+            </a:pPr>
+            <a:r>
+              <a:rPr lang="en-US" sz="1250" i="1" dirty="0">
                 <a:solidFill>
                   <a:srgbClr val="7C6B73"/>
                 </a:solidFill>
@@ -8700,15 +8818,15 @@
                 <a:ea typeface="Calibri" pitchFamily="34" charset="-122"/>
                 <a:cs typeface="Calibri" pitchFamily="34" charset="-120"/>
               </a:rPr>
-              <a:t>Acrylamide analysis (Polymex laboratory, ISO 9001, content below 3.0 µg/g) and REACH / SVHC screening (SGS) are available on request, together with the SOHISCERT certificate valid until 4 September 2027.</a:t>
-            </a:r>
-            <a:endParaRPr lang="en-US" sz="1100" dirty="0"/>
-          </a:p>
-        </p:txBody>
-      </p:sp>
-      <p:sp>
-        <p:nvSpPr>
-          <p:cNvPr id="10" name="Text 8"/>
+              <a:t>The framework adapts to the territory: an importer, an input distributor or a growers' group can lead the partnership.</a:t>
+            </a:r>
+            <a:endParaRPr lang="en-US" sz="1250" dirty="0"/>
+          </a:p>
+        </p:txBody>
+      </p:sp>
+      <p:sp>
+        <p:nvSpPr>
+          <p:cNvPr id="25" name="Text 23"/>
           <p:cNvSpPr txBox="1"/>
           <p:nvPr/>
         </p:nvSpPr>
@@ -8749,7 +8867,7 @@
       </p:sp>
       <p:sp>
         <p:nvSpPr>
-          <p:cNvPr id="11" name="Text 9"/>
+          <p:cNvPr id="26" name="Text 24"/>
           <p:cNvSpPr txBox="1"/>
           <p:nvPr/>
         </p:nvSpPr>
@@ -8853,7 +8971,7 @@
                 <a:ea typeface="Calibri" pitchFamily="34" charset="-122"/>
                 <a:cs typeface="Calibri" pitchFamily="34" charset="-120"/>
               </a:rPr>
-              <a:t>Sources</a:t>
+              <a:t>WHAT TO ANTICIPATE</a:t>
             </a:r>
             <a:endParaRPr lang="en-US" sz="1150" dirty="0"/>
           </a:p>
@@ -8892,7 +9010,7 @@
                 <a:ea typeface="Cambria" pitchFamily="34" charset="-122"/>
                 <a:cs typeface="Cambria" pitchFamily="34" charset="-120"/>
               </a:rPr>
-              <a:t>Sources and working assumptions</a:t>
+              <a:t>Identified risks and our answers</a:t>
             </a:r>
             <a:endParaRPr lang="en-US" sz="3000" dirty="0"/>
           </a:p>
@@ -8931,7 +9049,7 @@
                 <a:ea typeface="Cambria" pitchFamily="34" charset="-122"/>
                 <a:cs typeface="Cambria" pitchFamily="34" charset="-120"/>
               </a:rPr>
-              <a:t>Main sources</a:t>
+              <a:t>Risks</a:t>
             </a:r>
             <a:endParaRPr lang="en-US" sz="1600" dirty="0"/>
           </a:p>
@@ -8977,7 +9095,7 @@
                 <a:ea typeface="Calibri" pitchFamily="34" charset="-122"/>
                 <a:cs typeface="Calibri" pitchFamily="34" charset="-120"/>
               </a:rPr>
-              <a:t>Statistics South Africa: GDP by industry, Quarterly Labour Force Survey, Census of Commercial Agriculture.</a:t>
+              <a:t>Rainfall variability: one good La Niña season is enough to mask the value of the product.</a:t>
             </a:r>
             <a:endParaRPr lang="en-US" sz="1350" dirty="0"/>
           </a:p>
@@ -9001,7 +9119,7 @@
                 <a:ea typeface="Calibri" pitchFamily="34" charset="-122"/>
                 <a:cs typeface="Calibri" pitchFamily="34" charset="-120"/>
               </a:rPr>
-              <a:t>Department of Agriculture: Abstract of Agricultural Statistics.</a:t>
+              <a:t>Registration: fertilisers and soil amendments fall under Act 36 of 1947 and must be registered before commercial sale.</a:t>
             </a:r>
             <a:endParaRPr lang="en-US" sz="1350" dirty="0"/>
           </a:p>
@@ -9025,7 +9143,7 @@
                 <a:ea typeface="Calibri" pitchFamily="34" charset="-122"/>
                 <a:cs typeface="Calibri" pitchFamily="34" charset="-120"/>
               </a:rPr>
-              <a:t>Citrus Growers' Association; SAWIS for vineyard area.</a:t>
+              <a:t>The memory of cheap sodium-based polymers, which left a poor reputation in several regions.</a:t>
             </a:r>
             <a:endParaRPr lang="en-US" sz="1350" dirty="0"/>
           </a:p>
@@ -9049,10 +9167,71 @@
                 <a:ea typeface="Calibri" pitchFamily="34" charset="-122"/>
                 <a:cs typeface="Calibri" pitchFamily="34" charset="-120"/>
               </a:rPr>
-              <a:t>Department of Water and Sanitation; FAO (FAOSTAT, AQUASTAT); World Bank (WDI).</a:t>
+              <a:t>Farm cash flow after successive droughts, high input costs and a rand that raises the price of every imported input.</a:t>
             </a:r>
             <a:endParaRPr lang="en-US" sz="1350" dirty="0"/>
           </a:p>
+        </p:txBody>
+      </p:sp>
+      <p:sp>
+        <p:nvSpPr>
+          <p:cNvPr id="6" name="Text 4"/>
+          <p:cNvSpPr txBox="1"/>
+          <p:nvPr/>
+        </p:nvSpPr>
+        <p:spPr>
+          <a:xfrm>
+            <a:off x="6370168" y="1783080"/>
+            <a:ext cx="5227168" cy="411480"/>
+          </a:xfrm>
+          <a:prstGeom prst="rect">
+            <a:avLst/>
+          </a:prstGeom>
+          <a:noFill/>
+          <a:ln/>
+        </p:spPr>
+        <p:txBody>
+          <a:bodyPr wrap="square" lIns="0" tIns="0" rIns="0" bIns="0" rtlCol="0" anchor="ctr"/>
+          <a:lstStyle/>
+          <a:p>
+            <a:pPr algn="l" indent="0" marL="0">
+              <a:buNone/>
+            </a:pPr>
+            <a:r>
+              <a:rPr lang="en-US" sz="1600" b="1" dirty="0">
+                <a:solidFill>
+                  <a:srgbClr val="6B2A44"/>
+                </a:solidFill>
+                <a:latin typeface="Cambria" pitchFamily="34" charset="0"/>
+                <a:ea typeface="Cambria" pitchFamily="34" charset="-122"/>
+                <a:cs typeface="Cambria" pitchFamily="34" charset="-120"/>
+              </a:rPr>
+              <a:t>Our answers</a:t>
+            </a:r>
+            <a:endParaRPr lang="en-US" sz="1600" dirty="0"/>
+          </a:p>
+        </p:txBody>
+      </p:sp>
+      <p:sp>
+        <p:nvSpPr>
+          <p:cNvPr id="7" name="Text 5"/>
+          <p:cNvSpPr txBox="1"/>
+          <p:nvPr/>
+        </p:nvSpPr>
+        <p:spPr>
+          <a:xfrm>
+            <a:off x="6370168" y="2286000"/>
+            <a:ext cx="5227168" cy="2468880"/>
+          </a:xfrm>
+          <a:prstGeom prst="rect">
+            <a:avLst/>
+          </a:prstGeom>
+          <a:noFill/>
+          <a:ln/>
+        </p:spPr>
+        <p:txBody>
+          <a:bodyPr wrap="square" lIns="0" tIns="0" rIns="0" bIns="0" rtlCol="0" anchor="t"/>
+          <a:lstStyle/>
           <a:p>
             <a:pPr algn="l" marL="342900" indent="-342900">
               <a:lnSpc>
@@ -9073,71 +9252,10 @@
                 <a:ea typeface="Calibri" pitchFamily="34" charset="-122"/>
                 <a:cs typeface="Calibri" pitchFamily="34" charset="-120"/>
               </a:rPr>
-              <a:t>Photographs: Amada44 (Public domain), Barry haynes (CC BY-SA 4.0), Haytam123258 (CC BY-SA 4.0), Ossewa (CC BY-SA 4.0) — via Wikimedia Commons.</a:t>
+              <a:t>Run the trial over a full season against a control block, so the gain is measurable even in a favourable year.</a:t>
             </a:r>
             <a:endParaRPr lang="en-US" sz="1350" dirty="0"/>
           </a:p>
-        </p:txBody>
-      </p:sp>
-      <p:sp>
-        <p:nvSpPr>
-          <p:cNvPr id="6" name="Text 4"/>
-          <p:cNvSpPr txBox="1"/>
-          <p:nvPr/>
-        </p:nvSpPr>
-        <p:spPr>
-          <a:xfrm>
-            <a:off x="6370168" y="1783080"/>
-            <a:ext cx="5227168" cy="411480"/>
-          </a:xfrm>
-          <a:prstGeom prst="rect">
-            <a:avLst/>
-          </a:prstGeom>
-          <a:noFill/>
-          <a:ln/>
-        </p:spPr>
-        <p:txBody>
-          <a:bodyPr wrap="square" lIns="0" tIns="0" rIns="0" bIns="0" rtlCol="0" anchor="ctr"/>
-          <a:lstStyle/>
-          <a:p>
-            <a:pPr algn="l" indent="0" marL="0">
-              <a:buNone/>
-            </a:pPr>
-            <a:r>
-              <a:rPr lang="en-US" sz="1600" b="1" dirty="0">
-                <a:solidFill>
-                  <a:srgbClr val="6B2A44"/>
-                </a:solidFill>
-                <a:latin typeface="Cambria" pitchFamily="34" charset="0"/>
-                <a:ea typeface="Cambria" pitchFamily="34" charset="-122"/>
-                <a:cs typeface="Cambria" pitchFamily="34" charset="-120"/>
-              </a:rPr>
-              <a:t>Working assumptions</a:t>
-            </a:r>
-            <a:endParaRPr lang="en-US" sz="1600" dirty="0"/>
-          </a:p>
-        </p:txBody>
-      </p:sp>
-      <p:sp>
-        <p:nvSpPr>
-          <p:cNvPr id="7" name="Text 5"/>
-          <p:cNvSpPr txBox="1"/>
-          <p:nvPr/>
-        </p:nvSpPr>
-        <p:spPr>
-          <a:xfrm>
-            <a:off x="6370168" y="2286000"/>
-            <a:ext cx="5227168" cy="2468880"/>
-          </a:xfrm>
-          <a:prstGeom prst="rect">
-            <a:avLst/>
-          </a:prstGeom>
-          <a:noFill/>
-          <a:ln/>
-        </p:spPr>
-        <p:txBody>
-          <a:bodyPr wrap="square" lIns="0" tIns="0" rIns="0" bIns="0" rtlCol="0" anchor="t"/>
-          <a:lstStyle/>
           <a:p>
             <a:pPr algn="l" marL="342900" indent="-342900">
               <a:lnSpc>
@@ -9158,7 +9276,7 @@
                 <a:ea typeface="Calibri" pitchFamily="34" charset="-122"/>
                 <a:cs typeface="Calibri" pitchFamily="34" charset="-120"/>
               </a:rPr>
-              <a:t>Figures are rounded orders of magnitude, taken from the latest public data available.</a:t>
+              <a:t>Open the registration file in parallel with the first trials rather than after them.</a:t>
             </a:r>
             <a:endParaRPr lang="en-US" sz="1350" dirty="0"/>
           </a:p>
@@ -9182,7 +9300,7 @@
                 <a:ea typeface="Calibri" pitchFamily="34" charset="-122"/>
                 <a:cs typeface="Calibri" pitchFamily="34" charset="-120"/>
               </a:rPr>
-              <a:t>Water and yield gains are indicative and vary with soil, climate and crop.</a:t>
+              <a:t>Document the formulation: potassium, never sodium, and compatible with food crops.</a:t>
             </a:r>
             <a:endParaRPr lang="en-US" sz="1350" dirty="0"/>
           </a:p>
@@ -9206,7 +9324,7 @@
                 <a:ea typeface="Calibri" pitchFamily="34" charset="-122"/>
                 <a:cs typeface="Calibri" pitchFamily="34" charset="-120"/>
               </a:rPr>
-              <a:t>Commercial working document: figures to be refreshed before any official submission.</a:t>
+              <a:t>Spread the commitment: a useful life of 3 to 4 years amortises the cost over several seasons.</a:t>
             </a:r>
             <a:endParaRPr lang="en-US" sz="1350" dirty="0"/>
           </a:p>
@@ -9275,7 +9393,7 @@
                 <a:ea typeface="Calibri" pitchFamily="34" charset="-122"/>
                 <a:cs typeface="Calibri" pitchFamily="34" charset="-120"/>
               </a:rPr>
-              <a:t>Trial reports, certificates (SOHISCERT, Polymex and SGS analyses) and technical sheets: available on request.</a:t>
+              <a:t>Acrylamide analysis (Polymex laboratory, ISO 9001, content below 3.0 µg/g) and REACH / SVHC screening (SGS) are available on request, together with the SOHISCERT certificate valid until 4 September 2027.</a:t>
             </a:r>
             <a:endParaRPr lang="en-US" sz="1100" dirty="0"/>
           </a:p>
@@ -9374,6 +9492,605 @@
 <file path=ppt/slides/slide18.xml><?xml version="1.0" encoding="utf-8"?>
 <p:sld xmlns:a="http://schemas.openxmlformats.org/drawingml/2006/main" xmlns:r="http://schemas.openxmlformats.org/officeDocument/2006/relationships" xmlns:p="http://schemas.openxmlformats.org/presentationml/2006/main">
   <p:cSld name="Slide 18">
+    <p:bg>
+      <p:bgPr>
+        <a:solidFill>
+          <a:srgbClr val="FCFAFA"/>
+        </a:solidFill>
+      </p:bgPr>
+    </p:bg>
+    <p:spTree>
+      <p:nvGrpSpPr>
+        <p:cNvPr id="1" name=""/>
+        <p:cNvGrpSpPr/>
+        <p:nvPr/>
+      </p:nvGrpSpPr>
+      <p:grpSpPr>
+        <a:xfrm>
+          <a:off x="0" y="0"/>
+          <a:ext cx="0" cy="0"/>
+          <a:chOff x="0" y="0"/>
+          <a:chExt cx="0" cy="0"/>
+        </a:xfrm>
+      </p:grpSpPr>
+      <p:sp>
+        <p:nvSpPr>
+          <p:cNvPr id="2" name="Text 0"/>
+          <p:cNvSpPr txBox="1"/>
+          <p:nvPr/>
+        </p:nvSpPr>
+        <p:spPr>
+          <a:xfrm>
+            <a:off x="594360" y="411480"/>
+            <a:ext cx="10515600" cy="274320"/>
+          </a:xfrm>
+          <a:prstGeom prst="rect">
+            <a:avLst/>
+          </a:prstGeom>
+          <a:noFill/>
+          <a:ln/>
+        </p:spPr>
+        <p:txBody>
+          <a:bodyPr wrap="square" lIns="0" tIns="0" rIns="0" bIns="0" rtlCol="0" anchor="ctr"/>
+          <a:lstStyle/>
+          <a:p>
+            <a:pPr algn="l" indent="0" marL="0">
+              <a:buNone/>
+            </a:pPr>
+            <a:r>
+              <a:rPr lang="en-US" sz="1150" b="1" spc="200" kern="0" dirty="0">
+                <a:solidFill>
+                  <a:srgbClr val="C9A227"/>
+                </a:solidFill>
+                <a:latin typeface="Calibri" pitchFamily="34" charset="0"/>
+                <a:ea typeface="Calibri" pitchFamily="34" charset="-122"/>
+                <a:cs typeface="Calibri" pitchFamily="34" charset="-120"/>
+              </a:rPr>
+              <a:t>Sources</a:t>
+            </a:r>
+            <a:endParaRPr lang="en-US" sz="1150" dirty="0"/>
+          </a:p>
+        </p:txBody>
+      </p:sp>
+      <p:sp>
+        <p:nvSpPr>
+          <p:cNvPr id="3" name="Text 1"/>
+          <p:cNvSpPr txBox="1"/>
+          <p:nvPr/>
+        </p:nvSpPr>
+        <p:spPr>
+          <a:xfrm>
+            <a:off x="594360" y="731520"/>
+            <a:ext cx="10881360" cy="731520"/>
+          </a:xfrm>
+          <a:prstGeom prst="rect">
+            <a:avLst/>
+          </a:prstGeom>
+          <a:noFill/>
+          <a:ln/>
+        </p:spPr>
+        <p:txBody>
+          <a:bodyPr wrap="square" lIns="0" tIns="0" rIns="0" bIns="0" rtlCol="0" anchor="ctr"/>
+          <a:lstStyle/>
+          <a:p>
+            <a:pPr algn="l" indent="0" marL="0">
+              <a:buNone/>
+            </a:pPr>
+            <a:r>
+              <a:rPr lang="en-US" sz="3000" b="1" dirty="0">
+                <a:solidFill>
+                  <a:srgbClr val="3F162A"/>
+                </a:solidFill>
+                <a:latin typeface="Cambria" pitchFamily="34" charset="0"/>
+                <a:ea typeface="Cambria" pitchFamily="34" charset="-122"/>
+                <a:cs typeface="Cambria" pitchFamily="34" charset="-120"/>
+              </a:rPr>
+              <a:t>Sources and working assumptions</a:t>
+            </a:r>
+            <a:endParaRPr lang="en-US" sz="3000" dirty="0"/>
+          </a:p>
+        </p:txBody>
+      </p:sp>
+      <p:sp>
+        <p:nvSpPr>
+          <p:cNvPr id="4" name="Text 2"/>
+          <p:cNvSpPr txBox="1"/>
+          <p:nvPr/>
+        </p:nvSpPr>
+        <p:spPr>
+          <a:xfrm>
+            <a:off x="594360" y="1783080"/>
+            <a:ext cx="5227168" cy="411480"/>
+          </a:xfrm>
+          <a:prstGeom prst="rect">
+            <a:avLst/>
+          </a:prstGeom>
+          <a:noFill/>
+          <a:ln/>
+        </p:spPr>
+        <p:txBody>
+          <a:bodyPr wrap="square" lIns="0" tIns="0" rIns="0" bIns="0" rtlCol="0" anchor="ctr"/>
+          <a:lstStyle/>
+          <a:p>
+            <a:pPr algn="l" indent="0" marL="0">
+              <a:buNone/>
+            </a:pPr>
+            <a:r>
+              <a:rPr lang="en-US" sz="1600" b="1" dirty="0">
+                <a:solidFill>
+                  <a:srgbClr val="6B2A44"/>
+                </a:solidFill>
+                <a:latin typeface="Cambria" pitchFamily="34" charset="0"/>
+                <a:ea typeface="Cambria" pitchFamily="34" charset="-122"/>
+                <a:cs typeface="Cambria" pitchFamily="34" charset="-120"/>
+              </a:rPr>
+              <a:t>Main sources</a:t>
+            </a:r>
+            <a:endParaRPr lang="en-US" sz="1600" dirty="0"/>
+          </a:p>
+        </p:txBody>
+      </p:sp>
+      <p:sp>
+        <p:nvSpPr>
+          <p:cNvPr id="5" name="Text 3"/>
+          <p:cNvSpPr txBox="1"/>
+          <p:nvPr/>
+        </p:nvSpPr>
+        <p:spPr>
+          <a:xfrm>
+            <a:off x="594360" y="2286000"/>
+            <a:ext cx="5227168" cy="2468880"/>
+          </a:xfrm>
+          <a:prstGeom prst="rect">
+            <a:avLst/>
+          </a:prstGeom>
+          <a:noFill/>
+          <a:ln/>
+        </p:spPr>
+        <p:txBody>
+          <a:bodyPr wrap="square" lIns="0" tIns="0" rIns="0" bIns="0" rtlCol="0" anchor="t"/>
+          <a:lstStyle/>
+          <a:p>
+            <a:pPr algn="l" marL="342900" indent="-342900">
+              <a:lnSpc>
+                <a:spcPct val="122000"/>
+              </a:lnSpc>
+              <a:spcAft>
+                <a:spcPts val="1000"/>
+              </a:spcAft>
+              <a:buSzPct val="100000"/>
+              <a:buChar char="•"/>
+            </a:pPr>
+            <a:r>
+              <a:rPr lang="en-US" sz="1350" dirty="0">
+                <a:solidFill>
+                  <a:srgbClr val="3F3138"/>
+                </a:solidFill>
+                <a:latin typeface="Calibri" pitchFamily="34" charset="0"/>
+                <a:ea typeface="Calibri" pitchFamily="34" charset="-122"/>
+                <a:cs typeface="Calibri" pitchFamily="34" charset="-120"/>
+              </a:rPr>
+              <a:t>Statistics South Africa: GDP by industry, Quarterly Labour Force Survey, Census of Commercial Agriculture.</a:t>
+            </a:r>
+            <a:endParaRPr lang="en-US" sz="1350" dirty="0"/>
+          </a:p>
+          <a:p>
+            <a:pPr algn="l" marL="342900" indent="-342900">
+              <a:lnSpc>
+                <a:spcPct val="122000"/>
+              </a:lnSpc>
+              <a:spcAft>
+                <a:spcPts val="1000"/>
+              </a:spcAft>
+              <a:buSzPct val="100000"/>
+              <a:buChar char="•"/>
+            </a:pPr>
+            <a:r>
+              <a:rPr lang="en-US" sz="1350" dirty="0">
+                <a:solidFill>
+                  <a:srgbClr val="3F3138"/>
+                </a:solidFill>
+                <a:latin typeface="Calibri" pitchFamily="34" charset="0"/>
+                <a:ea typeface="Calibri" pitchFamily="34" charset="-122"/>
+                <a:cs typeface="Calibri" pitchFamily="34" charset="-120"/>
+              </a:rPr>
+              <a:t>Department of Agriculture: Abstract of Agricultural Statistics.</a:t>
+            </a:r>
+            <a:endParaRPr lang="en-US" sz="1350" dirty="0"/>
+          </a:p>
+          <a:p>
+            <a:pPr algn="l" marL="342900" indent="-342900">
+              <a:lnSpc>
+                <a:spcPct val="122000"/>
+              </a:lnSpc>
+              <a:spcAft>
+                <a:spcPts val="1000"/>
+              </a:spcAft>
+              <a:buSzPct val="100000"/>
+              <a:buChar char="•"/>
+            </a:pPr>
+            <a:r>
+              <a:rPr lang="en-US" sz="1350" dirty="0">
+                <a:solidFill>
+                  <a:srgbClr val="3F3138"/>
+                </a:solidFill>
+                <a:latin typeface="Calibri" pitchFamily="34" charset="0"/>
+                <a:ea typeface="Calibri" pitchFamily="34" charset="-122"/>
+                <a:cs typeface="Calibri" pitchFamily="34" charset="-120"/>
+              </a:rPr>
+              <a:t>Citrus Growers' Association; SAWIS for vineyard area.</a:t>
+            </a:r>
+            <a:endParaRPr lang="en-US" sz="1350" dirty="0"/>
+          </a:p>
+          <a:p>
+            <a:pPr algn="l" marL="342900" indent="-342900">
+              <a:lnSpc>
+                <a:spcPct val="122000"/>
+              </a:lnSpc>
+              <a:spcAft>
+                <a:spcPts val="1000"/>
+              </a:spcAft>
+              <a:buSzPct val="100000"/>
+              <a:buChar char="•"/>
+            </a:pPr>
+            <a:r>
+              <a:rPr lang="en-US" sz="1350" dirty="0">
+                <a:solidFill>
+                  <a:srgbClr val="3F3138"/>
+                </a:solidFill>
+                <a:latin typeface="Calibri" pitchFamily="34" charset="0"/>
+                <a:ea typeface="Calibri" pitchFamily="34" charset="-122"/>
+                <a:cs typeface="Calibri" pitchFamily="34" charset="-120"/>
+              </a:rPr>
+              <a:t>Department of Water and Sanitation; FAO (FAOSTAT, AQUASTAT); World Bank (WDI).</a:t>
+            </a:r>
+            <a:endParaRPr lang="en-US" sz="1350" dirty="0"/>
+          </a:p>
+          <a:p>
+            <a:pPr algn="l" marL="342900" indent="-342900">
+              <a:lnSpc>
+                <a:spcPct val="122000"/>
+              </a:lnSpc>
+              <a:spcAft>
+                <a:spcPts val="1000"/>
+              </a:spcAft>
+              <a:buSzPct val="100000"/>
+              <a:buChar char="•"/>
+            </a:pPr>
+            <a:r>
+              <a:rPr lang="en-US" sz="1350" dirty="0">
+                <a:solidFill>
+                  <a:srgbClr val="3F3138"/>
+                </a:solidFill>
+                <a:latin typeface="Calibri" pitchFamily="34" charset="0"/>
+                <a:ea typeface="Calibri" pitchFamily="34" charset="-122"/>
+                <a:cs typeface="Calibri" pitchFamily="34" charset="-120"/>
+              </a:rPr>
+              <a:t>UNCCD, Drought in Numbers 2022: number and duration of droughts, +29% since 2000 versus 1980–1999.</a:t>
+            </a:r>
+            <a:endParaRPr lang="en-US" sz="1350" dirty="0"/>
+          </a:p>
+          <a:p>
+            <a:pPr algn="l" marL="342900" indent="-342900">
+              <a:lnSpc>
+                <a:spcPct val="122000"/>
+              </a:lnSpc>
+              <a:spcAft>
+                <a:spcPts val="1000"/>
+              </a:spcAft>
+              <a:buSzPct val="100000"/>
+              <a:buChar char="•"/>
+            </a:pPr>
+            <a:r>
+              <a:rPr lang="en-US" sz="1350" dirty="0">
+                <a:solidFill>
+                  <a:srgbClr val="3F3138"/>
+                </a:solidFill>
+                <a:latin typeface="Calibri" pitchFamily="34" charset="0"/>
+                <a:ea typeface="Calibri" pitchFamily="34" charset="-122"/>
+                <a:cs typeface="Calibri" pitchFamily="34" charset="-120"/>
+              </a:rPr>
+              <a:t>UN-Water / FAO AQUASTAT, SDG indicator 6.4.2: definition and thresholds of water stress.</a:t>
+            </a:r>
+            <a:endParaRPr lang="en-US" sz="1350" dirty="0"/>
+          </a:p>
+        </p:txBody>
+      </p:sp>
+      <p:sp>
+        <p:nvSpPr>
+          <p:cNvPr id="6" name="Text 4"/>
+          <p:cNvSpPr txBox="1"/>
+          <p:nvPr/>
+        </p:nvSpPr>
+        <p:spPr>
+          <a:xfrm>
+            <a:off x="6370168" y="1783080"/>
+            <a:ext cx="5227168" cy="411480"/>
+          </a:xfrm>
+          <a:prstGeom prst="rect">
+            <a:avLst/>
+          </a:prstGeom>
+          <a:noFill/>
+          <a:ln/>
+        </p:spPr>
+        <p:txBody>
+          <a:bodyPr wrap="square" lIns="0" tIns="0" rIns="0" bIns="0" rtlCol="0" anchor="ctr"/>
+          <a:lstStyle/>
+          <a:p>
+            <a:pPr algn="l" indent="0" marL="0">
+              <a:buNone/>
+            </a:pPr>
+            <a:r>
+              <a:rPr lang="en-US" sz="1600" b="1" dirty="0">
+                <a:solidFill>
+                  <a:srgbClr val="6B2A44"/>
+                </a:solidFill>
+                <a:latin typeface="Cambria" pitchFamily="34" charset="0"/>
+                <a:ea typeface="Cambria" pitchFamily="34" charset="-122"/>
+                <a:cs typeface="Cambria" pitchFamily="34" charset="-120"/>
+              </a:rPr>
+              <a:t>Working assumptions</a:t>
+            </a:r>
+            <a:endParaRPr lang="en-US" sz="1600" dirty="0"/>
+          </a:p>
+        </p:txBody>
+      </p:sp>
+      <p:sp>
+        <p:nvSpPr>
+          <p:cNvPr id="7" name="Text 5"/>
+          <p:cNvSpPr txBox="1"/>
+          <p:nvPr/>
+        </p:nvSpPr>
+        <p:spPr>
+          <a:xfrm>
+            <a:off x="6370168" y="2286000"/>
+            <a:ext cx="5227168" cy="2468880"/>
+          </a:xfrm>
+          <a:prstGeom prst="rect">
+            <a:avLst/>
+          </a:prstGeom>
+          <a:noFill/>
+          <a:ln/>
+        </p:spPr>
+        <p:txBody>
+          <a:bodyPr wrap="square" lIns="0" tIns="0" rIns="0" bIns="0" rtlCol="0" anchor="t"/>
+          <a:lstStyle/>
+          <a:p>
+            <a:pPr algn="l" marL="342900" indent="-342900">
+              <a:lnSpc>
+                <a:spcPct val="122000"/>
+              </a:lnSpc>
+              <a:spcAft>
+                <a:spcPts val="1000"/>
+              </a:spcAft>
+              <a:buSzPct val="100000"/>
+              <a:buChar char="•"/>
+            </a:pPr>
+            <a:r>
+              <a:rPr lang="en-US" sz="1350" dirty="0">
+                <a:solidFill>
+                  <a:srgbClr val="3F3138"/>
+                </a:solidFill>
+                <a:latin typeface="Calibri" pitchFamily="34" charset="0"/>
+                <a:ea typeface="Calibri" pitchFamily="34" charset="-122"/>
+                <a:cs typeface="Calibri" pitchFamily="34" charset="-120"/>
+              </a:rPr>
+              <a:t>Figures are rounded orders of magnitude, taken from the latest public data available.</a:t>
+            </a:r>
+            <a:endParaRPr lang="en-US" sz="1350" dirty="0"/>
+          </a:p>
+          <a:p>
+            <a:pPr algn="l" marL="342900" indent="-342900">
+              <a:lnSpc>
+                <a:spcPct val="122000"/>
+              </a:lnSpc>
+              <a:spcAft>
+                <a:spcPts val="1000"/>
+              </a:spcAft>
+              <a:buSzPct val="100000"/>
+              <a:buChar char="•"/>
+            </a:pPr>
+            <a:r>
+              <a:rPr lang="en-US" sz="1350" dirty="0">
+                <a:solidFill>
+                  <a:srgbClr val="3F3138"/>
+                </a:solidFill>
+                <a:latin typeface="Calibri" pitchFamily="34" charset="0"/>
+                <a:ea typeface="Calibri" pitchFamily="34" charset="-122"/>
+                <a:cs typeface="Calibri" pitchFamily="34" charset="-120"/>
+              </a:rPr>
+              <a:t>Water and yield gains are indicative and vary with soil, climate and crop.</a:t>
+            </a:r>
+            <a:endParaRPr lang="en-US" sz="1350" dirty="0"/>
+          </a:p>
+          <a:p>
+            <a:pPr algn="l" marL="342900" indent="-342900">
+              <a:lnSpc>
+                <a:spcPct val="122000"/>
+              </a:lnSpc>
+              <a:spcAft>
+                <a:spcPts val="1000"/>
+              </a:spcAft>
+              <a:buSzPct val="100000"/>
+              <a:buChar char="•"/>
+            </a:pPr>
+            <a:r>
+              <a:rPr lang="en-US" sz="1350" dirty="0">
+                <a:solidFill>
+                  <a:srgbClr val="3F3138"/>
+                </a:solidFill>
+                <a:latin typeface="Calibri" pitchFamily="34" charset="0"/>
+                <a:ea typeface="Calibri" pitchFamily="34" charset="-122"/>
+                <a:cs typeface="Calibri" pitchFamily="34" charset="-120"/>
+              </a:rPr>
+              <a:t>Commercial working document: figures to be refreshed before any official submission.</a:t>
+            </a:r>
+            <a:endParaRPr lang="en-US" sz="1350" dirty="0"/>
+          </a:p>
+        </p:txBody>
+      </p:sp>
+      <p:sp>
+        <p:nvSpPr>
+          <p:cNvPr id="8" name="Shape 6"/>
+          <p:cNvSpPr/>
+          <p:nvPr/>
+        </p:nvSpPr>
+        <p:spPr>
+          <a:xfrm>
+            <a:off x="594360" y="4846320"/>
+            <a:ext cx="11002975" cy="960120"/>
+          </a:xfrm>
+          <a:prstGeom prst="roundRect">
+            <a:avLst>
+              <a:gd name="adj" fmla="val 7619"/>
+            </a:avLst>
+          </a:prstGeom>
+          <a:solidFill>
+            <a:srgbClr val="F5EFF1"/>
+          </a:solidFill>
+          <a:ln w="9525">
+            <a:solidFill>
+              <a:srgbClr val="E5D9DE"/>
+            </a:solidFill>
+            <a:prstDash val="solid"/>
+          </a:ln>
+        </p:spPr>
+      </p:sp>
+      <p:sp>
+        <p:nvSpPr>
+          <p:cNvPr id="9" name="Text 7"/>
+          <p:cNvSpPr txBox="1"/>
+          <p:nvPr/>
+        </p:nvSpPr>
+        <p:spPr>
+          <a:xfrm>
+            <a:off x="822960" y="4983480"/>
+            <a:ext cx="10545775" cy="713232"/>
+          </a:xfrm>
+          <a:prstGeom prst="rect">
+            <a:avLst/>
+          </a:prstGeom>
+          <a:noFill/>
+          <a:ln/>
+        </p:spPr>
+        <p:txBody>
+          <a:bodyPr wrap="square" lIns="0" tIns="0" rIns="0" bIns="0" rtlCol="0" anchor="t"/>
+          <a:lstStyle/>
+          <a:p>
+            <a:pPr algn="l" indent="0" marL="0">
+              <a:lnSpc>
+                <a:spcPct val="118000"/>
+              </a:lnSpc>
+              <a:buNone/>
+            </a:pPr>
+            <a:r>
+              <a:rPr lang="en-US" sz="1100" dirty="0">
+                <a:solidFill>
+                  <a:srgbClr val="7C6B73"/>
+                </a:solidFill>
+                <a:latin typeface="Calibri" pitchFamily="34" charset="0"/>
+                <a:ea typeface="Calibri" pitchFamily="34" charset="-122"/>
+                <a:cs typeface="Calibri" pitchFamily="34" charset="-120"/>
+              </a:rPr>
+              <a:t>Trial reports, certificates (SOHISCERT, Polymex and SGS analyses) and technical sheets: available on request.</a:t>
+            </a:r>
+            <a:endParaRPr lang="en-US" sz="1100" dirty="0"/>
+          </a:p>
+        </p:txBody>
+      </p:sp>
+      <p:sp>
+        <p:nvSpPr>
+          <p:cNvPr id="10" name="Text 8"/>
+          <p:cNvSpPr txBox="1"/>
+          <p:nvPr/>
+        </p:nvSpPr>
+        <p:spPr>
+          <a:xfrm>
+            <a:off x="502920" y="6382512"/>
+            <a:ext cx="8229600" cy="274320"/>
+          </a:xfrm>
+          <a:prstGeom prst="rect">
+            <a:avLst/>
+          </a:prstGeom>
+          <a:noFill/>
+          <a:ln/>
+        </p:spPr>
+        <p:txBody>
+          <a:bodyPr wrap="square" lIns="0" tIns="0" rIns="0" bIns="0" rtlCol="0" anchor="ctr"/>
+          <a:lstStyle/>
+          <a:p>
+            <a:pPr algn="l" indent="0" marL="0">
+              <a:buNone/>
+            </a:pPr>
+            <a:r>
+              <a:rPr lang="en-US" sz="950" dirty="0">
+                <a:solidFill>
+                  <a:srgbClr val="7C6B73">
+                    <a:alpha val="80000"/>
+                  </a:srgbClr>
+                </a:solidFill>
+                <a:latin typeface="Calibri" pitchFamily="34" charset="0"/>
+                <a:ea typeface="Calibri" pitchFamily="34" charset="-122"/>
+                <a:cs typeface="Calibri" pitchFamily="34" charset="-120"/>
+              </a:rPr>
+              <a:t>Green Solutions · South Africa market dossier</a:t>
+            </a:r>
+            <a:endParaRPr lang="en-US" sz="950" dirty="0"/>
+          </a:p>
+        </p:txBody>
+      </p:sp>
+      <p:sp>
+        <p:nvSpPr>
+          <p:cNvPr id="11" name="Text 9"/>
+          <p:cNvSpPr txBox="1"/>
+          <p:nvPr/>
+        </p:nvSpPr>
+        <p:spPr>
+          <a:xfrm>
+            <a:off x="11140135" y="6382512"/>
+            <a:ext cx="548640" cy="274320"/>
+          </a:xfrm>
+          <a:prstGeom prst="rect">
+            <a:avLst/>
+          </a:prstGeom>
+          <a:noFill/>
+          <a:ln/>
+        </p:spPr>
+        <p:txBody>
+          <a:bodyPr wrap="square" lIns="0" tIns="0" rIns="0" bIns="0" rtlCol="0" anchor="ctr"/>
+          <a:lstStyle/>
+          <a:p>
+            <a:pPr algn="r" indent="0" marL="0">
+              <a:buNone/>
+            </a:pPr>
+            <a:r>
+              <a:rPr lang="en-US" sz="950" dirty="0">
+                <a:solidFill>
+                  <a:srgbClr val="7C6B73">
+                    <a:alpha val="80000"/>
+                  </a:srgbClr>
+                </a:solidFill>
+                <a:latin typeface="Calibri" pitchFamily="34" charset="0"/>
+                <a:ea typeface="Calibri" pitchFamily="34" charset="-122"/>
+                <a:cs typeface="Calibri" pitchFamily="34" charset="-120"/>
+              </a:rPr>
+              <a:t>17</a:t>
+            </a:r>
+            <a:endParaRPr lang="en-US" sz="950" dirty="0"/>
+          </a:p>
+        </p:txBody>
+      </p:sp>
+    </p:spTree>
+  </p:cSld>
+  <p:clrMapOvr>
+    <a:masterClrMapping/>
+  </p:clrMapOvr>
+</p:sld>
+</file>
+
+<file path=ppt/slides/slide19.xml><?xml version="1.0" encoding="utf-8"?>
+<p:sld xmlns:a="http://schemas.openxmlformats.org/drawingml/2006/main" xmlns:r="http://schemas.openxmlformats.org/officeDocument/2006/relationships" xmlns:p="http://schemas.openxmlformats.org/presentationml/2006/main">
+  <p:cSld name="Slide 19">
     <p:spTree>
       <p:nvGrpSpPr>
         <p:cNvPr id="1" name=""/>
@@ -9567,7 +10284,7 @@
       </p:sp>
       <p:pic>
         <p:nvPicPr>
-          <p:cNvPr id="6" name="Image 1" descr="C:\Users\Utilisateur\dev\green-solutions-web\scripts\dossiers\sceau-aim-clair.png">    </p:cNvPr>
+          <p:cNvPr id="6" name="Image 1" descr="/workspace/scratch/50eb4f7d8e13/green-solutions-web/scripts/dossiers/sceau-aim-clair.png">    </p:cNvPr>
           <p:cNvPicPr>
             <a:picLocks noChangeAspect="1"/>
           </p:cNvPicPr>
@@ -9667,7 +10384,7 @@
                 <a:ea typeface="Calibri" pitchFamily="34" charset="-122"/>
                 <a:cs typeface="Calibri" pitchFamily="34" charset="-120"/>
               </a:rPr>
-              <a:t>17</a:t>
+              <a:t>18</a:t>
             </a:r>
             <a:endParaRPr lang="en-US" sz="950" dirty="0"/>
           </a:p>
@@ -10801,7 +11518,7 @@
                 <a:ea typeface="Calibri" pitchFamily="34" charset="-122"/>
                 <a:cs typeface="Calibri" pitchFamily="34" charset="-120"/>
               </a:rPr>
-              <a:t>WHERE THE WATER GOES</a:t>
+              <a:t>DROUGHT AND WATER STRESS</a:t>
             </a:r>
             <a:endParaRPr lang="en-US" sz="1150" dirty="0"/>
           </a:p>
@@ -10840,7 +11557,7 @@
                 <a:ea typeface="Cambria" pitchFamily="34" charset="-122"/>
                 <a:cs typeface="Cambria" pitchFamily="34" charset="-120"/>
               </a:rPr>
-              <a:t>Irrigation takes six litres in every ten</a:t>
+              <a:t>Pressure is rising, but risk remains local</a:t>
             </a:r>
             <a:endParaRPr lang="en-US" sz="3000" dirty="0"/>
           </a:p>
@@ -10922,7 +11639,7 @@
                 <a:ea typeface="Cambria" pitchFamily="34" charset="-122"/>
                 <a:cs typeface="Cambria" pitchFamily="34" charset="-120"/>
               </a:rPr>
-              <a:t>What this implies</a:t>
+              <a:t>Two indicators, not a shortcut</a:t>
             </a:r>
             <a:endParaRPr lang="en-US" sz="1300" dirty="0"/>
           </a:p>
@@ -10964,7 +11681,7 @@
                 <a:ea typeface="Calibri" pitchFamily="34" charset="-122"/>
                 <a:cs typeface="Calibri" pitchFamily="34" charset="-120"/>
               </a:rPr>
-              <a:t>A 10 % cut in irrigation demand releases close to half the volume used by industry, mining and every other non-municipal use combined.</a:t>
+              <a:t>Worldwide, the number and duration of droughts have risen by 29% since 2000 compared with the two previous decades.</a:t>
             </a:r>
             <a:endParaRPr lang="en-US" sz="1200" dirty="0"/>
           </a:p>
@@ -10993,7 +11710,7 @@
                 <a:ea typeface="Calibri" pitchFamily="34" charset="-122"/>
                 <a:cs typeface="Calibri" pitchFamily="34" charset="-120"/>
               </a:rPr>
-              <a:t>That is why the effort belongs in the field rather than in the other uses.</a:t>
+              <a:t>Water stress measures something different: withdrawals as a share of renewable resources available after environmental needs. This global signal is therefore not a country forecast; it must be read alongside local rainfall, aquifers, seasons and uses.</a:t>
             </a:r>
             <a:endParaRPr lang="en-US" sz="1200" dirty="0"/>
           </a:p>
@@ -11146,7 +11863,7 @@
                 <a:ea typeface="Calibri" pitchFamily="34" charset="-122"/>
                 <a:cs typeface="Calibri" pitchFamily="34" charset="-120"/>
               </a:rPr>
-              <a:t>ECONOMY AND FOOD SECURITY</a:t>
+              <a:t>WHERE THE WATER GOES</a:t>
             </a:r>
             <a:endParaRPr lang="en-US" sz="1150" dirty="0"/>
           </a:p>
@@ -11185,26 +11902,42 @@
                 <a:ea typeface="Cambria" pitchFamily="34" charset="-122"/>
                 <a:cs typeface="Cambria" pitchFamily="34" charset="-120"/>
               </a:rPr>
-              <a:t>A net food exporter with a two-speed farm economy</a:t>
+              <a:t>Irrigation takes six litres in every ten</a:t>
             </a:r>
             <a:endParaRPr lang="en-US" sz="3000" dirty="0"/>
           </a:p>
         </p:txBody>
       </p:sp>
-      <p:sp>
-        <p:nvSpPr>
-          <p:cNvPr id="4" name="Shape 2"/>
+      <p:graphicFrame>
+        <p:nvGraphicFramePr>
+          <p:cNvPr id="4" name="Chart 0" descr=""/>
+          <p:cNvGraphicFramePr/>
+          <p:nvPr/>
+        </p:nvGraphicFramePr>
+        <p:xfrm>
+          <a:off x="594360" y="1783080"/>
+          <a:ext cx="7360920" cy="3977640"/>
+        </p:xfrm>
+        <a:graphic xmlns:a="http://schemas.openxmlformats.org/drawingml/2006/main">
+          <a:graphicData uri="http://schemas.openxmlformats.org/drawingml/2006/chart">
+            <c:chart xmlns:c="http://schemas.openxmlformats.org/drawingml/2006/chart" r:id="rId1"/>
+          </a:graphicData>
+        </a:graphic>
+      </p:graphicFrame>
+      <p:sp>
+        <p:nvSpPr>
+          <p:cNvPr id="5" name="Shape 2"/>
           <p:cNvSpPr/>
           <p:nvPr/>
         </p:nvSpPr>
         <p:spPr>
           <a:xfrm>
-            <a:off x="594360" y="1874520"/>
-            <a:ext cx="2545004" cy="2514600"/>
+            <a:off x="8275320" y="1783080"/>
+            <a:ext cx="3291840" cy="3977640"/>
           </a:xfrm>
           <a:prstGeom prst="roundRect">
             <a:avLst>
-              <a:gd name="adj" fmla="val 3636"/>
+              <a:gd name="adj" fmla="val 2778"/>
             </a:avLst>
           </a:prstGeom>
           <a:solidFill>
@@ -11220,14 +11953,14 @@
       </p:sp>
       <p:sp>
         <p:nvSpPr>
-          <p:cNvPr id="5" name="Text 3"/>
-          <p:cNvSpPr txBox="1"/>
-          <p:nvPr/>
-        </p:nvSpPr>
-        <p:spPr>
-          <a:xfrm>
-            <a:off x="777240" y="2148840"/>
-            <a:ext cx="2179244" cy="960120"/>
+          <p:cNvPr id="6" name="Text 3"/>
+          <p:cNvSpPr txBox="1"/>
+          <p:nvPr/>
+        </p:nvSpPr>
+        <p:spPr>
+          <a:xfrm>
+            <a:off x="8503920" y="2011680"/>
+            <a:ext cx="2834640" cy="457200"/>
           </a:xfrm>
           <a:prstGeom prst="rect">
             <a:avLst/>
@@ -11239,11 +11972,11 @@
           <a:bodyPr wrap="square" lIns="0" tIns="0" rIns="0" bIns="0" rtlCol="0" anchor="ctr"/>
           <a:lstStyle/>
           <a:p>
-            <a:pPr algn="ctr" indent="0" marL="0">
-              <a:buNone/>
-            </a:pPr>
-            <a:r>
-              <a:rPr lang="en-US" sz="3800" b="1" dirty="0">
+            <a:pPr algn="l" indent="0" marL="0">
+              <a:buNone/>
+            </a:pPr>
+            <a:r>
+              <a:rPr lang="en-US" sz="1300" b="1" dirty="0">
                 <a:solidFill>
                   <a:srgbClr val="6B2A44"/>
                 </a:solidFill>
@@ -11251,388 +11984,22 @@
                 <a:ea typeface="Cambria" pitchFamily="34" charset="-122"/>
                 <a:cs typeface="Cambria" pitchFamily="34" charset="-120"/>
               </a:rPr>
-              <a:t>No. 2</a:t>
-            </a:r>
-            <a:endParaRPr lang="en-US" sz="3800" dirty="0"/>
-          </a:p>
-        </p:txBody>
-      </p:sp>
-      <p:sp>
-        <p:nvSpPr>
-          <p:cNvPr id="6" name="Text 4"/>
-          <p:cNvSpPr txBox="1"/>
-          <p:nvPr/>
-        </p:nvSpPr>
-        <p:spPr>
-          <a:xfrm>
-            <a:off x="795528" y="3154680"/>
-            <a:ext cx="2142668" cy="1051560"/>
-          </a:xfrm>
-          <a:prstGeom prst="rect">
-            <a:avLst/>
-          </a:prstGeom>
-          <a:noFill/>
-          <a:ln/>
-        </p:spPr>
-        <p:txBody>
-          <a:bodyPr wrap="square" lIns="0" tIns="0" rIns="0" bIns="0" rtlCol="0" anchor="t"/>
-          <a:lstStyle/>
-          <a:p>
-            <a:pPr algn="ctr" indent="0" marL="0">
-              <a:lnSpc>
-                <a:spcPct val="118000"/>
-              </a:lnSpc>
-              <a:buNone/>
-            </a:pPr>
-            <a:r>
-              <a:rPr lang="en-US" sz="1250" dirty="0">
-                <a:solidFill>
-                  <a:srgbClr val="3F3138"/>
-                </a:solidFill>
-                <a:latin typeface="Calibri" pitchFamily="34" charset="0"/>
-                <a:ea typeface="Calibri" pitchFamily="34" charset="-122"/>
-                <a:cs typeface="Calibri" pitchFamily="34" charset="-120"/>
-              </a:rPr>
-              <a:t>exporter of fresh citrus in the world</a:t>
-            </a:r>
-            <a:endParaRPr lang="en-US" sz="1250" dirty="0"/>
-          </a:p>
-        </p:txBody>
-      </p:sp>
-      <p:sp>
-        <p:nvSpPr>
-          <p:cNvPr id="7" name="Shape 5"/>
-          <p:cNvSpPr/>
-          <p:nvPr/>
-        </p:nvSpPr>
-        <p:spPr>
-          <a:xfrm>
-            <a:off x="3413684" y="1874520"/>
-            <a:ext cx="2545004" cy="2514600"/>
-          </a:xfrm>
-          <a:prstGeom prst="roundRect">
-            <a:avLst>
-              <a:gd name="adj" fmla="val 3636"/>
-            </a:avLst>
-          </a:prstGeom>
-          <a:solidFill>
-            <a:srgbClr val="F5EFF1"/>
-          </a:solidFill>
-          <a:ln w="9525">
-            <a:solidFill>
-              <a:srgbClr val="E5D9DE"/>
-            </a:solidFill>
-            <a:prstDash val="solid"/>
-          </a:ln>
-        </p:spPr>
-      </p:sp>
-      <p:sp>
-        <p:nvSpPr>
-          <p:cNvPr id="8" name="Text 6"/>
-          <p:cNvSpPr txBox="1"/>
-          <p:nvPr/>
-        </p:nvSpPr>
-        <p:spPr>
-          <a:xfrm>
-            <a:off x="3596564" y="2148840"/>
-            <a:ext cx="2179244" cy="960120"/>
-          </a:xfrm>
-          <a:prstGeom prst="rect">
-            <a:avLst/>
-          </a:prstGeom>
-          <a:noFill/>
-          <a:ln/>
-        </p:spPr>
-        <p:txBody>
-          <a:bodyPr wrap="square" lIns="0" tIns="0" rIns="0" bIns="0" rtlCol="0" anchor="ctr"/>
-          <a:lstStyle/>
-          <a:p>
-            <a:pPr algn="ctr" indent="0" marL="0">
-              <a:buNone/>
-            </a:pPr>
-            <a:r>
-              <a:rPr lang="en-US" sz="3800" b="1" dirty="0">
-                <a:solidFill>
-                  <a:srgbClr val="6B2A44"/>
-                </a:solidFill>
-                <a:latin typeface="Cambria" pitchFamily="34" charset="0"/>
-                <a:ea typeface="Cambria" pitchFamily="34" charset="-122"/>
-                <a:cs typeface="Cambria" pitchFamily="34" charset="-120"/>
-              </a:rPr>
-              <a:t>≈ 0.9 M</a:t>
-            </a:r>
-            <a:endParaRPr lang="en-US" sz="3800" dirty="0"/>
-          </a:p>
-        </p:txBody>
-      </p:sp>
-      <p:sp>
-        <p:nvSpPr>
-          <p:cNvPr id="9" name="Text 7"/>
-          <p:cNvSpPr txBox="1"/>
-          <p:nvPr/>
-        </p:nvSpPr>
-        <p:spPr>
-          <a:xfrm>
-            <a:off x="3614852" y="3154680"/>
-            <a:ext cx="2142668" cy="1051560"/>
-          </a:xfrm>
-          <a:prstGeom prst="rect">
-            <a:avLst/>
-          </a:prstGeom>
-          <a:noFill/>
-          <a:ln/>
-        </p:spPr>
-        <p:txBody>
-          <a:bodyPr wrap="square" lIns="0" tIns="0" rIns="0" bIns="0" rtlCol="0" anchor="t"/>
-          <a:lstStyle/>
-          <a:p>
-            <a:pPr algn="ctr" indent="0" marL="0">
-              <a:lnSpc>
-                <a:spcPct val="118000"/>
-              </a:lnSpc>
-              <a:buNone/>
-            </a:pPr>
-            <a:r>
-              <a:rPr lang="en-US" sz="1250" dirty="0">
-                <a:solidFill>
-                  <a:srgbClr val="3F3138"/>
-                </a:solidFill>
-                <a:latin typeface="Calibri" pitchFamily="34" charset="0"/>
-                <a:ea typeface="Calibri" pitchFamily="34" charset="-122"/>
-                <a:cs typeface="Calibri" pitchFamily="34" charset="-120"/>
-              </a:rPr>
-              <a:t>people employed in primary agriculture</a:t>
-            </a:r>
-            <a:endParaRPr lang="en-US" sz="1250" dirty="0"/>
-          </a:p>
-        </p:txBody>
-      </p:sp>
-      <p:sp>
-        <p:nvSpPr>
-          <p:cNvPr id="10" name="Shape 8"/>
-          <p:cNvSpPr/>
-          <p:nvPr/>
-        </p:nvSpPr>
-        <p:spPr>
-          <a:xfrm>
-            <a:off x="6233008" y="1874520"/>
-            <a:ext cx="2545004" cy="2514600"/>
-          </a:xfrm>
-          <a:prstGeom prst="roundRect">
-            <a:avLst>
-              <a:gd name="adj" fmla="val 3636"/>
-            </a:avLst>
-          </a:prstGeom>
-          <a:solidFill>
-            <a:srgbClr val="F5EFF1"/>
-          </a:solidFill>
-          <a:ln w="9525">
-            <a:solidFill>
-              <a:srgbClr val="E5D9DE"/>
-            </a:solidFill>
-            <a:prstDash val="solid"/>
-          </a:ln>
-        </p:spPr>
-      </p:sp>
-      <p:sp>
-        <p:nvSpPr>
-          <p:cNvPr id="11" name="Text 9"/>
-          <p:cNvSpPr txBox="1"/>
-          <p:nvPr/>
-        </p:nvSpPr>
-        <p:spPr>
-          <a:xfrm>
-            <a:off x="6415888" y="2148840"/>
-            <a:ext cx="2179244" cy="960120"/>
-          </a:xfrm>
-          <a:prstGeom prst="rect">
-            <a:avLst/>
-          </a:prstGeom>
-          <a:noFill/>
-          <a:ln/>
-        </p:spPr>
-        <p:txBody>
-          <a:bodyPr wrap="square" lIns="0" tIns="0" rIns="0" bIns="0" rtlCol="0" anchor="ctr"/>
-          <a:lstStyle/>
-          <a:p>
-            <a:pPr algn="ctr" indent="0" marL="0">
-              <a:buNone/>
-            </a:pPr>
-            <a:r>
-              <a:rPr lang="en-US" sz="3800" b="1" dirty="0">
-                <a:solidFill>
-                  <a:srgbClr val="6B2A44"/>
-                </a:solidFill>
-                <a:latin typeface="Cambria" pitchFamily="34" charset="0"/>
-                <a:ea typeface="Cambria" pitchFamily="34" charset="-122"/>
-                <a:cs typeface="Cambria" pitchFamily="34" charset="-120"/>
-              </a:rPr>
-              <a:t>≈ 40,000</a:t>
-            </a:r>
-            <a:endParaRPr lang="en-US" sz="3800" dirty="0"/>
-          </a:p>
-        </p:txBody>
-      </p:sp>
-      <p:sp>
-        <p:nvSpPr>
-          <p:cNvPr id="12" name="Text 10"/>
-          <p:cNvSpPr txBox="1"/>
-          <p:nvPr/>
-        </p:nvSpPr>
-        <p:spPr>
-          <a:xfrm>
-            <a:off x="6434176" y="3154680"/>
-            <a:ext cx="2142668" cy="1051560"/>
-          </a:xfrm>
-          <a:prstGeom prst="rect">
-            <a:avLst/>
-          </a:prstGeom>
-          <a:noFill/>
-          <a:ln/>
-        </p:spPr>
-        <p:txBody>
-          <a:bodyPr wrap="square" lIns="0" tIns="0" rIns="0" bIns="0" rtlCol="0" anchor="t"/>
-          <a:lstStyle/>
-          <a:p>
-            <a:pPr algn="ctr" indent="0" marL="0">
-              <a:lnSpc>
-                <a:spcPct val="118000"/>
-              </a:lnSpc>
-              <a:buNone/>
-            </a:pPr>
-            <a:r>
-              <a:rPr lang="en-US" sz="1250" dirty="0">
-                <a:solidFill>
-                  <a:srgbClr val="3F3138"/>
-                </a:solidFill>
-                <a:latin typeface="Calibri" pitchFamily="34" charset="0"/>
-                <a:ea typeface="Calibri" pitchFamily="34" charset="-122"/>
-                <a:cs typeface="Calibri" pitchFamily="34" charset="-120"/>
-              </a:rPr>
-              <a:t>commercial farming units in the latest census</a:t>
-            </a:r>
-            <a:endParaRPr lang="en-US" sz="1250" dirty="0"/>
-          </a:p>
-        </p:txBody>
-      </p:sp>
-      <p:sp>
-        <p:nvSpPr>
-          <p:cNvPr id="13" name="Shape 11"/>
-          <p:cNvSpPr/>
-          <p:nvPr/>
-        </p:nvSpPr>
-        <p:spPr>
-          <a:xfrm>
-            <a:off x="9052331" y="1874520"/>
-            <a:ext cx="2545004" cy="2514600"/>
-          </a:xfrm>
-          <a:prstGeom prst="roundRect">
-            <a:avLst>
-              <a:gd name="adj" fmla="val 3636"/>
-            </a:avLst>
-          </a:prstGeom>
-          <a:solidFill>
-            <a:srgbClr val="F5EFF1"/>
-          </a:solidFill>
-          <a:ln w="9525">
-            <a:solidFill>
-              <a:srgbClr val="E5D9DE"/>
-            </a:solidFill>
-            <a:prstDash val="solid"/>
-          </a:ln>
-        </p:spPr>
-      </p:sp>
-      <p:sp>
-        <p:nvSpPr>
-          <p:cNvPr id="14" name="Text 12"/>
-          <p:cNvSpPr txBox="1"/>
-          <p:nvPr/>
-        </p:nvSpPr>
-        <p:spPr>
-          <a:xfrm>
-            <a:off x="9235211" y="2148840"/>
-            <a:ext cx="2179244" cy="960120"/>
-          </a:xfrm>
-          <a:prstGeom prst="rect">
-            <a:avLst/>
-          </a:prstGeom>
-          <a:noFill/>
-          <a:ln/>
-        </p:spPr>
-        <p:txBody>
-          <a:bodyPr wrap="square" lIns="0" tIns="0" rIns="0" bIns="0" rtlCol="0" anchor="ctr"/>
-          <a:lstStyle/>
-          <a:p>
-            <a:pPr algn="ctr" indent="0" marL="0">
-              <a:buNone/>
-            </a:pPr>
-            <a:r>
-              <a:rPr lang="en-US" sz="3800" b="1" dirty="0">
-                <a:solidFill>
-                  <a:srgbClr val="6B2A44"/>
-                </a:solidFill>
-                <a:latin typeface="Cambria" pitchFamily="34" charset="0"/>
-                <a:ea typeface="Cambria" pitchFamily="34" charset="-122"/>
-                <a:cs typeface="Cambria" pitchFamily="34" charset="-120"/>
-              </a:rPr>
-              <a:t>≈ 2.3 M</a:t>
-            </a:r>
-            <a:endParaRPr lang="en-US" sz="3800" dirty="0"/>
-          </a:p>
-        </p:txBody>
-      </p:sp>
-      <p:sp>
-        <p:nvSpPr>
-          <p:cNvPr id="15" name="Text 13"/>
-          <p:cNvSpPr txBox="1"/>
-          <p:nvPr/>
-        </p:nvSpPr>
-        <p:spPr>
-          <a:xfrm>
-            <a:off x="9253499" y="3154680"/>
-            <a:ext cx="2142668" cy="1051560"/>
-          </a:xfrm>
-          <a:prstGeom prst="rect">
-            <a:avLst/>
-          </a:prstGeom>
-          <a:noFill/>
-          <a:ln/>
-        </p:spPr>
-        <p:txBody>
-          <a:bodyPr wrap="square" lIns="0" tIns="0" rIns="0" bIns="0" rtlCol="0" anchor="t"/>
-          <a:lstStyle/>
-          <a:p>
-            <a:pPr algn="ctr" indent="0" marL="0">
-              <a:lnSpc>
-                <a:spcPct val="118000"/>
-              </a:lnSpc>
-              <a:buNone/>
-            </a:pPr>
-            <a:r>
-              <a:rPr lang="en-US" sz="1250" dirty="0">
-                <a:solidFill>
-                  <a:srgbClr val="3F3138"/>
-                </a:solidFill>
-                <a:latin typeface="Calibri" pitchFamily="34" charset="0"/>
-                <a:ea typeface="Calibri" pitchFamily="34" charset="-122"/>
-                <a:cs typeface="Calibri" pitchFamily="34" charset="-120"/>
-              </a:rPr>
-              <a:t>households farming on a small scale, mostly for their own food</a:t>
-            </a:r>
-            <a:endParaRPr lang="en-US" sz="1250" dirty="0"/>
-          </a:p>
-        </p:txBody>
-      </p:sp>
-      <p:sp>
-        <p:nvSpPr>
-          <p:cNvPr id="16" name="Text 14"/>
-          <p:cNvSpPr txBox="1"/>
-          <p:nvPr/>
-        </p:nvSpPr>
-        <p:spPr>
-          <a:xfrm>
-            <a:off x="594360" y="4709160"/>
-            <a:ext cx="11002975" cy="1097280"/>
+              <a:t>What this implies</a:t>
+            </a:r>
+            <a:endParaRPr lang="en-US" sz="1300" dirty="0"/>
+          </a:p>
+        </p:txBody>
+      </p:sp>
+      <p:sp>
+        <p:nvSpPr>
+          <p:cNvPr id="7" name="Text 4"/>
+          <p:cNvSpPr txBox="1"/>
+          <p:nvPr/>
+        </p:nvSpPr>
+        <p:spPr>
+          <a:xfrm>
+            <a:off x="8503920" y="2560320"/>
+            <a:ext cx="2834640" cy="3017520"/>
           </a:xfrm>
           <a:prstGeom prst="rect">
             <a:avLst/>
@@ -11646,12 +12013,12 @@
           <a:p>
             <a:pPr algn="l" indent="0" marL="0">
               <a:lnSpc>
-                <a:spcPct val="130000"/>
+                <a:spcPct val="125000"/>
               </a:lnSpc>
               <a:buNone/>
             </a:pPr>
             <a:r>
-              <a:rPr lang="en-US" sz="1350" dirty="0">
+              <a:rPr lang="en-US" sz="1200" dirty="0">
                 <a:solidFill>
                   <a:srgbClr val="3F3138"/>
                 </a:solidFill>
@@ -11659,15 +12026,44 @@
                 <a:ea typeface="Calibri" pitchFamily="34" charset="-122"/>
                 <a:cs typeface="Calibri" pitchFamily="34" charset="-120"/>
               </a:rPr>
-              <a:t>Commercial agriculture earns foreign exchange from fruit, wine, nuts and sugar, while millions of households farm small plots with little access to water. Water-use licensing, electricity load-shedding and land reform all weigh on investment decisions.</a:t>
-            </a:r>
-            <a:endParaRPr lang="en-US" sz="1350" dirty="0"/>
-          </a:p>
-        </p:txBody>
-      </p:sp>
-      <p:sp>
-        <p:nvSpPr>
-          <p:cNvPr id="17" name="Text 15"/>
+              <a:t>A 10 % cut in irrigation demand releases close to half the volume used by industry, mining and every other non-municipal use combined.</a:t>
+            </a:r>
+            <a:endParaRPr lang="en-US" sz="1200" dirty="0"/>
+          </a:p>
+          <a:p>
+            <a:pPr algn="l" indent="0" marL="0">
+              <a:lnSpc>
+                <a:spcPct val="125000"/>
+              </a:lnSpc>
+              <a:buNone/>
+            </a:pPr>
+            <a:endParaRPr lang="en-US" sz="1200" dirty="0"/>
+          </a:p>
+          <a:p>
+            <a:pPr algn="l" indent="0" marL="0">
+              <a:lnSpc>
+                <a:spcPct val="125000"/>
+              </a:lnSpc>
+              <a:buNone/>
+            </a:pPr>
+            <a:r>
+              <a:rPr lang="en-US" sz="1200" dirty="0">
+                <a:solidFill>
+                  <a:srgbClr val="3F3138"/>
+                </a:solidFill>
+                <a:latin typeface="Calibri" pitchFamily="34" charset="0"/>
+                <a:ea typeface="Calibri" pitchFamily="34" charset="-122"/>
+                <a:cs typeface="Calibri" pitchFamily="34" charset="-120"/>
+              </a:rPr>
+              <a:t>That is why the effort belongs in the field rather than in the other uses.</a:t>
+            </a:r>
+            <a:endParaRPr lang="en-US" sz="1200" dirty="0"/>
+          </a:p>
+        </p:txBody>
+      </p:sp>
+      <p:sp>
+        <p:nvSpPr>
+          <p:cNvPr id="8" name="Text 5"/>
           <p:cNvSpPr txBox="1"/>
           <p:nvPr/>
         </p:nvSpPr>
@@ -11708,7 +12104,7 @@
       </p:sp>
       <p:sp>
         <p:nvSpPr>
-          <p:cNvPr id="18" name="Text 16"/>
+          <p:cNvPr id="9" name="Text 6"/>
           <p:cNvSpPr txBox="1"/>
           <p:nvPr/>
         </p:nvSpPr>
@@ -11812,7 +12208,7 @@
                 <a:ea typeface="Calibri" pitchFamily="34" charset="-122"/>
                 <a:cs typeface="Calibri" pitchFamily="34" charset="-120"/>
               </a:rPr>
-              <a:t>THE MAIN CROPS</a:t>
+              <a:t>ECONOMY AND FOOD SECURITY</a:t>
             </a:r>
             <a:endParaRPr lang="en-US" sz="1150" dirty="0"/>
           </a:p>
@@ -11851,42 +12247,26 @@
                 <a:ea typeface="Cambria" pitchFamily="34" charset="-122"/>
                 <a:cs typeface="Cambria" pitchFamily="34" charset="-120"/>
               </a:rPr>
-              <a:t>Five crops carry the volume and the value</a:t>
+              <a:t>A net food exporter with a two-speed farm economy</a:t>
             </a:r>
             <a:endParaRPr lang="en-US" sz="3000" dirty="0"/>
           </a:p>
         </p:txBody>
       </p:sp>
-      <p:graphicFrame>
-        <p:nvGraphicFramePr>
-          <p:cNvPr id="4" name="Chart 0" descr=""/>
-          <p:cNvGraphicFramePr/>
-          <p:nvPr/>
-        </p:nvGraphicFramePr>
-        <p:xfrm>
-          <a:off x="594360" y="1783080"/>
-          <a:ext cx="7360920" cy="3977640"/>
-        </p:xfrm>
-        <a:graphic xmlns:a="http://schemas.openxmlformats.org/drawingml/2006/main">
-          <a:graphicData uri="http://schemas.openxmlformats.org/drawingml/2006/chart">
-            <c:chart xmlns:c="http://schemas.openxmlformats.org/drawingml/2006/chart" r:id="rId1"/>
-          </a:graphicData>
-        </a:graphic>
-      </p:graphicFrame>
-      <p:sp>
-        <p:nvSpPr>
-          <p:cNvPr id="5" name="Shape 2"/>
+      <p:sp>
+        <p:nvSpPr>
+          <p:cNvPr id="4" name="Shape 2"/>
           <p:cNvSpPr/>
           <p:nvPr/>
         </p:nvSpPr>
         <p:spPr>
           <a:xfrm>
-            <a:off x="8275320" y="1783080"/>
-            <a:ext cx="3291840" cy="3977640"/>
+            <a:off x="594360" y="1874520"/>
+            <a:ext cx="2545004" cy="2514600"/>
           </a:xfrm>
           <a:prstGeom prst="roundRect">
             <a:avLst>
-              <a:gd name="adj" fmla="val 2778"/>
+              <a:gd name="adj" fmla="val 3636"/>
             </a:avLst>
           </a:prstGeom>
           <a:solidFill>
@@ -11902,14 +12282,14 @@
       </p:sp>
       <p:sp>
         <p:nvSpPr>
-          <p:cNvPr id="6" name="Text 3"/>
-          <p:cNvSpPr txBox="1"/>
-          <p:nvPr/>
-        </p:nvSpPr>
-        <p:spPr>
-          <a:xfrm>
-            <a:off x="8503920" y="2011680"/>
-            <a:ext cx="2834640" cy="457200"/>
+          <p:cNvPr id="5" name="Text 3"/>
+          <p:cNvSpPr txBox="1"/>
+          <p:nvPr/>
+        </p:nvSpPr>
+        <p:spPr>
+          <a:xfrm>
+            <a:off x="777240" y="2148840"/>
+            <a:ext cx="2179244" cy="960120"/>
           </a:xfrm>
           <a:prstGeom prst="rect">
             <a:avLst/>
@@ -11921,11 +12301,11 @@
           <a:bodyPr wrap="square" lIns="0" tIns="0" rIns="0" bIns="0" rtlCol="0" anchor="ctr"/>
           <a:lstStyle/>
           <a:p>
-            <a:pPr algn="l" indent="0" marL="0">
-              <a:buNone/>
-            </a:pPr>
-            <a:r>
-              <a:rPr lang="en-US" sz="1300" b="1" dirty="0">
+            <a:pPr algn="ctr" indent="0" marL="0">
+              <a:buNone/>
+            </a:pPr>
+            <a:r>
+              <a:rPr lang="en-US" sz="3800" b="1" dirty="0">
                 <a:solidFill>
                   <a:srgbClr val="6B2A44"/>
                 </a:solidFill>
@@ -11933,22 +12313,388 @@
                 <a:ea typeface="Cambria" pitchFamily="34" charset="-122"/>
                 <a:cs typeface="Cambria" pitchFamily="34" charset="-120"/>
               </a:rPr>
-              <a:t>Reading</a:t>
-            </a:r>
-            <a:endParaRPr lang="en-US" sz="1300" dirty="0"/>
-          </a:p>
-        </p:txBody>
-      </p:sp>
-      <p:sp>
-        <p:nvSpPr>
-          <p:cNvPr id="7" name="Text 4"/>
-          <p:cNvSpPr txBox="1"/>
-          <p:nvPr/>
-        </p:nvSpPr>
-        <p:spPr>
-          <a:xfrm>
-            <a:off x="8503920" y="2560320"/>
-            <a:ext cx="2834640" cy="3017520"/>
+              <a:t>No. 2</a:t>
+            </a:r>
+            <a:endParaRPr lang="en-US" sz="3800" dirty="0"/>
+          </a:p>
+        </p:txBody>
+      </p:sp>
+      <p:sp>
+        <p:nvSpPr>
+          <p:cNvPr id="6" name="Text 4"/>
+          <p:cNvSpPr txBox="1"/>
+          <p:nvPr/>
+        </p:nvSpPr>
+        <p:spPr>
+          <a:xfrm>
+            <a:off x="795528" y="3154680"/>
+            <a:ext cx="2142668" cy="1051560"/>
+          </a:xfrm>
+          <a:prstGeom prst="rect">
+            <a:avLst/>
+          </a:prstGeom>
+          <a:noFill/>
+          <a:ln/>
+        </p:spPr>
+        <p:txBody>
+          <a:bodyPr wrap="square" lIns="0" tIns="0" rIns="0" bIns="0" rtlCol="0" anchor="t"/>
+          <a:lstStyle/>
+          <a:p>
+            <a:pPr algn="ctr" indent="0" marL="0">
+              <a:lnSpc>
+                <a:spcPct val="118000"/>
+              </a:lnSpc>
+              <a:buNone/>
+            </a:pPr>
+            <a:r>
+              <a:rPr lang="en-US" sz="1250" dirty="0">
+                <a:solidFill>
+                  <a:srgbClr val="3F3138"/>
+                </a:solidFill>
+                <a:latin typeface="Calibri" pitchFamily="34" charset="0"/>
+                <a:ea typeface="Calibri" pitchFamily="34" charset="-122"/>
+                <a:cs typeface="Calibri" pitchFamily="34" charset="-120"/>
+              </a:rPr>
+              <a:t>exporter of fresh citrus in the world</a:t>
+            </a:r>
+            <a:endParaRPr lang="en-US" sz="1250" dirty="0"/>
+          </a:p>
+        </p:txBody>
+      </p:sp>
+      <p:sp>
+        <p:nvSpPr>
+          <p:cNvPr id="7" name="Shape 5"/>
+          <p:cNvSpPr/>
+          <p:nvPr/>
+        </p:nvSpPr>
+        <p:spPr>
+          <a:xfrm>
+            <a:off x="3413684" y="1874520"/>
+            <a:ext cx="2545004" cy="2514600"/>
+          </a:xfrm>
+          <a:prstGeom prst="roundRect">
+            <a:avLst>
+              <a:gd name="adj" fmla="val 3636"/>
+            </a:avLst>
+          </a:prstGeom>
+          <a:solidFill>
+            <a:srgbClr val="F5EFF1"/>
+          </a:solidFill>
+          <a:ln w="9525">
+            <a:solidFill>
+              <a:srgbClr val="E5D9DE"/>
+            </a:solidFill>
+            <a:prstDash val="solid"/>
+          </a:ln>
+        </p:spPr>
+      </p:sp>
+      <p:sp>
+        <p:nvSpPr>
+          <p:cNvPr id="8" name="Text 6"/>
+          <p:cNvSpPr txBox="1"/>
+          <p:nvPr/>
+        </p:nvSpPr>
+        <p:spPr>
+          <a:xfrm>
+            <a:off x="3596564" y="2148840"/>
+            <a:ext cx="2179244" cy="960120"/>
+          </a:xfrm>
+          <a:prstGeom prst="rect">
+            <a:avLst/>
+          </a:prstGeom>
+          <a:noFill/>
+          <a:ln/>
+        </p:spPr>
+        <p:txBody>
+          <a:bodyPr wrap="square" lIns="0" tIns="0" rIns="0" bIns="0" rtlCol="0" anchor="ctr"/>
+          <a:lstStyle/>
+          <a:p>
+            <a:pPr algn="ctr" indent="0" marL="0">
+              <a:buNone/>
+            </a:pPr>
+            <a:r>
+              <a:rPr lang="en-US" sz="3800" b="1" dirty="0">
+                <a:solidFill>
+                  <a:srgbClr val="6B2A44"/>
+                </a:solidFill>
+                <a:latin typeface="Cambria" pitchFamily="34" charset="0"/>
+                <a:ea typeface="Cambria" pitchFamily="34" charset="-122"/>
+                <a:cs typeface="Cambria" pitchFamily="34" charset="-120"/>
+              </a:rPr>
+              <a:t>≈ 0.9 M</a:t>
+            </a:r>
+            <a:endParaRPr lang="en-US" sz="3800" dirty="0"/>
+          </a:p>
+        </p:txBody>
+      </p:sp>
+      <p:sp>
+        <p:nvSpPr>
+          <p:cNvPr id="9" name="Text 7"/>
+          <p:cNvSpPr txBox="1"/>
+          <p:nvPr/>
+        </p:nvSpPr>
+        <p:spPr>
+          <a:xfrm>
+            <a:off x="3614852" y="3154680"/>
+            <a:ext cx="2142668" cy="1051560"/>
+          </a:xfrm>
+          <a:prstGeom prst="rect">
+            <a:avLst/>
+          </a:prstGeom>
+          <a:noFill/>
+          <a:ln/>
+        </p:spPr>
+        <p:txBody>
+          <a:bodyPr wrap="square" lIns="0" tIns="0" rIns="0" bIns="0" rtlCol="0" anchor="t"/>
+          <a:lstStyle/>
+          <a:p>
+            <a:pPr algn="ctr" indent="0" marL="0">
+              <a:lnSpc>
+                <a:spcPct val="118000"/>
+              </a:lnSpc>
+              <a:buNone/>
+            </a:pPr>
+            <a:r>
+              <a:rPr lang="en-US" sz="1250" dirty="0">
+                <a:solidFill>
+                  <a:srgbClr val="3F3138"/>
+                </a:solidFill>
+                <a:latin typeface="Calibri" pitchFamily="34" charset="0"/>
+                <a:ea typeface="Calibri" pitchFamily="34" charset="-122"/>
+                <a:cs typeface="Calibri" pitchFamily="34" charset="-120"/>
+              </a:rPr>
+              <a:t>people employed in primary agriculture</a:t>
+            </a:r>
+            <a:endParaRPr lang="en-US" sz="1250" dirty="0"/>
+          </a:p>
+        </p:txBody>
+      </p:sp>
+      <p:sp>
+        <p:nvSpPr>
+          <p:cNvPr id="10" name="Shape 8"/>
+          <p:cNvSpPr/>
+          <p:nvPr/>
+        </p:nvSpPr>
+        <p:spPr>
+          <a:xfrm>
+            <a:off x="6233008" y="1874520"/>
+            <a:ext cx="2545004" cy="2514600"/>
+          </a:xfrm>
+          <a:prstGeom prst="roundRect">
+            <a:avLst>
+              <a:gd name="adj" fmla="val 3636"/>
+            </a:avLst>
+          </a:prstGeom>
+          <a:solidFill>
+            <a:srgbClr val="F5EFF1"/>
+          </a:solidFill>
+          <a:ln w="9525">
+            <a:solidFill>
+              <a:srgbClr val="E5D9DE"/>
+            </a:solidFill>
+            <a:prstDash val="solid"/>
+          </a:ln>
+        </p:spPr>
+      </p:sp>
+      <p:sp>
+        <p:nvSpPr>
+          <p:cNvPr id="11" name="Text 9"/>
+          <p:cNvSpPr txBox="1"/>
+          <p:nvPr/>
+        </p:nvSpPr>
+        <p:spPr>
+          <a:xfrm>
+            <a:off x="6415888" y="2148840"/>
+            <a:ext cx="2179244" cy="960120"/>
+          </a:xfrm>
+          <a:prstGeom prst="rect">
+            <a:avLst/>
+          </a:prstGeom>
+          <a:noFill/>
+          <a:ln/>
+        </p:spPr>
+        <p:txBody>
+          <a:bodyPr wrap="square" lIns="0" tIns="0" rIns="0" bIns="0" rtlCol="0" anchor="ctr"/>
+          <a:lstStyle/>
+          <a:p>
+            <a:pPr algn="ctr" indent="0" marL="0">
+              <a:buNone/>
+            </a:pPr>
+            <a:r>
+              <a:rPr lang="en-US" sz="3800" b="1" dirty="0">
+                <a:solidFill>
+                  <a:srgbClr val="6B2A44"/>
+                </a:solidFill>
+                <a:latin typeface="Cambria" pitchFamily="34" charset="0"/>
+                <a:ea typeface="Cambria" pitchFamily="34" charset="-122"/>
+                <a:cs typeface="Cambria" pitchFamily="34" charset="-120"/>
+              </a:rPr>
+              <a:t>≈ 40,000</a:t>
+            </a:r>
+            <a:endParaRPr lang="en-US" sz="3800" dirty="0"/>
+          </a:p>
+        </p:txBody>
+      </p:sp>
+      <p:sp>
+        <p:nvSpPr>
+          <p:cNvPr id="12" name="Text 10"/>
+          <p:cNvSpPr txBox="1"/>
+          <p:nvPr/>
+        </p:nvSpPr>
+        <p:spPr>
+          <a:xfrm>
+            <a:off x="6434176" y="3154680"/>
+            <a:ext cx="2142668" cy="1051560"/>
+          </a:xfrm>
+          <a:prstGeom prst="rect">
+            <a:avLst/>
+          </a:prstGeom>
+          <a:noFill/>
+          <a:ln/>
+        </p:spPr>
+        <p:txBody>
+          <a:bodyPr wrap="square" lIns="0" tIns="0" rIns="0" bIns="0" rtlCol="0" anchor="t"/>
+          <a:lstStyle/>
+          <a:p>
+            <a:pPr algn="ctr" indent="0" marL="0">
+              <a:lnSpc>
+                <a:spcPct val="118000"/>
+              </a:lnSpc>
+              <a:buNone/>
+            </a:pPr>
+            <a:r>
+              <a:rPr lang="en-US" sz="1250" dirty="0">
+                <a:solidFill>
+                  <a:srgbClr val="3F3138"/>
+                </a:solidFill>
+                <a:latin typeface="Calibri" pitchFamily="34" charset="0"/>
+                <a:ea typeface="Calibri" pitchFamily="34" charset="-122"/>
+                <a:cs typeface="Calibri" pitchFamily="34" charset="-120"/>
+              </a:rPr>
+              <a:t>commercial farming units in the latest census</a:t>
+            </a:r>
+            <a:endParaRPr lang="en-US" sz="1250" dirty="0"/>
+          </a:p>
+        </p:txBody>
+      </p:sp>
+      <p:sp>
+        <p:nvSpPr>
+          <p:cNvPr id="13" name="Shape 11"/>
+          <p:cNvSpPr/>
+          <p:nvPr/>
+        </p:nvSpPr>
+        <p:spPr>
+          <a:xfrm>
+            <a:off x="9052331" y="1874520"/>
+            <a:ext cx="2545004" cy="2514600"/>
+          </a:xfrm>
+          <a:prstGeom prst="roundRect">
+            <a:avLst>
+              <a:gd name="adj" fmla="val 3636"/>
+            </a:avLst>
+          </a:prstGeom>
+          <a:solidFill>
+            <a:srgbClr val="F5EFF1"/>
+          </a:solidFill>
+          <a:ln w="9525">
+            <a:solidFill>
+              <a:srgbClr val="E5D9DE"/>
+            </a:solidFill>
+            <a:prstDash val="solid"/>
+          </a:ln>
+        </p:spPr>
+      </p:sp>
+      <p:sp>
+        <p:nvSpPr>
+          <p:cNvPr id="14" name="Text 12"/>
+          <p:cNvSpPr txBox="1"/>
+          <p:nvPr/>
+        </p:nvSpPr>
+        <p:spPr>
+          <a:xfrm>
+            <a:off x="9235211" y="2148840"/>
+            <a:ext cx="2179244" cy="960120"/>
+          </a:xfrm>
+          <a:prstGeom prst="rect">
+            <a:avLst/>
+          </a:prstGeom>
+          <a:noFill/>
+          <a:ln/>
+        </p:spPr>
+        <p:txBody>
+          <a:bodyPr wrap="square" lIns="0" tIns="0" rIns="0" bIns="0" rtlCol="0" anchor="ctr"/>
+          <a:lstStyle/>
+          <a:p>
+            <a:pPr algn="ctr" indent="0" marL="0">
+              <a:buNone/>
+            </a:pPr>
+            <a:r>
+              <a:rPr lang="en-US" sz="3800" b="1" dirty="0">
+                <a:solidFill>
+                  <a:srgbClr val="6B2A44"/>
+                </a:solidFill>
+                <a:latin typeface="Cambria" pitchFamily="34" charset="0"/>
+                <a:ea typeface="Cambria" pitchFamily="34" charset="-122"/>
+                <a:cs typeface="Cambria" pitchFamily="34" charset="-120"/>
+              </a:rPr>
+              <a:t>≈ 2.3 M</a:t>
+            </a:r>
+            <a:endParaRPr lang="en-US" sz="3800" dirty="0"/>
+          </a:p>
+        </p:txBody>
+      </p:sp>
+      <p:sp>
+        <p:nvSpPr>
+          <p:cNvPr id="15" name="Text 13"/>
+          <p:cNvSpPr txBox="1"/>
+          <p:nvPr/>
+        </p:nvSpPr>
+        <p:spPr>
+          <a:xfrm>
+            <a:off x="9253499" y="3154680"/>
+            <a:ext cx="2142668" cy="1051560"/>
+          </a:xfrm>
+          <a:prstGeom prst="rect">
+            <a:avLst/>
+          </a:prstGeom>
+          <a:noFill/>
+          <a:ln/>
+        </p:spPr>
+        <p:txBody>
+          <a:bodyPr wrap="square" lIns="0" tIns="0" rIns="0" bIns="0" rtlCol="0" anchor="t"/>
+          <a:lstStyle/>
+          <a:p>
+            <a:pPr algn="ctr" indent="0" marL="0">
+              <a:lnSpc>
+                <a:spcPct val="118000"/>
+              </a:lnSpc>
+              <a:buNone/>
+            </a:pPr>
+            <a:r>
+              <a:rPr lang="en-US" sz="1250" dirty="0">
+                <a:solidFill>
+                  <a:srgbClr val="3F3138"/>
+                </a:solidFill>
+                <a:latin typeface="Calibri" pitchFamily="34" charset="0"/>
+                <a:ea typeface="Calibri" pitchFamily="34" charset="-122"/>
+                <a:cs typeface="Calibri" pitchFamily="34" charset="-120"/>
+              </a:rPr>
+              <a:t>households farming on a small scale, mostly for their own food</a:t>
+            </a:r>
+            <a:endParaRPr lang="en-US" sz="1250" dirty="0"/>
+          </a:p>
+        </p:txBody>
+      </p:sp>
+      <p:sp>
+        <p:nvSpPr>
+          <p:cNvPr id="16" name="Text 14"/>
+          <p:cNvSpPr txBox="1"/>
+          <p:nvPr/>
+        </p:nvSpPr>
+        <p:spPr>
+          <a:xfrm>
+            <a:off x="594360" y="4709160"/>
+            <a:ext cx="11002975" cy="1097280"/>
           </a:xfrm>
           <a:prstGeom prst="rect">
             <a:avLst/>
@@ -11962,12 +12708,12 @@
           <a:p>
             <a:pPr algn="l" indent="0" marL="0">
               <a:lnSpc>
-                <a:spcPct val="125000"/>
+                <a:spcPct val="130000"/>
               </a:lnSpc>
               <a:buNone/>
             </a:pPr>
             <a:r>
-              <a:rPr lang="en-US" sz="1200" dirty="0">
+              <a:rPr lang="en-US" sz="1350" dirty="0">
                 <a:solidFill>
                   <a:srgbClr val="3F3138"/>
                 </a:solidFill>
@@ -11975,44 +12721,15 @@
                 <a:ea typeface="Calibri" pitchFamily="34" charset="-122"/>
                 <a:cs typeface="Calibri" pitchFamily="34" charset="-120"/>
               </a:rPr>
-              <a:t>Citrus and grapes are irrigated, export-bound and priced per carton: there, a litre saved converts into margin. The country ships about 2.6 million tonnes of citrus a year, second only to Spain.</a:t>
-            </a:r>
-            <a:endParaRPr lang="en-US" sz="1200" dirty="0"/>
-          </a:p>
-          <a:p>
-            <a:pPr algn="l" indent="0" marL="0">
-              <a:lnSpc>
-                <a:spcPct val="125000"/>
-              </a:lnSpc>
-              <a:buNone/>
-            </a:pPr>
-            <a:endParaRPr lang="en-US" sz="1200" dirty="0"/>
-          </a:p>
-          <a:p>
-            <a:pPr algn="l" indent="0" marL="0">
-              <a:lnSpc>
-                <a:spcPct val="125000"/>
-              </a:lnSpc>
-              <a:buNone/>
-            </a:pPr>
-            <a:r>
-              <a:rPr lang="en-US" sz="1200" dirty="0">
-                <a:solidFill>
-                  <a:srgbClr val="3F3138"/>
-                </a:solidFill>
-                <a:latin typeface="Calibri" pitchFamily="34" charset="0"/>
-                <a:ea typeface="Calibri" pitchFamily="34" charset="-122"/>
-                <a:cs typeface="Calibri" pitchFamily="34" charset="-120"/>
-              </a:rPr>
-              <a:t>* Maize is mostly rain-fed and swings by several million tonnes between seasons.</a:t>
-            </a:r>
-            <a:endParaRPr lang="en-US" sz="1200" dirty="0"/>
-          </a:p>
-        </p:txBody>
-      </p:sp>
-      <p:sp>
-        <p:nvSpPr>
-          <p:cNvPr id="8" name="Text 5"/>
+              <a:t>Commercial agriculture earns foreign exchange from fruit, wine, nuts and sugar, while millions of households farm small plots with little access to water. Water-use licensing, electricity load-shedding and land reform all weigh on investment decisions.</a:t>
+            </a:r>
+            <a:endParaRPr lang="en-US" sz="1350" dirty="0"/>
+          </a:p>
+        </p:txBody>
+      </p:sp>
+      <p:sp>
+        <p:nvSpPr>
+          <p:cNvPr id="17" name="Text 15"/>
           <p:cNvSpPr txBox="1"/>
           <p:nvPr/>
         </p:nvSpPr>
@@ -12053,7 +12770,7 @@
       </p:sp>
       <p:sp>
         <p:nvSpPr>
-          <p:cNvPr id="9" name="Text 6"/>
+          <p:cNvPr id="18" name="Text 16"/>
           <p:cNvSpPr txBox="1"/>
           <p:nvPr/>
         </p:nvSpPr>
@@ -12157,7 +12874,7 @@
                 <a:ea typeface="Calibri" pitchFamily="34" charset="-122"/>
                 <a:cs typeface="Calibri" pitchFamily="34" charset="-120"/>
               </a:rPr>
-              <a:t>FIRST SECTOR</a:t>
+              <a:t>THE MAIN CROPS</a:t>
             </a:r>
             <a:endParaRPr lang="en-US" sz="1150" dirty="0"/>
           </a:p>
@@ -12196,46 +12913,104 @@
                 <a:ea typeface="Cambria" pitchFamily="34" charset="-122"/>
                 <a:cs typeface="Cambria" pitchFamily="34" charset="-120"/>
               </a:rPr>
-              <a:t>Citrus: an export leader on a tight water allocation</a:t>
+              <a:t>Five crops carry the volume and the value</a:t>
             </a:r>
             <a:endParaRPr lang="en-US" sz="3000" dirty="0"/>
           </a:p>
         </p:txBody>
       </p:sp>
-      <p:pic>
-        <p:nvPicPr>
-          <p:cNvPr id="4" name="Image 0" descr="preencoded.png">    </p:cNvPr>
-          <p:cNvPicPr>
-            <a:picLocks noChangeAspect="1"/>
-          </p:cNvPicPr>
-          <p:nvPr/>
-        </p:nvPicPr>
-        <p:blipFill>
-          <a:blip r:embed="rId1"/>
-          <a:stretch>
-            <a:fillRect/>
-          </a:stretch>
-        </p:blipFill>
-        <p:spPr>
-          <a:xfrm>
-            <a:off x="6522415" y="1783080"/>
-            <a:ext cx="5074920" cy="3794760"/>
-          </a:xfrm>
-          <a:prstGeom prst="rect">
-            <a:avLst/>
-          </a:prstGeom>
-        </p:spPr>
-      </p:pic>
-      <p:sp>
-        <p:nvSpPr>
-          <p:cNvPr id="5" name="Text 2"/>
-          <p:cNvSpPr txBox="1"/>
-          <p:nvPr/>
-        </p:nvSpPr>
-        <p:spPr>
-          <a:xfrm>
-            <a:off x="594360" y="1783080"/>
-            <a:ext cx="5379415" cy="4251960"/>
+      <p:graphicFrame>
+        <p:nvGraphicFramePr>
+          <p:cNvPr id="4" name="Chart 0" descr=""/>
+          <p:cNvGraphicFramePr/>
+          <p:nvPr/>
+        </p:nvGraphicFramePr>
+        <p:xfrm>
+          <a:off x="594360" y="1783080"/>
+          <a:ext cx="7360920" cy="3977640"/>
+        </p:xfrm>
+        <a:graphic xmlns:a="http://schemas.openxmlformats.org/drawingml/2006/main">
+          <a:graphicData uri="http://schemas.openxmlformats.org/drawingml/2006/chart">
+            <c:chart xmlns:c="http://schemas.openxmlformats.org/drawingml/2006/chart" r:id="rId1"/>
+          </a:graphicData>
+        </a:graphic>
+      </p:graphicFrame>
+      <p:sp>
+        <p:nvSpPr>
+          <p:cNvPr id="5" name="Shape 2"/>
+          <p:cNvSpPr/>
+          <p:nvPr/>
+        </p:nvSpPr>
+        <p:spPr>
+          <a:xfrm>
+            <a:off x="8275320" y="1783080"/>
+            <a:ext cx="3291840" cy="3977640"/>
+          </a:xfrm>
+          <a:prstGeom prst="roundRect">
+            <a:avLst>
+              <a:gd name="adj" fmla="val 2778"/>
+            </a:avLst>
+          </a:prstGeom>
+          <a:solidFill>
+            <a:srgbClr val="F5EFF1"/>
+          </a:solidFill>
+          <a:ln w="9525">
+            <a:solidFill>
+              <a:srgbClr val="E5D9DE"/>
+            </a:solidFill>
+            <a:prstDash val="solid"/>
+          </a:ln>
+        </p:spPr>
+      </p:sp>
+      <p:sp>
+        <p:nvSpPr>
+          <p:cNvPr id="6" name="Text 3"/>
+          <p:cNvSpPr txBox="1"/>
+          <p:nvPr/>
+        </p:nvSpPr>
+        <p:spPr>
+          <a:xfrm>
+            <a:off x="8503920" y="2011680"/>
+            <a:ext cx="2834640" cy="457200"/>
+          </a:xfrm>
+          <a:prstGeom prst="rect">
+            <a:avLst/>
+          </a:prstGeom>
+          <a:noFill/>
+          <a:ln/>
+        </p:spPr>
+        <p:txBody>
+          <a:bodyPr wrap="square" lIns="0" tIns="0" rIns="0" bIns="0" rtlCol="0" anchor="ctr"/>
+          <a:lstStyle/>
+          <a:p>
+            <a:pPr algn="l" indent="0" marL="0">
+              <a:buNone/>
+            </a:pPr>
+            <a:r>
+              <a:rPr lang="en-US" sz="1300" b="1" dirty="0">
+                <a:solidFill>
+                  <a:srgbClr val="6B2A44"/>
+                </a:solidFill>
+                <a:latin typeface="Cambria" pitchFamily="34" charset="0"/>
+                <a:ea typeface="Cambria" pitchFamily="34" charset="-122"/>
+                <a:cs typeface="Cambria" pitchFamily="34" charset="-120"/>
+              </a:rPr>
+              <a:t>Reading</a:t>
+            </a:r>
+            <a:endParaRPr lang="en-US" sz="1300" dirty="0"/>
+          </a:p>
+        </p:txBody>
+      </p:sp>
+      <p:sp>
+        <p:nvSpPr>
+          <p:cNvPr id="7" name="Text 4"/>
+          <p:cNvSpPr txBox="1"/>
+          <p:nvPr/>
+        </p:nvSpPr>
+        <p:spPr>
+          <a:xfrm>
+            <a:off x="8503920" y="2560320"/>
+            <a:ext cx="2834640" cy="3017520"/>
           </a:xfrm>
           <a:prstGeom prst="rect">
             <a:avLst/>
@@ -12247,18 +13022,14 @@
           <a:bodyPr wrap="square" lIns="0" tIns="0" rIns="0" bIns="0" rtlCol="0" anchor="t"/>
           <a:lstStyle/>
           <a:p>
-            <a:pPr algn="l" marL="342900" indent="-342900">
+            <a:pPr algn="l" indent="0" marL="0">
               <a:lnSpc>
-                <a:spcPct val="122000"/>
+                <a:spcPct val="125000"/>
               </a:lnSpc>
-              <a:spcAft>
-                <a:spcPts val="1100"/>
-              </a:spcAft>
-              <a:buSzPct val="100000"/>
-              <a:buChar char="•"/>
-            </a:pPr>
-            <a:r>
-              <a:rPr lang="en-US" sz="1400" dirty="0">
+              <a:buNone/>
+            </a:pPr>
+            <a:r>
+              <a:rPr lang="en-US" sz="1200" dirty="0">
                 <a:solidFill>
                   <a:srgbClr val="3F3138"/>
                 </a:solidFill>
@@ -12266,23 +13037,28 @@
                 <a:ea typeface="Calibri" pitchFamily="34" charset="-122"/>
                 <a:cs typeface="Calibri" pitchFamily="34" charset="-120"/>
               </a:rPr>
-              <a:t>Citrus is grown in Limpopo, the Eastern Cape, Mpumalanga and the Western Cape, mostly under micro-irrigation.</a:t>
-            </a:r>
-            <a:endParaRPr lang="en-US" sz="1400" dirty="0"/>
-          </a:p>
-          <a:p>
-            <a:pPr algn="l" marL="342900" indent="-342900">
+              <a:t>Citrus and grapes are irrigated, export-bound and priced per carton: there, a litre saved converts into margin. The country ships about 2.6 million tonnes of citrus a year, second only to Spain.</a:t>
+            </a:r>
+            <a:endParaRPr lang="en-US" sz="1200" dirty="0"/>
+          </a:p>
+          <a:p>
+            <a:pPr algn="l" indent="0" marL="0">
               <a:lnSpc>
-                <a:spcPct val="122000"/>
+                <a:spcPct val="125000"/>
               </a:lnSpc>
-              <a:spcAft>
-                <a:spcPts val="1100"/>
-              </a:spcAft>
-              <a:buSzPct val="100000"/>
-              <a:buChar char="•"/>
-            </a:pPr>
-            <a:r>
-              <a:rPr lang="en-US" sz="1400" dirty="0">
+              <a:buNone/>
+            </a:pPr>
+            <a:endParaRPr lang="en-US" sz="1200" dirty="0"/>
+          </a:p>
+          <a:p>
+            <a:pPr algn="l" indent="0" marL="0">
+              <a:lnSpc>
+                <a:spcPct val="125000"/>
+              </a:lnSpc>
+              <a:buNone/>
+            </a:pPr>
+            <a:r>
+              <a:rPr lang="en-US" sz="1200" dirty="0">
                 <a:solidFill>
                   <a:srgbClr val="3F3138"/>
                 </a:solidFill>
@@ -12290,87 +13066,15 @@
                 <a:ea typeface="Calibri" pitchFamily="34" charset="-122"/>
                 <a:cs typeface="Calibri" pitchFamily="34" charset="-120"/>
               </a:rPr>
-              <a:t>Orchards draw on allocated river and dam water, which is cut back in drought years.</a:t>
-            </a:r>
-            <a:endParaRPr lang="en-US" sz="1400" dirty="0"/>
-          </a:p>
-          <a:p>
-            <a:pPr algn="l" marL="342900" indent="-342900">
-              <a:lnSpc>
-                <a:spcPct val="122000"/>
-              </a:lnSpc>
-              <a:spcAft>
-                <a:spcPts val="1100"/>
-              </a:spcAft>
-              <a:buSzPct val="100000"/>
-              <a:buChar char="•"/>
-            </a:pPr>
-            <a:r>
-              <a:rPr lang="en-US" sz="1400" dirty="0">
-                <a:solidFill>
-                  <a:srgbClr val="3F3138"/>
-                </a:solidFill>
-                <a:latin typeface="Calibri" pitchFamily="34" charset="0"/>
-                <a:ea typeface="Calibri" pitchFamily="34" charset="-122"/>
-                <a:cs typeface="Calibri" pitchFamily="34" charset="-120"/>
-              </a:rPr>
-              <a:t>Load-shedding interrupts pumping schedules, so trees can miss irrigations during hot, dry spells.</a:t>
-            </a:r>
-            <a:endParaRPr lang="en-US" sz="1400" dirty="0"/>
-          </a:p>
-          <a:p>
-            <a:pPr algn="l" marL="342900" indent="-342900">
-              <a:lnSpc>
-                <a:spcPct val="122000"/>
-              </a:lnSpc>
-              <a:spcAft>
-                <a:spcPts val="1100"/>
-              </a:spcAft>
-              <a:buSzPct val="100000"/>
-              <a:buChar char="•"/>
-            </a:pPr>
-            <a:r>
-              <a:rPr lang="en-US" sz="1400" dirty="0">
-                <a:solidFill>
-                  <a:srgbClr val="3F3138"/>
-                </a:solidFill>
-                <a:latin typeface="Calibri" pitchFamily="34" charset="0"/>
-                <a:ea typeface="Calibri" pitchFamily="34" charset="-122"/>
-                <a:cs typeface="Calibri" pitchFamily="34" charset="-120"/>
-              </a:rPr>
-              <a:t>Export markets pay for size and appearance: steady soil moisture protects both at fruit set and sizing.</a:t>
-            </a:r>
-            <a:endParaRPr lang="en-US" sz="1400" dirty="0"/>
-          </a:p>
-          <a:p>
-            <a:pPr algn="l" marL="342900" indent="-342900">
-              <a:lnSpc>
-                <a:spcPct val="122000"/>
-              </a:lnSpc>
-              <a:spcAft>
-                <a:spcPts val="1100"/>
-              </a:spcAft>
-              <a:buSzPct val="100000"/>
-              <a:buChar char="•"/>
-            </a:pPr>
-            <a:r>
-              <a:rPr lang="en-US" sz="1400" dirty="0">
-                <a:solidFill>
-                  <a:srgbClr val="3F3138"/>
-                </a:solidFill>
-                <a:latin typeface="Calibri" pitchFamily="34" charset="0"/>
-                <a:ea typeface="Calibri" pitchFamily="34" charset="-122"/>
-                <a:cs typeface="Calibri" pitchFamily="34" charset="-120"/>
-              </a:rPr>
-              <a:t>NAPEMA® treats pests without residue, which matters under strict European maximum residue limits.</a:t>
-            </a:r>
-            <a:endParaRPr lang="en-US" sz="1400" dirty="0"/>
-          </a:p>
-        </p:txBody>
-      </p:sp>
-      <p:sp>
-        <p:nvSpPr>
-          <p:cNvPr id="6" name="Text 3"/>
+              <a:t>* Maize is mostly rain-fed and swings by several million tonnes between seasons.</a:t>
+            </a:r>
+            <a:endParaRPr lang="en-US" sz="1200" dirty="0"/>
+          </a:p>
+        </p:txBody>
+      </p:sp>
+      <p:sp>
+        <p:nvSpPr>
+          <p:cNvPr id="8" name="Text 5"/>
           <p:cNvSpPr txBox="1"/>
           <p:nvPr/>
         </p:nvSpPr>
@@ -12411,7 +13115,7 @@
       </p:sp>
       <p:sp>
         <p:nvSpPr>
-          <p:cNvPr id="7" name="Text 4"/>
+          <p:cNvPr id="9" name="Text 6"/>
           <p:cNvSpPr txBox="1"/>
           <p:nvPr/>
         </p:nvSpPr>
@@ -12515,7 +13219,7 @@
                 <a:ea typeface="Calibri" pitchFamily="34" charset="-122"/>
                 <a:cs typeface="Calibri" pitchFamily="34" charset="-120"/>
               </a:rPr>
-              <a:t>SECOND SECTOR</a:t>
+              <a:t>FIRST SECTOR</a:t>
             </a:r>
             <a:endParaRPr lang="en-US" sz="1150" dirty="0"/>
           </a:p>
@@ -12554,7 +13258,7 @@
                 <a:ea typeface="Cambria" pitchFamily="34" charset="-122"/>
                 <a:cs typeface="Cambria" pitchFamily="34" charset="-120"/>
               </a:rPr>
-              <a:t>Wine and table grapes in the Western Cape</a:t>
+              <a:t>Citrus: an export leader on a tight water allocation</a:t>
             </a:r>
             <a:endParaRPr lang="en-US" sz="3000" dirty="0"/>
           </a:p>
@@ -12576,23 +13280,23 @@
         </p:blipFill>
         <p:spPr>
           <a:xfrm>
+            <a:off x="6522415" y="1783080"/>
+            <a:ext cx="5074920" cy="3794760"/>
+          </a:xfrm>
+          <a:prstGeom prst="rect">
+            <a:avLst/>
+          </a:prstGeom>
+        </p:spPr>
+      </p:pic>
+      <p:sp>
+        <p:nvSpPr>
+          <p:cNvPr id="5" name="Text 2"/>
+          <p:cNvSpPr txBox="1"/>
+          <p:nvPr/>
+        </p:nvSpPr>
+        <p:spPr>
+          <a:xfrm>
             <a:off x="594360" y="1783080"/>
-            <a:ext cx="5074920" cy="3794760"/>
-          </a:xfrm>
-          <a:prstGeom prst="rect">
-            <a:avLst/>
-          </a:prstGeom>
-        </p:spPr>
-      </p:pic>
-      <p:sp>
-        <p:nvSpPr>
-          <p:cNvPr id="5" name="Text 2"/>
-          <p:cNvSpPr txBox="1"/>
-          <p:nvPr/>
-        </p:nvSpPr>
-        <p:spPr>
-          <a:xfrm>
-            <a:off x="6217920" y="1783080"/>
             <a:ext cx="5379415" cy="4251960"/>
           </a:xfrm>
           <a:prstGeom prst="rect">
@@ -12624,7 +13328,7 @@
                 <a:ea typeface="Calibri" pitchFamily="34" charset="-122"/>
                 <a:cs typeface="Calibri" pitchFamily="34" charset="-120"/>
               </a:rPr>
-              <a:t>The Western Cape holds most of the vineyard area, from Stellenbosch to the Breede and Olifants river valleys.</a:t>
+              <a:t>Citrus is grown in Limpopo, the Eastern Cape, Mpumalanga and the Western Cape, mostly under micro-irrigation.</a:t>
             </a:r>
             <a:endParaRPr lang="en-US" sz="1400" dirty="0"/>
           </a:p>
@@ -12648,7 +13352,7 @@
                 <a:ea typeface="Calibri" pitchFamily="34" charset="-122"/>
                 <a:cs typeface="Calibri" pitchFamily="34" charset="-120"/>
               </a:rPr>
-              <a:t>The 2015–2018 drought brought Cape Town close to 'Day Zero', and farms lost much of their water allocation.</a:t>
+              <a:t>Orchards draw on allocated river and dam water, which is cut back in drought years.</a:t>
             </a:r>
             <a:endParaRPr lang="en-US" sz="1400" dirty="0"/>
           </a:p>
@@ -12672,7 +13376,7 @@
                 <a:ea typeface="Calibri" pitchFamily="34" charset="-122"/>
                 <a:cs typeface="Calibri" pitchFamily="34" charset="-120"/>
               </a:rPr>
-              <a:t>Table-grape growers in the Hex and Orange River valleys depend on long, hot seasons and dependable irrigation.</a:t>
+              <a:t>Load-shedding interrupts pumping schedules, so trees can miss irrigations during hot, dry spells.</a:t>
             </a:r>
             <a:endParaRPr lang="en-US" sz="1400" dirty="0"/>
           </a:p>
@@ -12696,7 +13400,7 @@
                 <a:ea typeface="Calibri" pitchFamily="34" charset="-122"/>
                 <a:cs typeface="Calibri" pitchFamily="34" charset="-120"/>
               </a:rPr>
-              <a:t>Replanting a vineyard costs several years of income: young vines must be kept free of water stress to establish.</a:t>
+              <a:t>Export markets pay for size and appearance: steady soil moisture protects both at fruit set and sizing.</a:t>
             </a:r>
             <a:endParaRPr lang="en-US" sz="1400" dirty="0"/>
           </a:p>
@@ -12720,7 +13424,7 @@
                 <a:ea typeface="Calibri" pitchFamily="34" charset="-122"/>
                 <a:cs typeface="Calibri" pitchFamily="34" charset="-120"/>
               </a:rPr>
-              <a:t>EVERGREEN® placed in the planting furrow holds water around young roots between irrigations.</a:t>
+              <a:t>NAPEMA® treats pests without residue, which matters under strict European maximum residue limits.</a:t>
             </a:r>
             <a:endParaRPr lang="en-US" sz="1400" dirty="0"/>
           </a:p>
@@ -12873,7 +13577,7 @@
                 <a:ea typeface="Calibri" pitchFamily="34" charset="-122"/>
                 <a:cs typeface="Calibri" pitchFamily="34" charset="-120"/>
               </a:rPr>
-              <a:t>Yield potential</a:t>
+              <a:t>SECOND SECTOR</a:t>
             </a:r>
             <a:endParaRPr lang="en-US" sz="1150" dirty="0"/>
           </a:p>
@@ -12912,168 +13616,181 @@
                 <a:ea typeface="Cambria" pitchFamily="34" charset="-122"/>
                 <a:cs typeface="Cambria" pitchFamily="34" charset="-120"/>
               </a:rPr>
-              <a:t>Expected yield gain by crop</a:t>
+              <a:t>Wine and table grapes in the Western Cape</a:t>
             </a:r>
             <a:endParaRPr lang="en-US" sz="3000" dirty="0"/>
           </a:p>
         </p:txBody>
       </p:sp>
-      <p:graphicFrame>
-        <p:nvGraphicFramePr>
-          <p:cNvPr id="4" name="Chart 0" descr=""/>
-          <p:cNvGraphicFramePr/>
-          <p:nvPr/>
-        </p:nvGraphicFramePr>
-        <p:xfrm>
-          <a:off x="594360" y="1783080"/>
-          <a:ext cx="7360920" cy="3977640"/>
-        </p:xfrm>
-        <a:graphic xmlns:a="http://schemas.openxmlformats.org/drawingml/2006/main">
-          <a:graphicData uri="http://schemas.openxmlformats.org/drawingml/2006/chart">
-            <c:chart xmlns:c="http://schemas.openxmlformats.org/drawingml/2006/chart" r:id="rId1"/>
-          </a:graphicData>
-        </a:graphic>
-      </p:graphicFrame>
-      <p:sp>
-        <p:nvSpPr>
-          <p:cNvPr id="5" name="Shape 2"/>
-          <p:cNvSpPr/>
-          <p:nvPr/>
-        </p:nvSpPr>
-        <p:spPr>
-          <a:xfrm>
-            <a:off x="8275320" y="1783080"/>
-            <a:ext cx="3291840" cy="3977640"/>
-          </a:xfrm>
-          <a:prstGeom prst="roundRect">
-            <a:avLst>
-              <a:gd name="adj" fmla="val 2778"/>
-            </a:avLst>
-          </a:prstGeom>
-          <a:solidFill>
-            <a:srgbClr val="F5EFF1"/>
-          </a:solidFill>
-          <a:ln w="9525">
-            <a:solidFill>
-              <a:srgbClr val="E5D9DE"/>
-            </a:solidFill>
-            <a:prstDash val="solid"/>
-          </a:ln>
-        </p:spPr>
+      <p:pic>
+        <p:nvPicPr>
+          <p:cNvPr id="4" name="Image 0" descr="preencoded.png">    </p:cNvPr>
+          <p:cNvPicPr>
+            <a:picLocks noChangeAspect="1"/>
+          </p:cNvPicPr>
+          <p:nvPr/>
+        </p:nvPicPr>
+        <p:blipFill>
+          <a:blip r:embed="rId1"/>
+          <a:stretch>
+            <a:fillRect/>
+          </a:stretch>
+        </p:blipFill>
+        <p:spPr>
+          <a:xfrm>
+            <a:off x="594360" y="1783080"/>
+            <a:ext cx="5074920" cy="3794760"/>
+          </a:xfrm>
+          <a:prstGeom prst="rect">
+            <a:avLst/>
+          </a:prstGeom>
+        </p:spPr>
+      </p:pic>
+      <p:sp>
+        <p:nvSpPr>
+          <p:cNvPr id="5" name="Text 2"/>
+          <p:cNvSpPr txBox="1"/>
+          <p:nvPr/>
+        </p:nvSpPr>
+        <p:spPr>
+          <a:xfrm>
+            <a:off x="6217920" y="1783080"/>
+            <a:ext cx="5379415" cy="4251960"/>
+          </a:xfrm>
+          <a:prstGeom prst="rect">
+            <a:avLst/>
+          </a:prstGeom>
+          <a:noFill/>
+          <a:ln/>
+        </p:spPr>
+        <p:txBody>
+          <a:bodyPr wrap="square" lIns="0" tIns="0" rIns="0" bIns="0" rtlCol="0" anchor="t"/>
+          <a:lstStyle/>
+          <a:p>
+            <a:pPr algn="l" marL="342900" indent="-342900">
+              <a:lnSpc>
+                <a:spcPct val="122000"/>
+              </a:lnSpc>
+              <a:spcAft>
+                <a:spcPts val="1100"/>
+              </a:spcAft>
+              <a:buSzPct val="100000"/>
+              <a:buChar char="•"/>
+            </a:pPr>
+            <a:r>
+              <a:rPr lang="en-US" sz="1400" dirty="0">
+                <a:solidFill>
+                  <a:srgbClr val="3F3138"/>
+                </a:solidFill>
+                <a:latin typeface="Calibri" pitchFamily="34" charset="0"/>
+                <a:ea typeface="Calibri" pitchFamily="34" charset="-122"/>
+                <a:cs typeface="Calibri" pitchFamily="34" charset="-120"/>
+              </a:rPr>
+              <a:t>The Western Cape holds most of the vineyard area, from Stellenbosch to the Breede and Olifants river valleys.</a:t>
+            </a:r>
+            <a:endParaRPr lang="en-US" sz="1400" dirty="0"/>
+          </a:p>
+          <a:p>
+            <a:pPr algn="l" marL="342900" indent="-342900">
+              <a:lnSpc>
+                <a:spcPct val="122000"/>
+              </a:lnSpc>
+              <a:spcAft>
+                <a:spcPts val="1100"/>
+              </a:spcAft>
+              <a:buSzPct val="100000"/>
+              <a:buChar char="•"/>
+            </a:pPr>
+            <a:r>
+              <a:rPr lang="en-US" sz="1400" dirty="0">
+                <a:solidFill>
+                  <a:srgbClr val="3F3138"/>
+                </a:solidFill>
+                <a:latin typeface="Calibri" pitchFamily="34" charset="0"/>
+                <a:ea typeface="Calibri" pitchFamily="34" charset="-122"/>
+                <a:cs typeface="Calibri" pitchFamily="34" charset="-120"/>
+              </a:rPr>
+              <a:t>The 2015–2018 drought brought Cape Town close to 'Day Zero', and farms lost much of their water allocation.</a:t>
+            </a:r>
+            <a:endParaRPr lang="en-US" sz="1400" dirty="0"/>
+          </a:p>
+          <a:p>
+            <a:pPr algn="l" marL="342900" indent="-342900">
+              <a:lnSpc>
+                <a:spcPct val="122000"/>
+              </a:lnSpc>
+              <a:spcAft>
+                <a:spcPts val="1100"/>
+              </a:spcAft>
+              <a:buSzPct val="100000"/>
+              <a:buChar char="•"/>
+            </a:pPr>
+            <a:r>
+              <a:rPr lang="en-US" sz="1400" dirty="0">
+                <a:solidFill>
+                  <a:srgbClr val="3F3138"/>
+                </a:solidFill>
+                <a:latin typeface="Calibri" pitchFamily="34" charset="0"/>
+                <a:ea typeface="Calibri" pitchFamily="34" charset="-122"/>
+                <a:cs typeface="Calibri" pitchFamily="34" charset="-120"/>
+              </a:rPr>
+              <a:t>Table-grape growers in the Hex and Orange River valleys depend on long, hot seasons and dependable irrigation.</a:t>
+            </a:r>
+            <a:endParaRPr lang="en-US" sz="1400" dirty="0"/>
+          </a:p>
+          <a:p>
+            <a:pPr algn="l" marL="342900" indent="-342900">
+              <a:lnSpc>
+                <a:spcPct val="122000"/>
+              </a:lnSpc>
+              <a:spcAft>
+                <a:spcPts val="1100"/>
+              </a:spcAft>
+              <a:buSzPct val="100000"/>
+              <a:buChar char="•"/>
+            </a:pPr>
+            <a:r>
+              <a:rPr lang="en-US" sz="1400" dirty="0">
+                <a:solidFill>
+                  <a:srgbClr val="3F3138"/>
+                </a:solidFill>
+                <a:latin typeface="Calibri" pitchFamily="34" charset="0"/>
+                <a:ea typeface="Calibri" pitchFamily="34" charset="-122"/>
+                <a:cs typeface="Calibri" pitchFamily="34" charset="-120"/>
+              </a:rPr>
+              <a:t>Replanting a vineyard costs several years of income: young vines must be kept free of water stress to establish.</a:t>
+            </a:r>
+            <a:endParaRPr lang="en-US" sz="1400" dirty="0"/>
+          </a:p>
+          <a:p>
+            <a:pPr algn="l" marL="342900" indent="-342900">
+              <a:lnSpc>
+                <a:spcPct val="122000"/>
+              </a:lnSpc>
+              <a:spcAft>
+                <a:spcPts val="1100"/>
+              </a:spcAft>
+              <a:buSzPct val="100000"/>
+              <a:buChar char="•"/>
+            </a:pPr>
+            <a:r>
+              <a:rPr lang="en-US" sz="1400" dirty="0">
+                <a:solidFill>
+                  <a:srgbClr val="3F3138"/>
+                </a:solidFill>
+                <a:latin typeface="Calibri" pitchFamily="34" charset="0"/>
+                <a:ea typeface="Calibri" pitchFamily="34" charset="-122"/>
+                <a:cs typeface="Calibri" pitchFamily="34" charset="-120"/>
+              </a:rPr>
+              <a:t>EVERGREEN® placed in the planting furrow holds water around young roots between irrigations.</a:t>
+            </a:r>
+            <a:endParaRPr lang="en-US" sz="1400" dirty="0"/>
+          </a:p>
+        </p:txBody>
       </p:sp>
       <p:sp>
         <p:nvSpPr>
           <p:cNvPr id="6" name="Text 3"/>
-          <p:cNvSpPr txBox="1"/>
-          <p:nvPr/>
-        </p:nvSpPr>
-        <p:spPr>
-          <a:xfrm>
-            <a:off x="8503920" y="2011680"/>
-            <a:ext cx="2834640" cy="457200"/>
-          </a:xfrm>
-          <a:prstGeom prst="rect">
-            <a:avLst/>
-          </a:prstGeom>
-          <a:noFill/>
-          <a:ln/>
-        </p:spPr>
-        <p:txBody>
-          <a:bodyPr wrap="square" lIns="0" tIns="0" rIns="0" bIns="0" rtlCol="0" anchor="ctr"/>
-          <a:lstStyle/>
-          <a:p>
-            <a:pPr algn="l" indent="0" marL="0">
-              <a:buNone/>
-            </a:pPr>
-            <a:r>
-              <a:rPr lang="en-US" sz="1300" b="1" dirty="0">
-                <a:solidFill>
-                  <a:srgbClr val="6B2A44"/>
-                </a:solidFill>
-                <a:latin typeface="Cambria" pitchFamily="34" charset="0"/>
-                <a:ea typeface="Cambria" pitchFamily="34" charset="-122"/>
-                <a:cs typeface="Cambria" pitchFamily="34" charset="-120"/>
-              </a:rPr>
-              <a:t>Read with care</a:t>
-            </a:r>
-            <a:endParaRPr lang="en-US" sz="1300" dirty="0"/>
-          </a:p>
-        </p:txBody>
-      </p:sp>
-      <p:sp>
-        <p:nvSpPr>
-          <p:cNvPr id="7" name="Text 4"/>
-          <p:cNvSpPr txBox="1"/>
-          <p:nvPr/>
-        </p:nvSpPr>
-        <p:spPr>
-          <a:xfrm>
-            <a:off x="8503920" y="2560320"/>
-            <a:ext cx="2834640" cy="3017520"/>
-          </a:xfrm>
-          <a:prstGeom prst="rect">
-            <a:avLst/>
-          </a:prstGeom>
-          <a:noFill/>
-          <a:ln/>
-        </p:spPr>
-        <p:txBody>
-          <a:bodyPr wrap="square" lIns="0" tIns="0" rIns="0" bIns="0" rtlCol="0" anchor="t"/>
-          <a:lstStyle/>
-          <a:p>
-            <a:pPr algn="l" indent="0" marL="0">
-              <a:lnSpc>
-                <a:spcPct val="125000"/>
-              </a:lnSpc>
-              <a:buNone/>
-            </a:pPr>
-            <a:r>
-              <a:rPr lang="en-US" sz="1200" dirty="0">
-                <a:solidFill>
-                  <a:srgbClr val="3F3138"/>
-                </a:solidFill>
-                <a:latin typeface="Calibri" pitchFamily="34" charset="0"/>
-                <a:ea typeface="Calibri" pitchFamily="34" charset="-122"/>
-                <a:cs typeface="Calibri" pitchFamily="34" charset="-120"/>
-              </a:rPr>
-              <a:t>Ranges used by our dose calculator, for a normally managed crop with EVERGREEN® applied at planting.</a:t>
-            </a:r>
-            <a:endParaRPr lang="en-US" sz="1200" dirty="0"/>
-          </a:p>
-          <a:p>
-            <a:pPr algn="l" indent="0" marL="0">
-              <a:lnSpc>
-                <a:spcPct val="125000"/>
-              </a:lnSpc>
-              <a:buNone/>
-            </a:pPr>
-            <a:endParaRPr lang="en-US" sz="1200" dirty="0"/>
-          </a:p>
-          <a:p>
-            <a:pPr algn="l" indent="0" marL="0">
-              <a:lnSpc>
-                <a:spcPct val="125000"/>
-              </a:lnSpc>
-              <a:buNone/>
-            </a:pPr>
-            <a:r>
-              <a:rPr lang="en-US" sz="1200" dirty="0">
-                <a:solidFill>
-                  <a:srgbClr val="3F3138"/>
-                </a:solidFill>
-                <a:latin typeface="Calibri" pitchFamily="34" charset="0"/>
-                <a:ea typeface="Calibri" pitchFamily="34" charset="-122"/>
-                <a:cs typeface="Calibri" pitchFamily="34" charset="-120"/>
-              </a:rPr>
-              <a:t>Actual results depend on soil, climate and management. For cereals, no gain is claimed without a field trial.</a:t>
-            </a:r>
-            <a:endParaRPr lang="en-US" sz="1200" dirty="0"/>
-          </a:p>
-        </p:txBody>
-      </p:sp>
-      <p:sp>
-        <p:nvSpPr>
-          <p:cNvPr id="8" name="Text 5"/>
           <p:cNvSpPr txBox="1"/>
           <p:nvPr/>
         </p:nvSpPr>
@@ -13114,7 +13831,7 @@
       </p:sp>
       <p:sp>
         <p:nvSpPr>
-          <p:cNvPr id="9" name="Text 6"/>
+          <p:cNvPr id="7" name="Text 4"/>
           <p:cNvSpPr txBox="1"/>
           <p:nvPr/>
         </p:nvSpPr>

--- a/public/documents/countries/afrique-du-sud.pptx
+++ b/public/documents/countries/afrique-du-sud.pptx
@@ -4092,7 +4092,7 @@
       </p:sp>
       <p:pic>
         <p:nvPicPr>
-          <p:cNvPr id="5" name="Image 1" descr="/workspace/scratch/50eb4f7d8e13/green-solutions-web/public/images/logo-icon.png">    </p:cNvPr>
+          <p:cNvPr id="5" name="Image 1" descr="/home/claude/green-solutions-web/public/images/logo-icon.png">    </p:cNvPr>
           <p:cNvPicPr>
             <a:picLocks noChangeAspect="1"/>
           </p:cNvPicPr>
@@ -4116,7 +4116,7 @@
       </p:pic>
       <p:pic>
         <p:nvPicPr>
-          <p:cNvPr id="6" name="Image 2" descr="/workspace/scratch/50eb4f7d8e13/green-solutions-web/scripts/dossiers/drapeaux/afrique-du-sud.png">    </p:cNvPr>
+          <p:cNvPr id="6" name="Image 2" descr="/home/claude/green-solutions-web/scripts/dossiers/drapeaux/afrique-du-sud.png">    </p:cNvPr>
           <p:cNvPicPr>
             <a:picLocks noChangeAspect="1"/>
           </p:cNvPicPr>
@@ -10276,7 +10276,7 @@
                 <a:ea typeface="Calibri" pitchFamily="34" charset="-122"/>
                 <a:cs typeface="Calibri" pitchFamily="34" charset="-120"/>
               </a:rPr>
-              <a:t>contact@evergreen-ecosorb.com · Green Solutions Groupe AIM SA, 46, route de la Condémine, 1475 Forel, Switzerland</a:t>
+              <a:t>contact@green-solutions-group.com · Green Solutions Groupe AIM SA, 46, route de la Condémine, 1475 Forel, Switzerland</a:t>
             </a:r>
             <a:endParaRPr lang="en-US" sz="1400" dirty="0"/>
           </a:p>
@@ -10284,7 +10284,7 @@
       </p:sp>
       <p:pic>
         <p:nvPicPr>
-          <p:cNvPr id="6" name="Image 1" descr="/workspace/scratch/50eb4f7d8e13/green-solutions-web/scripts/dossiers/sceau-aim-clair.png">    </p:cNvPr>
+          <p:cNvPr id="6" name="Image 1" descr="/home/claude/green-solutions-web/scripts/dossiers/sceau-aim-clair.png">    </p:cNvPr>
           <p:cNvPicPr>
             <a:picLocks noChangeAspect="1"/>
           </p:cNvPicPr>
